--- a/blocks/D_sensors/M12_camera_sensor/M12_Camera_Sensor.pptx
+++ b/blocks/D_sensors/M12_camera_sensor/M12_Camera_Sensor.pptx
@@ -48,6 +48,10 @@
     <p:sldId id="296" r:id="rId48"/>
     <p:sldId id="297" r:id="rId49"/>
     <p:sldId id="298" r:id="rId50"/>
+    <p:sldId id="299" r:id="rId51"/>
+    <p:sldId id="300" r:id="rId52"/>
+    <p:sldId id="301" r:id="rId53"/>
+    <p:sldId id="302" r:id="rId54"/>
   </p:sldIdLst>
   <p:sldSz cx="12191999" cy="6858000" type="screen4x3"/>
   <p:notesSz cx="6858000" cy="9144000"/>
@@ -634,7 +638,7 @@
           <a:lstStyle/>
           <a:p>
             <a:r>
-              <a:t>[설명] ~/agv_ws/src/agv_gazebo/models/agv/model.sdf의 전체 파일을 2/21 구간으로 작성한다.</a:t>
+              <a:t>[설명] ~/agv_ws/src/agv_gazebo/models/agv/model.sdf의 전체 파일을 2/24 구간으로 작성한다.</a:t>
             </a:r>
           </a:p>
           <a:p>
@@ -724,7 +728,7 @@
           <a:lstStyle/>
           <a:p>
             <a:r>
-              <a:t>[설명] ~/agv_ws/src/agv_gazebo/models/agv/model.sdf의 전체 파일을 3/21 구간으로 작성한다.</a:t>
+              <a:t>[설명] ~/agv_ws/src/agv_gazebo/models/agv/model.sdf의 전체 파일을 3/24 구간으로 작성한다.</a:t>
             </a:r>
           </a:p>
           <a:p>
@@ -814,7 +818,7 @@
           <a:lstStyle/>
           <a:p>
             <a:r>
-              <a:t>[설명] ~/agv_ws/src/agv_gazebo/models/agv/model.sdf의 전체 파일을 4/21 구간으로 작성한다.</a:t>
+              <a:t>[설명] ~/agv_ws/src/agv_gazebo/models/agv/model.sdf의 전체 파일을 4/24 구간으로 작성한다.</a:t>
             </a:r>
           </a:p>
           <a:p>
@@ -904,7 +908,7 @@
           <a:lstStyle/>
           <a:p>
             <a:r>
-              <a:t>[설명] ~/agv_ws/src/agv_gazebo/models/agv/model.sdf의 전체 파일을 5/21 구간으로 작성한다.</a:t>
+              <a:t>[설명] ~/agv_ws/src/agv_gazebo/models/agv/model.sdf의 전체 파일을 5/24 구간으로 작성한다.</a:t>
             </a:r>
           </a:p>
           <a:p>
@@ -994,7 +998,7 @@
           <a:lstStyle/>
           <a:p>
             <a:r>
-              <a:t>[설명] ~/agv_ws/src/agv_gazebo/models/agv/model.sdf의 전체 파일을 6/21 구간으로 작성한다.</a:t>
+              <a:t>[설명] ~/agv_ws/src/agv_gazebo/models/agv/model.sdf의 전체 파일을 6/24 구간으로 작성한다.</a:t>
             </a:r>
           </a:p>
           <a:p>
@@ -1084,7 +1088,7 @@
           <a:lstStyle/>
           <a:p>
             <a:r>
-              <a:t>[설명] ~/agv_ws/src/agv_gazebo/models/agv/model.sdf의 전체 파일을 7/21 구간으로 작성한다.</a:t>
+              <a:t>[설명] ~/agv_ws/src/agv_gazebo/models/agv/model.sdf의 전체 파일을 7/24 구간으로 작성한다.</a:t>
             </a:r>
           </a:p>
           <a:p>
@@ -1174,7 +1178,7 @@
           <a:lstStyle/>
           <a:p>
             <a:r>
-              <a:t>[설명] ~/agv_ws/src/agv_gazebo/models/agv/model.sdf의 전체 파일을 8/21 구간으로 작성한다.</a:t>
+              <a:t>[설명] ~/agv_ws/src/agv_gazebo/models/agv/model.sdf의 전체 파일을 8/24 구간으로 작성한다.</a:t>
             </a:r>
           </a:p>
           <a:p>
@@ -1264,7 +1268,7 @@
           <a:lstStyle/>
           <a:p>
             <a:r>
-              <a:t>[설명] ~/agv_ws/src/agv_gazebo/models/agv/model.sdf의 전체 파일을 9/21 구간으로 작성한다.</a:t>
+              <a:t>[설명] ~/agv_ws/src/agv_gazebo/models/agv/model.sdf의 전체 파일을 9/24 구간으로 작성한다.</a:t>
             </a:r>
           </a:p>
           <a:p>
@@ -1354,7 +1358,7 @@
           <a:lstStyle/>
           <a:p>
             <a:r>
-              <a:t>[설명] ~/agv_ws/src/agv_gazebo/models/agv/model.sdf의 전체 파일을 10/21 구간으로 작성한다.</a:t>
+              <a:t>[설명] ~/agv_ws/src/agv_gazebo/models/agv/model.sdf의 전체 파일을 10/24 구간으로 작성한다.</a:t>
             </a:r>
           </a:p>
           <a:p>
@@ -1444,7 +1448,7 @@
           <a:lstStyle/>
           <a:p>
             <a:r>
-              <a:t>[설명] ~/agv_ws/src/agv_gazebo/models/agv/model.sdf의 전체 파일을 11/21 구간으로 작성한다.</a:t>
+              <a:t>[설명] ~/agv_ws/src/agv_gazebo/models/agv/model.sdf의 전체 파일을 11/24 구간으로 작성한다.</a:t>
             </a:r>
           </a:p>
           <a:p>
@@ -1624,7 +1628,7 @@
           <a:lstStyle/>
           <a:p>
             <a:r>
-              <a:t>[설명] ~/agv_ws/src/agv_gazebo/models/agv/model.sdf의 전체 파일을 12/21 구간으로 작성한다.</a:t>
+              <a:t>[설명] ~/agv_ws/src/agv_gazebo/models/agv/model.sdf의 전체 파일을 12/24 구간으로 작성한다.</a:t>
             </a:r>
           </a:p>
           <a:p>
@@ -1714,7 +1718,7 @@
           <a:lstStyle/>
           <a:p>
             <a:r>
-              <a:t>[설명] ~/agv_ws/src/agv_gazebo/models/agv/model.sdf의 전체 파일을 13/21 구간으로 작성한다.</a:t>
+              <a:t>[설명] ~/agv_ws/src/agv_gazebo/models/agv/model.sdf의 전체 파일을 13/24 구간으로 작성한다.</a:t>
             </a:r>
           </a:p>
           <a:p>
@@ -1804,7 +1808,7 @@
           <a:lstStyle/>
           <a:p>
             <a:r>
-              <a:t>[설명] ~/agv_ws/src/agv_gazebo/models/agv/model.sdf의 전체 파일을 14/21 구간으로 작성한다.</a:t>
+              <a:t>[설명] ~/agv_ws/src/agv_gazebo/models/agv/model.sdf의 전체 파일을 14/24 구간으로 작성한다.</a:t>
             </a:r>
           </a:p>
           <a:p>
@@ -1894,7 +1898,7 @@
           <a:lstStyle/>
           <a:p>
             <a:r>
-              <a:t>[설명] ~/agv_ws/src/agv_gazebo/models/agv/model.sdf의 전체 파일을 15/21 구간으로 작성한다.</a:t>
+              <a:t>[설명] ~/agv_ws/src/agv_gazebo/models/agv/model.sdf의 전체 파일을 15/24 구간으로 작성한다.</a:t>
             </a:r>
           </a:p>
           <a:p>
@@ -1984,7 +1988,7 @@
           <a:lstStyle/>
           <a:p>
             <a:r>
-              <a:t>[설명] ~/agv_ws/src/agv_gazebo/models/agv/model.sdf의 전체 파일을 16/21 구간으로 작성한다.</a:t>
+              <a:t>[설명] ~/agv_ws/src/agv_gazebo/models/agv/model.sdf의 전체 파일을 16/24 구간으로 작성한다.</a:t>
             </a:r>
           </a:p>
           <a:p>
@@ -2074,7 +2078,7 @@
           <a:lstStyle/>
           <a:p>
             <a:r>
-              <a:t>[설명] ~/agv_ws/src/agv_gazebo/models/agv/model.sdf의 전체 파일을 17/21 구간으로 작성한다.</a:t>
+              <a:t>[설명] ~/agv_ws/src/agv_gazebo/models/agv/model.sdf의 전체 파일을 17/24 구간으로 작성한다.</a:t>
             </a:r>
           </a:p>
           <a:p>
@@ -2164,7 +2168,7 @@
           <a:lstStyle/>
           <a:p>
             <a:r>
-              <a:t>[설명] ~/agv_ws/src/agv_gazebo/models/agv/model.sdf의 전체 파일을 18/21 구간으로 작성한다.</a:t>
+              <a:t>[설명] ~/agv_ws/src/agv_gazebo/models/agv/model.sdf의 전체 파일을 18/24 구간으로 작성한다.</a:t>
             </a:r>
           </a:p>
           <a:p>
@@ -2254,7 +2258,7 @@
           <a:lstStyle/>
           <a:p>
             <a:r>
-              <a:t>[설명] ~/agv_ws/src/agv_gazebo/models/agv/model.sdf의 전체 파일을 19/21 구간으로 작성한다.</a:t>
+              <a:t>[설명] ~/agv_ws/src/agv_gazebo/models/agv/model.sdf의 전체 파일을 19/24 구간으로 작성한다.</a:t>
             </a:r>
           </a:p>
           <a:p>
@@ -2344,7 +2348,7 @@
           <a:lstStyle/>
           <a:p>
             <a:r>
-              <a:t>[설명] ~/agv_ws/src/agv_gazebo/models/agv/model.sdf의 전체 파일을 20/21 구간으로 작성한다.</a:t>
+              <a:t>[설명] ~/agv_ws/src/agv_gazebo/models/agv/model.sdf의 전체 파일을 20/24 구간으로 작성한다.</a:t>
             </a:r>
           </a:p>
           <a:p>
@@ -2434,7 +2438,7 @@
           <a:lstStyle/>
           <a:p>
             <a:r>
-              <a:t>[설명] ~/agv_ws/src/agv_gazebo/models/agv/model.sdf의 전체 파일을 21/21 구간으로 작성한다.</a:t>
+              <a:t>[설명] ~/agv_ws/src/agv_gazebo/models/agv/model.sdf의 전체 파일을 21/24 구간으로 작성한다.</a:t>
             </a:r>
           </a:p>
           <a:p>
@@ -2614,12 +2618,12 @@
           <a:lstStyle/>
           <a:p>
             <a:r>
-              <a:t>[설명] ~/agv_ws/src/agv_gazebo/config/bridge.yaml의 전체 파일을 1/3 구간으로 작성한다.</a:t>
-            </a:r>
-          </a:p>
-          <a:p>
-            <a:r>
-              <a:t>[실행] nano ~/agv_ws/src/agv_gazebo/config/bridge.yaml</a:t>
+              <a:t>[설명] ~/agv_ws/src/agv_gazebo/models/agv/model.sdf의 전체 파일을 22/24 구간으로 작성한다.</a:t>
+            </a:r>
+          </a:p>
+          <a:p>
+            <a:r>
+              <a:t>[실행] nano ~/agv_ws/src/agv_gazebo/models/agv/model.sdf</a:t>
             </a:r>
           </a:p>
           <a:p>
@@ -2704,12 +2708,12 @@
           <a:lstStyle/>
           <a:p>
             <a:r>
-              <a:t>[설명] ~/agv_ws/src/agv_gazebo/config/bridge.yaml의 전체 파일을 2/3 구간으로 작성한다.</a:t>
-            </a:r>
-          </a:p>
-          <a:p>
-            <a:r>
-              <a:t>[실행] nano ~/agv_ws/src/agv_gazebo/config/bridge.yaml</a:t>
+              <a:t>[설명] ~/agv_ws/src/agv_gazebo/models/agv/model.sdf의 전체 파일을 23/24 구간으로 작성한다.</a:t>
+            </a:r>
+          </a:p>
+          <a:p>
+            <a:r>
+              <a:t>[실행] nano ~/agv_ws/src/agv_gazebo/models/agv/model.sdf</a:t>
             </a:r>
           </a:p>
           <a:p>
@@ -2794,12 +2798,12 @@
           <a:lstStyle/>
           <a:p>
             <a:r>
-              <a:t>[설명] ~/agv_ws/src/agv_gazebo/config/bridge.yaml의 전체 파일을 3/3 구간으로 작성한다.</a:t>
-            </a:r>
-          </a:p>
-          <a:p>
-            <a:r>
-              <a:t>[실행] nano ~/agv_ws/src/agv_gazebo/config/bridge.yaml</a:t>
+              <a:t>[설명] ~/agv_ws/src/agv_gazebo/models/agv/model.sdf의 전체 파일을 24/24 구간으로 작성한다.</a:t>
+            </a:r>
+          </a:p>
+          <a:p>
+            <a:r>
+              <a:t>[실행] nano ~/agv_ws/src/agv_gazebo/models/agv/model.sdf</a:t>
             </a:r>
           </a:p>
           <a:p>
@@ -2884,12 +2888,12 @@
           <a:lstStyle/>
           <a:p>
             <a:r>
-              <a:t>[설명] ~/agv_ws/src/agv_vision/agv_vision/yolo_node.py의 전체 파일을 1/4 구간으로 작성한다.</a:t>
-            </a:r>
-          </a:p>
-          <a:p>
-            <a:r>
-              <a:t>[실행] nano ~/agv_ws/src/agv_vision/agv_vision/yolo_node.py</a:t>
+              <a:t>[설명] ~/agv_ws/src/agv_gazebo/config/bridge.yaml의 전체 파일을 1/3 구간으로 작성한다.</a:t>
+            </a:r>
+          </a:p>
+          <a:p>
+            <a:r>
+              <a:t>[실행] nano ~/agv_ws/src/agv_gazebo/config/bridge.yaml</a:t>
             </a:r>
           </a:p>
           <a:p>
@@ -2974,12 +2978,12 @@
           <a:lstStyle/>
           <a:p>
             <a:r>
-              <a:t>[설명] ~/agv_ws/src/agv_vision/agv_vision/yolo_node.py의 전체 파일을 2/4 구간으로 작성한다.</a:t>
-            </a:r>
-          </a:p>
-          <a:p>
-            <a:r>
-              <a:t>[실행] nano ~/agv_ws/src/agv_vision/agv_vision/yolo_node.py</a:t>
+              <a:t>[설명] ~/agv_ws/src/agv_gazebo/config/bridge.yaml의 전체 파일을 2/3 구간으로 작성한다.</a:t>
+            </a:r>
+          </a:p>
+          <a:p>
+            <a:r>
+              <a:t>[실행] nano ~/agv_ws/src/agv_gazebo/config/bridge.yaml</a:t>
             </a:r>
           </a:p>
           <a:p>
@@ -3064,12 +3068,12 @@
           <a:lstStyle/>
           <a:p>
             <a:r>
-              <a:t>[설명] ~/agv_ws/src/agv_vision/agv_vision/yolo_node.py의 전체 파일을 3/4 구간으로 작성한다.</a:t>
-            </a:r>
-          </a:p>
-          <a:p>
-            <a:r>
-              <a:t>[실행] nano ~/agv_ws/src/agv_vision/agv_vision/yolo_node.py</a:t>
+              <a:t>[설명] ~/agv_ws/src/agv_gazebo/config/bridge.yaml의 전체 파일을 3/3 구간으로 작성한다.</a:t>
+            </a:r>
+          </a:p>
+          <a:p>
+            <a:r>
+              <a:t>[실행] nano ~/agv_ws/src/agv_gazebo/config/bridge.yaml</a:t>
             </a:r>
           </a:p>
           <a:p>
@@ -3154,7 +3158,7 @@
           <a:lstStyle/>
           <a:p>
             <a:r>
-              <a:t>[설명] ~/agv_ws/src/agv_vision/agv_vision/yolo_node.py의 전체 파일을 4/4 구간으로 작성한다.</a:t>
+              <a:t>[설명] ~/agv_ws/src/agv_vision/agv_vision/yolo_node.py의 전체 파일을 1/5 구간으로 작성한다.</a:t>
             </a:r>
           </a:p>
           <a:p>
@@ -3244,22 +3248,17 @@
           <a:lstStyle/>
           <a:p>
             <a:r>
-              <a:t>[설명] build/source/run을 생략 없이 실행한다.</a:t>
-            </a:r>
-          </a:p>
-          <a:p>
-            <a:r>
-              <a:t>[실행] ros2 launch agv_bringup agv_sim.launch.py rviz:=false</a:t>
-            </a:r>
-          </a:p>
-          <a:p>
-            <a:r>
-              <a:t># 새 터미널: ros2 run rqt_image_view rqt_image_view</a:t>
-            </a:r>
-          </a:p>
-          <a:p>
-            <a:r>
-              <a:t>[확인] /camera/image_raw가 bridge를 통과하고 cv_bridge 소비 노드가 받을 준비가 된 상태를 확인한다.</a:t>
+              <a:t>[설명] ~/agv_ws/src/agv_vision/agv_vision/yolo_node.py의 전체 파일을 2/5 구간으로 작성한다.</a:t>
+            </a:r>
+          </a:p>
+          <a:p>
+            <a:r>
+              <a:t>[실행] nano ~/agv_ws/src/agv_vision/agv_vision/yolo_node.py</a:t>
+            </a:r>
+          </a:p>
+          <a:p>
+            <a:r>
+              <a:t>[확인] 코드를 저장하고 다음 코드 슬라이드 또는 build 단계로 이동한다.</a:t>
             </a:r>
           </a:p>
           <a:p>
@@ -3269,7 +3268,7 @@
           </a:p>
           <a:p>
             <a:r>
-              <a:t>[오류] 오류가 나면 현재 폴더, source, 파일 경로를 먼저 확인한다.</a:t>
+              <a:t>[오류] 들여쓰기·XML 태그·따옴표가 슬라이드와 정확히 같은지 확인한다.</a:t>
             </a:r>
           </a:p>
         </p:txBody>
@@ -3339,17 +3338,17 @@
           <a:lstStyle/>
           <a:p>
             <a:r>
-              <a:t>[설명] 실제 Ubuntu/ROS 2 환경에서 생성한 검증 화면이다.</a:t>
-            </a:r>
-          </a:p>
-          <a:p>
-            <a:r>
-              <a:t>[실행] 슬라이드의 명령 또는 파일 작성 단계를 진행한다.</a:t>
-            </a:r>
-          </a:p>
-          <a:p>
-            <a:r>
-              <a:t>[확인] 캡처의 명령과 다음 슬라이드의 검증 명령을 비교한다.</a:t>
+              <a:t>[설명] ~/agv_ws/src/agv_vision/agv_vision/yolo_node.py의 전체 파일을 3/5 구간으로 작성한다.</a:t>
+            </a:r>
+          </a:p>
+          <a:p>
+            <a:r>
+              <a:t>[실행] nano ~/agv_ws/src/agv_vision/agv_vision/yolo_node.py</a:t>
+            </a:r>
+          </a:p>
+          <a:p>
+            <a:r>
+              <a:t>[확인] 코드를 저장하고 다음 코드 슬라이드 또는 build 단계로 이동한다.</a:t>
             </a:r>
           </a:p>
           <a:p>
@@ -3359,7 +3358,7 @@
           </a:p>
           <a:p>
             <a:r>
-              <a:t>[오류] 오류가 나면 현재 폴더, source, 파일 경로를 먼저 확인한다.</a:t>
+              <a:t>[오류] 들여쓰기·XML 태그·따옴표가 슬라이드와 정확히 같은지 확인한다.</a:t>
             </a:r>
           </a:p>
         </p:txBody>
@@ -3429,22 +3428,17 @@
           <a:lstStyle/>
           <a:p>
             <a:r>
-              <a:t>[설명] 검증 명령은 GUI 결과와 별도로 실행해 재현 가능한 완료 기준을 만든다.</a:t>
-            </a:r>
-          </a:p>
-          <a:p>
-            <a:r>
-              <a:t>[실행] ros2 topic info /camera/image_raw</a:t>
-            </a:r>
-          </a:p>
-          <a:p>
-            <a:r>
-              <a:t>ros2 topic hz /camera/image_raw</a:t>
-            </a:r>
-          </a:p>
-          <a:p>
-            <a:r>
-              <a:t>[확인] /camera/image_raw가 bridge를 통과하고 cv_bridge 소비 노드가 받을 준비가 된 상태를 확인한다.</a:t>
+              <a:t>[설명] ~/agv_ws/src/agv_vision/agv_vision/yolo_node.py의 전체 파일을 4/5 구간으로 작성한다.</a:t>
+            </a:r>
+          </a:p>
+          <a:p>
+            <a:r>
+              <a:t>[실행] nano ~/agv_ws/src/agv_vision/agv_vision/yolo_node.py</a:t>
+            </a:r>
+          </a:p>
+          <a:p>
+            <a:r>
+              <a:t>[확인] 코드를 저장하고 다음 코드 슬라이드 또는 build 단계로 이동한다.</a:t>
             </a:r>
           </a:p>
           <a:p>
@@ -3454,7 +3448,7 @@
           </a:p>
           <a:p>
             <a:r>
-              <a:t>[오류] 오류가 나면 현재 폴더, source, 파일 경로를 먼저 확인한다.</a:t>
+              <a:t>[오류] 들여쓰기·XML 태그·따옴표가 슬라이드와 정확히 같은지 확인한다.</a:t>
             </a:r>
           </a:p>
         </p:txBody>
@@ -3614,17 +3608,17 @@
           <a:lstStyle/>
           <a:p>
             <a:r>
-              <a:t>[설명] 오류를 대신 해결하지 말고 증상부터 우선 확인 순서대로 교육생이 실행하게 한다.</a:t>
-            </a:r>
-          </a:p>
-          <a:p>
-            <a:r>
-              <a:t>[실행] 슬라이드의 명령 또는 파일 작성 단계를 진행한다.</a:t>
-            </a:r>
-          </a:p>
-          <a:p>
-            <a:r>
-              <a:t>[확인] 수정 뒤 첫 검증 명령을 다시 실행한다.</a:t>
+              <a:t>[설명] ~/agv_ws/src/agv_vision/agv_vision/yolo_node.py의 전체 파일을 5/5 구간으로 작성한다.</a:t>
+            </a:r>
+          </a:p>
+          <a:p>
+            <a:r>
+              <a:t>[실행] nano ~/agv_ws/src/agv_vision/agv_vision/yolo_node.py</a:t>
+            </a:r>
+          </a:p>
+          <a:p>
+            <a:r>
+              <a:t>[확인] 코드를 저장하고 다음 코드 슬라이드 또는 build 단계로 이동한다.</a:t>
             </a:r>
           </a:p>
           <a:p>
@@ -3634,7 +3628,7 @@
           </a:p>
           <a:p>
             <a:r>
-              <a:t>[오류] 슬라이드의 두 대표 오류를 먼저 사용한다.</a:t>
+              <a:t>[오류] 들여쓰기·XML 태그·따옴표가 슬라이드와 정확히 같은지 확인한다.</a:t>
             </a:r>
           </a:p>
         </p:txBody>
@@ -3704,17 +3698,22 @@
           <a:lstStyle/>
           <a:p>
             <a:r>
-              <a:t>[설명] 교육생이 직접 한 값만 바꿔 원인과 결과를 연결하게 한다.</a:t>
-            </a:r>
-          </a:p>
-          <a:p>
-            <a:r>
-              <a:t>[실행] 슬라이드의 명령 또는 파일 작성 단계를 진행한다.</a:t>
-            </a:r>
-          </a:p>
-          <a:p>
-            <a:r>
-              <a:t>[확인] 원래 값과 변경 값을 모두 기록한다.</a:t>
+              <a:t>[설명] build/source/run을 생략 없이 실행한다.</a:t>
+            </a:r>
+          </a:p>
+          <a:p>
+            <a:r>
+              <a:t>[실행] ros2 launch agv_bringup agv_sim.launch.py rviz:=false</a:t>
+            </a:r>
+          </a:p>
+          <a:p>
+            <a:r>
+              <a:t># 새 터미널: ros2 run rqt_image_view rqt_image_view</a:t>
+            </a:r>
+          </a:p>
+          <a:p>
+            <a:r>
+              <a:t>[확인] /camera/image_raw가 bridge를 통과하고 cv_bridge 소비 노드가 받을 준비가 된 상태를 확인한다.</a:t>
             </a:r>
           </a:p>
           <a:p>
@@ -3794,7 +3793,7 @@
           <a:lstStyle/>
           <a:p>
             <a:r>
-              <a:t>[설명] 교육생이 Complete·캡처·로그를 저장했는지 확인하고 다음 모듈의 시작 상태를 읽는다.</a:t>
+              <a:t>[설명] 실제 Ubuntu/ROS 2 환경에서 생성한 검증 화면이다.</a:t>
             </a:r>
           </a:p>
           <a:p>
@@ -3804,7 +3803,7 @@
           </a:p>
           <a:p>
             <a:r>
-              <a:t>[확인] M13 LiDAR 시작 조건을 말할 수 있다.</a:t>
+              <a:t>[확인] 캡처의 명령과 다음 슬라이드의 검증 명령을 비교한다.</a:t>
             </a:r>
           </a:p>
           <a:p>
@@ -3884,6 +3883,371 @@
           <a:lstStyle/>
           <a:p>
             <a:r>
+              <a:t>[설명] 검증 명령은 GUI 결과와 별도로 실행해 재현 가능한 완료 기준을 만든다.</a:t>
+            </a:r>
+          </a:p>
+          <a:p>
+            <a:r>
+              <a:t>[실행] ros2 topic info /camera/image_raw</a:t>
+            </a:r>
+          </a:p>
+          <a:p>
+            <a:r>
+              <a:t>ros2 topic hz /camera/image_raw</a:t>
+            </a:r>
+          </a:p>
+          <a:p>
+            <a:r>
+              <a:t>[확인] /camera/image_raw가 bridge를 통과하고 cv_bridge 소비 노드가 받을 준비가 된 상태를 확인한다.</a:t>
+            </a:r>
+          </a:p>
+          <a:p>
+            <a:r>
+              <a:t>[멈춤] 교육생이 현재 체크포인트를 통과할 때까지 기다린다.</a:t>
+            </a:r>
+          </a:p>
+          <a:p>
+            <a:r>
+              <a:t>[오류] 오류가 나면 현재 폴더, source, 파일 경로를 먼저 확인한다.</a:t>
+            </a:r>
+          </a:p>
+        </p:txBody>
+      </p:sp>
+      <p:sp>
+        <p:nvSpPr>
+          <p:cNvPr id="4" name="Slide Number Placeholder 3"/>
+          <p:cNvSpPr>
+            <a:spLocks noGrp="1"/>
+          </p:cNvSpPr>
+          <p:nvPr>
+            <p:ph type="sldNum" idx="5" sz="quarter"/>
+          </p:nvPr>
+        </p:nvSpPr>
+        <p:spPr/>
+      </p:sp>
+    </p:spTree>
+  </p:cSld>
+  <p:clrMapOvr>
+    <a:masterClrMapping/>
+  </p:clrMapOvr>
+</p:notes>
+</file>
+
+<file path=ppt/notesSlides/notesSlide44.xml><?xml version="1.0" encoding="utf-8"?>
+<p:notes xmlns:a="http://schemas.openxmlformats.org/drawingml/2006/main" xmlns:p="http://schemas.openxmlformats.org/presentationml/2006/main" xmlns:r="http://schemas.openxmlformats.org/officeDocument/2006/relationships">
+  <p:cSld>
+    <p:spTree>
+      <p:nvGrpSpPr>
+        <p:cNvPr id="1" name=""/>
+        <p:cNvGrpSpPr/>
+        <p:nvPr/>
+      </p:nvGrpSpPr>
+      <p:grpSpPr>
+        <a:xfrm>
+          <a:off x="0" y="0"/>
+          <a:ext cx="0" cy="0"/>
+          <a:chOff x="0" y="0"/>
+          <a:chExt cx="0" cy="0"/>
+        </a:xfrm>
+      </p:grpSpPr>
+      <p:sp>
+        <p:nvSpPr>
+          <p:cNvPr id="2" name="Slide Image Placeholder 1"/>
+          <p:cNvSpPr>
+            <a:spLocks noGrp="1"/>
+          </p:cNvSpPr>
+          <p:nvPr>
+            <p:ph type="sldImg" idx="2"/>
+          </p:nvPr>
+        </p:nvSpPr>
+        <p:spPr/>
+      </p:sp>
+      <p:sp>
+        <p:nvSpPr>
+          <p:cNvPr id="3" name="Notes Placeholder 2"/>
+          <p:cNvSpPr>
+            <a:spLocks noGrp="1"/>
+          </p:cNvSpPr>
+          <p:nvPr>
+            <p:ph type="body" idx="3" sz="quarter"/>
+          </p:nvPr>
+        </p:nvSpPr>
+        <p:spPr/>
+        <p:txBody>
+          <a:bodyPr/>
+          <a:lstStyle/>
+          <a:p>
+            <a:r>
+              <a:t>[설명] 오류를 대신 해결하지 말고 증상부터 우선 확인 순서대로 교육생이 실행하게 한다.</a:t>
+            </a:r>
+          </a:p>
+          <a:p>
+            <a:r>
+              <a:t>[실행] 슬라이드의 명령 또는 파일 작성 단계를 진행한다.</a:t>
+            </a:r>
+          </a:p>
+          <a:p>
+            <a:r>
+              <a:t>[확인] 수정 뒤 첫 검증 명령을 다시 실행한다.</a:t>
+            </a:r>
+          </a:p>
+          <a:p>
+            <a:r>
+              <a:t>[멈춤] 교육생이 현재 체크포인트를 통과할 때까지 기다린다.</a:t>
+            </a:r>
+          </a:p>
+          <a:p>
+            <a:r>
+              <a:t>[오류] 슬라이드의 두 대표 오류를 먼저 사용한다.</a:t>
+            </a:r>
+          </a:p>
+        </p:txBody>
+      </p:sp>
+      <p:sp>
+        <p:nvSpPr>
+          <p:cNvPr id="4" name="Slide Number Placeholder 3"/>
+          <p:cNvSpPr>
+            <a:spLocks noGrp="1"/>
+          </p:cNvSpPr>
+          <p:nvPr>
+            <p:ph type="sldNum" idx="5" sz="quarter"/>
+          </p:nvPr>
+        </p:nvSpPr>
+        <p:spPr/>
+      </p:sp>
+    </p:spTree>
+  </p:cSld>
+  <p:clrMapOvr>
+    <a:masterClrMapping/>
+  </p:clrMapOvr>
+</p:notes>
+</file>
+
+<file path=ppt/notesSlides/notesSlide45.xml><?xml version="1.0" encoding="utf-8"?>
+<p:notes xmlns:a="http://schemas.openxmlformats.org/drawingml/2006/main" xmlns:p="http://schemas.openxmlformats.org/presentationml/2006/main" xmlns:r="http://schemas.openxmlformats.org/officeDocument/2006/relationships">
+  <p:cSld>
+    <p:spTree>
+      <p:nvGrpSpPr>
+        <p:cNvPr id="1" name=""/>
+        <p:cNvGrpSpPr/>
+        <p:nvPr/>
+      </p:nvGrpSpPr>
+      <p:grpSpPr>
+        <a:xfrm>
+          <a:off x="0" y="0"/>
+          <a:ext cx="0" cy="0"/>
+          <a:chOff x="0" y="0"/>
+          <a:chExt cx="0" cy="0"/>
+        </a:xfrm>
+      </p:grpSpPr>
+      <p:sp>
+        <p:nvSpPr>
+          <p:cNvPr id="2" name="Slide Image Placeholder 1"/>
+          <p:cNvSpPr>
+            <a:spLocks noGrp="1"/>
+          </p:cNvSpPr>
+          <p:nvPr>
+            <p:ph type="sldImg" idx="2"/>
+          </p:nvPr>
+        </p:nvSpPr>
+        <p:spPr/>
+      </p:sp>
+      <p:sp>
+        <p:nvSpPr>
+          <p:cNvPr id="3" name="Notes Placeholder 2"/>
+          <p:cNvSpPr>
+            <a:spLocks noGrp="1"/>
+          </p:cNvSpPr>
+          <p:nvPr>
+            <p:ph type="body" idx="3" sz="quarter"/>
+          </p:nvPr>
+        </p:nvSpPr>
+        <p:spPr/>
+        <p:txBody>
+          <a:bodyPr/>
+          <a:lstStyle/>
+          <a:p>
+            <a:r>
+              <a:t>[설명] 교육생이 직접 한 값만 바꿔 원인과 결과를 연결하게 한다.</a:t>
+            </a:r>
+          </a:p>
+          <a:p>
+            <a:r>
+              <a:t>[실행] 슬라이드의 명령 또는 파일 작성 단계를 진행한다.</a:t>
+            </a:r>
+          </a:p>
+          <a:p>
+            <a:r>
+              <a:t>[확인] 원래 값과 변경 값을 모두 기록한다.</a:t>
+            </a:r>
+          </a:p>
+          <a:p>
+            <a:r>
+              <a:t>[멈춤] 교육생이 현재 체크포인트를 통과할 때까지 기다린다.</a:t>
+            </a:r>
+          </a:p>
+          <a:p>
+            <a:r>
+              <a:t>[오류] 오류가 나면 현재 폴더, source, 파일 경로를 먼저 확인한다.</a:t>
+            </a:r>
+          </a:p>
+        </p:txBody>
+      </p:sp>
+      <p:sp>
+        <p:nvSpPr>
+          <p:cNvPr id="4" name="Slide Number Placeholder 3"/>
+          <p:cNvSpPr>
+            <a:spLocks noGrp="1"/>
+          </p:cNvSpPr>
+          <p:nvPr>
+            <p:ph type="sldNum" idx="5" sz="quarter"/>
+          </p:nvPr>
+        </p:nvSpPr>
+        <p:spPr/>
+      </p:sp>
+    </p:spTree>
+  </p:cSld>
+  <p:clrMapOvr>
+    <a:masterClrMapping/>
+  </p:clrMapOvr>
+</p:notes>
+</file>
+
+<file path=ppt/notesSlides/notesSlide46.xml><?xml version="1.0" encoding="utf-8"?>
+<p:notes xmlns:a="http://schemas.openxmlformats.org/drawingml/2006/main" xmlns:p="http://schemas.openxmlformats.org/presentationml/2006/main" xmlns:r="http://schemas.openxmlformats.org/officeDocument/2006/relationships">
+  <p:cSld>
+    <p:spTree>
+      <p:nvGrpSpPr>
+        <p:cNvPr id="1" name=""/>
+        <p:cNvGrpSpPr/>
+        <p:nvPr/>
+      </p:nvGrpSpPr>
+      <p:grpSpPr>
+        <a:xfrm>
+          <a:off x="0" y="0"/>
+          <a:ext cx="0" cy="0"/>
+          <a:chOff x="0" y="0"/>
+          <a:chExt cx="0" cy="0"/>
+        </a:xfrm>
+      </p:grpSpPr>
+      <p:sp>
+        <p:nvSpPr>
+          <p:cNvPr id="2" name="Slide Image Placeholder 1"/>
+          <p:cNvSpPr>
+            <a:spLocks noGrp="1"/>
+          </p:cNvSpPr>
+          <p:nvPr>
+            <p:ph type="sldImg" idx="2"/>
+          </p:nvPr>
+        </p:nvSpPr>
+        <p:spPr/>
+      </p:sp>
+      <p:sp>
+        <p:nvSpPr>
+          <p:cNvPr id="3" name="Notes Placeholder 2"/>
+          <p:cNvSpPr>
+            <a:spLocks noGrp="1"/>
+          </p:cNvSpPr>
+          <p:nvPr>
+            <p:ph type="body" idx="3" sz="quarter"/>
+          </p:nvPr>
+        </p:nvSpPr>
+        <p:spPr/>
+        <p:txBody>
+          <a:bodyPr/>
+          <a:lstStyle/>
+          <a:p>
+            <a:r>
+              <a:t>[설명] 교육생이 Complete·캡처·로그를 저장했는지 확인하고 다음 모듈의 시작 상태를 읽는다.</a:t>
+            </a:r>
+          </a:p>
+          <a:p>
+            <a:r>
+              <a:t>[실행] 슬라이드의 명령 또는 파일 작성 단계를 진행한다.</a:t>
+            </a:r>
+          </a:p>
+          <a:p>
+            <a:r>
+              <a:t>[확인] M13 LiDAR 시작 조건을 말할 수 있다.</a:t>
+            </a:r>
+          </a:p>
+          <a:p>
+            <a:r>
+              <a:t>[멈춤] 교육생이 현재 체크포인트를 통과할 때까지 기다린다.</a:t>
+            </a:r>
+          </a:p>
+          <a:p>
+            <a:r>
+              <a:t>[오류] 오류가 나면 현재 폴더, source, 파일 경로를 먼저 확인한다.</a:t>
+            </a:r>
+          </a:p>
+        </p:txBody>
+      </p:sp>
+      <p:sp>
+        <p:nvSpPr>
+          <p:cNvPr id="4" name="Slide Number Placeholder 3"/>
+          <p:cNvSpPr>
+            <a:spLocks noGrp="1"/>
+          </p:cNvSpPr>
+          <p:nvPr>
+            <p:ph type="sldNum" idx="5" sz="quarter"/>
+          </p:nvPr>
+        </p:nvSpPr>
+        <p:spPr/>
+      </p:sp>
+    </p:spTree>
+  </p:cSld>
+  <p:clrMapOvr>
+    <a:masterClrMapping/>
+  </p:clrMapOvr>
+</p:notes>
+</file>
+
+<file path=ppt/notesSlides/notesSlide47.xml><?xml version="1.0" encoding="utf-8"?>
+<p:notes xmlns:a="http://schemas.openxmlformats.org/drawingml/2006/main" xmlns:p="http://schemas.openxmlformats.org/presentationml/2006/main" xmlns:r="http://schemas.openxmlformats.org/officeDocument/2006/relationships">
+  <p:cSld>
+    <p:spTree>
+      <p:nvGrpSpPr>
+        <p:cNvPr id="1" name=""/>
+        <p:cNvGrpSpPr/>
+        <p:nvPr/>
+      </p:nvGrpSpPr>
+      <p:grpSpPr>
+        <a:xfrm>
+          <a:off x="0" y="0"/>
+          <a:ext cx="0" cy="0"/>
+          <a:chOff x="0" y="0"/>
+          <a:chExt cx="0" cy="0"/>
+        </a:xfrm>
+      </p:grpSpPr>
+      <p:sp>
+        <p:nvSpPr>
+          <p:cNvPr id="2" name="Slide Image Placeholder 1"/>
+          <p:cNvSpPr>
+            <a:spLocks noGrp="1"/>
+          </p:cNvSpPr>
+          <p:nvPr>
+            <p:ph type="sldImg" idx="2"/>
+          </p:nvPr>
+        </p:nvSpPr>
+        <p:spPr/>
+      </p:sp>
+      <p:sp>
+        <p:nvSpPr>
+          <p:cNvPr id="3" name="Notes Placeholder 2"/>
+          <p:cNvSpPr>
+            <a:spLocks noGrp="1"/>
+          </p:cNvSpPr>
+          <p:nvPr>
+            <p:ph type="body" idx="3" sz="quarter"/>
+          </p:nvPr>
+        </p:nvSpPr>
+        <p:spPr/>
+        <p:txBody>
+          <a:bodyPr/>
+          <a:lstStyle/>
+          <a:p>
+            <a:r>
               <a:t>[설명] 공식 문서는 버전 차이와 확장 학습을 확인할 때 사용한다.</a:t>
             </a:r>
           </a:p>
@@ -4349,7 +4713,7 @@
           <a:lstStyle/>
           <a:p>
             <a:r>
-              <a:t>[설명] ~/agv_ws/src/agv_gazebo/models/agv/model.sdf의 전체 파일을 1/21 구간으로 작성한다.</a:t>
+              <a:t>[설명] ~/agv_ws/src/agv_gazebo/models/agv/model.sdf의 전체 파일을 1/24 구간으로 작성한다.</a:t>
             </a:r>
           </a:p>
           <a:p>
@@ -7742,7 +8106,7 @@
               </a:defRPr>
             </a:pPr>
             <a:r>
-              <a:t>파일을 계속 작성하고 저장한다 (2/21)</a:t>
+              <a:t>파일을 계속 작성하고 저장한다 (2/24)</a:t>
             </a:r>
           </a:p>
         </p:txBody>
@@ -7917,7 +8281,7 @@
               </a:defRPr>
             </a:pPr>
             <a:r>
-              <a:t>현재 단계 4/24    |    현재 폴더 ~/agv_ws    |    현재 터미널</a:t>
+              <a:t>현재 단계 4/27    |    현재 폴더 ~/agv_ws    |    현재 터미널</a:t>
             </a:r>
           </a:p>
         </p:txBody>
@@ -7930,8 +8294,8 @@
         </p:nvSpPr>
         <p:spPr>
           <a:xfrm>
-            <a:off x="658368" y="1682496"/>
-            <a:ext cx="10972800" cy="347472"/>
+            <a:off x="658368" y="1627632"/>
+            <a:ext cx="10972800" cy="256032"/>
           </a:xfrm>
           <a:prstGeom prst="rect">
             <a:avLst/>
@@ -7948,7 +8312,7 @@
               <a:spcAft>
                 <a:spcPts val="0"/>
               </a:spcAft>
-              <a:defRPr sz="1700" b="1">
+              <a:defRPr sz="1500" b="1">
                 <a:solidFill>
                   <a:srgbClr val="122C4E"/>
                 </a:solidFill>
@@ -7969,8 +8333,8 @@
         </p:nvSpPr>
         <p:spPr>
           <a:xfrm>
-            <a:off x="658368" y="2103120"/>
-            <a:ext cx="10972800" cy="493776"/>
+            <a:off x="658368" y="1956816"/>
+            <a:ext cx="10972800" cy="603504"/>
           </a:xfrm>
           <a:prstGeom prst="rect">
             <a:avLst/>
@@ -8014,7 +8378,11 @@
               </a:defRPr>
             </a:pPr>
             <a:r>
-              <a:t>파일 생성/열기: mkdir -p ~/agv_ws/src/agv_gazebo/models/agv    &amp;&amp;    nano ~/agv_ws/src/agv_gazebo/models/agv/model.sdf</a:t>
+              <a:t>파일 생성: mkdir -p ~/agv_ws/src/agv_gazebo/models/agv</a:t>
+            </a:r>
+            <a:br/>
+            <a:r>
+              <a:t>파일 열기: nano ~/agv_ws/src/agv_gazebo/models/agv/model.sdf</a:t>
             </a:r>
           </a:p>
         </p:txBody>
@@ -8027,8 +8395,8 @@
         </p:nvSpPr>
         <p:spPr>
           <a:xfrm>
-            <a:off x="658368" y="2761488"/>
-            <a:ext cx="10972800" cy="3383280"/>
+            <a:off x="658368" y="2706624"/>
+            <a:ext cx="10972800" cy="3364992"/>
           </a:xfrm>
           <a:prstGeom prst="rect">
             <a:avLst/>
@@ -8072,6 +8440,14 @@
               </a:defRPr>
             </a:pPr>
             <a:r>
+              <a:t>      </a:t>
+            </a:r>
+            <a:br/>
+            <a:r>
+              <a:t>      &lt;inertial&gt;</a:t>
+            </a:r>
+            <a:br/>
+            <a:r>
               <a:t>        &lt;mass&gt;12.0&lt;/mass&gt;</a:t>
             </a:r>
             <a:br/>
@@ -8109,22 +8485,6 @@
             <a:br/>
             <a:r>
               <a:t>      &lt;visual name="body"&gt;</a:t>
-            </a:r>
-            <a:br/>
-            <a:r>
-              <a:t>        &lt;geometry&gt;</a:t>
-            </a:r>
-            <a:br/>
-            <a:r>
-              <a:t>          &lt;box&gt;</a:t>
-            </a:r>
-            <a:br/>
-            <a:r>
-              <a:t>            &lt;size&gt;0.60 0.42 0.16&lt;/size&gt;</a:t>
-            </a:r>
-            <a:br/>
-            <a:r>
-              <a:t>          &lt;/box&gt;</a:t>
             </a:r>
           </a:p>
         </p:txBody>
@@ -8137,7 +8497,7 @@
         </p:nvSpPr>
         <p:spPr>
           <a:xfrm>
-            <a:off x="749808" y="6199632"/>
+            <a:off x="749808" y="6181344"/>
             <a:ext cx="10789920" cy="201168"/>
           </a:xfrm>
           <a:prstGeom prst="rect">
@@ -8163,7 +8523,7 @@
               </a:defRPr>
             </a:pPr>
             <a:r>
-              <a:t>파일 전체 2/21 · 이 슬라이드 다음에 같은 파일의 나머지 줄이 이어집니다.</a:t>
+              <a:t>파일 전체 2/24 · 이 슬라이드 다음에 같은 파일의 나머지 줄이 이어집니다.</a:t>
             </a:r>
           </a:p>
         </p:txBody>
@@ -8220,7 +8580,7 @@
               </a:defRPr>
             </a:pPr>
             <a:r>
-              <a:t>파일을 계속 작성하고 저장한다 (3/21)</a:t>
+              <a:t>파일을 계속 작성하고 저장한다 (3/24)</a:t>
             </a:r>
           </a:p>
         </p:txBody>
@@ -8395,7 +8755,7 @@
               </a:defRPr>
             </a:pPr>
             <a:r>
-              <a:t>현재 단계 5/24    |    현재 폴더 ~/agv_ws    |    현재 터미널</a:t>
+              <a:t>현재 단계 5/27    |    현재 폴더 ~/agv_ws    |    현재 터미널</a:t>
             </a:r>
           </a:p>
         </p:txBody>
@@ -8408,8 +8768,8 @@
         </p:nvSpPr>
         <p:spPr>
           <a:xfrm>
-            <a:off x="658368" y="1682496"/>
-            <a:ext cx="10972800" cy="347472"/>
+            <a:off x="658368" y="1627632"/>
+            <a:ext cx="10972800" cy="256032"/>
           </a:xfrm>
           <a:prstGeom prst="rect">
             <a:avLst/>
@@ -8426,7 +8786,7 @@
               <a:spcAft>
                 <a:spcPts val="0"/>
               </a:spcAft>
-              <a:defRPr sz="1700" b="1">
+              <a:defRPr sz="1500" b="1">
                 <a:solidFill>
                   <a:srgbClr val="122C4E"/>
                 </a:solidFill>
@@ -8447,8 +8807,8 @@
         </p:nvSpPr>
         <p:spPr>
           <a:xfrm>
-            <a:off x="658368" y="2103120"/>
-            <a:ext cx="10972800" cy="493776"/>
+            <a:off x="658368" y="1956816"/>
+            <a:ext cx="10972800" cy="603504"/>
           </a:xfrm>
           <a:prstGeom prst="rect">
             <a:avLst/>
@@ -8492,7 +8852,11 @@
               </a:defRPr>
             </a:pPr>
             <a:r>
-              <a:t>파일 생성/열기: mkdir -p ~/agv_ws/src/agv_gazebo/models/agv    &amp;&amp;    nano ~/agv_ws/src/agv_gazebo/models/agv/model.sdf</a:t>
+              <a:t>파일 생성: mkdir -p ~/agv_ws/src/agv_gazebo/models/agv</a:t>
+            </a:r>
+            <a:br/>
+            <a:r>
+              <a:t>파일 열기: nano ~/agv_ws/src/agv_gazebo/models/agv/model.sdf</a:t>
             </a:r>
           </a:p>
         </p:txBody>
@@ -8505,8 +8869,8 @@
         </p:nvSpPr>
         <p:spPr>
           <a:xfrm>
-            <a:off x="658368" y="2761488"/>
-            <a:ext cx="10972800" cy="3383280"/>
+            <a:off x="658368" y="2706624"/>
+            <a:ext cx="10972800" cy="3364992"/>
           </a:xfrm>
           <a:prstGeom prst="rect">
             <a:avLst/>
@@ -8550,6 +8914,22 @@
               </a:defRPr>
             </a:pPr>
             <a:r>
+              <a:t>        &lt;geometry&gt;</a:t>
+            </a:r>
+            <a:br/>
+            <a:r>
+              <a:t>          &lt;box&gt;</a:t>
+            </a:r>
+            <a:br/>
+            <a:r>
+              <a:t>            &lt;size&gt;0.60 0.42 0.16&lt;/size&gt;</a:t>
+            </a:r>
+            <a:br/>
+            <a:r>
+              <a:t>          &lt;/box&gt;</a:t>
+            </a:r>
+            <a:br/>
+            <a:r>
               <a:t>        &lt;/geometry&gt;</a:t>
             </a:r>
             <a:br/>
@@ -8579,30 +8959,6 @@
             <a:br/>
             <a:r>
               <a:t>      &lt;collision name="body_collision"&gt;</a:t>
-            </a:r>
-            <a:br/>
-            <a:r>
-              <a:t>        &lt;geometry&gt;</a:t>
-            </a:r>
-            <a:br/>
-            <a:r>
-              <a:t>          &lt;box&gt;</a:t>
-            </a:r>
-            <a:br/>
-            <a:r>
-              <a:t>            &lt;size&gt;0.60 0.42 0.16&lt;/size&gt;</a:t>
-            </a:r>
-            <a:br/>
-            <a:r>
-              <a:t>          &lt;/box&gt;</a:t>
-            </a:r>
-            <a:br/>
-            <a:r>
-              <a:t>        &lt;/geometry&gt;</a:t>
-            </a:r>
-            <a:br/>
-            <a:r>
-              <a:t>      &lt;/collision&gt;</a:t>
             </a:r>
           </a:p>
         </p:txBody>
@@ -8615,7 +8971,7 @@
         </p:nvSpPr>
         <p:spPr>
           <a:xfrm>
-            <a:off x="749808" y="6199632"/>
+            <a:off x="749808" y="6181344"/>
             <a:ext cx="10789920" cy="201168"/>
           </a:xfrm>
           <a:prstGeom prst="rect">
@@ -8641,7 +8997,7 @@
               </a:defRPr>
             </a:pPr>
             <a:r>
-              <a:t>파일 전체 3/21 · 이 슬라이드 다음에 같은 파일의 나머지 줄이 이어집니다.</a:t>
+              <a:t>파일 전체 3/24 · 이 슬라이드 다음에 같은 파일의 나머지 줄이 이어집니다.</a:t>
             </a:r>
           </a:p>
         </p:txBody>
@@ -8698,7 +9054,7 @@
               </a:defRPr>
             </a:pPr>
             <a:r>
-              <a:t>파일을 계속 작성하고 저장한다 (4/21)</a:t>
+              <a:t>파일을 계속 작성하고 저장한다 (4/24)</a:t>
             </a:r>
           </a:p>
         </p:txBody>
@@ -8873,7 +9229,7 @@
               </a:defRPr>
             </a:pPr>
             <a:r>
-              <a:t>현재 단계 6/24    |    현재 폴더 ~/agv_ws    |    현재 터미널</a:t>
+              <a:t>현재 단계 6/27    |    현재 폴더 ~/agv_ws    |    현재 터미널</a:t>
             </a:r>
           </a:p>
         </p:txBody>
@@ -8886,8 +9242,8 @@
         </p:nvSpPr>
         <p:spPr>
           <a:xfrm>
-            <a:off x="658368" y="1682496"/>
-            <a:ext cx="10972800" cy="347472"/>
+            <a:off x="658368" y="1627632"/>
+            <a:ext cx="10972800" cy="256032"/>
           </a:xfrm>
           <a:prstGeom prst="rect">
             <a:avLst/>
@@ -8904,7 +9260,7 @@
               <a:spcAft>
                 <a:spcPts val="0"/>
               </a:spcAft>
-              <a:defRPr sz="1700" b="1">
+              <a:defRPr sz="1500" b="1">
                 <a:solidFill>
                   <a:srgbClr val="122C4E"/>
                 </a:solidFill>
@@ -8925,8 +9281,8 @@
         </p:nvSpPr>
         <p:spPr>
           <a:xfrm>
-            <a:off x="658368" y="2103120"/>
-            <a:ext cx="10972800" cy="493776"/>
+            <a:off x="658368" y="1956816"/>
+            <a:ext cx="10972800" cy="603504"/>
           </a:xfrm>
           <a:prstGeom prst="rect">
             <a:avLst/>
@@ -8970,7 +9326,11 @@
               </a:defRPr>
             </a:pPr>
             <a:r>
-              <a:t>파일 생성/열기: mkdir -p ~/agv_ws/src/agv_gazebo/models/agv    &amp;&amp;    nano ~/agv_ws/src/agv_gazebo/models/agv/model.sdf</a:t>
+              <a:t>파일 생성: mkdir -p ~/agv_ws/src/agv_gazebo/models/agv</a:t>
+            </a:r>
+            <a:br/>
+            <a:r>
+              <a:t>파일 열기: nano ~/agv_ws/src/agv_gazebo/models/agv/model.sdf</a:t>
             </a:r>
           </a:p>
         </p:txBody>
@@ -8983,8 +9343,8 @@
         </p:nvSpPr>
         <p:spPr>
           <a:xfrm>
-            <a:off x="658368" y="2761488"/>
-            <a:ext cx="10972800" cy="3383280"/>
+            <a:off x="658368" y="2706624"/>
+            <a:ext cx="10972800" cy="3364992"/>
           </a:xfrm>
           <a:prstGeom prst="rect">
             <a:avLst/>
@@ -9028,6 +9388,30 @@
               </a:defRPr>
             </a:pPr>
             <a:r>
+              <a:t>        &lt;geometry&gt;</a:t>
+            </a:r>
+            <a:br/>
+            <a:r>
+              <a:t>          &lt;box&gt;</a:t>
+            </a:r>
+            <a:br/>
+            <a:r>
+              <a:t>            &lt;size&gt;0.60 0.42 0.16&lt;/size&gt;</a:t>
+            </a:r>
+            <a:br/>
+            <a:r>
+              <a:t>          &lt;/box&gt;</a:t>
+            </a:r>
+            <a:br/>
+            <a:r>
+              <a:t>        &lt;/geometry&gt;</a:t>
+            </a:r>
+            <a:br/>
+            <a:r>
+              <a:t>      &lt;/collision&gt;</a:t>
+            </a:r>
+            <a:br/>
+            <a:r>
               <a:t>      </a:t>
             </a:r>
             <a:br/>
@@ -9049,38 +9433,6 @@
             <a:br/>
             <a:r>
               <a:t>        &lt;update_rate&gt;100&lt;/update_rate&gt;</a:t>
-            </a:r>
-            <a:br/>
-            <a:r>
-              <a:t>        &lt;imu&gt;</a:t>
-            </a:r>
-            <a:br/>
-            <a:r>
-              <a:t>          &lt;angular_velocity&gt;</a:t>
-            </a:r>
-            <a:br/>
-            <a:r>
-              <a:t>            &lt;x&gt;</a:t>
-            </a:r>
-            <a:br/>
-            <a:r>
-              <a:t>              &lt;noise type="gaussian"&gt;</a:t>
-            </a:r>
-            <a:br/>
-            <a:r>
-              <a:t>                &lt;mean&gt;0&lt;/mean&gt;</a:t>
-            </a:r>
-            <a:br/>
-            <a:r>
-              <a:t>                &lt;stddev&gt;0.001&lt;/stddev&gt;</a:t>
-            </a:r>
-            <a:br/>
-            <a:r>
-              <a:t>              &lt;/noise&gt;</a:t>
-            </a:r>
-            <a:br/>
-            <a:r>
-              <a:t>            &lt;/x&gt;</a:t>
             </a:r>
           </a:p>
         </p:txBody>
@@ -9093,7 +9445,7 @@
         </p:nvSpPr>
         <p:spPr>
           <a:xfrm>
-            <a:off x="749808" y="6199632"/>
+            <a:off x="749808" y="6181344"/>
             <a:ext cx="10789920" cy="201168"/>
           </a:xfrm>
           <a:prstGeom prst="rect">
@@ -9119,7 +9471,7 @@
               </a:defRPr>
             </a:pPr>
             <a:r>
-              <a:t>파일 전체 4/21 · 이 슬라이드 다음에 같은 파일의 나머지 줄이 이어집니다.</a:t>
+              <a:t>파일 전체 4/24 · 이 슬라이드 다음에 같은 파일의 나머지 줄이 이어집니다.</a:t>
             </a:r>
           </a:p>
         </p:txBody>
@@ -9176,7 +9528,7 @@
               </a:defRPr>
             </a:pPr>
             <a:r>
-              <a:t>파일을 계속 작성하고 저장한다 (5/21)</a:t>
+              <a:t>파일을 계속 작성하고 저장한다 (5/24)</a:t>
             </a:r>
           </a:p>
         </p:txBody>
@@ -9351,7 +9703,7 @@
               </a:defRPr>
             </a:pPr>
             <a:r>
-              <a:t>현재 단계 7/24    |    현재 폴더 ~/agv_ws    |    현재 터미널</a:t>
+              <a:t>현재 단계 7/27    |    현재 폴더 ~/agv_ws    |    현재 터미널</a:t>
             </a:r>
           </a:p>
         </p:txBody>
@@ -9364,8 +9716,8 @@
         </p:nvSpPr>
         <p:spPr>
           <a:xfrm>
-            <a:off x="658368" y="1682496"/>
-            <a:ext cx="10972800" cy="347472"/>
+            <a:off x="658368" y="1627632"/>
+            <a:ext cx="10972800" cy="256032"/>
           </a:xfrm>
           <a:prstGeom prst="rect">
             <a:avLst/>
@@ -9382,7 +9734,7 @@
               <a:spcAft>
                 <a:spcPts val="0"/>
               </a:spcAft>
-              <a:defRPr sz="1700" b="1">
+              <a:defRPr sz="1500" b="1">
                 <a:solidFill>
                   <a:srgbClr val="122C4E"/>
                 </a:solidFill>
@@ -9403,8 +9755,8 @@
         </p:nvSpPr>
         <p:spPr>
           <a:xfrm>
-            <a:off x="658368" y="2103120"/>
-            <a:ext cx="10972800" cy="493776"/>
+            <a:off x="658368" y="1956816"/>
+            <a:ext cx="10972800" cy="603504"/>
           </a:xfrm>
           <a:prstGeom prst="rect">
             <a:avLst/>
@@ -9448,7 +9800,11 @@
               </a:defRPr>
             </a:pPr>
             <a:r>
-              <a:t>파일 생성/열기: mkdir -p ~/agv_ws/src/agv_gazebo/models/agv    &amp;&amp;    nano ~/agv_ws/src/agv_gazebo/models/agv/model.sdf</a:t>
+              <a:t>파일 생성: mkdir -p ~/agv_ws/src/agv_gazebo/models/agv</a:t>
+            </a:r>
+            <a:br/>
+            <a:r>
+              <a:t>파일 열기: nano ~/agv_ws/src/agv_gazebo/models/agv/model.sdf</a:t>
             </a:r>
           </a:p>
         </p:txBody>
@@ -9461,8 +9817,8 @@
         </p:nvSpPr>
         <p:spPr>
           <a:xfrm>
-            <a:off x="658368" y="2761488"/>
-            <a:ext cx="10972800" cy="3383280"/>
+            <a:off x="658368" y="2706624"/>
+            <a:ext cx="10972800" cy="3364992"/>
           </a:xfrm>
           <a:prstGeom prst="rect">
             <a:avLst/>
@@ -9506,6 +9862,38 @@
               </a:defRPr>
             </a:pPr>
             <a:r>
+              <a:t>        &lt;imu&gt;</a:t>
+            </a:r>
+            <a:br/>
+            <a:r>
+              <a:t>          &lt;angular_velocity&gt;</a:t>
+            </a:r>
+            <a:br/>
+            <a:r>
+              <a:t>            &lt;x&gt;</a:t>
+            </a:r>
+            <a:br/>
+            <a:r>
+              <a:t>              &lt;noise type="gaussian"&gt;</a:t>
+            </a:r>
+            <a:br/>
+            <a:r>
+              <a:t>                &lt;mean&gt;0&lt;/mean&gt;</a:t>
+            </a:r>
+            <a:br/>
+            <a:r>
+              <a:t>                &lt;stddev&gt;0.001&lt;/stddev&gt;</a:t>
+            </a:r>
+            <a:br/>
+            <a:r>
+              <a:t>              &lt;/noise&gt;</a:t>
+            </a:r>
+            <a:br/>
+            <a:r>
+              <a:t>            &lt;/x&gt;</a:t>
+            </a:r>
+            <a:br/>
+            <a:r>
               <a:t>          &lt;/angular_velocity&gt;</a:t>
             </a:r>
             <a:br/>
@@ -9519,46 +9907,6 @@
             <a:br/>
             <a:r>
               <a:t>      </a:t>
-            </a:r>
-            <a:br/>
-            <a:r>
-              <a:t>    </a:t>
-            </a:r>
-            <a:br/>
-            <a:r>
-              <a:t>    &lt;/link&gt;</a:t>
-            </a:r>
-            <a:br/>
-            <a:r>
-              <a:t>    </a:t>
-            </a:r>
-            <a:br/>
-            <a:r>
-              <a:t>    </a:t>
-            </a:r>
-            <a:br/>
-            <a:r>
-              <a:t>    &lt;link name="left_wheel_link"&gt;</a:t>
-            </a:r>
-            <a:br/>
-            <a:r>
-              <a:t>      &lt;pose relative_to="base_link"&gt;0 0.19 -0.08 1.5708 0 0&lt;/pose&gt;</a:t>
-            </a:r>
-            <a:br/>
-            <a:r>
-              <a:t>      &lt;inertial&gt;</a:t>
-            </a:r>
-            <a:br/>
-            <a:r>
-              <a:t>        &lt;mass&gt;0.6&lt;/mass&gt;</a:t>
-            </a:r>
-            <a:br/>
-            <a:r>
-              <a:t>        &lt;inertia&gt;</a:t>
-            </a:r>
-            <a:br/>
-            <a:r>
-              <a:t>          &lt;ixx&gt;0.002&lt;/ixx&gt;</a:t>
             </a:r>
           </a:p>
         </p:txBody>
@@ -9571,7 +9919,7 @@
         </p:nvSpPr>
         <p:spPr>
           <a:xfrm>
-            <a:off x="749808" y="6199632"/>
+            <a:off x="749808" y="6181344"/>
             <a:ext cx="10789920" cy="201168"/>
           </a:xfrm>
           <a:prstGeom prst="rect">
@@ -9597,7 +9945,7 @@
               </a:defRPr>
             </a:pPr>
             <a:r>
-              <a:t>파일 전체 5/21 · 이 슬라이드 다음에 같은 파일의 나머지 줄이 이어집니다.</a:t>
+              <a:t>파일 전체 5/24 · 이 슬라이드 다음에 같은 파일의 나머지 줄이 이어집니다.</a:t>
             </a:r>
           </a:p>
         </p:txBody>
@@ -9654,7 +10002,7 @@
               </a:defRPr>
             </a:pPr>
             <a:r>
-              <a:t>파일을 계속 작성하고 저장한다 (6/21)</a:t>
+              <a:t>파일을 계속 작성하고 저장한다 (6/24)</a:t>
             </a:r>
           </a:p>
         </p:txBody>
@@ -9829,7 +10177,7 @@
               </a:defRPr>
             </a:pPr>
             <a:r>
-              <a:t>현재 단계 8/24    |    현재 폴더 ~/agv_ws    |    현재 터미널</a:t>
+              <a:t>현재 단계 8/27    |    현재 폴더 ~/agv_ws    |    현재 터미널</a:t>
             </a:r>
           </a:p>
         </p:txBody>
@@ -9842,8 +10190,8 @@
         </p:nvSpPr>
         <p:spPr>
           <a:xfrm>
-            <a:off x="658368" y="1682496"/>
-            <a:ext cx="10972800" cy="347472"/>
+            <a:off x="658368" y="1627632"/>
+            <a:ext cx="10972800" cy="256032"/>
           </a:xfrm>
           <a:prstGeom prst="rect">
             <a:avLst/>
@@ -9860,7 +10208,7 @@
               <a:spcAft>
                 <a:spcPts val="0"/>
               </a:spcAft>
-              <a:defRPr sz="1700" b="1">
+              <a:defRPr sz="1500" b="1">
                 <a:solidFill>
                   <a:srgbClr val="122C4E"/>
                 </a:solidFill>
@@ -9881,8 +10229,8 @@
         </p:nvSpPr>
         <p:spPr>
           <a:xfrm>
-            <a:off x="658368" y="2103120"/>
-            <a:ext cx="10972800" cy="493776"/>
+            <a:off x="658368" y="1956816"/>
+            <a:ext cx="10972800" cy="603504"/>
           </a:xfrm>
           <a:prstGeom prst="rect">
             <a:avLst/>
@@ -9926,7 +10274,11 @@
               </a:defRPr>
             </a:pPr>
             <a:r>
-              <a:t>파일 생성/열기: mkdir -p ~/agv_ws/src/agv_gazebo/models/agv    &amp;&amp;    nano ~/agv_ws/src/agv_gazebo/models/agv/model.sdf</a:t>
+              <a:t>파일 생성: mkdir -p ~/agv_ws/src/agv_gazebo/models/agv</a:t>
+            </a:r>
+            <a:br/>
+            <a:r>
+              <a:t>파일 열기: nano ~/agv_ws/src/agv_gazebo/models/agv/model.sdf</a:t>
             </a:r>
           </a:p>
         </p:txBody>
@@ -9939,8 +10291,8 @@
         </p:nvSpPr>
         <p:spPr>
           <a:xfrm>
-            <a:off x="658368" y="2761488"/>
-            <a:ext cx="10972800" cy="3383280"/>
+            <a:off x="658368" y="2706624"/>
+            <a:ext cx="10972800" cy="3364992"/>
           </a:xfrm>
           <a:prstGeom prst="rect">
             <a:avLst/>
@@ -9984,59 +10336,51 @@
               </a:defRPr>
             </a:pPr>
             <a:r>
+              <a:t>    </a:t>
+            </a:r>
+            <a:br/>
+            <a:r>
+              <a:t>    &lt;/link&gt;</a:t>
+            </a:r>
+            <a:br/>
+            <a:r>
+              <a:t>    </a:t>
+            </a:r>
+            <a:br/>
+            <a:r>
+              <a:t>    </a:t>
+            </a:r>
+            <a:br/>
+            <a:r>
+              <a:t>    &lt;link name="left_wheel_link"&gt;</a:t>
+            </a:r>
+            <a:br/>
+            <a:r>
+              <a:t>      &lt;pose relative_to="base_link"&gt;0 0.19 -0.08 1.5708 0 0&lt;/pose&gt;</a:t>
+            </a:r>
+            <a:br/>
+            <a:r>
+              <a:t>      &lt;inertial&gt;</a:t>
+            </a:r>
+            <a:br/>
+            <a:r>
+              <a:t>        &lt;mass&gt;0.6&lt;/mass&gt;</a:t>
+            </a:r>
+            <a:br/>
+            <a:r>
+              <a:t>        &lt;inertia&gt;</a:t>
+            </a:r>
+            <a:br/>
+            <a:r>
+              <a:t>          &lt;ixx&gt;0.002&lt;/ixx&gt;</a:t>
+            </a:r>
+            <a:br/>
+            <a:r>
               <a:t>          &lt;iyy&gt;0.002&lt;/iyy&gt;</a:t>
             </a:r>
             <a:br/>
             <a:r>
               <a:t>          &lt;izz&gt;0.001&lt;/izz&gt;</a:t>
-            </a:r>
-            <a:br/>
-            <a:r>
-              <a:t>        &lt;/inertia&gt;</a:t>
-            </a:r>
-            <a:br/>
-            <a:r>
-              <a:t>      &lt;/inertial&gt;</a:t>
-            </a:r>
-            <a:br/>
-            <a:r>
-              <a:t>      &lt;visual name="wheel"&gt;</a:t>
-            </a:r>
-            <a:br/>
-            <a:r>
-              <a:t>        &lt;geometry&gt;</a:t>
-            </a:r>
-            <a:br/>
-            <a:r>
-              <a:t>          &lt;cylinder&gt;</a:t>
-            </a:r>
-            <a:br/>
-            <a:r>
-              <a:t>            &lt;radius&gt;0.08&lt;/radius&gt;</a:t>
-            </a:r>
-            <a:br/>
-            <a:r>
-              <a:t>            &lt;length&gt;0.05&lt;/length&gt;</a:t>
-            </a:r>
-            <a:br/>
-            <a:r>
-              <a:t>          &lt;/cylinder&gt;</a:t>
-            </a:r>
-            <a:br/>
-            <a:r>
-              <a:t>        &lt;/geometry&gt;</a:t>
-            </a:r>
-            <a:br/>
-            <a:r>
-              <a:t>      &lt;/visual&gt;</a:t>
-            </a:r>
-            <a:br/>
-            <a:r>
-              <a:t>      &lt;collision name="wheel_collision"&gt;</a:t>
-            </a:r>
-            <a:br/>
-            <a:r>
-              <a:t>        &lt;geometry&gt;</a:t>
             </a:r>
           </a:p>
         </p:txBody>
@@ -10049,7 +10393,7 @@
         </p:nvSpPr>
         <p:spPr>
           <a:xfrm>
-            <a:off x="749808" y="6199632"/>
+            <a:off x="749808" y="6181344"/>
             <a:ext cx="10789920" cy="201168"/>
           </a:xfrm>
           <a:prstGeom prst="rect">
@@ -10075,7 +10419,7 @@
               </a:defRPr>
             </a:pPr>
             <a:r>
-              <a:t>파일 전체 6/21 · 이 슬라이드 다음에 같은 파일의 나머지 줄이 이어집니다.</a:t>
+              <a:t>파일 전체 6/24 · 이 슬라이드 다음에 같은 파일의 나머지 줄이 이어집니다.</a:t>
             </a:r>
           </a:p>
         </p:txBody>
@@ -10132,7 +10476,7 @@
               </a:defRPr>
             </a:pPr>
             <a:r>
-              <a:t>파일을 계속 작성하고 저장한다 (7/21)</a:t>
+              <a:t>파일을 계속 작성하고 저장한다 (7/24)</a:t>
             </a:r>
           </a:p>
         </p:txBody>
@@ -10307,7 +10651,7 @@
               </a:defRPr>
             </a:pPr>
             <a:r>
-              <a:t>현재 단계 9/24    |    현재 폴더 ~/agv_ws    |    현재 터미널</a:t>
+              <a:t>현재 단계 9/27    |    현재 폴더 ~/agv_ws    |    현재 터미널</a:t>
             </a:r>
           </a:p>
         </p:txBody>
@@ -10320,8 +10664,8 @@
         </p:nvSpPr>
         <p:spPr>
           <a:xfrm>
-            <a:off x="658368" y="1682496"/>
-            <a:ext cx="10972800" cy="347472"/>
+            <a:off x="658368" y="1627632"/>
+            <a:ext cx="10972800" cy="256032"/>
           </a:xfrm>
           <a:prstGeom prst="rect">
             <a:avLst/>
@@ -10338,7 +10682,7 @@
               <a:spcAft>
                 <a:spcPts val="0"/>
               </a:spcAft>
-              <a:defRPr sz="1700" b="1">
+              <a:defRPr sz="1500" b="1">
                 <a:solidFill>
                   <a:srgbClr val="122C4E"/>
                 </a:solidFill>
@@ -10359,8 +10703,8 @@
         </p:nvSpPr>
         <p:spPr>
           <a:xfrm>
-            <a:off x="658368" y="2103120"/>
-            <a:ext cx="10972800" cy="493776"/>
+            <a:off x="658368" y="1956816"/>
+            <a:ext cx="10972800" cy="603504"/>
           </a:xfrm>
           <a:prstGeom prst="rect">
             <a:avLst/>
@@ -10404,7 +10748,11 @@
               </a:defRPr>
             </a:pPr>
             <a:r>
-              <a:t>파일 생성/열기: mkdir -p ~/agv_ws/src/agv_gazebo/models/agv    &amp;&amp;    nano ~/agv_ws/src/agv_gazebo/models/agv/model.sdf</a:t>
+              <a:t>파일 생성: mkdir -p ~/agv_ws/src/agv_gazebo/models/agv</a:t>
+            </a:r>
+            <a:br/>
+            <a:r>
+              <a:t>파일 열기: nano ~/agv_ws/src/agv_gazebo/models/agv/model.sdf</a:t>
             </a:r>
           </a:p>
         </p:txBody>
@@ -10417,8 +10765,8 @@
         </p:nvSpPr>
         <p:spPr>
           <a:xfrm>
-            <a:off x="658368" y="2761488"/>
-            <a:ext cx="10972800" cy="3383280"/>
+            <a:off x="658368" y="2706624"/>
+            <a:ext cx="10972800" cy="3364992"/>
           </a:xfrm>
           <a:prstGeom prst="rect">
             <a:avLst/>
@@ -10462,6 +10810,22 @@
               </a:defRPr>
             </a:pPr>
             <a:r>
+              <a:t>        &lt;/inertia&gt;</a:t>
+            </a:r>
+            <a:br/>
+            <a:r>
+              <a:t>      &lt;/inertial&gt;</a:t>
+            </a:r>
+            <a:br/>
+            <a:r>
+              <a:t>      &lt;visual name="wheel"&gt;</a:t>
+            </a:r>
+            <a:br/>
+            <a:r>
+              <a:t>        &lt;geometry&gt;</a:t>
+            </a:r>
+            <a:br/>
+            <a:r>
               <a:t>          &lt;cylinder&gt;</a:t>
             </a:r>
             <a:br/>
@@ -10482,39 +10846,15 @@
             </a:r>
             <a:br/>
             <a:r>
-              <a:t>        &lt;surface&gt;</a:t>
-            </a:r>
-            <a:br/>
-            <a:r>
-              <a:t>          &lt;friction&gt;</a:t>
-            </a:r>
-            <a:br/>
-            <a:r>
-              <a:t>            &lt;ode&gt;</a:t>
-            </a:r>
-            <a:br/>
-            <a:r>
-              <a:t>              &lt;mu&gt;1.0&lt;/mu&gt;</a:t>
-            </a:r>
-            <a:br/>
-            <a:r>
-              <a:t>              &lt;mu2&gt;1.0&lt;/mu2&gt;</a:t>
-            </a:r>
-            <a:br/>
-            <a:r>
-              <a:t>            &lt;/ode&gt;</a:t>
-            </a:r>
-            <a:br/>
-            <a:r>
-              <a:t>          &lt;/friction&gt;</a:t>
-            </a:r>
-            <a:br/>
-            <a:r>
-              <a:t>        &lt;/surface&gt;</a:t>
-            </a:r>
-            <a:br/>
-            <a:r>
-              <a:t>      &lt;/collision&gt;</a:t>
+              <a:t>      &lt;/visual&gt;</a:t>
+            </a:r>
+            <a:br/>
+            <a:r>
+              <a:t>      &lt;collision name="wheel_collision"&gt;</a:t>
+            </a:r>
+            <a:br/>
+            <a:r>
+              <a:t>        &lt;geometry&gt;</a:t>
             </a:r>
           </a:p>
         </p:txBody>
@@ -10527,7 +10867,7 @@
         </p:nvSpPr>
         <p:spPr>
           <a:xfrm>
-            <a:off x="749808" y="6199632"/>
+            <a:off x="749808" y="6181344"/>
             <a:ext cx="10789920" cy="201168"/>
           </a:xfrm>
           <a:prstGeom prst="rect">
@@ -10553,7 +10893,7 @@
               </a:defRPr>
             </a:pPr>
             <a:r>
-              <a:t>파일 전체 7/21 · 이 슬라이드 다음에 같은 파일의 나머지 줄이 이어집니다.</a:t>
+              <a:t>파일 전체 7/24 · 이 슬라이드 다음에 같은 파일의 나머지 줄이 이어집니다.</a:t>
             </a:r>
           </a:p>
         </p:txBody>
@@ -10610,7 +10950,7 @@
               </a:defRPr>
             </a:pPr>
             <a:r>
-              <a:t>파일을 계속 작성하고 저장한다 (8/21)</a:t>
+              <a:t>파일을 계속 작성하고 저장한다 (8/24)</a:t>
             </a:r>
           </a:p>
         </p:txBody>
@@ -10785,7 +11125,7 @@
               </a:defRPr>
             </a:pPr>
             <a:r>
-              <a:t>현재 단계 10/24    |    현재 폴더 ~/agv_ws    |    현재 터미널</a:t>
+              <a:t>현재 단계 10/27    |    현재 폴더 ~/agv_ws    |    현재 터미널</a:t>
             </a:r>
           </a:p>
         </p:txBody>
@@ -10798,8 +11138,8 @@
         </p:nvSpPr>
         <p:spPr>
           <a:xfrm>
-            <a:off x="658368" y="1682496"/>
-            <a:ext cx="10972800" cy="347472"/>
+            <a:off x="658368" y="1627632"/>
+            <a:ext cx="10972800" cy="256032"/>
           </a:xfrm>
           <a:prstGeom prst="rect">
             <a:avLst/>
@@ -10816,7 +11156,7 @@
               <a:spcAft>
                 <a:spcPts val="0"/>
               </a:spcAft>
-              <a:defRPr sz="1700" b="1">
+              <a:defRPr sz="1500" b="1">
                 <a:solidFill>
                   <a:srgbClr val="122C4E"/>
                 </a:solidFill>
@@ -10837,8 +11177,8 @@
         </p:nvSpPr>
         <p:spPr>
           <a:xfrm>
-            <a:off x="658368" y="2103120"/>
-            <a:ext cx="10972800" cy="493776"/>
+            <a:off x="658368" y="1956816"/>
+            <a:ext cx="10972800" cy="603504"/>
           </a:xfrm>
           <a:prstGeom prst="rect">
             <a:avLst/>
@@ -10882,7 +11222,11 @@
               </a:defRPr>
             </a:pPr>
             <a:r>
-              <a:t>파일 생성/열기: mkdir -p ~/agv_ws/src/agv_gazebo/models/agv    &amp;&amp;    nano ~/agv_ws/src/agv_gazebo/models/agv/model.sdf</a:t>
+              <a:t>파일 생성: mkdir -p ~/agv_ws/src/agv_gazebo/models/agv</a:t>
+            </a:r>
+            <a:br/>
+            <a:r>
+              <a:t>파일 열기: nano ~/agv_ws/src/agv_gazebo/models/agv/model.sdf</a:t>
             </a:r>
           </a:p>
         </p:txBody>
@@ -10895,8 +11239,8 @@
         </p:nvSpPr>
         <p:spPr>
           <a:xfrm>
-            <a:off x="658368" y="2761488"/>
-            <a:ext cx="10972800" cy="3383280"/>
+            <a:off x="658368" y="2706624"/>
+            <a:ext cx="10972800" cy="3364992"/>
           </a:xfrm>
           <a:prstGeom prst="rect">
             <a:avLst/>
@@ -10940,59 +11284,51 @@
               </a:defRPr>
             </a:pPr>
             <a:r>
-              <a:t>    &lt;/link&gt;</a:t>
-            </a:r>
-            <a:br/>
-            <a:r>
-              <a:t>    </a:t>
-            </a:r>
-            <a:br/>
-            <a:r>
-              <a:t>    </a:t>
-            </a:r>
-            <a:br/>
-            <a:r>
-              <a:t>    &lt;link name="right_wheel_link"&gt;</a:t>
-            </a:r>
-            <a:br/>
-            <a:r>
-              <a:t>      &lt;pose relative_to="base_link"&gt;0 -0.19 -0.08 1.5708 0 0&lt;/pose&gt;</a:t>
-            </a:r>
-            <a:br/>
-            <a:r>
-              <a:t>      &lt;inertial&gt;</a:t>
-            </a:r>
-            <a:br/>
-            <a:r>
-              <a:t>        &lt;mass&gt;0.6&lt;/mass&gt;</a:t>
-            </a:r>
-            <a:br/>
-            <a:r>
-              <a:t>        &lt;inertia&gt;</a:t>
-            </a:r>
-            <a:br/>
-            <a:r>
-              <a:t>          &lt;ixx&gt;0.002&lt;/ixx&gt;</a:t>
-            </a:r>
-            <a:br/>
-            <a:r>
-              <a:t>          &lt;iyy&gt;0.002&lt;/iyy&gt;</a:t>
-            </a:r>
-            <a:br/>
-            <a:r>
-              <a:t>          &lt;izz&gt;0.001&lt;/izz&gt;</a:t>
-            </a:r>
-            <a:br/>
-            <a:r>
-              <a:t>        &lt;/inertia&gt;</a:t>
-            </a:r>
-            <a:br/>
-            <a:r>
-              <a:t>      &lt;/inertial&gt;</a:t>
-            </a:r>
-            <a:br/>
-            <a:r>
-              <a:t>      &lt;visual name="wheel"&gt;</a:t>
+              <a:t>          &lt;cylinder&gt;</a:t>
+            </a:r>
+            <a:br/>
+            <a:r>
+              <a:t>            &lt;radius&gt;0.08&lt;/radius&gt;</a:t>
+            </a:r>
+            <a:br/>
+            <a:r>
+              <a:t>            &lt;length&gt;0.05&lt;/length&gt;</a:t>
+            </a:r>
+            <a:br/>
+            <a:r>
+              <a:t>          &lt;/cylinder&gt;</a:t>
+            </a:r>
+            <a:br/>
+            <a:r>
+              <a:t>        &lt;/geometry&gt;</a:t>
+            </a:r>
+            <a:br/>
+            <a:r>
+              <a:t>        &lt;surface&gt;</a:t>
+            </a:r>
+            <a:br/>
+            <a:r>
+              <a:t>          &lt;friction&gt;</a:t>
+            </a:r>
+            <a:br/>
+            <a:r>
+              <a:t>            &lt;ode&gt;</a:t>
+            </a:r>
+            <a:br/>
+            <a:r>
+              <a:t>              &lt;mu&gt;1.0&lt;/mu&gt;</a:t>
+            </a:r>
+            <a:br/>
+            <a:r>
+              <a:t>              &lt;mu2&gt;1.0&lt;/mu2&gt;</a:t>
+            </a:r>
+            <a:br/>
+            <a:r>
+              <a:t>            &lt;/ode&gt;</a:t>
+            </a:r>
+            <a:br/>
+            <a:r>
+              <a:t>          &lt;/friction&gt;</a:t>
             </a:r>
           </a:p>
         </p:txBody>
@@ -11005,7 +11341,7 @@
         </p:nvSpPr>
         <p:spPr>
           <a:xfrm>
-            <a:off x="749808" y="6199632"/>
+            <a:off x="749808" y="6181344"/>
             <a:ext cx="10789920" cy="201168"/>
           </a:xfrm>
           <a:prstGeom prst="rect">
@@ -11031,7 +11367,7 @@
               </a:defRPr>
             </a:pPr>
             <a:r>
-              <a:t>파일 전체 8/21 · 이 슬라이드 다음에 같은 파일의 나머지 줄이 이어집니다.</a:t>
+              <a:t>파일 전체 8/24 · 이 슬라이드 다음에 같은 파일의 나머지 줄이 이어집니다.</a:t>
             </a:r>
           </a:p>
         </p:txBody>
@@ -11088,7 +11424,7 @@
               </a:defRPr>
             </a:pPr>
             <a:r>
-              <a:t>파일을 계속 작성하고 저장한다 (9/21)</a:t>
+              <a:t>파일을 계속 작성하고 저장한다 (9/24)</a:t>
             </a:r>
           </a:p>
         </p:txBody>
@@ -11263,7 +11599,7 @@
               </a:defRPr>
             </a:pPr>
             <a:r>
-              <a:t>현재 단계 11/24    |    현재 폴더 ~/agv_ws    |    현재 터미널</a:t>
+              <a:t>현재 단계 11/27    |    현재 폴더 ~/agv_ws    |    현재 터미널</a:t>
             </a:r>
           </a:p>
         </p:txBody>
@@ -11276,8 +11612,8 @@
         </p:nvSpPr>
         <p:spPr>
           <a:xfrm>
-            <a:off x="658368" y="1682496"/>
-            <a:ext cx="10972800" cy="347472"/>
+            <a:off x="658368" y="1627632"/>
+            <a:ext cx="10972800" cy="256032"/>
           </a:xfrm>
           <a:prstGeom prst="rect">
             <a:avLst/>
@@ -11294,7 +11630,7 @@
               <a:spcAft>
                 <a:spcPts val="0"/>
               </a:spcAft>
-              <a:defRPr sz="1700" b="1">
+              <a:defRPr sz="1500" b="1">
                 <a:solidFill>
                   <a:srgbClr val="122C4E"/>
                 </a:solidFill>
@@ -11315,8 +11651,8 @@
         </p:nvSpPr>
         <p:spPr>
           <a:xfrm>
-            <a:off x="658368" y="2103120"/>
-            <a:ext cx="10972800" cy="493776"/>
+            <a:off x="658368" y="1956816"/>
+            <a:ext cx="10972800" cy="603504"/>
           </a:xfrm>
           <a:prstGeom prst="rect">
             <a:avLst/>
@@ -11360,7 +11696,11 @@
               </a:defRPr>
             </a:pPr>
             <a:r>
-              <a:t>파일 생성/열기: mkdir -p ~/agv_ws/src/agv_gazebo/models/agv    &amp;&amp;    nano ~/agv_ws/src/agv_gazebo/models/agv/model.sdf</a:t>
+              <a:t>파일 생성: mkdir -p ~/agv_ws/src/agv_gazebo/models/agv</a:t>
+            </a:r>
+            <a:br/>
+            <a:r>
+              <a:t>파일 열기: nano ~/agv_ws/src/agv_gazebo/models/agv/model.sdf</a:t>
             </a:r>
           </a:p>
         </p:txBody>
@@ -11373,8 +11713,8 @@
         </p:nvSpPr>
         <p:spPr>
           <a:xfrm>
-            <a:off x="658368" y="2761488"/>
-            <a:ext cx="10972800" cy="3383280"/>
+            <a:off x="658368" y="2706624"/>
+            <a:ext cx="10972800" cy="3364992"/>
           </a:xfrm>
           <a:prstGeom prst="rect">
             <a:avLst/>
@@ -11418,59 +11758,51 @@
               </a:defRPr>
             </a:pPr>
             <a:r>
-              <a:t>        &lt;geometry&gt;</a:t>
-            </a:r>
-            <a:br/>
-            <a:r>
-              <a:t>          &lt;cylinder&gt;</a:t>
-            </a:r>
-            <a:br/>
-            <a:r>
-              <a:t>            &lt;radius&gt;0.08&lt;/radius&gt;</a:t>
-            </a:r>
-            <a:br/>
-            <a:r>
-              <a:t>            &lt;length&gt;0.05&lt;/length&gt;</a:t>
-            </a:r>
-            <a:br/>
-            <a:r>
-              <a:t>          &lt;/cylinder&gt;</a:t>
-            </a:r>
-            <a:br/>
-            <a:r>
-              <a:t>        &lt;/geometry&gt;</a:t>
-            </a:r>
-            <a:br/>
-            <a:r>
-              <a:t>      &lt;/visual&gt;</a:t>
-            </a:r>
-            <a:br/>
-            <a:r>
-              <a:t>      &lt;collision name="wheel_collision"&gt;</a:t>
-            </a:r>
-            <a:br/>
-            <a:r>
-              <a:t>        &lt;geometry&gt;</a:t>
-            </a:r>
-            <a:br/>
-            <a:r>
-              <a:t>          &lt;cylinder&gt;</a:t>
-            </a:r>
-            <a:br/>
-            <a:r>
-              <a:t>            &lt;radius&gt;0.08&lt;/radius&gt;</a:t>
-            </a:r>
-            <a:br/>
-            <a:r>
-              <a:t>            &lt;length&gt;0.05&lt;/length&gt;</a:t>
-            </a:r>
-            <a:br/>
-            <a:r>
-              <a:t>          &lt;/cylinder&gt;</a:t>
-            </a:r>
-            <a:br/>
-            <a:r>
-              <a:t>        &lt;/geometry&gt;</a:t>
+              <a:t>        &lt;/surface&gt;</a:t>
+            </a:r>
+            <a:br/>
+            <a:r>
+              <a:t>      &lt;/collision&gt;</a:t>
+            </a:r>
+            <a:br/>
+            <a:r>
+              <a:t>    &lt;/link&gt;</a:t>
+            </a:r>
+            <a:br/>
+            <a:r>
+              <a:t>    </a:t>
+            </a:r>
+            <a:br/>
+            <a:r>
+              <a:t>    </a:t>
+            </a:r>
+            <a:br/>
+            <a:r>
+              <a:t>    &lt;link name="right_wheel_link"&gt;</a:t>
+            </a:r>
+            <a:br/>
+            <a:r>
+              <a:t>      &lt;pose relative_to="base_link"&gt;0 -0.19 -0.08 1.5708 0 0&lt;/pose&gt;</a:t>
+            </a:r>
+            <a:br/>
+            <a:r>
+              <a:t>      &lt;inertial&gt;</a:t>
+            </a:r>
+            <a:br/>
+            <a:r>
+              <a:t>        &lt;mass&gt;0.6&lt;/mass&gt;</a:t>
+            </a:r>
+            <a:br/>
+            <a:r>
+              <a:t>        &lt;inertia&gt;</a:t>
+            </a:r>
+            <a:br/>
+            <a:r>
+              <a:t>          &lt;ixx&gt;0.002&lt;/ixx&gt;</a:t>
+            </a:r>
+            <a:br/>
+            <a:r>
+              <a:t>          &lt;iyy&gt;0.002&lt;/iyy&gt;</a:t>
             </a:r>
           </a:p>
         </p:txBody>
@@ -11483,7 +11815,7 @@
         </p:nvSpPr>
         <p:spPr>
           <a:xfrm>
-            <a:off x="749808" y="6199632"/>
+            <a:off x="749808" y="6181344"/>
             <a:ext cx="10789920" cy="201168"/>
           </a:xfrm>
           <a:prstGeom prst="rect">
@@ -11509,7 +11841,7 @@
               </a:defRPr>
             </a:pPr>
             <a:r>
-              <a:t>파일 전체 9/21 · 이 슬라이드 다음에 같은 파일의 나머지 줄이 이어집니다.</a:t>
+              <a:t>파일 전체 9/24 · 이 슬라이드 다음에 같은 파일의 나머지 줄이 이어집니다.</a:t>
             </a:r>
           </a:p>
         </p:txBody>
@@ -11566,7 +11898,7 @@
               </a:defRPr>
             </a:pPr>
             <a:r>
-              <a:t>파일을 계속 작성하고 저장한다 (10/21)</a:t>
+              <a:t>파일을 계속 작성하고 저장한다 (10/24)</a:t>
             </a:r>
           </a:p>
         </p:txBody>
@@ -11741,7 +12073,7 @@
               </a:defRPr>
             </a:pPr>
             <a:r>
-              <a:t>현재 단계 12/24    |    현재 폴더 ~/agv_ws    |    현재 터미널</a:t>
+              <a:t>현재 단계 12/27    |    현재 폴더 ~/agv_ws    |    현재 터미널</a:t>
             </a:r>
           </a:p>
         </p:txBody>
@@ -11754,8 +12086,8 @@
         </p:nvSpPr>
         <p:spPr>
           <a:xfrm>
-            <a:off x="658368" y="1682496"/>
-            <a:ext cx="10972800" cy="347472"/>
+            <a:off x="658368" y="1627632"/>
+            <a:ext cx="10972800" cy="256032"/>
           </a:xfrm>
           <a:prstGeom prst="rect">
             <a:avLst/>
@@ -11772,7 +12104,7 @@
               <a:spcAft>
                 <a:spcPts val="0"/>
               </a:spcAft>
-              <a:defRPr sz="1700" b="1">
+              <a:defRPr sz="1500" b="1">
                 <a:solidFill>
                   <a:srgbClr val="122C4E"/>
                 </a:solidFill>
@@ -11793,8 +12125,8 @@
         </p:nvSpPr>
         <p:spPr>
           <a:xfrm>
-            <a:off x="658368" y="2103120"/>
-            <a:ext cx="10972800" cy="493776"/>
+            <a:off x="658368" y="1956816"/>
+            <a:ext cx="10972800" cy="603504"/>
           </a:xfrm>
           <a:prstGeom prst="rect">
             <a:avLst/>
@@ -11838,7 +12170,11 @@
               </a:defRPr>
             </a:pPr>
             <a:r>
-              <a:t>파일 생성/열기: mkdir -p ~/agv_ws/src/agv_gazebo/models/agv    &amp;&amp;    nano ~/agv_ws/src/agv_gazebo/models/agv/model.sdf</a:t>
+              <a:t>파일 생성: mkdir -p ~/agv_ws/src/agv_gazebo/models/agv</a:t>
+            </a:r>
+            <a:br/>
+            <a:r>
+              <a:t>파일 열기: nano ~/agv_ws/src/agv_gazebo/models/agv/model.sdf</a:t>
             </a:r>
           </a:p>
         </p:txBody>
@@ -11851,8 +12187,8 @@
         </p:nvSpPr>
         <p:spPr>
           <a:xfrm>
-            <a:off x="658368" y="2761488"/>
-            <a:ext cx="10972800" cy="3383280"/>
+            <a:off x="658368" y="2706624"/>
+            <a:ext cx="10972800" cy="3364992"/>
           </a:xfrm>
           <a:prstGeom prst="rect">
             <a:avLst/>
@@ -11896,59 +12232,51 @@
               </a:defRPr>
             </a:pPr>
             <a:r>
-              <a:t>        &lt;surface&gt;</a:t>
-            </a:r>
-            <a:br/>
-            <a:r>
-              <a:t>          &lt;friction&gt;</a:t>
-            </a:r>
-            <a:br/>
-            <a:r>
-              <a:t>            &lt;ode&gt;</a:t>
-            </a:r>
-            <a:br/>
-            <a:r>
-              <a:t>              &lt;mu&gt;1.0&lt;/mu&gt;</a:t>
-            </a:r>
-            <a:br/>
-            <a:r>
-              <a:t>              &lt;mu2&gt;1.0&lt;/mu2&gt;</a:t>
-            </a:r>
-            <a:br/>
-            <a:r>
-              <a:t>            &lt;/ode&gt;</a:t>
-            </a:r>
-            <a:br/>
-            <a:r>
-              <a:t>          &lt;/friction&gt;</a:t>
-            </a:r>
-            <a:br/>
-            <a:r>
-              <a:t>        &lt;/surface&gt;</a:t>
-            </a:r>
-            <a:br/>
-            <a:r>
-              <a:t>      &lt;/collision&gt;</a:t>
-            </a:r>
-            <a:br/>
-            <a:r>
-              <a:t>    &lt;/link&gt;</a:t>
-            </a:r>
-            <a:br/>
-            <a:r>
-              <a:t>    </a:t>
-            </a:r>
-            <a:br/>
-            <a:r>
-              <a:t>    </a:t>
-            </a:r>
-            <a:br/>
-            <a:r>
-              <a:t>    &lt;joint name="left_wheel_joint" type="revolute"&gt;</a:t>
-            </a:r>
-            <a:br/>
-            <a:r>
-              <a:t>      &lt;parent&gt;base_link&lt;/parent&gt;</a:t>
+              <a:t>          &lt;izz&gt;0.001&lt;/izz&gt;</a:t>
+            </a:r>
+            <a:br/>
+            <a:r>
+              <a:t>        &lt;/inertia&gt;</a:t>
+            </a:r>
+            <a:br/>
+            <a:r>
+              <a:t>      &lt;/inertial&gt;</a:t>
+            </a:r>
+            <a:br/>
+            <a:r>
+              <a:t>      &lt;visual name="wheel"&gt;</a:t>
+            </a:r>
+            <a:br/>
+            <a:r>
+              <a:t>        &lt;geometry&gt;</a:t>
+            </a:r>
+            <a:br/>
+            <a:r>
+              <a:t>          &lt;cylinder&gt;</a:t>
+            </a:r>
+            <a:br/>
+            <a:r>
+              <a:t>            &lt;radius&gt;0.08&lt;/radius&gt;</a:t>
+            </a:r>
+            <a:br/>
+            <a:r>
+              <a:t>            &lt;length&gt;0.05&lt;/length&gt;</a:t>
+            </a:r>
+            <a:br/>
+            <a:r>
+              <a:t>          &lt;/cylinder&gt;</a:t>
+            </a:r>
+            <a:br/>
+            <a:r>
+              <a:t>        &lt;/geometry&gt;</a:t>
+            </a:r>
+            <a:br/>
+            <a:r>
+              <a:t>      &lt;/visual&gt;</a:t>
+            </a:r>
+            <a:br/>
+            <a:r>
+              <a:t>      &lt;collision name="wheel_collision"&gt;</a:t>
             </a:r>
           </a:p>
         </p:txBody>
@@ -11961,7 +12289,7 @@
         </p:nvSpPr>
         <p:spPr>
           <a:xfrm>
-            <a:off x="749808" y="6199632"/>
+            <a:off x="749808" y="6181344"/>
             <a:ext cx="10789920" cy="201168"/>
           </a:xfrm>
           <a:prstGeom prst="rect">
@@ -11987,7 +12315,7 @@
               </a:defRPr>
             </a:pPr>
             <a:r>
-              <a:t>파일 전체 10/21 · 이 슬라이드 다음에 같은 파일의 나머지 줄이 이어집니다.</a:t>
+              <a:t>파일 전체 10/24 · 이 슬라이드 다음에 같은 파일의 나머지 줄이 이어집니다.</a:t>
             </a:r>
           </a:p>
         </p:txBody>
@@ -12044,7 +12372,7 @@
               </a:defRPr>
             </a:pPr>
             <a:r>
-              <a:t>파일을 계속 작성하고 저장한다 (11/21)</a:t>
+              <a:t>파일을 계속 작성하고 저장한다 (11/24)</a:t>
             </a:r>
           </a:p>
         </p:txBody>
@@ -12219,7 +12547,7 @@
               </a:defRPr>
             </a:pPr>
             <a:r>
-              <a:t>현재 단계 13/24    |    현재 폴더 ~/agv_ws    |    현재 터미널</a:t>
+              <a:t>현재 단계 13/27    |    현재 폴더 ~/agv_ws    |    현재 터미널</a:t>
             </a:r>
           </a:p>
         </p:txBody>
@@ -12232,8 +12560,8 @@
         </p:nvSpPr>
         <p:spPr>
           <a:xfrm>
-            <a:off x="658368" y="1682496"/>
-            <a:ext cx="10972800" cy="347472"/>
+            <a:off x="658368" y="1627632"/>
+            <a:ext cx="10972800" cy="256032"/>
           </a:xfrm>
           <a:prstGeom prst="rect">
             <a:avLst/>
@@ -12250,7 +12578,7 @@
               <a:spcAft>
                 <a:spcPts val="0"/>
               </a:spcAft>
-              <a:defRPr sz="1700" b="1">
+              <a:defRPr sz="1500" b="1">
                 <a:solidFill>
                   <a:srgbClr val="122C4E"/>
                 </a:solidFill>
@@ -12271,8 +12599,8 @@
         </p:nvSpPr>
         <p:spPr>
           <a:xfrm>
-            <a:off x="658368" y="2103120"/>
-            <a:ext cx="10972800" cy="493776"/>
+            <a:off x="658368" y="1956816"/>
+            <a:ext cx="10972800" cy="603504"/>
           </a:xfrm>
           <a:prstGeom prst="rect">
             <a:avLst/>
@@ -12316,7 +12644,11 @@
               </a:defRPr>
             </a:pPr>
             <a:r>
-              <a:t>파일 생성/열기: mkdir -p ~/agv_ws/src/agv_gazebo/models/agv    &amp;&amp;    nano ~/agv_ws/src/agv_gazebo/models/agv/model.sdf</a:t>
+              <a:t>파일 생성: mkdir -p ~/agv_ws/src/agv_gazebo/models/agv</a:t>
+            </a:r>
+            <a:br/>
+            <a:r>
+              <a:t>파일 열기: nano ~/agv_ws/src/agv_gazebo/models/agv/model.sdf</a:t>
             </a:r>
           </a:p>
         </p:txBody>
@@ -12329,8 +12661,8 @@
         </p:nvSpPr>
         <p:spPr>
           <a:xfrm>
-            <a:off x="658368" y="2761488"/>
-            <a:ext cx="10972800" cy="3383280"/>
+            <a:off x="658368" y="2706624"/>
+            <a:ext cx="10972800" cy="3364992"/>
           </a:xfrm>
           <a:prstGeom prst="rect">
             <a:avLst/>
@@ -12374,59 +12706,51 @@
               </a:defRPr>
             </a:pPr>
             <a:r>
-              <a:t>      &lt;child&gt;left_wheel_link&lt;/child&gt;</a:t>
-            </a:r>
-            <a:br/>
-            <a:r>
-              <a:t>      &lt;axis&gt;</a:t>
-            </a:r>
-            <a:br/>
-            <a:r>
-              <a:t>        &lt;xyz&gt;0 1 0&lt;/xyz&gt;</a:t>
-            </a:r>
-            <a:br/>
-            <a:r>
-              <a:t>        &lt;limit&gt;</a:t>
-            </a:r>
-            <a:br/>
-            <a:r>
-              <a:t>          &lt;lower&gt;-1e16&lt;/lower&gt;</a:t>
-            </a:r>
-            <a:br/>
-            <a:r>
-              <a:t>          &lt;upper&gt;1e16&lt;/upper&gt;</a:t>
-            </a:r>
-            <a:br/>
-            <a:r>
-              <a:t>        &lt;/limit&gt;</a:t>
-            </a:r>
-            <a:br/>
-            <a:r>
-              <a:t>      &lt;/axis&gt;</a:t>
-            </a:r>
-            <a:br/>
-            <a:r>
-              <a:t>    &lt;/joint&gt;</a:t>
-            </a:r>
-            <a:br/>
-            <a:r>
-              <a:t>    </a:t>
-            </a:r>
-            <a:br/>
-            <a:r>
-              <a:t>    </a:t>
-            </a:r>
-            <a:br/>
-            <a:r>
-              <a:t>    &lt;joint name="right_wheel_joint" type="revolute"&gt;</a:t>
-            </a:r>
-            <a:br/>
-            <a:r>
-              <a:t>      &lt;parent&gt;base_link&lt;/parent&gt;</a:t>
-            </a:r>
-            <a:br/>
-            <a:r>
-              <a:t>      &lt;child&gt;right_wheel_link&lt;/child&gt;</a:t>
+              <a:t>        &lt;geometry&gt;</a:t>
+            </a:r>
+            <a:br/>
+            <a:r>
+              <a:t>          &lt;cylinder&gt;</a:t>
+            </a:r>
+            <a:br/>
+            <a:r>
+              <a:t>            &lt;radius&gt;0.08&lt;/radius&gt;</a:t>
+            </a:r>
+            <a:br/>
+            <a:r>
+              <a:t>            &lt;length&gt;0.05&lt;/length&gt;</a:t>
+            </a:r>
+            <a:br/>
+            <a:r>
+              <a:t>          &lt;/cylinder&gt;</a:t>
+            </a:r>
+            <a:br/>
+            <a:r>
+              <a:t>        &lt;/geometry&gt;</a:t>
+            </a:r>
+            <a:br/>
+            <a:r>
+              <a:t>        &lt;surface&gt;</a:t>
+            </a:r>
+            <a:br/>
+            <a:r>
+              <a:t>          &lt;friction&gt;</a:t>
+            </a:r>
+            <a:br/>
+            <a:r>
+              <a:t>            &lt;ode&gt;</a:t>
+            </a:r>
+            <a:br/>
+            <a:r>
+              <a:t>              &lt;mu&gt;1.0&lt;/mu&gt;</a:t>
+            </a:r>
+            <a:br/>
+            <a:r>
+              <a:t>              &lt;mu2&gt;1.0&lt;/mu2&gt;</a:t>
+            </a:r>
+            <a:br/>
+            <a:r>
+              <a:t>            &lt;/ode&gt;</a:t>
             </a:r>
           </a:p>
         </p:txBody>
@@ -12439,7 +12763,7 @@
         </p:nvSpPr>
         <p:spPr>
           <a:xfrm>
-            <a:off x="749808" y="6199632"/>
+            <a:off x="749808" y="6181344"/>
             <a:ext cx="10789920" cy="201168"/>
           </a:xfrm>
           <a:prstGeom prst="rect">
@@ -12465,7 +12789,7 @@
               </a:defRPr>
             </a:pPr>
             <a:r>
-              <a:t>파일 전체 11/21 · 이 슬라이드 다음에 같은 파일의 나머지 줄이 이어집니다.</a:t>
+              <a:t>파일 전체 11/24 · 이 슬라이드 다음에 같은 파일의 나머지 줄이 이어집니다.</a:t>
             </a:r>
           </a:p>
         </p:txBody>
@@ -12983,7 +13307,7 @@
               </a:defRPr>
             </a:pPr>
             <a:r>
-              <a:t>파일을 계속 작성하고 저장한다 (12/21)</a:t>
+              <a:t>파일을 계속 작성하고 저장한다 (12/24)</a:t>
             </a:r>
           </a:p>
         </p:txBody>
@@ -13158,7 +13482,7 @@
               </a:defRPr>
             </a:pPr>
             <a:r>
-              <a:t>현재 단계 14/24    |    현재 폴더 ~/agv_ws    |    현재 터미널</a:t>
+              <a:t>현재 단계 14/27    |    현재 폴더 ~/agv_ws    |    현재 터미널</a:t>
             </a:r>
           </a:p>
         </p:txBody>
@@ -13171,8 +13495,8 @@
         </p:nvSpPr>
         <p:spPr>
           <a:xfrm>
-            <a:off x="658368" y="1682496"/>
-            <a:ext cx="10972800" cy="347472"/>
+            <a:off x="658368" y="1627632"/>
+            <a:ext cx="10972800" cy="256032"/>
           </a:xfrm>
           <a:prstGeom prst="rect">
             <a:avLst/>
@@ -13189,7 +13513,7 @@
               <a:spcAft>
                 <a:spcPts val="0"/>
               </a:spcAft>
-              <a:defRPr sz="1700" b="1">
+              <a:defRPr sz="1500" b="1">
                 <a:solidFill>
                   <a:srgbClr val="122C4E"/>
                 </a:solidFill>
@@ -13210,8 +13534,8 @@
         </p:nvSpPr>
         <p:spPr>
           <a:xfrm>
-            <a:off x="658368" y="2103120"/>
-            <a:ext cx="10972800" cy="493776"/>
+            <a:off x="658368" y="1956816"/>
+            <a:ext cx="10972800" cy="603504"/>
           </a:xfrm>
           <a:prstGeom prst="rect">
             <a:avLst/>
@@ -13255,7 +13579,11 @@
               </a:defRPr>
             </a:pPr>
             <a:r>
-              <a:t>파일 생성/열기: mkdir -p ~/agv_ws/src/agv_gazebo/models/agv    &amp;&amp;    nano ~/agv_ws/src/agv_gazebo/models/agv/model.sdf</a:t>
+              <a:t>파일 생성: mkdir -p ~/agv_ws/src/agv_gazebo/models/agv</a:t>
+            </a:r>
+            <a:br/>
+            <a:r>
+              <a:t>파일 열기: nano ~/agv_ws/src/agv_gazebo/models/agv/model.sdf</a:t>
             </a:r>
           </a:p>
         </p:txBody>
@@ -13268,8 +13596,8 @@
         </p:nvSpPr>
         <p:spPr>
           <a:xfrm>
-            <a:off x="658368" y="2761488"/>
-            <a:ext cx="10972800" cy="3383280"/>
+            <a:off x="658368" y="2706624"/>
+            <a:ext cx="10972800" cy="3364992"/>
           </a:xfrm>
           <a:prstGeom prst="rect">
             <a:avLst/>
@@ -13313,6 +13641,42 @@
               </a:defRPr>
             </a:pPr>
             <a:r>
+              <a:t>          &lt;/friction&gt;</a:t>
+            </a:r>
+            <a:br/>
+            <a:r>
+              <a:t>        &lt;/surface&gt;</a:t>
+            </a:r>
+            <a:br/>
+            <a:r>
+              <a:t>      &lt;/collision&gt;</a:t>
+            </a:r>
+            <a:br/>
+            <a:r>
+              <a:t>    &lt;/link&gt;</a:t>
+            </a:r>
+            <a:br/>
+            <a:r>
+              <a:t>    </a:t>
+            </a:r>
+            <a:br/>
+            <a:r>
+              <a:t>    </a:t>
+            </a:r>
+            <a:br/>
+            <a:r>
+              <a:t>    &lt;joint name="left_wheel_joint" type="revolute"&gt;</a:t>
+            </a:r>
+            <a:br/>
+            <a:r>
+              <a:t>      &lt;parent&gt;base_link&lt;/parent&gt;</a:t>
+            </a:r>
+            <a:br/>
+            <a:r>
+              <a:t>      &lt;child&gt;left_wheel_link&lt;/child&gt;</a:t>
+            </a:r>
+            <a:br/>
+            <a:r>
               <a:t>      &lt;axis&gt;</a:t>
             </a:r>
             <a:br/>
@@ -13322,50 +13686,6 @@
             <a:br/>
             <a:r>
               <a:t>        &lt;limit&gt;</a:t>
-            </a:r>
-            <a:br/>
-            <a:r>
-              <a:t>          &lt;lower&gt;-1e16&lt;/lower&gt;</a:t>
-            </a:r>
-            <a:br/>
-            <a:r>
-              <a:t>          &lt;upper&gt;1e16&lt;/upper&gt;</a:t>
-            </a:r>
-            <a:br/>
-            <a:r>
-              <a:t>        &lt;/limit&gt;</a:t>
-            </a:r>
-            <a:br/>
-            <a:r>
-              <a:t>      &lt;/axis&gt;</a:t>
-            </a:r>
-            <a:br/>
-            <a:r>
-              <a:t>    &lt;/joint&gt;</a:t>
-            </a:r>
-            <a:br/>
-            <a:r>
-              <a:t>    </a:t>
-            </a:r>
-            <a:br/>
-            <a:r>
-              <a:t>    </a:t>
-            </a:r>
-            <a:br/>
-            <a:r>
-              <a:t>    &lt;link name="caster_link"&gt;</a:t>
-            </a:r>
-            <a:br/>
-            <a:r>
-              <a:t>      &lt;pose relative_to="base_link"&gt;-0.24 0 -0.12 0 0 0&lt;/pose&gt;</a:t>
-            </a:r>
-            <a:br/>
-            <a:r>
-              <a:t>      &lt;inertial&gt;</a:t>
-            </a:r>
-            <a:br/>
-            <a:r>
-              <a:t>        &lt;mass&gt;0.15&lt;/mass&gt;</a:t>
             </a:r>
           </a:p>
         </p:txBody>
@@ -13378,7 +13698,7 @@
         </p:nvSpPr>
         <p:spPr>
           <a:xfrm>
-            <a:off x="749808" y="6199632"/>
+            <a:off x="749808" y="6181344"/>
             <a:ext cx="10789920" cy="201168"/>
           </a:xfrm>
           <a:prstGeom prst="rect">
@@ -13404,7 +13724,7 @@
               </a:defRPr>
             </a:pPr>
             <a:r>
-              <a:t>파일 전체 12/21 · 이 슬라이드 다음에 같은 파일의 나머지 줄이 이어집니다.</a:t>
+              <a:t>파일 전체 12/24 · 이 슬라이드 다음에 같은 파일의 나머지 줄이 이어집니다.</a:t>
             </a:r>
           </a:p>
         </p:txBody>
@@ -13461,7 +13781,7 @@
               </a:defRPr>
             </a:pPr>
             <a:r>
-              <a:t>파일을 계속 작성하고 저장한다 (13/21)</a:t>
+              <a:t>파일을 계속 작성하고 저장한다 (13/24)</a:t>
             </a:r>
           </a:p>
         </p:txBody>
@@ -13636,7 +13956,7 @@
               </a:defRPr>
             </a:pPr>
             <a:r>
-              <a:t>현재 단계 15/24    |    현재 폴더 ~/agv_ws    |    현재 터미널</a:t>
+              <a:t>현재 단계 15/27    |    현재 폴더 ~/agv_ws    |    현재 터미널</a:t>
             </a:r>
           </a:p>
         </p:txBody>
@@ -13649,8 +13969,8 @@
         </p:nvSpPr>
         <p:spPr>
           <a:xfrm>
-            <a:off x="658368" y="1682496"/>
-            <a:ext cx="10972800" cy="347472"/>
+            <a:off x="658368" y="1627632"/>
+            <a:ext cx="10972800" cy="256032"/>
           </a:xfrm>
           <a:prstGeom prst="rect">
             <a:avLst/>
@@ -13667,7 +13987,7 @@
               <a:spcAft>
                 <a:spcPts val="0"/>
               </a:spcAft>
-              <a:defRPr sz="1700" b="1">
+              <a:defRPr sz="1500" b="1">
                 <a:solidFill>
                   <a:srgbClr val="122C4E"/>
                 </a:solidFill>
@@ -13688,8 +14008,8 @@
         </p:nvSpPr>
         <p:spPr>
           <a:xfrm>
-            <a:off x="658368" y="2103120"/>
-            <a:ext cx="10972800" cy="493776"/>
+            <a:off x="658368" y="1956816"/>
+            <a:ext cx="10972800" cy="603504"/>
           </a:xfrm>
           <a:prstGeom prst="rect">
             <a:avLst/>
@@ -13733,7 +14053,11 @@
               </a:defRPr>
             </a:pPr>
             <a:r>
-              <a:t>파일 생성/열기: mkdir -p ~/agv_ws/src/agv_gazebo/models/agv    &amp;&amp;    nano ~/agv_ws/src/agv_gazebo/models/agv/model.sdf</a:t>
+              <a:t>파일 생성: mkdir -p ~/agv_ws/src/agv_gazebo/models/agv</a:t>
+            </a:r>
+            <a:br/>
+            <a:r>
+              <a:t>파일 열기: nano ~/agv_ws/src/agv_gazebo/models/agv/model.sdf</a:t>
             </a:r>
           </a:p>
         </p:txBody>
@@ -13746,8 +14070,8 @@
         </p:nvSpPr>
         <p:spPr>
           <a:xfrm>
-            <a:off x="658368" y="2761488"/>
-            <a:ext cx="10972800" cy="3383280"/>
+            <a:off x="658368" y="2706624"/>
+            <a:ext cx="10972800" cy="3364992"/>
           </a:xfrm>
           <a:prstGeom prst="rect">
             <a:avLst/>
@@ -13791,59 +14115,51 @@
               </a:defRPr>
             </a:pPr>
             <a:r>
-              <a:t>        &lt;inertia&gt;</a:t>
-            </a:r>
-            <a:br/>
-            <a:r>
-              <a:t>          &lt;ixx&gt;0.0001&lt;/ixx&gt;</a:t>
-            </a:r>
-            <a:br/>
-            <a:r>
-              <a:t>          &lt;iyy&gt;0.0001&lt;/iyy&gt;</a:t>
-            </a:r>
-            <a:br/>
-            <a:r>
-              <a:t>          &lt;izz&gt;0.0001&lt;/izz&gt;</a:t>
-            </a:r>
-            <a:br/>
-            <a:r>
-              <a:t>        &lt;/inertia&gt;</a:t>
-            </a:r>
-            <a:br/>
-            <a:r>
-              <a:t>      &lt;/inertial&gt;</a:t>
-            </a:r>
-            <a:br/>
-            <a:r>
-              <a:t>      &lt;visual name="caster"&gt;</a:t>
-            </a:r>
-            <a:br/>
-            <a:r>
-              <a:t>        &lt;geometry&gt;</a:t>
-            </a:r>
-            <a:br/>
-            <a:r>
-              <a:t>          &lt;sphere&gt;</a:t>
-            </a:r>
-            <a:br/>
-            <a:r>
-              <a:t>            &lt;radius&gt;0.04&lt;/radius&gt;</a:t>
-            </a:r>
-            <a:br/>
-            <a:r>
-              <a:t>          &lt;/sphere&gt;</a:t>
-            </a:r>
-            <a:br/>
-            <a:r>
-              <a:t>        &lt;/geometry&gt;</a:t>
-            </a:r>
-            <a:br/>
-            <a:r>
-              <a:t>      &lt;/visual&gt;</a:t>
-            </a:r>
-            <a:br/>
-            <a:r>
-              <a:t>      &lt;collision name="caster_collision"&gt;</a:t>
+              <a:t>          &lt;lower&gt;-1e16&lt;/lower&gt;</a:t>
+            </a:r>
+            <a:br/>
+            <a:r>
+              <a:t>          &lt;upper&gt;1e16&lt;/upper&gt;</a:t>
+            </a:r>
+            <a:br/>
+            <a:r>
+              <a:t>        &lt;/limit&gt;</a:t>
+            </a:r>
+            <a:br/>
+            <a:r>
+              <a:t>      &lt;/axis&gt;</a:t>
+            </a:r>
+            <a:br/>
+            <a:r>
+              <a:t>    &lt;/joint&gt;</a:t>
+            </a:r>
+            <a:br/>
+            <a:r>
+              <a:t>    </a:t>
+            </a:r>
+            <a:br/>
+            <a:r>
+              <a:t>    </a:t>
+            </a:r>
+            <a:br/>
+            <a:r>
+              <a:t>    &lt;joint name="right_wheel_joint" type="revolute"&gt;</a:t>
+            </a:r>
+            <a:br/>
+            <a:r>
+              <a:t>      &lt;parent&gt;base_link&lt;/parent&gt;</a:t>
+            </a:r>
+            <a:br/>
+            <a:r>
+              <a:t>      &lt;child&gt;right_wheel_link&lt;/child&gt;</a:t>
+            </a:r>
+            <a:br/>
+            <a:r>
+              <a:t>      &lt;axis&gt;</a:t>
+            </a:r>
+            <a:br/>
+            <a:r>
+              <a:t>        &lt;xyz&gt;0 1 0&lt;/xyz&gt;</a:t>
             </a:r>
           </a:p>
         </p:txBody>
@@ -13856,7 +14172,7 @@
         </p:nvSpPr>
         <p:spPr>
           <a:xfrm>
-            <a:off x="749808" y="6199632"/>
+            <a:off x="749808" y="6181344"/>
             <a:ext cx="10789920" cy="201168"/>
           </a:xfrm>
           <a:prstGeom prst="rect">
@@ -13882,7 +14198,7 @@
               </a:defRPr>
             </a:pPr>
             <a:r>
-              <a:t>파일 전체 13/21 · 이 슬라이드 다음에 같은 파일의 나머지 줄이 이어집니다.</a:t>
+              <a:t>파일 전체 13/24 · 이 슬라이드 다음에 같은 파일의 나머지 줄이 이어집니다.</a:t>
             </a:r>
           </a:p>
         </p:txBody>
@@ -13939,7 +14255,7 @@
               </a:defRPr>
             </a:pPr>
             <a:r>
-              <a:t>파일을 계속 작성하고 저장한다 (14/21)</a:t>
+              <a:t>파일을 계속 작성하고 저장한다 (14/24)</a:t>
             </a:r>
           </a:p>
         </p:txBody>
@@ -14114,7 +14430,7 @@
               </a:defRPr>
             </a:pPr>
             <a:r>
-              <a:t>현재 단계 16/24    |    현재 폴더 ~/agv_ws    |    현재 터미널</a:t>
+              <a:t>현재 단계 16/27    |    현재 폴더 ~/agv_ws    |    현재 터미널</a:t>
             </a:r>
           </a:p>
         </p:txBody>
@@ -14127,8 +14443,8 @@
         </p:nvSpPr>
         <p:spPr>
           <a:xfrm>
-            <a:off x="658368" y="1682496"/>
-            <a:ext cx="10972800" cy="347472"/>
+            <a:off x="658368" y="1627632"/>
+            <a:ext cx="10972800" cy="256032"/>
           </a:xfrm>
           <a:prstGeom prst="rect">
             <a:avLst/>
@@ -14145,7 +14461,7 @@
               <a:spcAft>
                 <a:spcPts val="0"/>
               </a:spcAft>
-              <a:defRPr sz="1700" b="1">
+              <a:defRPr sz="1500" b="1">
                 <a:solidFill>
                   <a:srgbClr val="122C4E"/>
                 </a:solidFill>
@@ -14166,8 +14482,8 @@
         </p:nvSpPr>
         <p:spPr>
           <a:xfrm>
-            <a:off x="658368" y="2103120"/>
-            <a:ext cx="10972800" cy="493776"/>
+            <a:off x="658368" y="1956816"/>
+            <a:ext cx="10972800" cy="603504"/>
           </a:xfrm>
           <a:prstGeom prst="rect">
             <a:avLst/>
@@ -14211,7 +14527,11 @@
               </a:defRPr>
             </a:pPr>
             <a:r>
-              <a:t>파일 생성/열기: mkdir -p ~/agv_ws/src/agv_gazebo/models/agv    &amp;&amp;    nano ~/agv_ws/src/agv_gazebo/models/agv/model.sdf</a:t>
+              <a:t>파일 생성: mkdir -p ~/agv_ws/src/agv_gazebo/models/agv</a:t>
+            </a:r>
+            <a:br/>
+            <a:r>
+              <a:t>파일 열기: nano ~/agv_ws/src/agv_gazebo/models/agv/model.sdf</a:t>
             </a:r>
           </a:p>
         </p:txBody>
@@ -14224,8 +14544,8 @@
         </p:nvSpPr>
         <p:spPr>
           <a:xfrm>
-            <a:off x="658368" y="2761488"/>
-            <a:ext cx="10972800" cy="3383280"/>
+            <a:off x="658368" y="2706624"/>
+            <a:ext cx="10972800" cy="3364992"/>
           </a:xfrm>
           <a:prstGeom prst="rect">
             <a:avLst/>
@@ -14269,31 +14589,27 @@
               </a:defRPr>
             </a:pPr>
             <a:r>
-              <a:t>        &lt;geometry&gt;</a:t>
-            </a:r>
-            <a:br/>
-            <a:r>
-              <a:t>          &lt;sphere&gt;</a:t>
-            </a:r>
-            <a:br/>
-            <a:r>
-              <a:t>            &lt;radius&gt;0.04&lt;/radius&gt;</a:t>
-            </a:r>
-            <a:br/>
-            <a:r>
-              <a:t>          &lt;/sphere&gt;</a:t>
-            </a:r>
-            <a:br/>
-            <a:r>
-              <a:t>        &lt;/geometry&gt;</a:t>
-            </a:r>
-            <a:br/>
-            <a:r>
-              <a:t>      &lt;/collision&gt;</a:t>
-            </a:r>
-            <a:br/>
-            <a:r>
-              <a:t>    &lt;/link&gt;</a:t>
+              <a:t>        &lt;limit&gt;</a:t>
+            </a:r>
+            <a:br/>
+            <a:r>
+              <a:t>          &lt;lower&gt;-1e16&lt;/lower&gt;</a:t>
+            </a:r>
+            <a:br/>
+            <a:r>
+              <a:t>          &lt;upper&gt;1e16&lt;/upper&gt;</a:t>
+            </a:r>
+            <a:br/>
+            <a:r>
+              <a:t>        &lt;/limit&gt;</a:t>
+            </a:r>
+            <a:br/>
+            <a:r>
+              <a:t>      &lt;/axis&gt;</a:t>
+            </a:r>
+            <a:br/>
+            <a:r>
+              <a:t>    &lt;/joint&gt;</a:t>
             </a:r>
             <a:br/>
             <a:r>
@@ -14305,23 +14621,19 @@
             </a:r>
             <a:br/>
             <a:r>
-              <a:t>    &lt;joint name="caster_joint" type="fixed"&gt;</a:t>
-            </a:r>
-            <a:br/>
-            <a:r>
-              <a:t>      &lt;parent&gt;base_link&lt;/parent&gt;</a:t>
-            </a:r>
-            <a:br/>
-            <a:r>
-              <a:t>      &lt;child&gt;caster_link&lt;/child&gt;</a:t>
-            </a:r>
-            <a:br/>
-            <a:r>
-              <a:t>    &lt;/joint&gt;</a:t>
-            </a:r>
-            <a:br/>
-            <a:r>
-              <a:t>    </a:t>
+              <a:t>    &lt;link name="caster_link"&gt;</a:t>
+            </a:r>
+            <a:br/>
+            <a:r>
+              <a:t>      &lt;pose relative_to="base_link"&gt;-0.24 0 -0.12 0 0 0&lt;/pose&gt;</a:t>
+            </a:r>
+            <a:br/>
+            <a:r>
+              <a:t>      &lt;inertial&gt;</a:t>
+            </a:r>
+            <a:br/>
+            <a:r>
+              <a:t>        &lt;mass&gt;0.15&lt;/mass&gt;</a:t>
             </a:r>
           </a:p>
         </p:txBody>
@@ -14334,7 +14646,7 @@
         </p:nvSpPr>
         <p:spPr>
           <a:xfrm>
-            <a:off x="749808" y="6199632"/>
+            <a:off x="749808" y="6181344"/>
             <a:ext cx="10789920" cy="201168"/>
           </a:xfrm>
           <a:prstGeom prst="rect">
@@ -14360,7 +14672,7 @@
               </a:defRPr>
             </a:pPr>
             <a:r>
-              <a:t>파일 전체 14/21 · 이 슬라이드 다음에 같은 파일의 나머지 줄이 이어집니다.</a:t>
+              <a:t>파일 전체 14/24 · 이 슬라이드 다음에 같은 파일의 나머지 줄이 이어집니다.</a:t>
             </a:r>
           </a:p>
         </p:txBody>
@@ -14417,7 +14729,7 @@
               </a:defRPr>
             </a:pPr>
             <a:r>
-              <a:t>파일을 계속 작성하고 저장한다 (15/21)</a:t>
+              <a:t>파일을 계속 작성하고 저장한다 (15/24)</a:t>
             </a:r>
           </a:p>
         </p:txBody>
@@ -14592,7 +14904,7 @@
               </a:defRPr>
             </a:pPr>
             <a:r>
-              <a:t>현재 단계 17/24    |    현재 폴더 ~/agv_ws    |    현재 터미널</a:t>
+              <a:t>현재 단계 17/27    |    현재 폴더 ~/agv_ws    |    현재 터미널</a:t>
             </a:r>
           </a:p>
         </p:txBody>
@@ -14605,8 +14917,8 @@
         </p:nvSpPr>
         <p:spPr>
           <a:xfrm>
-            <a:off x="658368" y="1682496"/>
-            <a:ext cx="10972800" cy="347472"/>
+            <a:off x="658368" y="1627632"/>
+            <a:ext cx="10972800" cy="256032"/>
           </a:xfrm>
           <a:prstGeom prst="rect">
             <a:avLst/>
@@ -14623,7 +14935,7 @@
               <a:spcAft>
                 <a:spcPts val="0"/>
               </a:spcAft>
-              <a:defRPr sz="1700" b="1">
+              <a:defRPr sz="1500" b="1">
                 <a:solidFill>
                   <a:srgbClr val="122C4E"/>
                 </a:solidFill>
@@ -14644,8 +14956,8 @@
         </p:nvSpPr>
         <p:spPr>
           <a:xfrm>
-            <a:off x="658368" y="2103120"/>
-            <a:ext cx="10972800" cy="493776"/>
+            <a:off x="658368" y="1956816"/>
+            <a:ext cx="10972800" cy="603504"/>
           </a:xfrm>
           <a:prstGeom prst="rect">
             <a:avLst/>
@@ -14689,7 +15001,11 @@
               </a:defRPr>
             </a:pPr>
             <a:r>
-              <a:t>파일 생성/열기: mkdir -p ~/agv_ws/src/agv_gazebo/models/agv    &amp;&amp;    nano ~/agv_ws/src/agv_gazebo/models/agv/model.sdf</a:t>
+              <a:t>파일 생성: mkdir -p ~/agv_ws/src/agv_gazebo/models/agv</a:t>
+            </a:r>
+            <a:br/>
+            <a:r>
+              <a:t>파일 열기: nano ~/agv_ws/src/agv_gazebo/models/agv/model.sdf</a:t>
             </a:r>
           </a:p>
         </p:txBody>
@@ -14702,8 +15018,8 @@
         </p:nvSpPr>
         <p:spPr>
           <a:xfrm>
-            <a:off x="658368" y="2761488"/>
-            <a:ext cx="10972800" cy="3383280"/>
+            <a:off x="658368" y="2706624"/>
+            <a:ext cx="10972800" cy="3364992"/>
           </a:xfrm>
           <a:prstGeom prst="rect">
             <a:avLst/>
@@ -14747,19 +15063,31 @@
               </a:defRPr>
             </a:pPr>
             <a:r>
-              <a:t>    </a:t>
-            </a:r>
-            <a:br/>
-            <a:r>
-              <a:t>    &lt;link name="lidar_link"&gt;</a:t>
-            </a:r>
-            <a:br/>
-            <a:r>
-              <a:t>      &lt;pose relative_to="base_link"&gt;0.12 0 0.13 0 0 0&lt;/pose&gt;</a:t>
-            </a:r>
-            <a:br/>
-            <a:r>
-              <a:t>      &lt;visual name="housing"&gt;</a:t>
+              <a:t>        &lt;inertia&gt;</a:t>
+            </a:r>
+            <a:br/>
+            <a:r>
+              <a:t>          &lt;ixx&gt;0.0001&lt;/ixx&gt;</a:t>
+            </a:r>
+            <a:br/>
+            <a:r>
+              <a:t>          &lt;iyy&gt;0.0001&lt;/iyy&gt;</a:t>
+            </a:r>
+            <a:br/>
+            <a:r>
+              <a:t>          &lt;izz&gt;0.0001&lt;/izz&gt;</a:t>
+            </a:r>
+            <a:br/>
+            <a:r>
+              <a:t>        &lt;/inertia&gt;</a:t>
+            </a:r>
+            <a:br/>
+            <a:r>
+              <a:t>      &lt;/inertial&gt;</a:t>
+            </a:r>
+            <a:br/>
+            <a:r>
+              <a:t>      &lt;visual name="caster"&gt;</a:t>
             </a:r>
             <a:br/>
             <a:r>
@@ -14767,39 +15095,19 @@
             </a:r>
             <a:br/>
             <a:r>
-              <a:t>          &lt;cylinder&gt;</a:t>
-            </a:r>
-            <a:br/>
-            <a:r>
-              <a:t>            &lt;radius&gt;0.045&lt;/radius&gt;</a:t>
-            </a:r>
-            <a:br/>
-            <a:r>
-              <a:t>            &lt;length&gt;0.05&lt;/length&gt;</a:t>
-            </a:r>
-            <a:br/>
-            <a:r>
-              <a:t>          &lt;/cylinder&gt;</a:t>
+              <a:t>          &lt;sphere&gt;</a:t>
+            </a:r>
+            <a:br/>
+            <a:r>
+              <a:t>            &lt;radius&gt;0.04&lt;/radius&gt;</a:t>
+            </a:r>
+            <a:br/>
+            <a:r>
+              <a:t>          &lt;/sphere&gt;</a:t>
             </a:r>
             <a:br/>
             <a:r>
               <a:t>        &lt;/geometry&gt;</a:t>
-            </a:r>
-            <a:br/>
-            <a:r>
-              <a:t>      &lt;/visual&gt;</a:t>
-            </a:r>
-            <a:br/>
-            <a:r>
-              <a:t>      &lt;sensor name="lidar" type="gpu_lidar"&gt;</a:t>
-            </a:r>
-            <a:br/>
-            <a:r>
-              <a:t>        &lt;topic&gt;/scan&lt;/topic&gt;</a:t>
-            </a:r>
-            <a:br/>
-            <a:r>
-              <a:t>        &lt;always_on&gt;true&lt;/always_on&gt;</a:t>
             </a:r>
           </a:p>
         </p:txBody>
@@ -14812,7 +15120,7 @@
         </p:nvSpPr>
         <p:spPr>
           <a:xfrm>
-            <a:off x="749808" y="6199632"/>
+            <a:off x="749808" y="6181344"/>
             <a:ext cx="10789920" cy="201168"/>
           </a:xfrm>
           <a:prstGeom prst="rect">
@@ -14838,7 +15146,7 @@
               </a:defRPr>
             </a:pPr>
             <a:r>
-              <a:t>파일 전체 15/21 · 이 슬라이드 다음에 같은 파일의 나머지 줄이 이어집니다.</a:t>
+              <a:t>파일 전체 15/24 · 이 슬라이드 다음에 같은 파일의 나머지 줄이 이어집니다.</a:t>
             </a:r>
           </a:p>
         </p:txBody>
@@ -14895,7 +15203,7 @@
               </a:defRPr>
             </a:pPr>
             <a:r>
-              <a:t>파일을 계속 작성하고 저장한다 (16/21)</a:t>
+              <a:t>파일을 계속 작성하고 저장한다 (16/24)</a:t>
             </a:r>
           </a:p>
         </p:txBody>
@@ -15070,7 +15378,7 @@
               </a:defRPr>
             </a:pPr>
             <a:r>
-              <a:t>현재 단계 18/24    |    현재 폴더 ~/agv_ws    |    현재 터미널</a:t>
+              <a:t>현재 단계 18/27    |    현재 폴더 ~/agv_ws    |    현재 터미널</a:t>
             </a:r>
           </a:p>
         </p:txBody>
@@ -15083,8 +15391,8 @@
         </p:nvSpPr>
         <p:spPr>
           <a:xfrm>
-            <a:off x="658368" y="1682496"/>
-            <a:ext cx="10972800" cy="347472"/>
+            <a:off x="658368" y="1627632"/>
+            <a:ext cx="10972800" cy="256032"/>
           </a:xfrm>
           <a:prstGeom prst="rect">
             <a:avLst/>
@@ -15101,7 +15409,7 @@
               <a:spcAft>
                 <a:spcPts val="0"/>
               </a:spcAft>
-              <a:defRPr sz="1700" b="1">
+              <a:defRPr sz="1500" b="1">
                 <a:solidFill>
                   <a:srgbClr val="122C4E"/>
                 </a:solidFill>
@@ -15122,8 +15430,8 @@
         </p:nvSpPr>
         <p:spPr>
           <a:xfrm>
-            <a:off x="658368" y="2103120"/>
-            <a:ext cx="10972800" cy="493776"/>
+            <a:off x="658368" y="1956816"/>
+            <a:ext cx="10972800" cy="603504"/>
           </a:xfrm>
           <a:prstGeom prst="rect">
             <a:avLst/>
@@ -15167,7 +15475,11 @@
               </a:defRPr>
             </a:pPr>
             <a:r>
-              <a:t>파일 생성/열기: mkdir -p ~/agv_ws/src/agv_gazebo/models/agv    &amp;&amp;    nano ~/agv_ws/src/agv_gazebo/models/agv/model.sdf</a:t>
+              <a:t>파일 생성: mkdir -p ~/agv_ws/src/agv_gazebo/models/agv</a:t>
+            </a:r>
+            <a:br/>
+            <a:r>
+              <a:t>파일 열기: nano ~/agv_ws/src/agv_gazebo/models/agv/model.sdf</a:t>
             </a:r>
           </a:p>
         </p:txBody>
@@ -15180,8 +15492,8 @@
         </p:nvSpPr>
         <p:spPr>
           <a:xfrm>
-            <a:off x="658368" y="2761488"/>
-            <a:ext cx="10972800" cy="3383280"/>
+            <a:off x="658368" y="2706624"/>
+            <a:ext cx="10972800" cy="3364992"/>
           </a:xfrm>
           <a:prstGeom prst="rect">
             <a:avLst/>
@@ -15225,59 +15537,51 @@
               </a:defRPr>
             </a:pPr>
             <a:r>
-              <a:t>        &lt;update_rate&gt;10&lt;/update_rate&gt;</a:t>
-            </a:r>
-            <a:br/>
-            <a:r>
-              <a:t>        &lt;visualize&gt;false&lt;/visualize&gt;</a:t>
-            </a:r>
-            <a:br/>
-            <a:r>
-              <a:t>        &lt;lidar&gt;</a:t>
-            </a:r>
-            <a:br/>
-            <a:r>
-              <a:t>          &lt;scan&gt;</a:t>
-            </a:r>
-            <a:br/>
-            <a:r>
-              <a:t>            &lt;horizontal&gt;</a:t>
-            </a:r>
-            <a:br/>
-            <a:r>
-              <a:t>              &lt;samples&gt;720&lt;/samples&gt;</a:t>
-            </a:r>
-            <a:br/>
-            <a:r>
-              <a:t>              &lt;resolution&gt;1&lt;/resolution&gt;</a:t>
-            </a:r>
-            <a:br/>
-            <a:r>
-              <a:t>              &lt;min_angle&gt;-3.14159&lt;/min_angle&gt;</a:t>
-            </a:r>
-            <a:br/>
-            <a:r>
-              <a:t>              &lt;max_angle&gt;3.14159&lt;/max_angle&gt;</a:t>
-            </a:r>
-            <a:br/>
-            <a:r>
-              <a:t>            &lt;/horizontal&gt;</a:t>
-            </a:r>
-            <a:br/>
-            <a:r>
-              <a:t>          &lt;/scan&gt;</a:t>
-            </a:r>
-            <a:br/>
-            <a:r>
-              <a:t>          &lt;range&gt;</a:t>
-            </a:r>
-            <a:br/>
-            <a:r>
-              <a:t>            &lt;min&gt;0.12&lt;/min&gt;</a:t>
-            </a:r>
-            <a:br/>
-            <a:r>
-              <a:t>            &lt;max&gt;12.0&lt;/max&gt;</a:t>
+              <a:t>      &lt;/visual&gt;</a:t>
+            </a:r>
+            <a:br/>
+            <a:r>
+              <a:t>      &lt;collision name="caster_collision"&gt;</a:t>
+            </a:r>
+            <a:br/>
+            <a:r>
+              <a:t>        &lt;geometry&gt;</a:t>
+            </a:r>
+            <a:br/>
+            <a:r>
+              <a:t>          &lt;sphere&gt;</a:t>
+            </a:r>
+            <a:br/>
+            <a:r>
+              <a:t>            &lt;radius&gt;0.04&lt;/radius&gt;</a:t>
+            </a:r>
+            <a:br/>
+            <a:r>
+              <a:t>          &lt;/sphere&gt;</a:t>
+            </a:r>
+            <a:br/>
+            <a:r>
+              <a:t>        &lt;/geometry&gt;</a:t>
+            </a:r>
+            <a:br/>
+            <a:r>
+              <a:t>      &lt;/collision&gt;</a:t>
+            </a:r>
+            <a:br/>
+            <a:r>
+              <a:t>    &lt;/link&gt;</a:t>
+            </a:r>
+            <a:br/>
+            <a:r>
+              <a:t>    </a:t>
+            </a:r>
+            <a:br/>
+            <a:r>
+              <a:t>    </a:t>
+            </a:r>
+            <a:br/>
+            <a:r>
+              <a:t>    &lt;joint name="caster_joint" type="fixed"&gt;</a:t>
             </a:r>
           </a:p>
         </p:txBody>
@@ -15290,7 +15594,7 @@
         </p:nvSpPr>
         <p:spPr>
           <a:xfrm>
-            <a:off x="749808" y="6199632"/>
+            <a:off x="749808" y="6181344"/>
             <a:ext cx="10789920" cy="201168"/>
           </a:xfrm>
           <a:prstGeom prst="rect">
@@ -15316,7 +15620,7 @@
               </a:defRPr>
             </a:pPr>
             <a:r>
-              <a:t>파일 전체 16/21 · 이 슬라이드 다음에 같은 파일의 나머지 줄이 이어집니다.</a:t>
+              <a:t>파일 전체 16/24 · 이 슬라이드 다음에 같은 파일의 나머지 줄이 이어집니다.</a:t>
             </a:r>
           </a:p>
         </p:txBody>
@@ -15373,7 +15677,7 @@
               </a:defRPr>
             </a:pPr>
             <a:r>
-              <a:t>파일을 계속 작성하고 저장한다 (17/21)</a:t>
+              <a:t>파일을 계속 작성하고 저장한다 (17/24)</a:t>
             </a:r>
           </a:p>
         </p:txBody>
@@ -15548,7 +15852,7 @@
               </a:defRPr>
             </a:pPr>
             <a:r>
-              <a:t>현재 단계 19/24    |    현재 폴더 ~/agv_ws    |    현재 터미널</a:t>
+              <a:t>현재 단계 19/27    |    현재 폴더 ~/agv_ws    |    현재 터미널</a:t>
             </a:r>
           </a:p>
         </p:txBody>
@@ -15561,8 +15865,8 @@
         </p:nvSpPr>
         <p:spPr>
           <a:xfrm>
-            <a:off x="658368" y="1682496"/>
-            <a:ext cx="10972800" cy="347472"/>
+            <a:off x="658368" y="1627632"/>
+            <a:ext cx="10972800" cy="256032"/>
           </a:xfrm>
           <a:prstGeom prst="rect">
             <a:avLst/>
@@ -15579,7 +15883,7 @@
               <a:spcAft>
                 <a:spcPts val="0"/>
               </a:spcAft>
-              <a:defRPr sz="1700" b="1">
+              <a:defRPr sz="1500" b="1">
                 <a:solidFill>
                   <a:srgbClr val="122C4E"/>
                 </a:solidFill>
@@ -15600,8 +15904,8 @@
         </p:nvSpPr>
         <p:spPr>
           <a:xfrm>
-            <a:off x="658368" y="2103120"/>
-            <a:ext cx="10972800" cy="493776"/>
+            <a:off x="658368" y="1956816"/>
+            <a:ext cx="10972800" cy="603504"/>
           </a:xfrm>
           <a:prstGeom prst="rect">
             <a:avLst/>
@@ -15645,7 +15949,11 @@
               </a:defRPr>
             </a:pPr>
             <a:r>
-              <a:t>파일 생성/열기: mkdir -p ~/agv_ws/src/agv_gazebo/models/agv    &amp;&amp;    nano ~/agv_ws/src/agv_gazebo/models/agv/model.sdf</a:t>
+              <a:t>파일 생성: mkdir -p ~/agv_ws/src/agv_gazebo/models/agv</a:t>
+            </a:r>
+            <a:br/>
+            <a:r>
+              <a:t>파일 열기: nano ~/agv_ws/src/agv_gazebo/models/agv/model.sdf</a:t>
             </a:r>
           </a:p>
         </p:txBody>
@@ -15658,8 +15966,8 @@
         </p:nvSpPr>
         <p:spPr>
           <a:xfrm>
-            <a:off x="658368" y="2761488"/>
-            <a:ext cx="10972800" cy="3383280"/>
+            <a:off x="658368" y="2706624"/>
+            <a:ext cx="10972800" cy="3364992"/>
           </a:xfrm>
           <a:prstGeom prst="rect">
             <a:avLst/>
@@ -15703,23 +16011,15 @@
               </a:defRPr>
             </a:pPr>
             <a:r>
-              <a:t>            &lt;resolution&gt;0.01&lt;/resolution&gt;</a:t>
-            </a:r>
-            <a:br/>
-            <a:r>
-              <a:t>          &lt;/range&gt;</a:t>
-            </a:r>
-            <a:br/>
-            <a:r>
-              <a:t>        &lt;/lidar&gt;</a:t>
-            </a:r>
-            <a:br/>
-            <a:r>
-              <a:t>      &lt;/sensor&gt;</a:t>
-            </a:r>
-            <a:br/>
-            <a:r>
-              <a:t>    &lt;/link&gt;</a:t>
+              <a:t>      &lt;parent&gt;base_link&lt;/parent&gt;</a:t>
+            </a:r>
+            <a:br/>
+            <a:r>
+              <a:t>      &lt;child&gt;caster_link&lt;/child&gt;</a:t>
+            </a:r>
+            <a:br/>
+            <a:r>
+              <a:t>    &lt;/joint&gt;</a:t>
             </a:r>
             <a:br/>
             <a:r>
@@ -15731,31 +16031,31 @@
             </a:r>
             <a:br/>
             <a:r>
-              <a:t>    &lt;joint name="lidar_joint" type="fixed"&gt;</a:t>
-            </a:r>
-            <a:br/>
-            <a:r>
-              <a:t>      &lt;parent&gt;base_link&lt;/parent&gt;</a:t>
-            </a:r>
-            <a:br/>
-            <a:r>
-              <a:t>      &lt;child&gt;lidar_link&lt;/child&gt;</a:t>
-            </a:r>
-            <a:br/>
-            <a:r>
-              <a:t>    &lt;/joint&gt;</a:t>
-            </a:r>
-            <a:br/>
-            <a:r>
-              <a:t>    </a:t>
-            </a:r>
-            <a:br/>
-            <a:r>
-              <a:t>    </a:t>
-            </a:r>
-            <a:br/>
-            <a:r>
-              <a:t>    &lt;link name="camera_link"&gt;</a:t>
+              <a:t>    &lt;link name="lidar_link"&gt;</a:t>
+            </a:r>
+            <a:br/>
+            <a:r>
+              <a:t>      &lt;pose relative_to="base_link"&gt;0.12 0 0.13 0 0 0&lt;/pose&gt;</a:t>
+            </a:r>
+            <a:br/>
+            <a:r>
+              <a:t>      &lt;visual name="housing"&gt;</a:t>
+            </a:r>
+            <a:br/>
+            <a:r>
+              <a:t>        &lt;geometry&gt;</a:t>
+            </a:r>
+            <a:br/>
+            <a:r>
+              <a:t>          &lt;cylinder&gt;</a:t>
+            </a:r>
+            <a:br/>
+            <a:r>
+              <a:t>            &lt;radius&gt;0.045&lt;/radius&gt;</a:t>
+            </a:r>
+            <a:br/>
+            <a:r>
+              <a:t>            &lt;length&gt;0.05&lt;/length&gt;</a:t>
             </a:r>
           </a:p>
         </p:txBody>
@@ -15768,7 +16068,7 @@
         </p:nvSpPr>
         <p:spPr>
           <a:xfrm>
-            <a:off x="749808" y="6199632"/>
+            <a:off x="749808" y="6181344"/>
             <a:ext cx="10789920" cy="201168"/>
           </a:xfrm>
           <a:prstGeom prst="rect">
@@ -15794,7 +16094,7 @@
               </a:defRPr>
             </a:pPr>
             <a:r>
-              <a:t>파일 전체 17/21 · 이 슬라이드 다음에 같은 파일의 나머지 줄이 이어집니다.</a:t>
+              <a:t>파일 전체 17/24 · 이 슬라이드 다음에 같은 파일의 나머지 줄이 이어집니다.</a:t>
             </a:r>
           </a:p>
         </p:txBody>
@@ -15851,7 +16151,7 @@
               </a:defRPr>
             </a:pPr>
             <a:r>
-              <a:t>파일을 계속 작성하고 저장한다 (18/21)</a:t>
+              <a:t>파일을 계속 작성하고 저장한다 (18/24)</a:t>
             </a:r>
           </a:p>
         </p:txBody>
@@ -16026,7 +16326,7 @@
               </a:defRPr>
             </a:pPr>
             <a:r>
-              <a:t>현재 단계 20/24    |    현재 폴더 ~/agv_ws    |    현재 터미널</a:t>
+              <a:t>현재 단계 20/27    |    현재 폴더 ~/agv_ws    |    현재 터미널</a:t>
             </a:r>
           </a:p>
         </p:txBody>
@@ -16039,8 +16339,8 @@
         </p:nvSpPr>
         <p:spPr>
           <a:xfrm>
-            <a:off x="658368" y="1682496"/>
-            <a:ext cx="10972800" cy="347472"/>
+            <a:off x="658368" y="1627632"/>
+            <a:ext cx="10972800" cy="256032"/>
           </a:xfrm>
           <a:prstGeom prst="rect">
             <a:avLst/>
@@ -16057,7 +16357,7 @@
               <a:spcAft>
                 <a:spcPts val="0"/>
               </a:spcAft>
-              <a:defRPr sz="1700" b="1">
+              <a:defRPr sz="1500" b="1">
                 <a:solidFill>
                   <a:srgbClr val="122C4E"/>
                 </a:solidFill>
@@ -16078,8 +16378,8 @@
         </p:nvSpPr>
         <p:spPr>
           <a:xfrm>
-            <a:off x="658368" y="2103120"/>
-            <a:ext cx="10972800" cy="493776"/>
+            <a:off x="658368" y="1956816"/>
+            <a:ext cx="10972800" cy="603504"/>
           </a:xfrm>
           <a:prstGeom prst="rect">
             <a:avLst/>
@@ -16123,7 +16423,11 @@
               </a:defRPr>
             </a:pPr>
             <a:r>
-              <a:t>파일 생성/열기: mkdir -p ~/agv_ws/src/agv_gazebo/models/agv    &amp;&amp;    nano ~/agv_ws/src/agv_gazebo/models/agv/model.sdf</a:t>
+              <a:t>파일 생성: mkdir -p ~/agv_ws/src/agv_gazebo/models/agv</a:t>
+            </a:r>
+            <a:br/>
+            <a:r>
+              <a:t>파일 열기: nano ~/agv_ws/src/agv_gazebo/models/agv/model.sdf</a:t>
             </a:r>
           </a:p>
         </p:txBody>
@@ -16136,8 +16440,8 @@
         </p:nvSpPr>
         <p:spPr>
           <a:xfrm>
-            <a:off x="658368" y="2761488"/>
-            <a:ext cx="10972800" cy="3383280"/>
+            <a:off x="658368" y="2706624"/>
+            <a:ext cx="10972800" cy="3364992"/>
           </a:xfrm>
           <a:prstGeom prst="rect">
             <a:avLst/>
@@ -16181,27 +16485,7 @@
               </a:defRPr>
             </a:pPr>
             <a:r>
-              <a:t>      &lt;pose relative_to="base_link"&gt;0.30 0 0.10 0 0 0&lt;/pose&gt;</a:t>
-            </a:r>
-            <a:br/>
-            <a:r>
-              <a:t>      &lt;visual name="housing"&gt;</a:t>
-            </a:r>
-            <a:br/>
-            <a:r>
-              <a:t>        &lt;geometry&gt;</a:t>
-            </a:r>
-            <a:br/>
-            <a:r>
-              <a:t>          &lt;box&gt;</a:t>
-            </a:r>
-            <a:br/>
-            <a:r>
-              <a:t>            &lt;size&gt;0.05 0.08 0.05&lt;/size&gt;</a:t>
-            </a:r>
-            <a:br/>
-            <a:r>
-              <a:t>          &lt;/box&gt;</a:t>
+              <a:t>          &lt;/cylinder&gt;</a:t>
             </a:r>
             <a:br/>
             <a:r>
@@ -16213,11 +16497,11 @@
             </a:r>
             <a:br/>
             <a:r>
-              <a:t>      &lt;sensor name="camera" type="camera"&gt;</a:t>
-            </a:r>
-            <a:br/>
-            <a:r>
-              <a:t>        &lt;topic&gt;/camera/image_raw&lt;/topic&gt;</a:t>
+              <a:t>      &lt;sensor name="lidar" type="gpu_lidar"&gt;</a:t>
+            </a:r>
+            <a:br/>
+            <a:r>
+              <a:t>        &lt;topic&gt;/scan&lt;/topic&gt;</a:t>
             </a:r>
             <a:br/>
             <a:r>
@@ -16225,15 +16509,27 @@
             </a:r>
             <a:br/>
             <a:r>
-              <a:t>        &lt;update_rate&gt;15&lt;/update_rate&gt;</a:t>
-            </a:r>
-            <a:br/>
-            <a:r>
-              <a:t>        &lt;camera&gt;</a:t>
-            </a:r>
-            <a:br/>
-            <a:r>
-              <a:t>          &lt;horizontal_fov&gt;1.047&lt;/horizontal_fov&gt;</a:t>
+              <a:t>        &lt;update_rate&gt;10&lt;/update_rate&gt;</a:t>
+            </a:r>
+            <a:br/>
+            <a:r>
+              <a:t>        &lt;visualize&gt;false&lt;/visualize&gt;</a:t>
+            </a:r>
+            <a:br/>
+            <a:r>
+              <a:t>        &lt;lidar&gt;</a:t>
+            </a:r>
+            <a:br/>
+            <a:r>
+              <a:t>          &lt;scan&gt;</a:t>
+            </a:r>
+            <a:br/>
+            <a:r>
+              <a:t>            &lt;horizontal&gt;</a:t>
+            </a:r>
+            <a:br/>
+            <a:r>
+              <a:t>              &lt;samples&gt;720&lt;/samples&gt;</a:t>
             </a:r>
           </a:p>
         </p:txBody>
@@ -16246,7 +16542,7 @@
         </p:nvSpPr>
         <p:spPr>
           <a:xfrm>
-            <a:off x="749808" y="6199632"/>
+            <a:off x="749808" y="6181344"/>
             <a:ext cx="10789920" cy="201168"/>
           </a:xfrm>
           <a:prstGeom prst="rect">
@@ -16272,7 +16568,7 @@
               </a:defRPr>
             </a:pPr>
             <a:r>
-              <a:t>파일 전체 18/21 · 이 슬라이드 다음에 같은 파일의 나머지 줄이 이어집니다.</a:t>
+              <a:t>파일 전체 18/24 · 이 슬라이드 다음에 같은 파일의 나머지 줄이 이어집니다.</a:t>
             </a:r>
           </a:p>
         </p:txBody>
@@ -16329,7 +16625,7 @@
               </a:defRPr>
             </a:pPr>
             <a:r>
-              <a:t>파일을 계속 작성하고 저장한다 (19/21)</a:t>
+              <a:t>파일을 계속 작성하고 저장한다 (19/24)</a:t>
             </a:r>
           </a:p>
         </p:txBody>
@@ -16504,7 +16800,7 @@
               </a:defRPr>
             </a:pPr>
             <a:r>
-              <a:t>현재 단계 21/24    |    현재 폴더 ~/agv_ws    |    현재 터미널</a:t>
+              <a:t>현재 단계 21/27    |    현재 폴더 ~/agv_ws    |    현재 터미널</a:t>
             </a:r>
           </a:p>
         </p:txBody>
@@ -16517,8 +16813,8 @@
         </p:nvSpPr>
         <p:spPr>
           <a:xfrm>
-            <a:off x="658368" y="1682496"/>
-            <a:ext cx="10972800" cy="347472"/>
+            <a:off x="658368" y="1627632"/>
+            <a:ext cx="10972800" cy="256032"/>
           </a:xfrm>
           <a:prstGeom prst="rect">
             <a:avLst/>
@@ -16535,7 +16831,7 @@
               <a:spcAft>
                 <a:spcPts val="0"/>
               </a:spcAft>
-              <a:defRPr sz="1700" b="1">
+              <a:defRPr sz="1500" b="1">
                 <a:solidFill>
                   <a:srgbClr val="122C4E"/>
                 </a:solidFill>
@@ -16556,8 +16852,8 @@
         </p:nvSpPr>
         <p:spPr>
           <a:xfrm>
-            <a:off x="658368" y="2103120"/>
-            <a:ext cx="10972800" cy="493776"/>
+            <a:off x="658368" y="1956816"/>
+            <a:ext cx="10972800" cy="603504"/>
           </a:xfrm>
           <a:prstGeom prst="rect">
             <a:avLst/>
@@ -16601,7 +16897,11 @@
               </a:defRPr>
             </a:pPr>
             <a:r>
-              <a:t>파일 생성/열기: mkdir -p ~/agv_ws/src/agv_gazebo/models/agv    &amp;&amp;    nano ~/agv_ws/src/agv_gazebo/models/agv/model.sdf</a:t>
+              <a:t>파일 생성: mkdir -p ~/agv_ws/src/agv_gazebo/models/agv</a:t>
+            </a:r>
+            <a:br/>
+            <a:r>
+              <a:t>파일 열기: nano ~/agv_ws/src/agv_gazebo/models/agv/model.sdf</a:t>
             </a:r>
           </a:p>
         </p:txBody>
@@ -16614,8 +16914,8 @@
         </p:nvSpPr>
         <p:spPr>
           <a:xfrm>
-            <a:off x="658368" y="2761488"/>
-            <a:ext cx="10972800" cy="3383280"/>
+            <a:off x="658368" y="2706624"/>
+            <a:ext cx="10972800" cy="3364992"/>
           </a:xfrm>
           <a:prstGeom prst="rect">
             <a:avLst/>
@@ -16659,59 +16959,51 @@
               </a:defRPr>
             </a:pPr>
             <a:r>
-              <a:t>          &lt;image&gt;</a:t>
-            </a:r>
-            <a:br/>
-            <a:r>
-              <a:t>            &lt;width&gt;640&lt;/width&gt;</a:t>
-            </a:r>
-            <a:br/>
-            <a:r>
-              <a:t>            &lt;height&gt;480&lt;/height&gt;</a:t>
-            </a:r>
-            <a:br/>
-            <a:r>
-              <a:t>            &lt;format&gt;R8G8B8&lt;/format&gt;</a:t>
-            </a:r>
-            <a:br/>
-            <a:r>
-              <a:t>          &lt;/image&gt;</a:t>
-            </a:r>
-            <a:br/>
-            <a:r>
-              <a:t>          &lt;clip&gt;</a:t>
-            </a:r>
-            <a:br/>
-            <a:r>
-              <a:t>            &lt;near&gt;0.1&lt;/near&gt;</a:t>
-            </a:r>
-            <a:br/>
-            <a:r>
-              <a:t>            &lt;far&gt;20&lt;/far&gt;</a:t>
-            </a:r>
-            <a:br/>
-            <a:r>
-              <a:t>          &lt;/clip&gt;</a:t>
-            </a:r>
-            <a:br/>
-            <a:r>
-              <a:t>        &lt;/camera&gt;</a:t>
+              <a:t>              &lt;resolution&gt;1&lt;/resolution&gt;</a:t>
+            </a:r>
+            <a:br/>
+            <a:r>
+              <a:t>              &lt;min_angle&gt;-3.14159&lt;/min_angle&gt;</a:t>
+            </a:r>
+            <a:br/>
+            <a:r>
+              <a:t>              &lt;max_angle&gt;3.14159&lt;/max_angle&gt;</a:t>
+            </a:r>
+            <a:br/>
+            <a:r>
+              <a:t>            &lt;/horizontal&gt;</a:t>
+            </a:r>
+            <a:br/>
+            <a:r>
+              <a:t>          &lt;/scan&gt;</a:t>
+            </a:r>
+            <a:br/>
+            <a:r>
+              <a:t>          &lt;range&gt;</a:t>
+            </a:r>
+            <a:br/>
+            <a:r>
+              <a:t>            &lt;min&gt;0.12&lt;/min&gt;</a:t>
+            </a:r>
+            <a:br/>
+            <a:r>
+              <a:t>            &lt;max&gt;12.0&lt;/max&gt;</a:t>
+            </a:r>
+            <a:br/>
+            <a:r>
+              <a:t>            &lt;resolution&gt;0.01&lt;/resolution&gt;</a:t>
+            </a:r>
+            <a:br/>
+            <a:r>
+              <a:t>          &lt;/range&gt;</a:t>
+            </a:r>
+            <a:br/>
+            <a:r>
+              <a:t>        &lt;/lidar&gt;</a:t>
             </a:r>
             <a:br/>
             <a:r>
               <a:t>      &lt;/sensor&gt;</a:t>
-            </a:r>
-            <a:br/>
-            <a:r>
-              <a:t>    &lt;/link&gt;</a:t>
-            </a:r>
-            <a:br/>
-            <a:r>
-              <a:t>    </a:t>
-            </a:r>
-            <a:br/>
-            <a:r>
-              <a:t>    </a:t>
             </a:r>
           </a:p>
         </p:txBody>
@@ -16724,7 +17016,7 @@
         </p:nvSpPr>
         <p:spPr>
           <a:xfrm>
-            <a:off x="749808" y="6199632"/>
+            <a:off x="749808" y="6181344"/>
             <a:ext cx="10789920" cy="201168"/>
           </a:xfrm>
           <a:prstGeom prst="rect">
@@ -16750,7 +17042,7 @@
               </a:defRPr>
             </a:pPr>
             <a:r>
-              <a:t>파일 전체 19/21 · 이 슬라이드 다음에 같은 파일의 나머지 줄이 이어집니다.</a:t>
+              <a:t>파일 전체 19/24 · 이 슬라이드 다음에 같은 파일의 나머지 줄이 이어집니다.</a:t>
             </a:r>
           </a:p>
         </p:txBody>
@@ -16807,7 +17099,7 @@
               </a:defRPr>
             </a:pPr>
             <a:r>
-              <a:t>파일을 계속 작성하고 저장한다 (20/21)</a:t>
+              <a:t>파일을 계속 작성하고 저장한다 (20/24)</a:t>
             </a:r>
           </a:p>
         </p:txBody>
@@ -16982,7 +17274,7 @@
               </a:defRPr>
             </a:pPr>
             <a:r>
-              <a:t>현재 단계 22/24    |    현재 폴더 ~/agv_ws    |    현재 터미널</a:t>
+              <a:t>현재 단계 22/27    |    현재 폴더 ~/agv_ws    |    현재 터미널</a:t>
             </a:r>
           </a:p>
         </p:txBody>
@@ -16995,8 +17287,8 @@
         </p:nvSpPr>
         <p:spPr>
           <a:xfrm>
-            <a:off x="658368" y="1682496"/>
-            <a:ext cx="10972800" cy="347472"/>
+            <a:off x="658368" y="1627632"/>
+            <a:ext cx="10972800" cy="256032"/>
           </a:xfrm>
           <a:prstGeom prst="rect">
             <a:avLst/>
@@ -17013,7 +17305,7 @@
               <a:spcAft>
                 <a:spcPts val="0"/>
               </a:spcAft>
-              <a:defRPr sz="1700" b="1">
+              <a:defRPr sz="1500" b="1">
                 <a:solidFill>
                   <a:srgbClr val="122C4E"/>
                 </a:solidFill>
@@ -17034,8 +17326,8 @@
         </p:nvSpPr>
         <p:spPr>
           <a:xfrm>
-            <a:off x="658368" y="2103120"/>
-            <a:ext cx="10972800" cy="493776"/>
+            <a:off x="658368" y="1956816"/>
+            <a:ext cx="10972800" cy="603504"/>
           </a:xfrm>
           <a:prstGeom prst="rect">
             <a:avLst/>
@@ -17079,7 +17371,11 @@
               </a:defRPr>
             </a:pPr>
             <a:r>
-              <a:t>파일 생성/열기: mkdir -p ~/agv_ws/src/agv_gazebo/models/agv    &amp;&amp;    nano ~/agv_ws/src/agv_gazebo/models/agv/model.sdf</a:t>
+              <a:t>파일 생성: mkdir -p ~/agv_ws/src/agv_gazebo/models/agv</a:t>
+            </a:r>
+            <a:br/>
+            <a:r>
+              <a:t>파일 열기: nano ~/agv_ws/src/agv_gazebo/models/agv/model.sdf</a:t>
             </a:r>
           </a:p>
         </p:txBody>
@@ -17092,8 +17388,8 @@
         </p:nvSpPr>
         <p:spPr>
           <a:xfrm>
-            <a:off x="658368" y="2761488"/>
-            <a:ext cx="10972800" cy="3383280"/>
+            <a:off x="658368" y="2706624"/>
+            <a:ext cx="10972800" cy="3364992"/>
           </a:xfrm>
           <a:prstGeom prst="rect">
             <a:avLst/>
@@ -17137,7 +17433,19 @@
               </a:defRPr>
             </a:pPr>
             <a:r>
-              <a:t>    &lt;joint name="camera_joint" type="fixed"&gt;</a:t>
+              <a:t>    &lt;/link&gt;</a:t>
+            </a:r>
+            <a:br/>
+            <a:r>
+              <a:t>    </a:t>
+            </a:r>
+            <a:br/>
+            <a:r>
+              <a:t>    </a:t>
+            </a:r>
+            <a:br/>
+            <a:r>
+              <a:t>    &lt;joint name="lidar_joint" type="fixed"&gt;</a:t>
             </a:r>
             <a:br/>
             <a:r>
@@ -17145,7 +17453,7 @@
             </a:r>
             <a:br/>
             <a:r>
-              <a:t>      &lt;child&gt;camera_link&lt;/child&gt;</a:t>
+              <a:t>      &lt;child&gt;lidar_link&lt;/child&gt;</a:t>
             </a:r>
             <a:br/>
             <a:r>
@@ -17161,35 +17469,15 @@
             </a:r>
             <a:br/>
             <a:r>
-              <a:t>    &lt;plugin filename="gz-sim-diff-drive-system" name="gz::sim::systems::DiffDrive"&gt;</a:t>
-            </a:r>
-            <a:br/>
-            <a:r>
-              <a:t>      &lt;left_joint&gt;left_wheel_joint&lt;/left_joint&gt;</a:t>
-            </a:r>
-            <a:br/>
-            <a:r>
-              <a:t>      &lt;right_joint&gt;right_wheel_joint&lt;/right_joint&gt;</a:t>
-            </a:r>
-            <a:br/>
-            <a:r>
-              <a:t>      &lt;wheel_separation&gt;0.38&lt;/wheel_separation&gt;</a:t>
-            </a:r>
-            <a:br/>
-            <a:r>
-              <a:t>      &lt;wheel_radius&gt;0.08&lt;/wheel_radius&gt;</a:t>
-            </a:r>
-            <a:br/>
-            <a:r>
-              <a:t>      &lt;topic&gt;/cmd_vel&lt;/topic&gt;</a:t>
-            </a:r>
-            <a:br/>
-            <a:r>
-              <a:t>      &lt;odom_topic&gt;/odom&lt;/odom_topic&gt;</a:t>
-            </a:r>
-            <a:br/>
-            <a:r>
-              <a:t>      &lt;frame_id&gt;odom&lt;/frame_id&gt;</a:t>
+              <a:t>    &lt;link name="camera_link"&gt;</a:t>
+            </a:r>
+            <a:br/>
+            <a:r>
+              <a:t>      &lt;pose relative_to="base_link"&gt;0.30 0 0.10 0 0 0&lt;/pose&gt;</a:t>
+            </a:r>
+            <a:br/>
+            <a:r>
+              <a:t>      &lt;visual name="housing"&gt;</a:t>
             </a:r>
           </a:p>
         </p:txBody>
@@ -17202,7 +17490,7 @@
         </p:nvSpPr>
         <p:spPr>
           <a:xfrm>
-            <a:off x="749808" y="6199632"/>
+            <a:off x="749808" y="6181344"/>
             <a:ext cx="10789920" cy="201168"/>
           </a:xfrm>
           <a:prstGeom prst="rect">
@@ -17228,7 +17516,7 @@
               </a:defRPr>
             </a:pPr>
             <a:r>
-              <a:t>파일 전체 20/21 · 이 슬라이드 다음에 같은 파일의 나머지 줄이 이어집니다.</a:t>
+              <a:t>파일 전체 20/24 · 이 슬라이드 다음에 같은 파일의 나머지 줄이 이어집니다.</a:t>
             </a:r>
           </a:p>
         </p:txBody>
@@ -17285,7 +17573,7 @@
               </a:defRPr>
             </a:pPr>
             <a:r>
-              <a:t>파일을 계속 작성하고 저장한다 (21/21)</a:t>
+              <a:t>파일을 계속 작성하고 저장한다 (21/24)</a:t>
             </a:r>
           </a:p>
         </p:txBody>
@@ -17460,7 +17748,7 @@
               </a:defRPr>
             </a:pPr>
             <a:r>
-              <a:t>현재 단계 23/24    |    현재 폴더 ~/agv_ws    |    현재 터미널</a:t>
+              <a:t>현재 단계 23/27    |    현재 폴더 ~/agv_ws    |    현재 터미널</a:t>
             </a:r>
           </a:p>
         </p:txBody>
@@ -17473,8 +17761,8 @@
         </p:nvSpPr>
         <p:spPr>
           <a:xfrm>
-            <a:off x="658368" y="1682496"/>
-            <a:ext cx="10972800" cy="347472"/>
+            <a:off x="658368" y="1627632"/>
+            <a:ext cx="10972800" cy="256032"/>
           </a:xfrm>
           <a:prstGeom prst="rect">
             <a:avLst/>
@@ -17491,7 +17779,7 @@
               <a:spcAft>
                 <a:spcPts val="0"/>
               </a:spcAft>
-              <a:defRPr sz="1700" b="1">
+              <a:defRPr sz="1500" b="1">
                 <a:solidFill>
                   <a:srgbClr val="122C4E"/>
                 </a:solidFill>
@@ -17512,8 +17800,8 @@
         </p:nvSpPr>
         <p:spPr>
           <a:xfrm>
-            <a:off x="658368" y="2103120"/>
-            <a:ext cx="10972800" cy="493776"/>
+            <a:off x="658368" y="1956816"/>
+            <a:ext cx="10972800" cy="603504"/>
           </a:xfrm>
           <a:prstGeom prst="rect">
             <a:avLst/>
@@ -17557,7 +17845,11 @@
               </a:defRPr>
             </a:pPr>
             <a:r>
-              <a:t>파일 생성/열기: mkdir -p ~/agv_ws/src/agv_gazebo/models/agv    &amp;&amp;    nano ~/agv_ws/src/agv_gazebo/models/agv/model.sdf</a:t>
+              <a:t>파일 생성: mkdir -p ~/agv_ws/src/agv_gazebo/models/agv</a:t>
+            </a:r>
+            <a:br/>
+            <a:r>
+              <a:t>파일 열기: nano ~/agv_ws/src/agv_gazebo/models/agv/model.sdf</a:t>
             </a:r>
           </a:p>
         </p:txBody>
@@ -17570,8 +17862,8 @@
         </p:nvSpPr>
         <p:spPr>
           <a:xfrm>
-            <a:off x="658368" y="2761488"/>
-            <a:ext cx="10972800" cy="3383280"/>
+            <a:off x="658368" y="2706624"/>
+            <a:ext cx="10972800" cy="3364992"/>
           </a:xfrm>
           <a:prstGeom prst="rect">
             <a:avLst/>
@@ -17615,32 +17907,51 @@
               </a:defRPr>
             </a:pPr>
             <a:r>
-              <a:t>      &lt;child_frame_id&gt;base_link&lt;/child_frame_id&gt;</a:t>
-            </a:r>
-            <a:br/>
-            <a:r>
-              <a:t>    &lt;/plugin&gt;</a:t>
-            </a:r>
-            <a:br/>
-            <a:r>
-              <a:t>    </a:t>
-            </a:r>
-            <a:br/>
-            <a:r>
-              <a:t>  </a:t>
-            </a:r>
-            <a:br/>
-            <a:r>
-              <a:t>  &lt;/model&gt;</a:t>
-            </a:r>
-            <a:br/>
-            <a:r>
-              <a:t>  </a:t>
-            </a:r>
-            <a:br/>
-            <a:br/>
-            <a:r>
-              <a:t>&lt;/sdf&gt;</a:t>
+              <a:t>        &lt;geometry&gt;</a:t>
+            </a:r>
+            <a:br/>
+            <a:r>
+              <a:t>          &lt;box&gt;</a:t>
+            </a:r>
+            <a:br/>
+            <a:r>
+              <a:t>            &lt;size&gt;0.05 0.08 0.05&lt;/size&gt;</a:t>
+            </a:r>
+            <a:br/>
+            <a:r>
+              <a:t>          &lt;/box&gt;</a:t>
+            </a:r>
+            <a:br/>
+            <a:r>
+              <a:t>        &lt;/geometry&gt;</a:t>
+            </a:r>
+            <a:br/>
+            <a:r>
+              <a:t>      &lt;/visual&gt;</a:t>
+            </a:r>
+            <a:br/>
+            <a:r>
+              <a:t>      &lt;sensor name="camera" type="camera"&gt;</a:t>
+            </a:r>
+            <a:br/>
+            <a:r>
+              <a:t>        &lt;topic&gt;/camera/image_raw&lt;/topic&gt;</a:t>
+            </a:r>
+            <a:br/>
+            <a:r>
+              <a:t>        &lt;always_on&gt;true&lt;/always_on&gt;</a:t>
+            </a:r>
+            <a:br/>
+            <a:r>
+              <a:t>        &lt;update_rate&gt;15&lt;/update_rate&gt;</a:t>
+            </a:r>
+            <a:br/>
+            <a:r>
+              <a:t>        &lt;camera&gt;</a:t>
+            </a:r>
+            <a:br/>
+            <a:r>
+              <a:t>          &lt;horizontal_fov&gt;1.047&lt;/horizontal_fov&gt;</a:t>
             </a:r>
           </a:p>
         </p:txBody>
@@ -17653,7 +17964,7 @@
         </p:nvSpPr>
         <p:spPr>
           <a:xfrm>
-            <a:off x="749808" y="6199632"/>
+            <a:off x="749808" y="6181344"/>
             <a:ext cx="10789920" cy="201168"/>
           </a:xfrm>
           <a:prstGeom prst="rect">
@@ -17679,7 +17990,7 @@
               </a:defRPr>
             </a:pPr>
             <a:r>
-              <a:t>파일 전체 21/21 · 이 슬라이드 다음에 같은 파일의 나머지 줄이 이어집니다.</a:t>
+              <a:t>파일 전체 21/24 · 이 슬라이드 다음에 같은 파일의 나머지 줄이 이어집니다.</a:t>
             </a:r>
           </a:p>
         </p:txBody>
@@ -18155,7 +18466,7 @@
               </a:defRPr>
             </a:pPr>
             <a:r>
-              <a:t>파일을 새로 만들고 저장한다 (1/3)</a:t>
+              <a:t>파일을 계속 작성하고 저장한다 (22/24)</a:t>
             </a:r>
           </a:p>
         </p:txBody>
@@ -18194,7 +18505,7 @@
               </a:defRPr>
             </a:pPr>
             <a:r>
-              <a:t>~/agv_ws/src/agv_gazebo/config/bridge.yaml</a:t>
+              <a:t>~/agv_ws/src/agv_gazebo/models/agv/model.sdf</a:t>
             </a:r>
           </a:p>
         </p:txBody>
@@ -18343,8 +18654,8 @@
         </p:nvSpPr>
         <p:spPr>
           <a:xfrm>
-            <a:off x="658368" y="1682496"/>
-            <a:ext cx="10972800" cy="347472"/>
+            <a:off x="658368" y="1627632"/>
+            <a:ext cx="10972800" cy="256032"/>
           </a:xfrm>
           <a:prstGeom prst="rect">
             <a:avLst/>
@@ -18361,7 +18672,7 @@
               <a:spcAft>
                 <a:spcPts val="0"/>
               </a:spcAft>
-              <a:defRPr sz="1700" b="1">
+              <a:defRPr sz="1500" b="1">
                 <a:solidFill>
                   <a:srgbClr val="122C4E"/>
                 </a:solidFill>
@@ -18382,8 +18693,8 @@
         </p:nvSpPr>
         <p:spPr>
           <a:xfrm>
-            <a:off x="658368" y="2103120"/>
-            <a:ext cx="10972800" cy="493776"/>
+            <a:off x="658368" y="1956816"/>
+            <a:ext cx="10972800" cy="603504"/>
           </a:xfrm>
           <a:prstGeom prst="rect">
             <a:avLst/>
@@ -18427,7 +18738,11 @@
               </a:defRPr>
             </a:pPr>
             <a:r>
-              <a:t>파일 생성/열기: mkdir -p ~/agv_ws/src/agv_gazebo/config    &amp;&amp;    nano ~/agv_ws/src/agv_gazebo/config/bridge.yaml</a:t>
+              <a:t>파일 생성: mkdir -p ~/agv_ws/src/agv_gazebo/models/agv</a:t>
+            </a:r>
+            <a:br/>
+            <a:r>
+              <a:t>파일 열기: nano ~/agv_ws/src/agv_gazebo/models/agv/model.sdf</a:t>
             </a:r>
           </a:p>
         </p:txBody>
@@ -18440,8 +18755,8 @@
         </p:nvSpPr>
         <p:spPr>
           <a:xfrm>
-            <a:off x="658368" y="2761488"/>
-            <a:ext cx="10972800" cy="3383280"/>
+            <a:off x="658368" y="2706624"/>
+            <a:ext cx="10972800" cy="3364992"/>
           </a:xfrm>
           <a:prstGeom prst="rect">
             <a:avLst/>
@@ -18485,59 +18800,51 @@
               </a:defRPr>
             </a:pPr>
             <a:r>
-              <a:t>- ros_topic_name: "/cmd_vel"</a:t>
-            </a:r>
-            <a:br/>
-            <a:r>
-              <a:t>  gz_topic_name: "/cmd_vel"</a:t>
-            </a:r>
-            <a:br/>
-            <a:r>
-              <a:t>  ros_type_name: "geometry_msgs/msg/Twist"</a:t>
-            </a:r>
-            <a:br/>
-            <a:r>
-              <a:t>  gz_type_name: "gz.msgs.Twist"</a:t>
-            </a:r>
-            <a:br/>
-            <a:r>
-              <a:t>  direction: ROS_TO_GZ</a:t>
-            </a:r>
-            <a:br/>
-            <a:r>
-              <a:t>- ros_topic_name: "/odom"</a:t>
-            </a:r>
-            <a:br/>
-            <a:r>
-              <a:t>  gz_topic_name: "/odom"</a:t>
-            </a:r>
-            <a:br/>
-            <a:r>
-              <a:t>  ros_type_name: "nav_msgs/msg/Odometry"</a:t>
-            </a:r>
-            <a:br/>
-            <a:r>
-              <a:t>  gz_type_name: "gz.msgs.Odometry"</a:t>
-            </a:r>
-            <a:br/>
-            <a:r>
-              <a:t>  direction: GZ_TO_ROS</a:t>
-            </a:r>
-            <a:br/>
-            <a:r>
-              <a:t>- ros_topic_name: "/scan"</a:t>
-            </a:r>
-            <a:br/>
-            <a:r>
-              <a:t>  gz_topic_name: "/scan"</a:t>
-            </a:r>
-            <a:br/>
-            <a:r>
-              <a:t>  ros_type_name: "sensor_msgs/msg/LaserScan"</a:t>
-            </a:r>
-            <a:br/>
-            <a:r>
-              <a:t>  gz_type_name: "gz.msgs.LaserScan"</a:t>
+              <a:t>          &lt;image&gt;</a:t>
+            </a:r>
+            <a:br/>
+            <a:r>
+              <a:t>            &lt;width&gt;640&lt;/width&gt;</a:t>
+            </a:r>
+            <a:br/>
+            <a:r>
+              <a:t>            &lt;height&gt;480&lt;/height&gt;</a:t>
+            </a:r>
+            <a:br/>
+            <a:r>
+              <a:t>            &lt;format&gt;R8G8B8&lt;/format&gt;</a:t>
+            </a:r>
+            <a:br/>
+            <a:r>
+              <a:t>          &lt;/image&gt;</a:t>
+            </a:r>
+            <a:br/>
+            <a:r>
+              <a:t>          &lt;clip&gt;</a:t>
+            </a:r>
+            <a:br/>
+            <a:r>
+              <a:t>            &lt;near&gt;0.1&lt;/near&gt;</a:t>
+            </a:r>
+            <a:br/>
+            <a:r>
+              <a:t>            &lt;far&gt;20&lt;/far&gt;</a:t>
+            </a:r>
+            <a:br/>
+            <a:r>
+              <a:t>          &lt;/clip&gt;</a:t>
+            </a:r>
+            <a:br/>
+            <a:r>
+              <a:t>        &lt;/camera&gt;</a:t>
+            </a:r>
+            <a:br/>
+            <a:r>
+              <a:t>      &lt;/sensor&gt;</a:t>
+            </a:r>
+            <a:br/>
+            <a:r>
+              <a:t>    &lt;/link&gt;</a:t>
             </a:r>
           </a:p>
         </p:txBody>
@@ -18550,7 +18857,7 @@
         </p:nvSpPr>
         <p:spPr>
           <a:xfrm>
-            <a:off x="749808" y="6199632"/>
+            <a:off x="749808" y="6181344"/>
             <a:ext cx="10789920" cy="201168"/>
           </a:xfrm>
           <a:prstGeom prst="rect">
@@ -18576,7 +18883,7 @@
               </a:defRPr>
             </a:pPr>
             <a:r>
-              <a:t>파일 전체 1/3 · 이 슬라이드 다음에 같은 파일의 나머지 줄이 이어집니다.</a:t>
+              <a:t>파일 전체 22/24 · 이 슬라이드 다음에 같은 파일의 나머지 줄이 이어집니다.</a:t>
             </a:r>
           </a:p>
         </p:txBody>
@@ -18633,7 +18940,7 @@
               </a:defRPr>
             </a:pPr>
             <a:r>
-              <a:t>파일을 계속 작성하고 저장한다 (2/3)</a:t>
+              <a:t>파일을 계속 작성하고 저장한다 (23/24)</a:t>
             </a:r>
           </a:p>
         </p:txBody>
@@ -18672,7 +18979,7 @@
               </a:defRPr>
             </a:pPr>
             <a:r>
-              <a:t>~/agv_ws/src/agv_gazebo/config/bridge.yaml</a:t>
+              <a:t>~/agv_ws/src/agv_gazebo/models/agv/model.sdf</a:t>
             </a:r>
           </a:p>
         </p:txBody>
@@ -18821,8 +19128,8 @@
         </p:nvSpPr>
         <p:spPr>
           <a:xfrm>
-            <a:off x="658368" y="1682496"/>
-            <a:ext cx="10972800" cy="347472"/>
+            <a:off x="658368" y="1627632"/>
+            <a:ext cx="10972800" cy="256032"/>
           </a:xfrm>
           <a:prstGeom prst="rect">
             <a:avLst/>
@@ -18839,7 +19146,7 @@
               <a:spcAft>
                 <a:spcPts val="0"/>
               </a:spcAft>
-              <a:defRPr sz="1700" b="1">
+              <a:defRPr sz="1500" b="1">
                 <a:solidFill>
                   <a:srgbClr val="122C4E"/>
                 </a:solidFill>
@@ -18860,8 +19167,8 @@
         </p:nvSpPr>
         <p:spPr>
           <a:xfrm>
-            <a:off x="658368" y="2103120"/>
-            <a:ext cx="10972800" cy="493776"/>
+            <a:off x="658368" y="1956816"/>
+            <a:ext cx="10972800" cy="603504"/>
           </a:xfrm>
           <a:prstGeom prst="rect">
             <a:avLst/>
@@ -18905,7 +19212,11 @@
               </a:defRPr>
             </a:pPr>
             <a:r>
-              <a:t>파일 생성/열기: mkdir -p ~/agv_ws/src/agv_gazebo/config    &amp;&amp;    nano ~/agv_ws/src/agv_gazebo/config/bridge.yaml</a:t>
+              <a:t>파일 생성: mkdir -p ~/agv_ws/src/agv_gazebo/models/agv</a:t>
+            </a:r>
+            <a:br/>
+            <a:r>
+              <a:t>파일 열기: nano ~/agv_ws/src/agv_gazebo/models/agv/model.sdf</a:t>
             </a:r>
           </a:p>
         </p:txBody>
@@ -18918,8 +19229,8 @@
         </p:nvSpPr>
         <p:spPr>
           <a:xfrm>
-            <a:off x="658368" y="2761488"/>
-            <a:ext cx="10972800" cy="3383280"/>
+            <a:off x="658368" y="2706624"/>
+            <a:ext cx="10972800" cy="3364992"/>
           </a:xfrm>
           <a:prstGeom prst="rect">
             <a:avLst/>
@@ -18963,59 +19274,51 @@
               </a:defRPr>
             </a:pPr>
             <a:r>
-              <a:t>  direction: GZ_TO_ROS</a:t>
-            </a:r>
-            <a:br/>
-            <a:r>
-              <a:t>- ros_topic_name: "/imu/data"</a:t>
-            </a:r>
-            <a:br/>
-            <a:r>
-              <a:t>  gz_topic_name: "/imu/data"</a:t>
-            </a:r>
-            <a:br/>
-            <a:r>
-              <a:t>  ros_type_name: "sensor_msgs/msg/Imu"</a:t>
-            </a:r>
-            <a:br/>
-            <a:r>
-              <a:t>  gz_type_name: "gz.msgs.IMU"</a:t>
-            </a:r>
-            <a:br/>
-            <a:r>
-              <a:t>  direction: GZ_TO_ROS</a:t>
-            </a:r>
-            <a:br/>
-            <a:r>
-              <a:t>- ros_topic_name: "/camera/image_raw"</a:t>
-            </a:r>
-            <a:br/>
-            <a:r>
-              <a:t>  gz_topic_name: "/camera/image_raw"</a:t>
-            </a:r>
-            <a:br/>
-            <a:r>
-              <a:t>  ros_type_name: "sensor_msgs/msg/Image"</a:t>
-            </a:r>
-            <a:br/>
-            <a:r>
-              <a:t>  gz_type_name: "gz.msgs.Image"</a:t>
-            </a:r>
-            <a:br/>
-            <a:r>
-              <a:t>  direction: GZ_TO_ROS</a:t>
-            </a:r>
-            <a:br/>
-            <a:r>
-              <a:t>- ros_topic_name: "/clock"</a:t>
-            </a:r>
-            <a:br/>
-            <a:r>
-              <a:t>  gz_topic_name: "/clock"</a:t>
-            </a:r>
-            <a:br/>
-            <a:r>
-              <a:t>  ros_type_name: "rosgraph_msgs/msg/Clock"</a:t>
+              <a:t>    </a:t>
+            </a:r>
+            <a:br/>
+            <a:r>
+              <a:t>    </a:t>
+            </a:r>
+            <a:br/>
+            <a:r>
+              <a:t>    &lt;joint name="camera_joint" type="fixed"&gt;</a:t>
+            </a:r>
+            <a:br/>
+            <a:r>
+              <a:t>      &lt;parent&gt;base_link&lt;/parent&gt;</a:t>
+            </a:r>
+            <a:br/>
+            <a:r>
+              <a:t>      &lt;child&gt;camera_link&lt;/child&gt;</a:t>
+            </a:r>
+            <a:br/>
+            <a:r>
+              <a:t>    &lt;/joint&gt;</a:t>
+            </a:r>
+            <a:br/>
+            <a:r>
+              <a:t>    </a:t>
+            </a:r>
+            <a:br/>
+            <a:r>
+              <a:t>    </a:t>
+            </a:r>
+            <a:br/>
+            <a:r>
+              <a:t>    &lt;plugin filename="gz-sim-diff-drive-system" name="gz::sim::systems::DiffDrive"&gt;</a:t>
+            </a:r>
+            <a:br/>
+            <a:r>
+              <a:t>      &lt;left_joint&gt;left_wheel_joint&lt;/left_joint&gt;</a:t>
+            </a:r>
+            <a:br/>
+            <a:r>
+              <a:t>      &lt;right_joint&gt;right_wheel_joint&lt;/right_joint&gt;</a:t>
+            </a:r>
+            <a:br/>
+            <a:r>
+              <a:t>      &lt;wheel_separation&gt;0.38&lt;/wheel_separation&gt;</a:t>
             </a:r>
           </a:p>
         </p:txBody>
@@ -19028,7 +19331,7 @@
         </p:nvSpPr>
         <p:spPr>
           <a:xfrm>
-            <a:off x="749808" y="6199632"/>
+            <a:off x="749808" y="6181344"/>
             <a:ext cx="10789920" cy="201168"/>
           </a:xfrm>
           <a:prstGeom prst="rect">
@@ -19054,7 +19357,7 @@
               </a:defRPr>
             </a:pPr>
             <a:r>
-              <a:t>파일 전체 2/3 · 이 슬라이드 다음에 같은 파일의 나머지 줄이 이어집니다.</a:t>
+              <a:t>파일 전체 23/24 · 이 슬라이드 다음에 같은 파일의 나머지 줄이 이어집니다.</a:t>
             </a:r>
           </a:p>
         </p:txBody>
@@ -19111,7 +19414,7 @@
               </a:defRPr>
             </a:pPr>
             <a:r>
-              <a:t>파일을 계속 작성하고 저장한다 (3/3)</a:t>
+              <a:t>파일을 계속 작성하고 저장한다 (24/24)</a:t>
             </a:r>
           </a:p>
         </p:txBody>
@@ -19150,7 +19453,7 @@
               </a:defRPr>
             </a:pPr>
             <a:r>
-              <a:t>~/agv_ws/src/agv_gazebo/config/bridge.yaml</a:t>
+              <a:t>~/agv_ws/src/agv_gazebo/models/agv/model.sdf</a:t>
             </a:r>
           </a:p>
         </p:txBody>
@@ -19299,8 +19602,8 @@
         </p:nvSpPr>
         <p:spPr>
           <a:xfrm>
-            <a:off x="658368" y="1682496"/>
-            <a:ext cx="10972800" cy="347472"/>
+            <a:off x="658368" y="1627632"/>
+            <a:ext cx="10972800" cy="256032"/>
           </a:xfrm>
           <a:prstGeom prst="rect">
             <a:avLst/>
@@ -19317,7 +19620,7 @@
               <a:spcAft>
                 <a:spcPts val="0"/>
               </a:spcAft>
-              <a:defRPr sz="1700" b="1">
+              <a:defRPr sz="1500" b="1">
                 <a:solidFill>
                   <a:srgbClr val="122C4E"/>
                 </a:solidFill>
@@ -19338,8 +19641,8 @@
         </p:nvSpPr>
         <p:spPr>
           <a:xfrm>
-            <a:off x="658368" y="2103120"/>
-            <a:ext cx="10972800" cy="493776"/>
+            <a:off x="658368" y="1956816"/>
+            <a:ext cx="10972800" cy="603504"/>
           </a:xfrm>
           <a:prstGeom prst="rect">
             <a:avLst/>
@@ -19383,7 +19686,11 @@
               </a:defRPr>
             </a:pPr>
             <a:r>
-              <a:t>파일 생성/열기: mkdir -p ~/agv_ws/src/agv_gazebo/config    &amp;&amp;    nano ~/agv_ws/src/agv_gazebo/config/bridge.yaml</a:t>
+              <a:t>파일 생성: mkdir -p ~/agv_ws/src/agv_gazebo/models/agv</a:t>
+            </a:r>
+            <a:br/>
+            <a:r>
+              <a:t>파일 열기: nano ~/agv_ws/src/agv_gazebo/models/agv/model.sdf</a:t>
             </a:r>
           </a:p>
         </p:txBody>
@@ -19396,8 +19703,8 @@
         </p:nvSpPr>
         <p:spPr>
           <a:xfrm>
-            <a:off x="658368" y="2761488"/>
-            <a:ext cx="10972800" cy="3383280"/>
+            <a:off x="658368" y="2706624"/>
+            <a:ext cx="10972800" cy="3364992"/>
           </a:xfrm>
           <a:prstGeom prst="rect">
             <a:avLst/>
@@ -19441,11 +19748,48 @@
               </a:defRPr>
             </a:pPr>
             <a:r>
-              <a:t>  gz_type_name: "gz.msgs.Clock"</a:t>
-            </a:r>
-            <a:br/>
-            <a:r>
-              <a:t>  direction: GZ_TO_ROS</a:t>
+              <a:t>      &lt;wheel_radius&gt;0.08&lt;/wheel_radius&gt;</a:t>
+            </a:r>
+            <a:br/>
+            <a:r>
+              <a:t>      &lt;topic&gt;/cmd_vel&lt;/topic&gt;</a:t>
+            </a:r>
+            <a:br/>
+            <a:r>
+              <a:t>      &lt;odom_topic&gt;/odom&lt;/odom_topic&gt;</a:t>
+            </a:r>
+            <a:br/>
+            <a:r>
+              <a:t>      &lt;frame_id&gt;odom&lt;/frame_id&gt;</a:t>
+            </a:r>
+            <a:br/>
+            <a:r>
+              <a:t>      &lt;child_frame_id&gt;base_link&lt;/child_frame_id&gt;</a:t>
+            </a:r>
+            <a:br/>
+            <a:r>
+              <a:t>    &lt;/plugin&gt;</a:t>
+            </a:r>
+            <a:br/>
+            <a:r>
+              <a:t>    </a:t>
+            </a:r>
+            <a:br/>
+            <a:r>
+              <a:t>  </a:t>
+            </a:r>
+            <a:br/>
+            <a:r>
+              <a:t>  &lt;/model&gt;</a:t>
+            </a:r>
+            <a:br/>
+            <a:r>
+              <a:t>  </a:t>
+            </a:r>
+            <a:br/>
+            <a:br/>
+            <a:r>
+              <a:t>&lt;/sdf&gt;</a:t>
             </a:r>
           </a:p>
         </p:txBody>
@@ -19458,7 +19802,7 @@
         </p:nvSpPr>
         <p:spPr>
           <a:xfrm>
-            <a:off x="749808" y="6199632"/>
+            <a:off x="749808" y="6181344"/>
             <a:ext cx="10789920" cy="201168"/>
           </a:xfrm>
           <a:prstGeom prst="rect">
@@ -19484,7 +19828,7 @@
               </a:defRPr>
             </a:pPr>
             <a:r>
-              <a:t>파일 전체 3/3 · 이 슬라이드 다음에 같은 파일의 나머지 줄이 이어집니다.</a:t>
+              <a:t>파일 전체 24/24 · 이 슬라이드 다음에 같은 파일의 나머지 줄이 이어집니다.</a:t>
             </a:r>
           </a:p>
         </p:txBody>
@@ -19541,7 +19885,7 @@
               </a:defRPr>
             </a:pPr>
             <a:r>
-              <a:t>파일을 새로 만들고 저장한다 (1/4)</a:t>
+              <a:t>파일을 새로 만들고 저장한다 (1/3)</a:t>
             </a:r>
           </a:p>
         </p:txBody>
@@ -19580,7 +19924,7 @@
               </a:defRPr>
             </a:pPr>
             <a:r>
-              <a:t>~/agv_ws/src/agv_vision/agv_vision/yolo_node.py</a:t>
+              <a:t>~/agv_ws/src/agv_gazebo/config/bridge.yaml</a:t>
             </a:r>
           </a:p>
         </p:txBody>
@@ -19716,7 +20060,7 @@
               </a:defRPr>
             </a:pPr>
             <a:r>
-              <a:t>현재 단계 27/31    |    현재 폴더 ~/agv_ws    |    현재 터미널</a:t>
+              <a:t>현재 단계 27/30    |    현재 폴더 ~/agv_ws    |    현재 터미널</a:t>
             </a:r>
           </a:p>
         </p:txBody>
@@ -19729,8 +20073,8 @@
         </p:nvSpPr>
         <p:spPr>
           <a:xfrm>
-            <a:off x="658368" y="1682496"/>
-            <a:ext cx="10972800" cy="347472"/>
+            <a:off x="658368" y="1627632"/>
+            <a:ext cx="10972800" cy="256032"/>
           </a:xfrm>
           <a:prstGeom prst="rect">
             <a:avLst/>
@@ -19747,7 +20091,7 @@
               <a:spcAft>
                 <a:spcPts val="0"/>
               </a:spcAft>
-              <a:defRPr sz="1700" b="1">
+              <a:defRPr sz="1500" b="1">
                 <a:solidFill>
                   <a:srgbClr val="122C4E"/>
                 </a:solidFill>
@@ -19768,8 +20112,8 @@
         </p:nvSpPr>
         <p:spPr>
           <a:xfrm>
-            <a:off x="658368" y="2103120"/>
-            <a:ext cx="10972800" cy="493776"/>
+            <a:off x="658368" y="1956816"/>
+            <a:ext cx="10972800" cy="603504"/>
           </a:xfrm>
           <a:prstGeom prst="rect">
             <a:avLst/>
@@ -19813,7 +20157,11 @@
               </a:defRPr>
             </a:pPr>
             <a:r>
-              <a:t>파일 생성/열기: mkdir -p ~/agv_ws/src/agv_vision/agv_vision    &amp;&amp;    nano ~/agv_ws/src/agv_vision/agv_vision/yolo_node.py</a:t>
+              <a:t>파일 생성: mkdir -p ~/agv_ws/src/agv_gazebo/config</a:t>
+            </a:r>
+            <a:br/>
+            <a:r>
+              <a:t>파일 열기: nano ~/agv_ws/src/agv_gazebo/config/bridge.yaml</a:t>
             </a:r>
           </a:p>
         </p:txBody>
@@ -19826,8 +20174,8 @@
         </p:nvSpPr>
         <p:spPr>
           <a:xfrm>
-            <a:off x="658368" y="2761488"/>
-            <a:ext cx="10972800" cy="3383280"/>
+            <a:off x="658368" y="2706624"/>
+            <a:ext cx="10972800" cy="3364992"/>
           </a:xfrm>
           <a:prstGeom prst="rect">
             <a:avLst/>
@@ -19871,53 +20219,51 @@
               </a:defRPr>
             </a:pPr>
             <a:r>
-              <a:t>import rclpy</a:t>
-            </a:r>
-            <a:br/>
-            <a:r>
-              <a:t>from rclpy.node import Node</a:t>
-            </a:r>
-            <a:br/>
-            <a:r>
-              <a:t>from rclpy.qos import qos_profile_sensor_data</a:t>
-            </a:r>
-            <a:br/>
-            <a:r>
-              <a:t>from sensor_msgs.msg import Image</a:t>
-            </a:r>
-            <a:br/>
-            <a:r>
-              <a:t>from cv_bridge import CvBridge</a:t>
-            </a:r>
-            <a:br/>
-            <a:r>
-              <a:t>from agv_interfaces.msg import Detection, DetectionArray</a:t>
-            </a:r>
-            <a:br/>
-            <a:br/>
-            <a:r>
-              <a:t>class YoloNode(Node):</a:t>
-            </a:r>
-            <a:br/>
-            <a:br/>
-            <a:r>
-              <a:t>    def __init__(self):</a:t>
-            </a:r>
-            <a:br/>
-            <a:r>
-              <a:t>        super().__init__('yolo_node')</a:t>
-            </a:r>
-            <a:br/>
-            <a:r>
-              <a:t>        self.declare_parameter('model_path', 'yolo11n.pt')</a:t>
-            </a:r>
-            <a:br/>
-            <a:r>
-              <a:t>        self.declare_parameter('confidence_threshold', 0.5)</a:t>
-            </a:r>
-            <a:br/>
-            <a:r>
-              <a:t>        self.declare_parameter('enable_yolo', False)</a:t>
+              <a:t>- ros_topic_name: "/cmd_vel"</a:t>
+            </a:r>
+            <a:br/>
+            <a:r>
+              <a:t>  gz_topic_name: "/cmd_vel"</a:t>
+            </a:r>
+            <a:br/>
+            <a:r>
+              <a:t>  ros_type_name: "geometry_msgs/msg/Twist"</a:t>
+            </a:r>
+            <a:br/>
+            <a:r>
+              <a:t>  gz_type_name: "gz.msgs.Twist"</a:t>
+            </a:r>
+            <a:br/>
+            <a:r>
+              <a:t>  direction: ROS_TO_GZ</a:t>
+            </a:r>
+            <a:br/>
+            <a:r>
+              <a:t>- ros_topic_name: "/odom"</a:t>
+            </a:r>
+            <a:br/>
+            <a:r>
+              <a:t>  gz_topic_name: "/odom"</a:t>
+            </a:r>
+            <a:br/>
+            <a:r>
+              <a:t>  ros_type_name: "nav_msgs/msg/Odometry"</a:t>
+            </a:r>
+            <a:br/>
+            <a:r>
+              <a:t>  gz_type_name: "gz.msgs.Odometry"</a:t>
+            </a:r>
+            <a:br/>
+            <a:r>
+              <a:t>  direction: GZ_TO_ROS</a:t>
+            </a:r>
+            <a:br/>
+            <a:r>
+              <a:t>- ros_topic_name: "/scan"</a:t>
+            </a:r>
+            <a:br/>
+            <a:r>
+              <a:t>  gz_topic_name: "/scan"</a:t>
             </a:r>
           </a:p>
         </p:txBody>
@@ -19930,7 +20276,7 @@
         </p:nvSpPr>
         <p:spPr>
           <a:xfrm>
-            <a:off x="749808" y="6199632"/>
+            <a:off x="749808" y="6181344"/>
             <a:ext cx="10789920" cy="201168"/>
           </a:xfrm>
           <a:prstGeom prst="rect">
@@ -19956,7 +20302,7 @@
               </a:defRPr>
             </a:pPr>
             <a:r>
-              <a:t>파일 전체 1/4 · 이 슬라이드 다음에 같은 파일의 나머지 줄이 이어집니다.</a:t>
+              <a:t>파일 전체 1/3 · 이 슬라이드 다음에 같은 파일의 나머지 줄이 이어집니다.</a:t>
             </a:r>
           </a:p>
         </p:txBody>
@@ -20013,7 +20359,7 @@
               </a:defRPr>
             </a:pPr>
             <a:r>
-              <a:t>파일을 계속 작성하고 저장한다 (2/4)</a:t>
+              <a:t>파일을 계속 작성하고 저장한다 (2/3)</a:t>
             </a:r>
           </a:p>
         </p:txBody>
@@ -20052,7 +20398,7 @@
               </a:defRPr>
             </a:pPr>
             <a:r>
-              <a:t>~/agv_ws/src/agv_vision/agv_vision/yolo_node.py</a:t>
+              <a:t>~/agv_ws/src/agv_gazebo/config/bridge.yaml</a:t>
             </a:r>
           </a:p>
         </p:txBody>
@@ -20188,7 +20534,7 @@
               </a:defRPr>
             </a:pPr>
             <a:r>
-              <a:t>현재 단계 28/31    |    현재 폴더 ~/agv_ws    |    현재 터미널</a:t>
+              <a:t>현재 단계 28/30    |    현재 폴더 ~/agv_ws    |    현재 터미널</a:t>
             </a:r>
           </a:p>
         </p:txBody>
@@ -20201,8 +20547,8 @@
         </p:nvSpPr>
         <p:spPr>
           <a:xfrm>
-            <a:off x="658368" y="1682496"/>
-            <a:ext cx="10972800" cy="347472"/>
+            <a:off x="658368" y="1627632"/>
+            <a:ext cx="10972800" cy="256032"/>
           </a:xfrm>
           <a:prstGeom prst="rect">
             <a:avLst/>
@@ -20219,7 +20565,7 @@
               <a:spcAft>
                 <a:spcPts val="0"/>
               </a:spcAft>
-              <a:defRPr sz="1700" b="1">
+              <a:defRPr sz="1500" b="1">
                 <a:solidFill>
                   <a:srgbClr val="122C4E"/>
                 </a:solidFill>
@@ -20240,8 +20586,8 @@
         </p:nvSpPr>
         <p:spPr>
           <a:xfrm>
-            <a:off x="658368" y="2103120"/>
-            <a:ext cx="10972800" cy="493776"/>
+            <a:off x="658368" y="1956816"/>
+            <a:ext cx="10972800" cy="603504"/>
           </a:xfrm>
           <a:prstGeom prst="rect">
             <a:avLst/>
@@ -20285,7 +20631,11 @@
               </a:defRPr>
             </a:pPr>
             <a:r>
-              <a:t>파일 생성/열기: mkdir -p ~/agv_ws/src/agv_vision/agv_vision    &amp;&amp;    nano ~/agv_ws/src/agv_vision/agv_vision/yolo_node.py</a:t>
+              <a:t>파일 생성: mkdir -p ~/agv_ws/src/agv_gazebo/config</a:t>
+            </a:r>
+            <a:br/>
+            <a:r>
+              <a:t>파일 열기: nano ~/agv_ws/src/agv_gazebo/config/bridge.yaml</a:t>
             </a:r>
           </a:p>
         </p:txBody>
@@ -20298,8 +20648,8 @@
         </p:nvSpPr>
         <p:spPr>
           <a:xfrm>
-            <a:off x="658368" y="2761488"/>
-            <a:ext cx="10972800" cy="3383280"/>
+            <a:off x="658368" y="2706624"/>
+            <a:ext cx="10972800" cy="3364992"/>
           </a:xfrm>
           <a:prstGeom prst="rect">
             <a:avLst/>
@@ -20343,56 +20693,51 @@
               </a:defRPr>
             </a:pPr>
             <a:r>
-              <a:t>        self.bridge = CvBridge()</a:t>
-            </a:r>
-            <a:br/>
-            <a:r>
-              <a:t>        self.publisher = self.create_publisher(DetectionArray, '/detections', 10)</a:t>
-            </a:r>
-            <a:br/>
-            <a:r>
-              <a:t>        self.create_subscription(Image, '/camera/image_raw', self.callback,</a:t>
-            </a:r>
-            <a:br/>
-            <a:r>
-              <a:t>            qos_profile_sensor_data)</a:t>
-            </a:r>
-            <a:br/>
-            <a:r>
-              <a:t>        self.model = None</a:t>
-            </a:r>
-            <a:br/>
-            <a:r>
-              <a:t>        if self.get_parameter('enable_yolo').value:</a:t>
-            </a:r>
-            <a:br/>
-            <a:r>
-              <a:t>            try:</a:t>
-            </a:r>
-            <a:br/>
-            <a:r>
-              <a:t>                from ultralytics import YOLO</a:t>
-            </a:r>
-            <a:br/>
-            <a:r>
-              <a:t>                self.model = YOLO(self.get_parameter('model_path').value)</a:t>
-            </a:r>
-            <a:br/>
-            <a:r>
-              <a:t>                self.get_logger().info('YOLO model loaded')</a:t>
-            </a:r>
-            <a:br/>
-            <a:r>
-              <a:t>            except ImportError:</a:t>
-            </a:r>
-            <a:br/>
-            <a:r>
-              <a:t>                self.get_logger().error('ultralytics is not installed: follow M17 before enable_yolo:=true')</a:t>
-            </a:r>
-            <a:br/>
-            <a:br/>
-            <a:r>
-              <a:t>    def callback(self, image_message):</a:t>
+              <a:t>  ros_type_name: "sensor_msgs/msg/LaserScan"</a:t>
+            </a:r>
+            <a:br/>
+            <a:r>
+              <a:t>  gz_type_name: "gz.msgs.LaserScan"</a:t>
+            </a:r>
+            <a:br/>
+            <a:r>
+              <a:t>  direction: GZ_TO_ROS</a:t>
+            </a:r>
+            <a:br/>
+            <a:r>
+              <a:t>- ros_topic_name: "/imu/data"</a:t>
+            </a:r>
+            <a:br/>
+            <a:r>
+              <a:t>  gz_topic_name: "/imu/data"</a:t>
+            </a:r>
+            <a:br/>
+            <a:r>
+              <a:t>  ros_type_name: "sensor_msgs/msg/Imu"</a:t>
+            </a:r>
+            <a:br/>
+            <a:r>
+              <a:t>  gz_type_name: "gz.msgs.IMU"</a:t>
+            </a:r>
+            <a:br/>
+            <a:r>
+              <a:t>  direction: GZ_TO_ROS</a:t>
+            </a:r>
+            <a:br/>
+            <a:r>
+              <a:t>- ros_topic_name: "/camera/image_raw"</a:t>
+            </a:r>
+            <a:br/>
+            <a:r>
+              <a:t>  gz_topic_name: "/camera/image_raw"</a:t>
+            </a:r>
+            <a:br/>
+            <a:r>
+              <a:t>  ros_type_name: "sensor_msgs/msg/Image"</a:t>
+            </a:r>
+            <a:br/>
+            <a:r>
+              <a:t>  gz_type_name: "gz.msgs.Image"</a:t>
             </a:r>
           </a:p>
         </p:txBody>
@@ -20405,7 +20750,7 @@
         </p:nvSpPr>
         <p:spPr>
           <a:xfrm>
-            <a:off x="749808" y="6199632"/>
+            <a:off x="749808" y="6181344"/>
             <a:ext cx="10789920" cy="201168"/>
           </a:xfrm>
           <a:prstGeom prst="rect">
@@ -20431,7 +20776,7 @@
               </a:defRPr>
             </a:pPr>
             <a:r>
-              <a:t>파일 전체 2/4 · 이 슬라이드 다음에 같은 파일의 나머지 줄이 이어집니다.</a:t>
+              <a:t>파일 전체 2/3 · 이 슬라이드 다음에 같은 파일의 나머지 줄이 이어집니다.</a:t>
             </a:r>
           </a:p>
         </p:txBody>
@@ -20488,7 +20833,7 @@
               </a:defRPr>
             </a:pPr>
             <a:r>
-              <a:t>파일을 계속 작성하고 저장한다 (3/4)</a:t>
+              <a:t>파일을 계속 작성하고 저장한다 (3/3)</a:t>
             </a:r>
           </a:p>
         </p:txBody>
@@ -20527,7 +20872,7 @@
               </a:defRPr>
             </a:pPr>
             <a:r>
-              <a:t>~/agv_ws/src/agv_vision/agv_vision/yolo_node.py</a:t>
+              <a:t>~/agv_ws/src/agv_gazebo/config/bridge.yaml</a:t>
             </a:r>
           </a:p>
         </p:txBody>
@@ -20663,7 +21008,7 @@
               </a:defRPr>
             </a:pPr>
             <a:r>
-              <a:t>현재 단계 29/31    |    현재 폴더 ~/agv_ws    |    현재 터미널</a:t>
+              <a:t>현재 단계 29/30    |    현재 폴더 ~/agv_ws    |    현재 터미널</a:t>
             </a:r>
           </a:p>
         </p:txBody>
@@ -20676,8 +21021,8 @@
         </p:nvSpPr>
         <p:spPr>
           <a:xfrm>
-            <a:off x="658368" y="1682496"/>
-            <a:ext cx="10972800" cy="347472"/>
+            <a:off x="658368" y="1627632"/>
+            <a:ext cx="10972800" cy="256032"/>
           </a:xfrm>
           <a:prstGeom prst="rect">
             <a:avLst/>
@@ -20694,7 +21039,7 @@
               <a:spcAft>
                 <a:spcPts val="0"/>
               </a:spcAft>
-              <a:defRPr sz="1700" b="1">
+              <a:defRPr sz="1500" b="1">
                 <a:solidFill>
                   <a:srgbClr val="122C4E"/>
                 </a:solidFill>
@@ -20715,8 +21060,8 @@
         </p:nvSpPr>
         <p:spPr>
           <a:xfrm>
-            <a:off x="658368" y="2103120"/>
-            <a:ext cx="10972800" cy="493776"/>
+            <a:off x="658368" y="1956816"/>
+            <a:ext cx="10972800" cy="603504"/>
           </a:xfrm>
           <a:prstGeom prst="rect">
             <a:avLst/>
@@ -20760,7 +21105,11 @@
               </a:defRPr>
             </a:pPr>
             <a:r>
-              <a:t>파일 생성/열기: mkdir -p ~/agv_ws/src/agv_vision/agv_vision    &amp;&amp;    nano ~/agv_ws/src/agv_vision/agv_vision/yolo_node.py</a:t>
+              <a:t>파일 생성: mkdir -p ~/agv_ws/src/agv_gazebo/config</a:t>
+            </a:r>
+            <a:br/>
+            <a:r>
+              <a:t>파일 열기: nano ~/agv_ws/src/agv_gazebo/config/bridge.yaml</a:t>
             </a:r>
           </a:p>
         </p:txBody>
@@ -20773,8 +21122,8 @@
         </p:nvSpPr>
         <p:spPr>
           <a:xfrm>
-            <a:off x="658368" y="2761488"/>
-            <a:ext cx="10972800" cy="3383280"/>
+            <a:off x="658368" y="2706624"/>
+            <a:ext cx="10972800" cy="3364992"/>
           </a:xfrm>
           <a:prstGeom prst="rect">
             <a:avLst/>
@@ -20818,59 +21167,27 @@
               </a:defRPr>
             </a:pPr>
             <a:r>
-              <a:t>        output = DetectionArray(header=image_message.header)</a:t>
-            </a:r>
-            <a:br/>
-            <a:r>
-              <a:t>        if self.model is not None:</a:t>
-            </a:r>
-            <a:br/>
-            <a:r>
-              <a:t>            image = self.bridge.imgmsg_to_cv2(image_message, desired_encoding='bgr8')</a:t>
-            </a:r>
-            <a:br/>
-            <a:r>
-              <a:t>            result = self.model(image, verbose=False)[0]</a:t>
-            </a:r>
-            <a:br/>
-            <a:r>
-              <a:t>            threshold = self.get_parameter('confidence_threshold').value</a:t>
-            </a:r>
-            <a:br/>
-            <a:r>
-              <a:t>            for box in result.boxes:</a:t>
-            </a:r>
-            <a:br/>
-            <a:r>
-              <a:t>                confidence = float(box.conf[0])</a:t>
-            </a:r>
-            <a:br/>
-            <a:r>
-              <a:t>                if confidence &lt; threshold:</a:t>
-            </a:r>
-            <a:br/>
-            <a:r>
-              <a:t>                    continue</a:t>
-            </a:r>
-            <a:br/>
-            <a:r>
-              <a:t>                x1, y1, x2, y2 = [int(value) for value in box.xyxy[0].tolist()]</a:t>
-            </a:r>
-            <a:br/>
-            <a:r>
-              <a:t>                detection = Detection(header=image_message.header,</a:t>
-            </a:r>
-            <a:br/>
-            <a:r>
-              <a:t>                    class_name=result.names[int(box.cls[0])], confidence=confidence,</a:t>
-            </a:r>
-            <a:br/>
-            <a:r>
-              <a:t>                    center_x=(x1 + x2) // 2, center_y=(y1 + y2) // 2, width=x2 - x1,</a:t>
-            </a:r>
-            <a:br/>
-            <a:r>
-              <a:t>                    height=y2 - y1, estimated_distance=0.0)</a:t>
+              <a:t>  direction: GZ_TO_ROS</a:t>
+            </a:r>
+            <a:br/>
+            <a:r>
+              <a:t>- ros_topic_name: "/clock"</a:t>
+            </a:r>
+            <a:br/>
+            <a:r>
+              <a:t>  gz_topic_name: "/clock"</a:t>
+            </a:r>
+            <a:br/>
+            <a:r>
+              <a:t>  ros_type_name: "rosgraph_msgs/msg/Clock"</a:t>
+            </a:r>
+            <a:br/>
+            <a:r>
+              <a:t>  gz_type_name: "gz.msgs.Clock"</a:t>
+            </a:r>
+            <a:br/>
+            <a:r>
+              <a:t>  direction: GZ_TO_ROS</a:t>
             </a:r>
           </a:p>
         </p:txBody>
@@ -20883,7 +21200,7 @@
         </p:nvSpPr>
         <p:spPr>
           <a:xfrm>
-            <a:off x="749808" y="6199632"/>
+            <a:off x="749808" y="6181344"/>
             <a:ext cx="10789920" cy="201168"/>
           </a:xfrm>
           <a:prstGeom prst="rect">
@@ -20909,7 +21226,7 @@
               </a:defRPr>
             </a:pPr>
             <a:r>
-              <a:t>파일 전체 3/4 · 이 슬라이드 다음에 같은 파일의 나머지 줄이 이어집니다.</a:t>
+              <a:t>파일 전체 3/3 · 이 슬라이드 다음에 같은 파일의 나머지 줄이 이어집니다.</a:t>
             </a:r>
           </a:p>
         </p:txBody>
@@ -20966,7 +21283,7 @@
               </a:defRPr>
             </a:pPr>
             <a:r>
-              <a:t>파일을 계속 작성하고 저장한다 (4/4)</a:t>
+              <a:t>파일을 새로 만들고 저장한다 (1/5)</a:t>
             </a:r>
           </a:p>
         </p:txBody>
@@ -21141,7 +21458,7 @@
               </a:defRPr>
             </a:pPr>
             <a:r>
-              <a:t>현재 단계 30/31    |    현재 폴더 ~/agv_ws    |    현재 터미널</a:t>
+              <a:t>현재 단계 30/35    |    현재 폴더 ~/agv_ws    |    현재 터미널</a:t>
             </a:r>
           </a:p>
         </p:txBody>
@@ -21154,8 +21471,8 @@
         </p:nvSpPr>
         <p:spPr>
           <a:xfrm>
-            <a:off x="658368" y="1682496"/>
-            <a:ext cx="10972800" cy="347472"/>
+            <a:off x="658368" y="1627632"/>
+            <a:ext cx="10972800" cy="256032"/>
           </a:xfrm>
           <a:prstGeom prst="rect">
             <a:avLst/>
@@ -21172,7 +21489,7 @@
               <a:spcAft>
                 <a:spcPts val="0"/>
               </a:spcAft>
-              <a:defRPr sz="1700" b="1">
+              <a:defRPr sz="1500" b="1">
                 <a:solidFill>
                   <a:srgbClr val="122C4E"/>
                 </a:solidFill>
@@ -21193,8 +21510,8 @@
         </p:nvSpPr>
         <p:spPr>
           <a:xfrm>
-            <a:off x="658368" y="2103120"/>
-            <a:ext cx="10972800" cy="493776"/>
+            <a:off x="658368" y="1956816"/>
+            <a:ext cx="10972800" cy="603504"/>
           </a:xfrm>
           <a:prstGeom prst="rect">
             <a:avLst/>
@@ -21238,7 +21555,11 @@
               </a:defRPr>
             </a:pPr>
             <a:r>
-              <a:t>파일 생성/열기: mkdir -p ~/agv_ws/src/agv_vision/agv_vision    &amp;&amp;    nano ~/agv_ws/src/agv_vision/agv_vision/yolo_node.py</a:t>
+              <a:t>파일 생성: mkdir -p ~/agv_ws/src/agv_vision/agv_vision</a:t>
+            </a:r>
+            <a:br/>
+            <a:r>
+              <a:t>파일 열기: nano ~/agv_ws/src/agv_vision/agv_vision/yolo_node.py</a:t>
             </a:r>
           </a:p>
         </p:txBody>
@@ -21251,8 +21572,8 @@
         </p:nvSpPr>
         <p:spPr>
           <a:xfrm>
-            <a:off x="658368" y="2761488"/>
-            <a:ext cx="10972800" cy="3383280"/>
+            <a:off x="658368" y="2706624"/>
+            <a:ext cx="10972800" cy="3364992"/>
           </a:xfrm>
           <a:prstGeom prst="rect">
             <a:avLst/>
@@ -21296,56 +21617,45 @@
               </a:defRPr>
             </a:pPr>
             <a:r>
-              <a:t>                output.detections.append(detection)</a:t>
-            </a:r>
-            <a:br/>
-            <a:r>
-              <a:t>        self.publisher.publish(output)</a:t>
-            </a:r>
-            <a:br/>
-            <a:br/>
-            <a:r>
-              <a:t>def main():</a:t>
-            </a:r>
-            <a:br/>
-            <a:r>
-              <a:t>    rclpy.init()</a:t>
-            </a:r>
-            <a:br/>
-            <a:r>
-              <a:t>    node = YoloNode()</a:t>
-            </a:r>
-            <a:br/>
-            <a:r>
-              <a:t>    try:</a:t>
-            </a:r>
-            <a:br/>
-            <a:r>
-              <a:t>        rclpy.spin(node)</a:t>
-            </a:r>
-            <a:br/>
-            <a:r>
-              <a:t>    except KeyboardInterrupt:</a:t>
-            </a:r>
-            <a:br/>
-            <a:r>
-              <a:t>        pass</a:t>
-            </a:r>
-            <a:br/>
-            <a:r>
-              <a:t>    finally:</a:t>
-            </a:r>
-            <a:br/>
-            <a:r>
-              <a:t>        node.destroy_node()</a:t>
-            </a:r>
-            <a:br/>
-            <a:r>
-              <a:t>        if rclpy.ok():</a:t>
-            </a:r>
-            <a:br/>
-            <a:r>
-              <a:t>            rclpy.shutdown()</a:t>
+              <a:t>import rclpy</a:t>
+            </a:r>
+            <a:br/>
+            <a:r>
+              <a:t>from rclpy.node import Node</a:t>
+            </a:r>
+            <a:br/>
+            <a:r>
+              <a:t>from rclpy.qos import qos_profile_sensor_data</a:t>
+            </a:r>
+            <a:br/>
+            <a:r>
+              <a:t>from sensor_msgs.msg import Image</a:t>
+            </a:r>
+            <a:br/>
+            <a:r>
+              <a:t>from cv_bridge import CvBridge</a:t>
+            </a:r>
+            <a:br/>
+            <a:r>
+              <a:t>from agv_interfaces.msg import Detection, DetectionArray</a:t>
+            </a:r>
+            <a:br/>
+            <a:br/>
+            <a:r>
+              <a:t>class YoloNode(Node):</a:t>
+            </a:r>
+            <a:br/>
+            <a:br/>
+            <a:r>
+              <a:t>    def __init__(self):</a:t>
+            </a:r>
+            <a:br/>
+            <a:r>
+              <a:t>        super().__init__('yolo_node')</a:t>
+            </a:r>
+            <a:br/>
+            <a:r>
+              <a:t>        self.declare_parameter('model_path', 'yolo11n.pt')</a:t>
             </a:r>
           </a:p>
         </p:txBody>
@@ -21358,7 +21668,7 @@
         </p:nvSpPr>
         <p:spPr>
           <a:xfrm>
-            <a:off x="749808" y="6199632"/>
+            <a:off x="749808" y="6181344"/>
             <a:ext cx="10789920" cy="201168"/>
           </a:xfrm>
           <a:prstGeom prst="rect">
@@ -21384,7 +21694,7 @@
               </a:defRPr>
             </a:pPr>
             <a:r>
-              <a:t>파일 전체 4/4 · 이 슬라이드 다음에 같은 파일의 나머지 줄이 이어집니다.</a:t>
+              <a:t>파일 전체 1/5 · 이 슬라이드 다음에 같은 파일의 나머지 줄이 이어집니다.</a:t>
             </a:r>
           </a:p>
         </p:txBody>
@@ -21441,7 +21751,7 @@
               </a:defRPr>
             </a:pPr>
             <a:r>
-              <a:t>build → source → run 순서로 실행한다</a:t>
+              <a:t>파일을 계속 작성하고 저장한다 (2/5)</a:t>
             </a:r>
           </a:p>
         </p:txBody>
@@ -21480,7 +21790,7 @@
               </a:defRPr>
             </a:pPr>
             <a:r>
-              <a:t>새 파일 또는 수정 파일은 build와 source 뒤에만 실행 이름·설정에 반영됩니다.</a:t>
+              <a:t>~/agv_ws/src/agv_vision/agv_vision/yolo_node.py</a:t>
             </a:r>
           </a:p>
         </p:txBody>
@@ -21616,23 +21926,124 @@
               </a:defRPr>
             </a:pPr>
             <a:r>
-              <a:t>현재 단계 실행    |    현재 폴더 ~/agv_ws    |    현재 터미널</a:t>
-            </a:r>
-          </a:p>
-        </p:txBody>
-      </p:sp>
-      <p:sp>
-        <p:nvSpPr>
-          <p:cNvPr id="7" name="Rounded Rectangle 6"/>
+              <a:t>현재 단계 31/35    |    현재 폴더 ~/agv_ws    |    현재 터미널</a:t>
+            </a:r>
+          </a:p>
+        </p:txBody>
+      </p:sp>
+      <p:sp>
+        <p:nvSpPr>
+          <p:cNvPr id="7" name="TextBox 6"/>
+          <p:cNvSpPr txBox="1"/>
+          <p:nvPr/>
+        </p:nvSpPr>
+        <p:spPr>
+          <a:xfrm>
+            <a:off x="658368" y="1627632"/>
+            <a:ext cx="10972800" cy="256032"/>
+          </a:xfrm>
+          <a:prstGeom prst="rect">
+            <a:avLst/>
+          </a:prstGeom>
+          <a:noFill/>
+        </p:spPr>
+        <p:txBody>
+          <a:bodyPr wrap="square" lIns="73152" rIns="73152" tIns="36576" bIns="36576">
+            <a:spAutoFit/>
+          </a:bodyPr>
+          <a:lstStyle/>
+          <a:p>
+            <a:pPr algn="l">
+              <a:spcAft>
+                <a:spcPts val="0"/>
+              </a:spcAft>
+              <a:defRPr sz="1500" b="1">
+                <a:solidFill>
+                  <a:srgbClr val="122C4E"/>
+                </a:solidFill>
+                <a:latin typeface="Noto Sans CJK KR"/>
+              </a:defRPr>
+            </a:pPr>
+            <a:r>
+              <a:t>이번 단계: 파일의 전체 내용을 중간 생략 없이 작성합니다. 아래 줄 범위를 끝까지 입력하세요.</a:t>
+            </a:r>
+          </a:p>
+        </p:txBody>
+      </p:sp>
+      <p:sp>
+        <p:nvSpPr>
+          <p:cNvPr id="8" name="Rectangle 7"/>
           <p:cNvSpPr/>
           <p:nvPr/>
         </p:nvSpPr>
         <p:spPr>
           <a:xfrm>
-            <a:off x="658368" y="1700784"/>
-            <a:ext cx="10972800" cy="3182112"/>
-          </a:xfrm>
-          <a:prstGeom prst="roundRect">
+            <a:off x="658368" y="1956816"/>
+            <a:ext cx="10972800" cy="603504"/>
+          </a:xfrm>
+          <a:prstGeom prst="rect">
+            <a:avLst/>
+          </a:prstGeom>
+          <a:solidFill>
+            <a:srgbClr val="F4F7FB"/>
+          </a:solidFill>
+          <a:ln>
+            <a:solidFill>
+              <a:srgbClr val="F4F7FB"/>
+            </a:solidFill>
+          </a:ln>
+        </p:spPr>
+        <p:style>
+          <a:lnRef idx="1">
+            <a:schemeClr val="accent1"/>
+          </a:lnRef>
+          <a:fillRef idx="3">
+            <a:schemeClr val="accent1"/>
+          </a:fillRef>
+          <a:effectRef idx="2">
+            <a:schemeClr val="accent1"/>
+          </a:effectRef>
+          <a:fontRef idx="minor">
+            <a:schemeClr val="lt1"/>
+          </a:fontRef>
+        </p:style>
+        <p:txBody>
+          <a:bodyPr rtlCol="0" anchor="ctr" wrap="square" lIns="73152" rIns="73152" tIns="36576" bIns="36576"/>
+          <a:lstStyle/>
+          <a:p>
+            <a:pPr algn="l">
+              <a:spcAft>
+                <a:spcPts val="0"/>
+              </a:spcAft>
+              <a:defRPr sz="1400" b="0">
+                <a:solidFill>
+                  <a:srgbClr val="122C4E"/>
+                </a:solidFill>
+                <a:latin typeface="DejaVu Sans Mono"/>
+              </a:defRPr>
+            </a:pPr>
+            <a:r>
+              <a:t>파일 생성: mkdir -p ~/agv_ws/src/agv_vision/agv_vision</a:t>
+            </a:r>
+            <a:br/>
+            <a:r>
+              <a:t>파일 열기: nano ~/agv_ws/src/agv_vision/agv_vision/yolo_node.py</a:t>
+            </a:r>
+          </a:p>
+        </p:txBody>
+      </p:sp>
+      <p:sp>
+        <p:nvSpPr>
+          <p:cNvPr id="9" name="Rectangle 8"/>
+          <p:cNvSpPr/>
+          <p:nvPr/>
+        </p:nvSpPr>
+        <p:spPr>
+          <a:xfrm>
+            <a:off x="658368" y="2706624"/>
+            <a:ext cx="10972800" cy="3364992"/>
+          </a:xfrm>
+          <a:prstGeom prst="rect">
             <a:avLst/>
           </a:prstGeom>
           <a:solidFill>
@@ -21659,14 +22070,14 @@
           </a:fontRef>
         </p:style>
         <p:txBody>
-          <a:bodyPr rtlCol="0" anchor="ctr" wrap="square" lIns="73152" rIns="73152" tIns="36576" bIns="36576"/>
-          <a:lstStyle/>
-          <a:p>
-            <a:pPr algn="l">
-              <a:spcAft>
-                <a:spcPts val="0"/>
-              </a:spcAft>
-              <a:defRPr sz="1600" b="0">
+          <a:bodyPr rtlCol="0" anchor="ctr" wrap="square" lIns="164592" rIns="164592" tIns="109728" bIns="36576"/>
+          <a:lstStyle/>
+          <a:p>
+            <a:pPr algn="l">
+              <a:spcAft>
+                <a:spcPts val="0"/>
+              </a:spcAft>
+              <a:defRPr sz="1400" b="0">
                 <a:solidFill>
                   <a:srgbClr val="FFFFFF"/>
                 </a:solidFill>
@@ -21674,25 +22085,65 @@
               </a:defRPr>
             </a:pPr>
             <a:r>
-              <a:t>ros2 launch agv_bringup agv_sim.launch.py rviz:=false</a:t>
-            </a:r>
-            <a:br/>
-            <a:r>
-              <a:t># 새 터미널: ros2 run rqt_image_view rqt_image_view</a:t>
-            </a:r>
-          </a:p>
-        </p:txBody>
-      </p:sp>
-      <p:sp>
-        <p:nvSpPr>
-          <p:cNvPr id="8" name="TextBox 7"/>
+              <a:t>        self.declare_parameter('confidence_threshold', 0.5)</a:t>
+            </a:r>
+            <a:br/>
+            <a:r>
+              <a:t>        self.declare_parameter('enable_yolo', False)</a:t>
+            </a:r>
+            <a:br/>
+            <a:r>
+              <a:t>        self.bridge = CvBridge()</a:t>
+            </a:r>
+            <a:br/>
+            <a:r>
+              <a:t>        self.publisher = self.create_publisher(DetectionArray, '/detections', 10)</a:t>
+            </a:r>
+            <a:br/>
+            <a:r>
+              <a:t>        self.create_subscription(Image, '/camera/image_raw', self.callback,</a:t>
+            </a:r>
+            <a:br/>
+            <a:r>
+              <a:t>            qos_profile_sensor_data)</a:t>
+            </a:r>
+            <a:br/>
+            <a:r>
+              <a:t>        self.model = None</a:t>
+            </a:r>
+            <a:br/>
+            <a:r>
+              <a:t>        if self.get_parameter('enable_yolo').value:</a:t>
+            </a:r>
+            <a:br/>
+            <a:r>
+              <a:t>            try:</a:t>
+            </a:r>
+            <a:br/>
+            <a:r>
+              <a:t>                from ultralytics import YOLO</a:t>
+            </a:r>
+            <a:br/>
+            <a:r>
+              <a:t>                self.model = YOLO(self.get_parameter('model_path').value)</a:t>
+            </a:r>
+            <a:br/>
+            <a:r>
+              <a:t>                self.get_logger().info('YOLO model loaded')</a:t>
+            </a:r>
+          </a:p>
+        </p:txBody>
+      </p:sp>
+      <p:sp>
+        <p:nvSpPr>
+          <p:cNvPr id="10" name="TextBox 9"/>
           <p:cNvSpPr txBox="1"/>
           <p:nvPr/>
         </p:nvSpPr>
         <p:spPr>
           <a:xfrm>
-            <a:off x="786384" y="5239512"/>
-            <a:ext cx="1261872" cy="237744"/>
+            <a:off x="749808" y="6181344"/>
+            <a:ext cx="10789920" cy="201168"/>
           </a:xfrm>
           <a:prstGeom prst="rect">
             <a:avLst/>
@@ -21709,54 +22160,15 @@
               <a:spcAft>
                 <a:spcPts val="0"/>
               </a:spcAft>
-              <a:defRPr sz="1800" b="1">
-                <a:solidFill>
-                  <a:srgbClr val="2A8B5A"/>
-                </a:solidFill>
-                <a:latin typeface="Noto Sans CJK KR"/>
-              </a:defRPr>
-            </a:pPr>
-            <a:r>
-              <a:t>확인 기준</a:t>
-            </a:r>
-          </a:p>
-        </p:txBody>
-      </p:sp>
-      <p:sp>
-        <p:nvSpPr>
-          <p:cNvPr id="9" name="TextBox 8"/>
-          <p:cNvSpPr txBox="1"/>
-          <p:nvPr/>
-        </p:nvSpPr>
-        <p:spPr>
-          <a:xfrm>
-            <a:off x="786384" y="5532120"/>
-            <a:ext cx="10469880" cy="420624"/>
-          </a:xfrm>
-          <a:prstGeom prst="rect">
-            <a:avLst/>
-          </a:prstGeom>
-          <a:noFill/>
-        </p:spPr>
-        <p:txBody>
-          <a:bodyPr wrap="square" lIns="73152" rIns="73152" tIns="36576" bIns="36576">
-            <a:spAutoFit/>
-          </a:bodyPr>
-          <a:lstStyle/>
-          <a:p>
-            <a:pPr algn="l">
-              <a:spcAft>
-                <a:spcPts val="0"/>
-              </a:spcAft>
-              <a:defRPr sz="1800" b="0">
-                <a:solidFill>
-                  <a:srgbClr val="122C4E"/>
-                </a:solidFill>
-                <a:latin typeface="Noto Sans CJK KR"/>
-              </a:defRPr>
-            </a:pPr>
-            <a:r>
-              <a:t>/camera/image_raw가 bridge를 통과하고 cv_bridge 소비 노드가 받을 준비가 된 상태를 확인한다.</a:t>
+              <a:defRPr sz="1000" b="0">
+                <a:solidFill>
+                  <a:srgbClr val="5C6672"/>
+                </a:solidFill>
+                <a:latin typeface="Noto Sans CJK KR"/>
+              </a:defRPr>
+            </a:pPr>
+            <a:r>
+              <a:t>파일 전체 2/5 · 이 슬라이드 다음에 같은 파일의 나머지 줄이 이어집니다.</a:t>
             </a:r>
           </a:p>
         </p:txBody>
@@ -21813,7 +22225,7 @@
               </a:defRPr>
             </a:pPr>
             <a:r>
-              <a:t>정상 결과: 실제 환경에서 확인한 출력</a:t>
+              <a:t>파일을 계속 작성하고 저장한다 (3/5)</a:t>
             </a:r>
           </a:p>
         </p:txBody>
@@ -21852,7 +22264,7 @@
               </a:defRPr>
             </a:pPr>
             <a:r>
-              <a:t>실제 ROS 2 환경의 파일·패키지·구성 검증 로그</a:t>
+              <a:t>~/agv_ws/src/agv_vision/agv_vision/yolo_node.py</a:t>
             </a:r>
           </a:p>
         </p:txBody>
@@ -21935,30 +22347,64 @@
           </a:p>
         </p:txBody>
       </p:sp>
-      <p:pic>
-        <p:nvPicPr>
-          <p:cNvPr id="6" name="Picture 5" descr="validation_terminal.png"/>
-          <p:cNvPicPr>
-            <a:picLocks noChangeAspect="1"/>
-          </p:cNvPicPr>
-          <p:nvPr/>
-        </p:nvPicPr>
-        <p:blipFill>
-          <a:blip r:embed="rId2"/>
-          <a:stretch>
-            <a:fillRect/>
-          </a:stretch>
-        </p:blipFill>
-        <p:spPr>
-          <a:xfrm>
-            <a:off x="790956" y="1884338"/>
-            <a:ext cx="10607040" cy="3738546"/>
-          </a:xfrm>
-          <a:prstGeom prst="rect">
-            <a:avLst/>
-          </a:prstGeom>
-        </p:spPr>
-      </p:pic>
+      <p:sp>
+        <p:nvSpPr>
+          <p:cNvPr id="6" name="Rectangle 5"/>
+          <p:cNvSpPr/>
+          <p:nvPr/>
+        </p:nvSpPr>
+        <p:spPr>
+          <a:xfrm>
+            <a:off x="566928" y="1188720"/>
+            <a:ext cx="11064240" cy="347472"/>
+          </a:xfrm>
+          <a:prstGeom prst="rect">
+            <a:avLst/>
+          </a:prstGeom>
+          <a:solidFill>
+            <a:srgbClr val="F4F7FB"/>
+          </a:solidFill>
+          <a:ln>
+            <a:solidFill>
+              <a:srgbClr val="F4F7FB"/>
+            </a:solidFill>
+          </a:ln>
+        </p:spPr>
+        <p:style>
+          <a:lnRef idx="1">
+            <a:schemeClr val="accent1"/>
+          </a:lnRef>
+          <a:fillRef idx="3">
+            <a:schemeClr val="accent1"/>
+          </a:fillRef>
+          <a:effectRef idx="2">
+            <a:schemeClr val="accent1"/>
+          </a:effectRef>
+          <a:fontRef idx="minor">
+            <a:schemeClr val="lt1"/>
+          </a:fontRef>
+        </p:style>
+        <p:txBody>
+          <a:bodyPr rtlCol="0" anchor="ctr" wrap="square" lIns="73152" rIns="73152" tIns="36576" bIns="36576"/>
+          <a:lstStyle/>
+          <a:p>
+            <a:pPr algn="l">
+              <a:spcAft>
+                <a:spcPts val="0"/>
+              </a:spcAft>
+              <a:defRPr sz="1300" b="1">
+                <a:solidFill>
+                  <a:srgbClr val="122C4E"/>
+                </a:solidFill>
+                <a:latin typeface="Noto Sans CJK KR"/>
+              </a:defRPr>
+            </a:pPr>
+            <a:r>
+              <a:t>현재 단계 32/35    |    현재 폴더 ~/agv_ws    |    현재 터미널</a:t>
+            </a:r>
+          </a:p>
+        </p:txBody>
+      </p:sp>
       <p:sp>
         <p:nvSpPr>
           <p:cNvPr id="7" name="TextBox 6"/>
@@ -21967,8 +22413,8 @@
         </p:nvSpPr>
         <p:spPr>
           <a:xfrm>
-            <a:off x="777240" y="6217920"/>
-            <a:ext cx="10607040" cy="182880"/>
+            <a:off x="658368" y="1627632"/>
+            <a:ext cx="10972800" cy="256032"/>
           </a:xfrm>
           <a:prstGeom prst="rect">
             <a:avLst/>
@@ -21981,19 +22427,219 @@
           </a:bodyPr>
           <a:lstStyle/>
           <a:p>
-            <a:pPr algn="ctr">
-              <a:spcAft>
-                <a:spcPts val="0"/>
-              </a:spcAft>
-              <a:defRPr sz="1100" b="1">
-                <a:solidFill>
-                  <a:srgbClr val="2A8B5A"/>
-                </a:solidFill>
-                <a:latin typeface="Noto Sans CJK KR"/>
-              </a:defRPr>
-            </a:pPr>
-            <a:r>
-              <a:t>① 명령/설정  ② 정상 출력 또는 화면  ③ 다음 검증 명령으로 재확인</a:t>
+            <a:pPr algn="l">
+              <a:spcAft>
+                <a:spcPts val="0"/>
+              </a:spcAft>
+              <a:defRPr sz="1500" b="1">
+                <a:solidFill>
+                  <a:srgbClr val="122C4E"/>
+                </a:solidFill>
+                <a:latin typeface="Noto Sans CJK KR"/>
+              </a:defRPr>
+            </a:pPr>
+            <a:r>
+              <a:t>이번 단계: 파일의 전체 내용을 중간 생략 없이 작성합니다. 아래 줄 범위를 끝까지 입력하세요.</a:t>
+            </a:r>
+          </a:p>
+        </p:txBody>
+      </p:sp>
+      <p:sp>
+        <p:nvSpPr>
+          <p:cNvPr id="8" name="Rectangle 7"/>
+          <p:cNvSpPr/>
+          <p:nvPr/>
+        </p:nvSpPr>
+        <p:spPr>
+          <a:xfrm>
+            <a:off x="658368" y="1956816"/>
+            <a:ext cx="10972800" cy="603504"/>
+          </a:xfrm>
+          <a:prstGeom prst="rect">
+            <a:avLst/>
+          </a:prstGeom>
+          <a:solidFill>
+            <a:srgbClr val="F4F7FB"/>
+          </a:solidFill>
+          <a:ln>
+            <a:solidFill>
+              <a:srgbClr val="F4F7FB"/>
+            </a:solidFill>
+          </a:ln>
+        </p:spPr>
+        <p:style>
+          <a:lnRef idx="1">
+            <a:schemeClr val="accent1"/>
+          </a:lnRef>
+          <a:fillRef idx="3">
+            <a:schemeClr val="accent1"/>
+          </a:fillRef>
+          <a:effectRef idx="2">
+            <a:schemeClr val="accent1"/>
+          </a:effectRef>
+          <a:fontRef idx="minor">
+            <a:schemeClr val="lt1"/>
+          </a:fontRef>
+        </p:style>
+        <p:txBody>
+          <a:bodyPr rtlCol="0" anchor="ctr" wrap="square" lIns="73152" rIns="73152" tIns="36576" bIns="36576"/>
+          <a:lstStyle/>
+          <a:p>
+            <a:pPr algn="l">
+              <a:spcAft>
+                <a:spcPts val="0"/>
+              </a:spcAft>
+              <a:defRPr sz="1400" b="0">
+                <a:solidFill>
+                  <a:srgbClr val="122C4E"/>
+                </a:solidFill>
+                <a:latin typeface="DejaVu Sans Mono"/>
+              </a:defRPr>
+            </a:pPr>
+            <a:r>
+              <a:t>파일 생성: mkdir -p ~/agv_ws/src/agv_vision/agv_vision</a:t>
+            </a:r>
+            <a:br/>
+            <a:r>
+              <a:t>파일 열기: nano ~/agv_ws/src/agv_vision/agv_vision/yolo_node.py</a:t>
+            </a:r>
+          </a:p>
+        </p:txBody>
+      </p:sp>
+      <p:sp>
+        <p:nvSpPr>
+          <p:cNvPr id="9" name="Rectangle 8"/>
+          <p:cNvSpPr/>
+          <p:nvPr/>
+        </p:nvSpPr>
+        <p:spPr>
+          <a:xfrm>
+            <a:off x="658368" y="2706624"/>
+            <a:ext cx="10972800" cy="3364992"/>
+          </a:xfrm>
+          <a:prstGeom prst="rect">
+            <a:avLst/>
+          </a:prstGeom>
+          <a:solidFill>
+            <a:srgbClr val="1D232D"/>
+          </a:solidFill>
+          <a:ln>
+            <a:solidFill>
+              <a:srgbClr val="1D232D"/>
+            </a:solidFill>
+          </a:ln>
+        </p:spPr>
+        <p:style>
+          <a:lnRef idx="1">
+            <a:schemeClr val="accent1"/>
+          </a:lnRef>
+          <a:fillRef idx="3">
+            <a:schemeClr val="accent1"/>
+          </a:fillRef>
+          <a:effectRef idx="2">
+            <a:schemeClr val="accent1"/>
+          </a:effectRef>
+          <a:fontRef idx="minor">
+            <a:schemeClr val="lt1"/>
+          </a:fontRef>
+        </p:style>
+        <p:txBody>
+          <a:bodyPr rtlCol="0" anchor="ctr" wrap="square" lIns="164592" rIns="164592" tIns="109728" bIns="36576"/>
+          <a:lstStyle/>
+          <a:p>
+            <a:pPr algn="l">
+              <a:spcAft>
+                <a:spcPts val="0"/>
+              </a:spcAft>
+              <a:defRPr sz="1400" b="0">
+                <a:solidFill>
+                  <a:srgbClr val="FFFFFF"/>
+                </a:solidFill>
+                <a:latin typeface="DejaVu Sans Mono"/>
+              </a:defRPr>
+            </a:pPr>
+            <a:r>
+              <a:t>            except ImportError:</a:t>
+            </a:r>
+            <a:br/>
+            <a:r>
+              <a:t>                self.get_logger().error('ultralytics is not installed: follow M17 before enable_yolo:=true')</a:t>
+            </a:r>
+            <a:br/>
+            <a:br/>
+            <a:r>
+              <a:t>    def callback(self, image_message):</a:t>
+            </a:r>
+            <a:br/>
+            <a:r>
+              <a:t>        output = DetectionArray(header=image_message.header)</a:t>
+            </a:r>
+            <a:br/>
+            <a:r>
+              <a:t>        if self.model is not None:</a:t>
+            </a:r>
+            <a:br/>
+            <a:r>
+              <a:t>            image = self.bridge.imgmsg_to_cv2(image_message, desired_encoding='bgr8')</a:t>
+            </a:r>
+            <a:br/>
+            <a:r>
+              <a:t>            result = self.model(image, verbose=False)[0]</a:t>
+            </a:r>
+            <a:br/>
+            <a:r>
+              <a:t>            threshold = self.get_parameter('confidence_threshold').value</a:t>
+            </a:r>
+            <a:br/>
+            <a:r>
+              <a:t>            for box in result.boxes:</a:t>
+            </a:r>
+            <a:br/>
+            <a:r>
+              <a:t>                confidence = float(box.conf[0])</a:t>
+            </a:r>
+            <a:br/>
+            <a:r>
+              <a:t>                if confidence &lt; threshold:</a:t>
+            </a:r>
+          </a:p>
+        </p:txBody>
+      </p:sp>
+      <p:sp>
+        <p:nvSpPr>
+          <p:cNvPr id="10" name="TextBox 9"/>
+          <p:cNvSpPr txBox="1"/>
+          <p:nvPr/>
+        </p:nvSpPr>
+        <p:spPr>
+          <a:xfrm>
+            <a:off x="749808" y="6181344"/>
+            <a:ext cx="10789920" cy="201168"/>
+          </a:xfrm>
+          <a:prstGeom prst="rect">
+            <a:avLst/>
+          </a:prstGeom>
+          <a:noFill/>
+        </p:spPr>
+        <p:txBody>
+          <a:bodyPr wrap="square" lIns="73152" rIns="73152" tIns="36576" bIns="36576">
+            <a:spAutoFit/>
+          </a:bodyPr>
+          <a:lstStyle/>
+          <a:p>
+            <a:pPr algn="l">
+              <a:spcAft>
+                <a:spcPts val="0"/>
+              </a:spcAft>
+              <a:defRPr sz="1000" b="0">
+                <a:solidFill>
+                  <a:srgbClr val="5C6672"/>
+                </a:solidFill>
+                <a:latin typeface="Noto Sans CJK KR"/>
+              </a:defRPr>
+            </a:pPr>
+            <a:r>
+              <a:t>파일 전체 3/5 · 이 슬라이드 다음에 같은 파일의 나머지 줄이 이어집니다.</a:t>
             </a:r>
           </a:p>
         </p:txBody>
@@ -22050,7 +22696,7 @@
               </a:defRPr>
             </a:pPr>
             <a:r>
-              <a:t>객관적 검증 명령으로 완료를 확인한다</a:t>
+              <a:t>파일을 계속 작성하고 저장한다 (4/5)</a:t>
             </a:r>
           </a:p>
         </p:txBody>
@@ -22089,7 +22735,7 @@
               </a:defRPr>
             </a:pPr>
             <a:r>
-              <a:t>화면만 보지 말고 topic·frame·파일·parameter를 다시 확인합니다.</a:t>
+              <a:t>~/agv_ws/src/agv_vision/agv_vision/yolo_node.py</a:t>
             </a:r>
           </a:p>
         </p:txBody>
@@ -22225,23 +22871,124 @@
               </a:defRPr>
             </a:pPr>
             <a:r>
-              <a:t>현재 단계 검증    |    현재 폴더 ~/agv_ws    |    현재 터미널</a:t>
-            </a:r>
-          </a:p>
-        </p:txBody>
-      </p:sp>
-      <p:sp>
-        <p:nvSpPr>
-          <p:cNvPr id="7" name="Rounded Rectangle 6"/>
+              <a:t>현재 단계 33/35    |    현재 폴더 ~/agv_ws    |    현재 터미널</a:t>
+            </a:r>
+          </a:p>
+        </p:txBody>
+      </p:sp>
+      <p:sp>
+        <p:nvSpPr>
+          <p:cNvPr id="7" name="TextBox 6"/>
+          <p:cNvSpPr txBox="1"/>
+          <p:nvPr/>
+        </p:nvSpPr>
+        <p:spPr>
+          <a:xfrm>
+            <a:off x="658368" y="1627632"/>
+            <a:ext cx="10972800" cy="256032"/>
+          </a:xfrm>
+          <a:prstGeom prst="rect">
+            <a:avLst/>
+          </a:prstGeom>
+          <a:noFill/>
+        </p:spPr>
+        <p:txBody>
+          <a:bodyPr wrap="square" lIns="73152" rIns="73152" tIns="36576" bIns="36576">
+            <a:spAutoFit/>
+          </a:bodyPr>
+          <a:lstStyle/>
+          <a:p>
+            <a:pPr algn="l">
+              <a:spcAft>
+                <a:spcPts val="0"/>
+              </a:spcAft>
+              <a:defRPr sz="1500" b="1">
+                <a:solidFill>
+                  <a:srgbClr val="122C4E"/>
+                </a:solidFill>
+                <a:latin typeface="Noto Sans CJK KR"/>
+              </a:defRPr>
+            </a:pPr>
+            <a:r>
+              <a:t>이번 단계: 파일의 전체 내용을 중간 생략 없이 작성합니다. 아래 줄 범위를 끝까지 입력하세요.</a:t>
+            </a:r>
+          </a:p>
+        </p:txBody>
+      </p:sp>
+      <p:sp>
+        <p:nvSpPr>
+          <p:cNvPr id="8" name="Rectangle 7"/>
           <p:cNvSpPr/>
           <p:nvPr/>
         </p:nvSpPr>
         <p:spPr>
           <a:xfrm>
-            <a:off x="658368" y="1755648"/>
-            <a:ext cx="10972800" cy="2148840"/>
-          </a:xfrm>
-          <a:prstGeom prst="roundRect">
+            <a:off x="658368" y="1956816"/>
+            <a:ext cx="10972800" cy="603504"/>
+          </a:xfrm>
+          <a:prstGeom prst="rect">
+            <a:avLst/>
+          </a:prstGeom>
+          <a:solidFill>
+            <a:srgbClr val="F4F7FB"/>
+          </a:solidFill>
+          <a:ln>
+            <a:solidFill>
+              <a:srgbClr val="F4F7FB"/>
+            </a:solidFill>
+          </a:ln>
+        </p:spPr>
+        <p:style>
+          <a:lnRef idx="1">
+            <a:schemeClr val="accent1"/>
+          </a:lnRef>
+          <a:fillRef idx="3">
+            <a:schemeClr val="accent1"/>
+          </a:fillRef>
+          <a:effectRef idx="2">
+            <a:schemeClr val="accent1"/>
+          </a:effectRef>
+          <a:fontRef idx="minor">
+            <a:schemeClr val="lt1"/>
+          </a:fontRef>
+        </p:style>
+        <p:txBody>
+          <a:bodyPr rtlCol="0" anchor="ctr" wrap="square" lIns="73152" rIns="73152" tIns="36576" bIns="36576"/>
+          <a:lstStyle/>
+          <a:p>
+            <a:pPr algn="l">
+              <a:spcAft>
+                <a:spcPts val="0"/>
+              </a:spcAft>
+              <a:defRPr sz="1400" b="0">
+                <a:solidFill>
+                  <a:srgbClr val="122C4E"/>
+                </a:solidFill>
+                <a:latin typeface="DejaVu Sans Mono"/>
+              </a:defRPr>
+            </a:pPr>
+            <a:r>
+              <a:t>파일 생성: mkdir -p ~/agv_ws/src/agv_vision/agv_vision</a:t>
+            </a:r>
+            <a:br/>
+            <a:r>
+              <a:t>파일 열기: nano ~/agv_ws/src/agv_vision/agv_vision/yolo_node.py</a:t>
+            </a:r>
+          </a:p>
+        </p:txBody>
+      </p:sp>
+      <p:sp>
+        <p:nvSpPr>
+          <p:cNvPr id="9" name="Rectangle 8"/>
+          <p:cNvSpPr/>
+          <p:nvPr/>
+        </p:nvSpPr>
+        <p:spPr>
+          <a:xfrm>
+            <a:off x="658368" y="2706624"/>
+            <a:ext cx="10972800" cy="3364992"/>
+          </a:xfrm>
+          <a:prstGeom prst="rect">
             <a:avLst/>
           </a:prstGeom>
           <a:solidFill>
@@ -22268,14 +23015,14 @@
           </a:fontRef>
         </p:style>
         <p:txBody>
-          <a:bodyPr rtlCol="0" anchor="ctr" wrap="square" lIns="73152" rIns="73152" tIns="36576" bIns="36576"/>
-          <a:lstStyle/>
-          <a:p>
-            <a:pPr algn="l">
-              <a:spcAft>
-                <a:spcPts val="0"/>
-              </a:spcAft>
-              <a:defRPr sz="1600" b="0">
+          <a:bodyPr rtlCol="0" anchor="ctr" wrap="square" lIns="164592" rIns="164592" tIns="109728" bIns="36576"/>
+          <a:lstStyle/>
+          <a:p>
+            <a:pPr algn="l">
+              <a:spcAft>
+                <a:spcPts val="0"/>
+              </a:spcAft>
+              <a:defRPr sz="1400" b="0">
                 <a:solidFill>
                   <a:srgbClr val="FFFFFF"/>
                 </a:solidFill>
@@ -22283,95 +23030,62 @@
               </a:defRPr>
             </a:pPr>
             <a:r>
-              <a:t>ros2 topic info /camera/image_raw</a:t>
-            </a:r>
-            <a:br/>
-            <a:r>
-              <a:t>ros2 topic hz /camera/image_raw</a:t>
-            </a:r>
-          </a:p>
-        </p:txBody>
-      </p:sp>
-      <p:sp>
-        <p:nvSpPr>
-          <p:cNvPr id="8" name="Rounded Rectangle 7"/>
-          <p:cNvSpPr/>
-          <p:nvPr/>
-        </p:nvSpPr>
-        <p:spPr>
-          <a:xfrm>
-            <a:off x="658368" y="4206240"/>
-            <a:ext cx="10972800" cy="1554480"/>
-          </a:xfrm>
-          <a:prstGeom prst="roundRect">
-            <a:avLst/>
-          </a:prstGeom>
-          <a:solidFill>
-            <a:srgbClr val="F4F7FB"/>
-          </a:solidFill>
-          <a:ln>
-            <a:solidFill>
-              <a:srgbClr val="D1DFD5"/>
-            </a:solidFill>
-          </a:ln>
-        </p:spPr>
-        <p:style>
-          <a:lnRef idx="1">
-            <a:schemeClr val="accent1"/>
-          </a:lnRef>
-          <a:fillRef idx="3">
-            <a:schemeClr val="accent1"/>
-          </a:fillRef>
-          <a:effectRef idx="2">
-            <a:schemeClr val="accent1"/>
-          </a:effectRef>
-          <a:fontRef idx="minor">
-            <a:schemeClr val="lt1"/>
-          </a:fontRef>
-        </p:style>
-        <p:txBody>
-          <a:bodyPr rtlCol="0" anchor="ctr" wrap="square" lIns="73152" rIns="73152" tIns="36576" bIns="36576"/>
-          <a:lstStyle/>
-          <a:p>
-            <a:pPr algn="l">
-              <a:spcAft>
-                <a:spcPts val="0"/>
-              </a:spcAft>
-              <a:defRPr sz="1800" b="1">
-                <a:solidFill>
-                  <a:srgbClr val="2A8B5A"/>
-                </a:solidFill>
-                <a:latin typeface="Noto Sans CJK KR"/>
-              </a:defRPr>
-            </a:pPr>
-            <a:r>
-              <a:t>완료 체크</a:t>
-            </a:r>
-            <a:br/>
-            <a:r>
-              <a:t>□ 명령이 오류 없이 실행된다.</a:t>
-            </a:r>
-            <a:br/>
-            <a:r>
-              <a:t>□ 기대한 파일·topic·frame·parameter 이름이 보인다.</a:t>
-            </a:r>
-            <a:br/>
-            <a:r>
-              <a:t>□ 값의 단위와 방향을 한 문장으로 설명할 수 있다.</a:t>
-            </a:r>
-          </a:p>
-        </p:txBody>
-      </p:sp>
-      <p:sp>
-        <p:nvSpPr>
-          <p:cNvPr id="9" name="TextBox 8"/>
+              <a:t>                    continue</a:t>
+            </a:r>
+            <a:br/>
+            <a:r>
+              <a:t>                x1, y1, x2, y2 = [int(value) for value in box.xyxy[0].tolist()]</a:t>
+            </a:r>
+            <a:br/>
+            <a:r>
+              <a:t>                detection = Detection(header=image_message.header,</a:t>
+            </a:r>
+            <a:br/>
+            <a:r>
+              <a:t>                    class_name=result.names[int(box.cls[0])], confidence=confidence,</a:t>
+            </a:r>
+            <a:br/>
+            <a:r>
+              <a:t>                    center_x=(x1 + x2) // 2, center_y=(y1 + y2) // 2, width=x2 - x1,</a:t>
+            </a:r>
+            <a:br/>
+            <a:r>
+              <a:t>                    height=y2 - y1, estimated_distance=0.0)</a:t>
+            </a:r>
+            <a:br/>
+            <a:r>
+              <a:t>                output.detections.append(detection)</a:t>
+            </a:r>
+            <a:br/>
+            <a:r>
+              <a:t>        self.publisher.publish(output)</a:t>
+            </a:r>
+            <a:br/>
+            <a:br/>
+            <a:r>
+              <a:t>def main():</a:t>
+            </a:r>
+            <a:br/>
+            <a:r>
+              <a:t>    rclpy.init()</a:t>
+            </a:r>
+            <a:br/>
+            <a:r>
+              <a:t>    node = YoloNode()</a:t>
+            </a:r>
+          </a:p>
+        </p:txBody>
+      </p:sp>
+      <p:sp>
+        <p:nvSpPr>
+          <p:cNvPr id="10" name="TextBox 9"/>
           <p:cNvSpPr txBox="1"/>
           <p:nvPr/>
         </p:nvSpPr>
         <p:spPr>
           <a:xfrm>
-            <a:off x="731520" y="5989320"/>
-            <a:ext cx="10789920" cy="237744"/>
+            <a:off x="749808" y="6181344"/>
+            <a:ext cx="10789920" cy="201168"/>
           </a:xfrm>
           <a:prstGeom prst="rect">
             <a:avLst/>
@@ -22388,15 +23102,15 @@
               <a:spcAft>
                 <a:spcPts val="0"/>
               </a:spcAft>
-              <a:defRPr sz="1500" b="1">
-                <a:solidFill>
-                  <a:srgbClr val="122C4E"/>
-                </a:solidFill>
-                <a:latin typeface="Noto Sans CJK KR"/>
-              </a:defRPr>
-            </a:pPr>
-            <a:r>
-              <a:t>완료 조건: /camera/image_raw가 bridge를 통과하고 cv_bridge 소비 노드가 받을 준비가 된 상태를 확인한다.</a:t>
+              <a:defRPr sz="1000" b="0">
+                <a:solidFill>
+                  <a:srgbClr val="5C6672"/>
+                </a:solidFill>
+                <a:latin typeface="Noto Sans CJK KR"/>
+              </a:defRPr>
+            </a:pPr>
+            <a:r>
+              <a:t>파일 전체 4/5 · 이 슬라이드 다음에 같은 파일의 나머지 줄이 이어집니다.</a:t>
             </a:r>
           </a:p>
         </p:txBody>
@@ -22786,7 +23500,7 @@
               </a:defRPr>
             </a:pPr>
             <a:r>
-              <a:t>막히면: 증상 → 우선 확인 → 재검증</a:t>
+              <a:t>파일을 계속 작성하고 저장한다 (5/5)</a:t>
             </a:r>
           </a:p>
         </p:txBody>
@@ -22825,7 +23539,7 @@
               </a:defRPr>
             </a:pPr>
             <a:r>
-              <a:t>오류 메시지를 숨기지 않고 같은 순서로 점검합니다.</a:t>
+              <a:t>~/agv_ws/src/agv_vision/agv_vision/yolo_node.py</a:t>
             </a:r>
           </a:p>
         </p:txBody>
@@ -22961,31 +23675,70 @@
               </a:defRPr>
             </a:pPr>
             <a:r>
-              <a:t>현재 단계 오류 대응    |    현재 폴더 ~/agv_ws    |    현재 터미널</a:t>
-            </a:r>
-          </a:p>
-        </p:txBody>
-      </p:sp>
-      <p:sp>
-        <p:nvSpPr>
-          <p:cNvPr id="7" name="Rounded Rectangle 6"/>
+              <a:t>현재 단계 34/35    |    현재 폴더 ~/agv_ws    |    현재 터미널</a:t>
+            </a:r>
+          </a:p>
+        </p:txBody>
+      </p:sp>
+      <p:sp>
+        <p:nvSpPr>
+          <p:cNvPr id="7" name="TextBox 6"/>
+          <p:cNvSpPr txBox="1"/>
+          <p:nvPr/>
+        </p:nvSpPr>
+        <p:spPr>
+          <a:xfrm>
+            <a:off x="658368" y="1627632"/>
+            <a:ext cx="10972800" cy="256032"/>
+          </a:xfrm>
+          <a:prstGeom prst="rect">
+            <a:avLst/>
+          </a:prstGeom>
+          <a:noFill/>
+        </p:spPr>
+        <p:txBody>
+          <a:bodyPr wrap="square" lIns="73152" rIns="73152" tIns="36576" bIns="36576">
+            <a:spAutoFit/>
+          </a:bodyPr>
+          <a:lstStyle/>
+          <a:p>
+            <a:pPr algn="l">
+              <a:spcAft>
+                <a:spcPts val="0"/>
+              </a:spcAft>
+              <a:defRPr sz="1500" b="1">
+                <a:solidFill>
+                  <a:srgbClr val="122C4E"/>
+                </a:solidFill>
+                <a:latin typeface="Noto Sans CJK KR"/>
+              </a:defRPr>
+            </a:pPr>
+            <a:r>
+              <a:t>이번 단계: 파일의 전체 내용을 중간 생략 없이 작성합니다. 아래 줄 범위를 끝까지 입력하세요.</a:t>
+            </a:r>
+          </a:p>
+        </p:txBody>
+      </p:sp>
+      <p:sp>
+        <p:nvSpPr>
+          <p:cNvPr id="8" name="Rectangle 7"/>
           <p:cNvSpPr/>
           <p:nvPr/>
         </p:nvSpPr>
         <p:spPr>
           <a:xfrm>
-            <a:off x="694944" y="1755648"/>
-            <a:ext cx="10972800" cy="1115568"/>
-          </a:xfrm>
-          <a:prstGeom prst="roundRect">
+            <a:off x="658368" y="1956816"/>
+            <a:ext cx="10972800" cy="603504"/>
+          </a:xfrm>
+          <a:prstGeom prst="rect">
             <a:avLst/>
           </a:prstGeom>
           <a:solidFill>
-            <a:srgbClr val="FFF7F4"/>
+            <a:srgbClr val="F4F7FB"/>
           </a:solidFill>
           <a:ln>
             <a:solidFill>
-              <a:srgbClr val="EDBEB4"/>
+              <a:srgbClr val="F4F7FB"/>
             </a:solidFill>
           </a:ln>
         </p:spPr>
@@ -23004,115 +23757,50 @@
           </a:fontRef>
         </p:style>
         <p:txBody>
-          <a:bodyPr rtlCol="0" anchor="ctr"/>
-          <a:lstStyle/>
-          <a:p>
-            <a:pPr algn="ctr"/>
-          </a:p>
-        </p:txBody>
-      </p:sp>
-      <p:sp>
-        <p:nvSpPr>
-          <p:cNvPr id="8" name="TextBox 7"/>
-          <p:cNvSpPr txBox="1"/>
-          <p:nvPr/>
-        </p:nvSpPr>
-        <p:spPr>
-          <a:xfrm>
-            <a:off x="896112" y="1901952"/>
-            <a:ext cx="2926080" cy="274320"/>
-          </a:xfrm>
-          <a:prstGeom prst="rect">
-            <a:avLst/>
-          </a:prstGeom>
-          <a:noFill/>
-        </p:spPr>
-        <p:txBody>
-          <a:bodyPr wrap="square" lIns="73152" rIns="73152" tIns="36576" bIns="36576">
-            <a:spAutoFit/>
-          </a:bodyPr>
-          <a:lstStyle/>
-          <a:p>
-            <a:pPr algn="l">
-              <a:spcAft>
-                <a:spcPts val="0"/>
-              </a:spcAft>
-              <a:defRPr sz="1800" b="1">
-                <a:solidFill>
-                  <a:srgbClr val="BE3B3B"/>
-                </a:solidFill>
-                <a:latin typeface="Noto Sans CJK KR"/>
-              </a:defRPr>
-            </a:pPr>
-            <a:r>
-              <a:t>증상 1: 영상이 검정</a:t>
-            </a:r>
-          </a:p>
-        </p:txBody>
-      </p:sp>
-      <p:sp>
-        <p:nvSpPr>
-          <p:cNvPr id="9" name="TextBox 8"/>
-          <p:cNvSpPr txBox="1"/>
-          <p:nvPr/>
-        </p:nvSpPr>
-        <p:spPr>
-          <a:xfrm>
-            <a:off x="3794760" y="1883664"/>
-            <a:ext cx="7543800" cy="621792"/>
-          </a:xfrm>
-          <a:prstGeom prst="rect">
-            <a:avLst/>
-          </a:prstGeom>
-          <a:noFill/>
-        </p:spPr>
-        <p:txBody>
-          <a:bodyPr wrap="square" lIns="73152" rIns="73152" tIns="36576" bIns="36576">
-            <a:spAutoFit/>
-          </a:bodyPr>
-          <a:lstStyle/>
-          <a:p>
-            <a:pPr algn="l">
-              <a:spcAft>
-                <a:spcPts val="0"/>
-              </a:spcAft>
-              <a:defRPr sz="1600" b="0">
+          <a:bodyPr rtlCol="0" anchor="ctr" wrap="square" lIns="73152" rIns="73152" tIns="36576" bIns="36576"/>
+          <a:lstStyle/>
+          <a:p>
+            <a:pPr algn="l">
+              <a:spcAft>
+                <a:spcPts val="0"/>
+              </a:spcAft>
+              <a:defRPr sz="1400" b="0">
                 <a:solidFill>
                   <a:srgbClr val="122C4E"/>
                 </a:solidFill>
-                <a:latin typeface="Noto Sans CJK KR"/>
-              </a:defRPr>
-            </a:pPr>
-            <a:r>
-              <a:t>우선 확인: camera pose/FOV·world light·clipping range를 확인한다.</a:t>
-            </a:r>
-            <a:br/>
-            <a:r>
-              <a:t>수정 후: ros2 topic info /camera/image_raw</a:t>
-            </a:r>
-          </a:p>
-        </p:txBody>
-      </p:sp>
-      <p:sp>
-        <p:nvSpPr>
-          <p:cNvPr id="10" name="Rounded Rectangle 9"/>
+                <a:latin typeface="DejaVu Sans Mono"/>
+              </a:defRPr>
+            </a:pPr>
+            <a:r>
+              <a:t>파일 생성: mkdir -p ~/agv_ws/src/agv_vision/agv_vision</a:t>
+            </a:r>
+            <a:br/>
+            <a:r>
+              <a:t>파일 열기: nano ~/agv_ws/src/agv_vision/agv_vision/yolo_node.py</a:t>
+            </a:r>
+          </a:p>
+        </p:txBody>
+      </p:sp>
+      <p:sp>
+        <p:nvSpPr>
+          <p:cNvPr id="9" name="Rectangle 8"/>
           <p:cNvSpPr/>
           <p:nvPr/>
         </p:nvSpPr>
         <p:spPr>
           <a:xfrm>
-            <a:off x="694944" y="3172968"/>
-            <a:ext cx="10972800" cy="1115568"/>
-          </a:xfrm>
-          <a:prstGeom prst="roundRect">
+            <a:off x="658368" y="2706624"/>
+            <a:ext cx="10972800" cy="3364992"/>
+          </a:xfrm>
+          <a:prstGeom prst="rect">
             <a:avLst/>
           </a:prstGeom>
           <a:solidFill>
-            <a:srgbClr val="FFF7F4"/>
+            <a:srgbClr val="1D232D"/>
           </a:solidFill>
           <a:ln>
             <a:solidFill>
-              <a:srgbClr val="EDBEB4"/>
+              <a:srgbClr val="1D232D"/>
             </a:solidFill>
           </a:ln>
         </p:spPr>
@@ -23131,23 +23819,64 @@
           </a:fontRef>
         </p:style>
         <p:txBody>
-          <a:bodyPr rtlCol="0" anchor="ctr"/>
-          <a:lstStyle/>
-          <a:p>
-            <a:pPr algn="ctr"/>
-          </a:p>
-        </p:txBody>
-      </p:sp>
-      <p:sp>
-        <p:nvSpPr>
-          <p:cNvPr id="11" name="TextBox 10"/>
+          <a:bodyPr rtlCol="0" anchor="ctr" wrap="square" lIns="164592" rIns="164592" tIns="109728" bIns="36576"/>
+          <a:lstStyle/>
+          <a:p>
+            <a:pPr algn="l">
+              <a:spcAft>
+                <a:spcPts val="0"/>
+              </a:spcAft>
+              <a:defRPr sz="1400" b="0">
+                <a:solidFill>
+                  <a:srgbClr val="FFFFFF"/>
+                </a:solidFill>
+                <a:latin typeface="DejaVu Sans Mono"/>
+              </a:defRPr>
+            </a:pPr>
+            <a:r>
+              <a:t>    try:</a:t>
+            </a:r>
+            <a:br/>
+            <a:r>
+              <a:t>        rclpy.spin(node)</a:t>
+            </a:r>
+            <a:br/>
+            <a:r>
+              <a:t>    except KeyboardInterrupt:</a:t>
+            </a:r>
+            <a:br/>
+            <a:r>
+              <a:t>        pass</a:t>
+            </a:r>
+            <a:br/>
+            <a:r>
+              <a:t>    finally:</a:t>
+            </a:r>
+            <a:br/>
+            <a:r>
+              <a:t>        node.destroy_node()</a:t>
+            </a:r>
+            <a:br/>
+            <a:r>
+              <a:t>        if rclpy.ok():</a:t>
+            </a:r>
+            <a:br/>
+            <a:r>
+              <a:t>            rclpy.shutdown()</a:t>
+            </a:r>
+          </a:p>
+        </p:txBody>
+      </p:sp>
+      <p:sp>
+        <p:nvSpPr>
+          <p:cNvPr id="10" name="TextBox 9"/>
           <p:cNvSpPr txBox="1"/>
           <p:nvPr/>
         </p:nvSpPr>
         <p:spPr>
           <a:xfrm>
-            <a:off x="896112" y="3319272"/>
-            <a:ext cx="2926080" cy="274320"/>
+            <a:off x="749808" y="6181344"/>
+            <a:ext cx="10789920" cy="201168"/>
           </a:xfrm>
           <a:prstGeom prst="rect">
             <a:avLst/>
@@ -23164,97 +23893,15 @@
               <a:spcAft>
                 <a:spcPts val="0"/>
               </a:spcAft>
-              <a:defRPr sz="1800" b="1">
-                <a:solidFill>
-                  <a:srgbClr val="BE3B3B"/>
-                </a:solidFill>
-                <a:latin typeface="Noto Sans CJK KR"/>
-              </a:defRPr>
-            </a:pPr>
-            <a:r>
-              <a:t>증상 2: RViz 이미지가 비어 있음</a:t>
-            </a:r>
-          </a:p>
-        </p:txBody>
-      </p:sp>
-      <p:sp>
-        <p:nvSpPr>
-          <p:cNvPr id="12" name="TextBox 11"/>
-          <p:cNvSpPr txBox="1"/>
-          <p:nvPr/>
-        </p:nvSpPr>
-        <p:spPr>
-          <a:xfrm>
-            <a:off x="3794760" y="3300984"/>
-            <a:ext cx="7543800" cy="621792"/>
-          </a:xfrm>
-          <a:prstGeom prst="rect">
-            <a:avLst/>
-          </a:prstGeom>
-          <a:noFill/>
-        </p:spPr>
-        <p:txBody>
-          <a:bodyPr wrap="square" lIns="73152" rIns="73152" tIns="36576" bIns="36576">
-            <a:spAutoFit/>
-          </a:bodyPr>
-          <a:lstStyle/>
-          <a:p>
-            <a:pPr algn="l">
-              <a:spcAft>
-                <a:spcPts val="0"/>
-              </a:spcAft>
-              <a:defRPr sz="1600" b="0">
-                <a:solidFill>
-                  <a:srgbClr val="122C4E"/>
-                </a:solidFill>
-                <a:latin typeface="Noto Sans CJK KR"/>
-              </a:defRPr>
-            </a:pPr>
-            <a:r>
-              <a:t>우선 확인: Image topic·QoS·bridge mapping을 확인한다.</a:t>
-            </a:r>
-            <a:br/>
-            <a:r>
-              <a:t>수정 후: ros2 topic info /camera/image_raw</a:t>
-            </a:r>
-          </a:p>
-        </p:txBody>
-      </p:sp>
-      <p:sp>
-        <p:nvSpPr>
-          <p:cNvPr id="13" name="TextBox 12"/>
-          <p:cNvSpPr txBox="1"/>
-          <p:nvPr/>
-        </p:nvSpPr>
-        <p:spPr>
-          <a:xfrm>
-            <a:off x="822960" y="5102352"/>
-            <a:ext cx="10607040" cy="402336"/>
-          </a:xfrm>
-          <a:prstGeom prst="rect">
-            <a:avLst/>
-          </a:prstGeom>
-          <a:noFill/>
-        </p:spPr>
-        <p:txBody>
-          <a:bodyPr wrap="square" lIns="73152" rIns="73152" tIns="36576" bIns="36576">
-            <a:spAutoFit/>
-          </a:bodyPr>
-          <a:lstStyle/>
-          <a:p>
-            <a:pPr algn="ctr">
-              <a:spcAft>
-                <a:spcPts val="0"/>
-              </a:spcAft>
-              <a:defRPr sz="1800" b="1">
-                <a:solidFill>
-                  <a:srgbClr val="DB7E22"/>
-                </a:solidFill>
-                <a:latin typeface="Noto Sans CJK KR"/>
-              </a:defRPr>
-            </a:pPr>
-            <a:r>
-              <a:t>공통 순서: ① 현재 폴더 ② source ③ 파일 경로 ④ 이름/타입/단위 ⑤ build·source 후 재실행</a:t>
+              <a:defRPr sz="1000" b="0">
+                <a:solidFill>
+                  <a:srgbClr val="5C6672"/>
+                </a:solidFill>
+                <a:latin typeface="Noto Sans CJK KR"/>
+              </a:defRPr>
+            </a:pPr>
+            <a:r>
+              <a:t>파일 전체 5/5 · 이 슬라이드 다음에 같은 파일의 나머지 줄이 이어집니다.</a:t>
             </a:r>
           </a:p>
         </p:txBody>
@@ -23311,7 +23958,7 @@
               </a:defRPr>
             </a:pPr>
             <a:r>
-              <a:t>미니 실습: 값 하나를 바꾸고 결과를 비교한다</a:t>
+              <a:t>build → source → run 순서로 실행한다</a:t>
             </a:r>
           </a:p>
         </p:txBody>
@@ -23350,7 +23997,7 @@
               </a:defRPr>
             </a:pPr>
             <a:r>
-              <a:t>정상 결과를 만든 뒤에는 한 번에 하나의 값만 바꿉니다.</a:t>
+              <a:t>새 파일 또는 수정 파일은 build와 source 뒤에만 실행 이름·설정에 반영됩니다.</a:t>
             </a:r>
           </a:p>
         </p:txBody>
@@ -23486,7 +24133,7 @@
               </a:defRPr>
             </a:pPr>
             <a:r>
-              <a:t>현재 단계 미니 실습    |    현재 폴더 ~/agv_ws    |    현재 터미널</a:t>
+              <a:t>현재 단계 실행    |    현재 폴더 ~/agv_ws    |    현재 터미널</a:t>
             </a:r>
           </a:p>
         </p:txBody>
@@ -23499,18 +24146,18 @@
         </p:nvSpPr>
         <p:spPr>
           <a:xfrm>
-            <a:off x="749808" y="1874519"/>
-            <a:ext cx="10652760" cy="1993392"/>
+            <a:off x="658368" y="1700784"/>
+            <a:ext cx="10972800" cy="3182112"/>
           </a:xfrm>
           <a:prstGeom prst="roundRect">
             <a:avLst/>
           </a:prstGeom>
           <a:solidFill>
-            <a:srgbClr val="FFF8EB"/>
+            <a:srgbClr val="1D232D"/>
           </a:solidFill>
           <a:ln>
             <a:solidFill>
-              <a:srgbClr val="ECC680"/>
+              <a:srgbClr val="1D232D"/>
             </a:solidFill>
           </a:ln>
         </p:spPr>
@@ -23532,19 +24179,23 @@
           <a:bodyPr rtlCol="0" anchor="ctr" wrap="square" lIns="73152" rIns="73152" tIns="36576" bIns="36576"/>
           <a:lstStyle/>
           <a:p>
-            <a:pPr algn="ctr">
-              <a:spcAft>
-                <a:spcPts val="0"/>
-              </a:spcAft>
-              <a:defRPr sz="2300" b="1">
-                <a:solidFill>
-                  <a:srgbClr val="122C4E"/>
-                </a:solidFill>
-                <a:latin typeface="Noto Sans CJK KR"/>
-              </a:defRPr>
-            </a:pPr>
-            <a:r>
-              <a:t>camera update_rate 15→5 Hz와 width 640→320을 각각 바꾸고 topic hz와 처리량 차이를 기록한다.</a:t>
+            <a:pPr algn="l">
+              <a:spcAft>
+                <a:spcPts val="0"/>
+              </a:spcAft>
+              <a:defRPr sz="1600" b="0">
+                <a:solidFill>
+                  <a:srgbClr val="FFFFFF"/>
+                </a:solidFill>
+                <a:latin typeface="DejaVu Sans Mono"/>
+              </a:defRPr>
+            </a:pPr>
+            <a:r>
+              <a:t>ros2 launch agv_bringup agv_sim.launch.py rviz:=false</a:t>
+            </a:r>
+            <a:br/>
+            <a:r>
+              <a:t># 새 터미널: ros2 run rqt_image_view rqt_image_view</a:t>
             </a:r>
           </a:p>
         </p:txBody>
@@ -23557,8 +24208,8 @@
         </p:nvSpPr>
         <p:spPr>
           <a:xfrm>
-            <a:off x="877824" y="4590288"/>
-            <a:ext cx="10241280" cy="594360"/>
+            <a:off x="786384" y="5239512"/>
+            <a:ext cx="1261872" cy="237744"/>
           </a:xfrm>
           <a:prstGeom prst="rect">
             <a:avLst/>
@@ -23571,19 +24222,58 @@
           </a:bodyPr>
           <a:lstStyle/>
           <a:p>
-            <a:pPr algn="ctr">
-              <a:spcAft>
-                <a:spcPts val="0"/>
-              </a:spcAft>
-              <a:defRPr sz="1900" b="1">
-                <a:solidFill>
-                  <a:srgbClr val="DB7E22"/>
-                </a:solidFill>
-                <a:latin typeface="Noto Sans CJK KR"/>
-              </a:defRPr>
-            </a:pPr>
-            <a:r>
-              <a:t>기록할 것: 바꾼 값(단위) · 기대한 변화 · 실제 출력/화면 · 원래 값으로 되돌린 결과</a:t>
+            <a:pPr algn="l">
+              <a:spcAft>
+                <a:spcPts val="0"/>
+              </a:spcAft>
+              <a:defRPr sz="1800" b="1">
+                <a:solidFill>
+                  <a:srgbClr val="2A8B5A"/>
+                </a:solidFill>
+                <a:latin typeface="Noto Sans CJK KR"/>
+              </a:defRPr>
+            </a:pPr>
+            <a:r>
+              <a:t>확인 기준</a:t>
+            </a:r>
+          </a:p>
+        </p:txBody>
+      </p:sp>
+      <p:sp>
+        <p:nvSpPr>
+          <p:cNvPr id="9" name="TextBox 8"/>
+          <p:cNvSpPr txBox="1"/>
+          <p:nvPr/>
+        </p:nvSpPr>
+        <p:spPr>
+          <a:xfrm>
+            <a:off x="786384" y="5532120"/>
+            <a:ext cx="10469880" cy="420624"/>
+          </a:xfrm>
+          <a:prstGeom prst="rect">
+            <a:avLst/>
+          </a:prstGeom>
+          <a:noFill/>
+        </p:spPr>
+        <p:txBody>
+          <a:bodyPr wrap="square" lIns="73152" rIns="73152" tIns="36576" bIns="36576">
+            <a:spAutoFit/>
+          </a:bodyPr>
+          <a:lstStyle/>
+          <a:p>
+            <a:pPr algn="l">
+              <a:spcAft>
+                <a:spcPts val="0"/>
+              </a:spcAft>
+              <a:defRPr sz="1800" b="0">
+                <a:solidFill>
+                  <a:srgbClr val="122C4E"/>
+                </a:solidFill>
+                <a:latin typeface="Noto Sans CJK KR"/>
+              </a:defRPr>
+            </a:pPr>
+            <a:r>
+              <a:t>/camera/image_raw가 bridge를 통과하고 cv_bridge 소비 노드가 받을 준비가 된 상태를 확인한다.</a:t>
             </a:r>
           </a:p>
         </p:txBody>
@@ -23640,7 +24330,7 @@
               </a:defRPr>
             </a:pPr>
             <a:r>
-              <a:t>체크포인트를 저장하고 다음 모듈로 넘긴다</a:t>
+              <a:t>정상 결과: 실제 환경에서 확인한 출력</a:t>
             </a:r>
           </a:p>
         </p:txBody>
@@ -23679,7 +24369,7 @@
               </a:defRPr>
             </a:pPr>
             <a:r>
-              <a:t>현재 Complete는 다음 Starter의 기준선입니다.</a:t>
+              <a:t>실제 ROS 2 환경의 파일·패키지·구성 검증 로그</a:t>
             </a:r>
           </a:p>
         </p:txBody>
@@ -23762,222 +24452,40 @@
           </a:p>
         </p:txBody>
       </p:sp>
-      <p:sp>
-        <p:nvSpPr>
-          <p:cNvPr id="6" name="Rectangle 5"/>
-          <p:cNvSpPr/>
-          <p:nvPr/>
-        </p:nvSpPr>
-        <p:spPr>
-          <a:xfrm>
-            <a:off x="566928" y="1188720"/>
-            <a:ext cx="11064240" cy="347472"/>
-          </a:xfrm>
-          <a:prstGeom prst="rect">
-            <a:avLst/>
-          </a:prstGeom>
-          <a:solidFill>
-            <a:srgbClr val="F4F7FB"/>
-          </a:solidFill>
-          <a:ln>
-            <a:solidFill>
-              <a:srgbClr val="F4F7FB"/>
-            </a:solidFill>
-          </a:ln>
-        </p:spPr>
-        <p:style>
-          <a:lnRef idx="1">
-            <a:schemeClr val="accent1"/>
-          </a:lnRef>
-          <a:fillRef idx="3">
-            <a:schemeClr val="accent1"/>
-          </a:fillRef>
-          <a:effectRef idx="2">
-            <a:schemeClr val="accent1"/>
-          </a:effectRef>
-          <a:fontRef idx="minor">
-            <a:schemeClr val="lt1"/>
-          </a:fontRef>
-        </p:style>
-        <p:txBody>
-          <a:bodyPr rtlCol="0" anchor="ctr" wrap="square" lIns="73152" rIns="73152" tIns="36576" bIns="36576"/>
-          <a:lstStyle/>
-          <a:p>
-            <a:pPr algn="l">
-              <a:spcAft>
-                <a:spcPts val="0"/>
-              </a:spcAft>
-              <a:defRPr sz="1300" b="1">
-                <a:solidFill>
-                  <a:srgbClr val="122C4E"/>
-                </a:solidFill>
-                <a:latin typeface="Noto Sans CJK KR"/>
-              </a:defRPr>
-            </a:pPr>
-            <a:r>
-              <a:t>현재 단계 체크포인트    |    현재 폴더 ~/agv_ws    |    현재 터미널</a:t>
-            </a:r>
-          </a:p>
-        </p:txBody>
-      </p:sp>
-      <p:sp>
-        <p:nvSpPr>
-          <p:cNvPr id="7" name="Rounded Rectangle 6"/>
-          <p:cNvSpPr/>
-          <p:nvPr/>
-        </p:nvSpPr>
-        <p:spPr>
-          <a:xfrm>
-            <a:off x="685800" y="1737360"/>
-            <a:ext cx="10972800" cy="3611880"/>
-          </a:xfrm>
-          <a:prstGeom prst="roundRect">
-            <a:avLst/>
-          </a:prstGeom>
-          <a:solidFill>
-            <a:srgbClr val="F4F7FB"/>
-          </a:solidFill>
-          <a:ln>
-            <a:solidFill>
-              <a:srgbClr val="D2DCE8"/>
-            </a:solidFill>
-          </a:ln>
-        </p:spPr>
-        <p:style>
-          <a:lnRef idx="1">
-            <a:schemeClr val="accent1"/>
-          </a:lnRef>
-          <a:fillRef idx="3">
-            <a:schemeClr val="accent1"/>
-          </a:fillRef>
-          <a:effectRef idx="2">
-            <a:schemeClr val="accent1"/>
-          </a:effectRef>
-          <a:fontRef idx="minor">
-            <a:schemeClr val="lt1"/>
-          </a:fontRef>
-        </p:style>
-        <p:txBody>
-          <a:bodyPr rtlCol="0" anchor="ctr"/>
-          <a:lstStyle/>
-          <a:p>
-            <a:pPr algn="ctr"/>
-          </a:p>
-        </p:txBody>
-      </p:sp>
-      <p:sp>
-        <p:nvSpPr>
-          <p:cNvPr id="8" name="TextBox 7"/>
+      <p:pic>
+        <p:nvPicPr>
+          <p:cNvPr id="6" name="Picture 5" descr="validation_terminal.png"/>
+          <p:cNvPicPr>
+            <a:picLocks noChangeAspect="1"/>
+          </p:cNvPicPr>
+          <p:nvPr/>
+        </p:nvPicPr>
+        <p:blipFill>
+          <a:blip r:embed="rId2"/>
+          <a:stretch>
+            <a:fillRect/>
+          </a:stretch>
+        </p:blipFill>
+        <p:spPr>
+          <a:xfrm>
+            <a:off x="790956" y="1884338"/>
+            <a:ext cx="10607040" cy="3738546"/>
+          </a:xfrm>
+          <a:prstGeom prst="rect">
+            <a:avLst/>
+          </a:prstGeom>
+        </p:spPr>
+      </p:pic>
+      <p:sp>
+        <p:nvSpPr>
+          <p:cNvPr id="7" name="TextBox 6"/>
           <p:cNvSpPr txBox="1"/>
           <p:nvPr/>
         </p:nvSpPr>
         <p:spPr>
           <a:xfrm>
-            <a:off x="896112" y="1993392"/>
-            <a:ext cx="10332720" cy="2971800"/>
-          </a:xfrm>
-          <a:prstGeom prst="rect">
-            <a:avLst/>
-          </a:prstGeom>
-          <a:noFill/>
-        </p:spPr>
-        <p:txBody>
-          <a:bodyPr wrap="square" lIns="109728" rIns="109728">
-            <a:spAutoFit/>
-          </a:bodyPr>
-          <a:lstStyle/>
-          <a:p>
-            <a:pPr>
-              <a:spcAft>
-                <a:spcPts val="800"/>
-              </a:spcAft>
-              <a:defRPr sz="1800">
-                <a:solidFill>
-                  <a:srgbClr val="122C4E"/>
-                </a:solidFill>
-                <a:latin typeface="Noto Sans CJK KR"/>
-              </a:defRPr>
-            </a:pPr>
-            <a:r>
-              <a:t>• □ 완료 화면: /camera/image_raw가 bridge를 통과하고 cv_bridge 소비 노드가 받을 준비가 된 상태를 확인한다.</a:t>
-            </a:r>
-          </a:p>
-          <a:p>
-            <a:pPr>
-              <a:spcAft>
-                <a:spcPts val="800"/>
-              </a:spcAft>
-              <a:defRPr sz="1800">
-                <a:solidFill>
-                  <a:srgbClr val="122C4E"/>
-                </a:solidFill>
-                <a:latin typeface="Noto Sans CJK KR"/>
-              </a:defRPr>
-            </a:pPr>
-            <a:r>
-              <a:t>• □ Complete 파일: blocks/D_sensors/M12_camera_sensor/complete/</a:t>
-            </a:r>
-          </a:p>
-          <a:p>
-            <a:pPr>
-              <a:spcAft>
-                <a:spcPts val="800"/>
-              </a:spcAft>
-              <a:defRPr sz="1800">
-                <a:solidFill>
-                  <a:srgbClr val="122C4E"/>
-                </a:solidFill>
-                <a:latin typeface="Noto Sans CJK KR"/>
-              </a:defRPr>
-            </a:pPr>
-            <a:r>
-              <a:t>• □ 정상 로그·캡처: logs/validation.log, screenshots/validation_terminal.png</a:t>
-            </a:r>
-          </a:p>
-          <a:p>
-            <a:pPr>
-              <a:spcAft>
-                <a:spcPts val="800"/>
-              </a:spcAft>
-              <a:defRPr sz="1800">
-                <a:solidFill>
-                  <a:srgbClr val="122C4E"/>
-                </a:solidFill>
-                <a:latin typeface="Noto Sans CJK KR"/>
-              </a:defRPr>
-            </a:pPr>
-            <a:r>
-              <a:t>• □ 버전 식별: CHECKSUM_or_TAG.txt의 SHA-256 manifest</a:t>
-            </a:r>
-          </a:p>
-          <a:p>
-            <a:pPr>
-              <a:spcAft>
-                <a:spcPts val="800"/>
-              </a:spcAft>
-              <a:defRPr sz="1800">
-                <a:solidFill>
-                  <a:srgbClr val="122C4E"/>
-                </a:solidFill>
-                <a:latin typeface="Noto Sans CJK KR"/>
-              </a:defRPr>
-            </a:pPr>
-            <a:r>
-              <a:t>• □ 다음 시작 조건: M13 LiDAR</a:t>
-            </a:r>
-          </a:p>
-        </p:txBody>
-      </p:sp>
-      <p:sp>
-        <p:nvSpPr>
-          <p:cNvPr id="9" name="TextBox 8"/>
-          <p:cNvSpPr txBox="1"/>
-          <p:nvPr/>
-        </p:nvSpPr>
-        <p:spPr>
-          <a:xfrm>
-            <a:off x="868680" y="5596128"/>
-            <a:ext cx="10515600" cy="338328"/>
+            <a:off x="777240" y="6217920"/>
+            <a:ext cx="10607040" cy="182880"/>
           </a:xfrm>
           <a:prstGeom prst="rect">
             <a:avLst/>
@@ -23994,7 +24502,7 @@
               <a:spcAft>
                 <a:spcPts val="0"/>
               </a:spcAft>
-              <a:defRPr sz="1700" b="1">
+              <a:defRPr sz="1100" b="1">
                 <a:solidFill>
                   <a:srgbClr val="2A8B5A"/>
                 </a:solidFill>
@@ -24002,7 +24510,7 @@
               </a:defRPr>
             </a:pPr>
             <a:r>
-              <a:t>다음 모듈을 시작하기 전, 이 슬라이드의 Complete와 다음 모듈의 Starter를 비교합니다.</a:t>
+              <a:t>① 명령/설정  ② 정상 출력 또는 화면  ③ 다음 검증 명령으로 재확인</a:t>
             </a:r>
           </a:p>
         </p:txBody>
@@ -24059,6 +24567,1682 @@
               </a:defRPr>
             </a:pPr>
             <a:r>
+              <a:t>객관적 검증 명령으로 완료를 확인한다</a:t>
+            </a:r>
+          </a:p>
+        </p:txBody>
+      </p:sp>
+      <p:sp>
+        <p:nvSpPr>
+          <p:cNvPr id="3" name="TextBox 2"/>
+          <p:cNvSpPr txBox="1"/>
+          <p:nvPr/>
+        </p:nvSpPr>
+        <p:spPr>
+          <a:xfrm>
+            <a:off x="603504" y="859536"/>
+            <a:ext cx="10698480" cy="292608"/>
+          </a:xfrm>
+          <a:prstGeom prst="rect">
+            <a:avLst/>
+          </a:prstGeom>
+          <a:noFill/>
+        </p:spPr>
+        <p:txBody>
+          <a:bodyPr wrap="square" lIns="73152" rIns="73152" tIns="36576" bIns="36576">
+            <a:spAutoFit/>
+          </a:bodyPr>
+          <a:lstStyle/>
+          <a:p>
+            <a:pPr algn="l">
+              <a:spcAft>
+                <a:spcPts val="0"/>
+              </a:spcAft>
+              <a:defRPr sz="1700" b="0">
+                <a:solidFill>
+                  <a:srgbClr val="5C6672"/>
+                </a:solidFill>
+                <a:latin typeface="Noto Sans CJK KR"/>
+              </a:defRPr>
+            </a:pPr>
+            <a:r>
+              <a:t>화면만 보지 말고 topic·frame·파일·parameter를 다시 확인합니다.</a:t>
+            </a:r>
+          </a:p>
+        </p:txBody>
+      </p:sp>
+      <p:sp>
+        <p:nvSpPr>
+          <p:cNvPr id="4" name="TextBox 3"/>
+          <p:cNvSpPr txBox="1"/>
+          <p:nvPr/>
+        </p:nvSpPr>
+        <p:spPr>
+          <a:xfrm>
+            <a:off x="530352" y="6510528"/>
+            <a:ext cx="7772400" cy="201168"/>
+          </a:xfrm>
+          <a:prstGeom prst="rect">
+            <a:avLst/>
+          </a:prstGeom>
+          <a:noFill/>
+        </p:spPr>
+        <p:txBody>
+          <a:bodyPr wrap="square" lIns="73152" rIns="73152" tIns="36576" bIns="36576">
+            <a:spAutoFit/>
+          </a:bodyPr>
+          <a:lstStyle/>
+          <a:p>
+            <a:pPr algn="l">
+              <a:spcAft>
+                <a:spcPts val="0"/>
+              </a:spcAft>
+              <a:defRPr sz="1000" b="0">
+                <a:solidFill>
+                  <a:srgbClr val="5C6672"/>
+                </a:solidFill>
+                <a:latin typeface="Noto Sans CJK KR"/>
+              </a:defRPr>
+            </a:pPr>
+            <a:r>
+              <a:t>ROS 2 Jazzy · Gazebo Harmonic · M12 · 따라 하기형 AGV 실습</a:t>
+            </a:r>
+          </a:p>
+        </p:txBody>
+      </p:sp>
+      <p:sp>
+        <p:nvSpPr>
+          <p:cNvPr id="5" name="TextBox 4"/>
+          <p:cNvSpPr txBox="1"/>
+          <p:nvPr/>
+        </p:nvSpPr>
+        <p:spPr>
+          <a:xfrm>
+            <a:off x="9144000" y="6510528"/>
+            <a:ext cx="2468880" cy="201168"/>
+          </a:xfrm>
+          <a:prstGeom prst="rect">
+            <a:avLst/>
+          </a:prstGeom>
+          <a:noFill/>
+        </p:spPr>
+        <p:txBody>
+          <a:bodyPr wrap="square" lIns="73152" rIns="73152" tIns="36576" bIns="36576">
+            <a:spAutoFit/>
+          </a:bodyPr>
+          <a:lstStyle/>
+          <a:p>
+            <a:pPr algn="r">
+              <a:spcAft>
+                <a:spcPts val="0"/>
+              </a:spcAft>
+              <a:defRPr sz="1000" b="0">
+                <a:solidFill>
+                  <a:srgbClr val="5C6672"/>
+                </a:solidFill>
+                <a:latin typeface="Noto Sans CJK KR"/>
+              </a:defRPr>
+            </a:pPr>
+            <a:r>
+              <a:t>명령·파일 경로는 슬라이드에서 복사 가능</a:t>
+            </a:r>
+          </a:p>
+        </p:txBody>
+      </p:sp>
+      <p:sp>
+        <p:nvSpPr>
+          <p:cNvPr id="6" name="Rectangle 5"/>
+          <p:cNvSpPr/>
+          <p:nvPr/>
+        </p:nvSpPr>
+        <p:spPr>
+          <a:xfrm>
+            <a:off x="566928" y="1188720"/>
+            <a:ext cx="11064240" cy="347472"/>
+          </a:xfrm>
+          <a:prstGeom prst="rect">
+            <a:avLst/>
+          </a:prstGeom>
+          <a:solidFill>
+            <a:srgbClr val="F4F7FB"/>
+          </a:solidFill>
+          <a:ln>
+            <a:solidFill>
+              <a:srgbClr val="F4F7FB"/>
+            </a:solidFill>
+          </a:ln>
+        </p:spPr>
+        <p:style>
+          <a:lnRef idx="1">
+            <a:schemeClr val="accent1"/>
+          </a:lnRef>
+          <a:fillRef idx="3">
+            <a:schemeClr val="accent1"/>
+          </a:fillRef>
+          <a:effectRef idx="2">
+            <a:schemeClr val="accent1"/>
+          </a:effectRef>
+          <a:fontRef idx="minor">
+            <a:schemeClr val="lt1"/>
+          </a:fontRef>
+        </p:style>
+        <p:txBody>
+          <a:bodyPr rtlCol="0" anchor="ctr" wrap="square" lIns="73152" rIns="73152" tIns="36576" bIns="36576"/>
+          <a:lstStyle/>
+          <a:p>
+            <a:pPr algn="l">
+              <a:spcAft>
+                <a:spcPts val="0"/>
+              </a:spcAft>
+              <a:defRPr sz="1300" b="1">
+                <a:solidFill>
+                  <a:srgbClr val="122C4E"/>
+                </a:solidFill>
+                <a:latin typeface="Noto Sans CJK KR"/>
+              </a:defRPr>
+            </a:pPr>
+            <a:r>
+              <a:t>현재 단계 검증    |    현재 폴더 ~/agv_ws    |    현재 터미널</a:t>
+            </a:r>
+          </a:p>
+        </p:txBody>
+      </p:sp>
+      <p:sp>
+        <p:nvSpPr>
+          <p:cNvPr id="7" name="Rounded Rectangle 6"/>
+          <p:cNvSpPr/>
+          <p:nvPr/>
+        </p:nvSpPr>
+        <p:spPr>
+          <a:xfrm>
+            <a:off x="658368" y="1755648"/>
+            <a:ext cx="10972800" cy="2148840"/>
+          </a:xfrm>
+          <a:prstGeom prst="roundRect">
+            <a:avLst/>
+          </a:prstGeom>
+          <a:solidFill>
+            <a:srgbClr val="1D232D"/>
+          </a:solidFill>
+          <a:ln>
+            <a:solidFill>
+              <a:srgbClr val="1D232D"/>
+            </a:solidFill>
+          </a:ln>
+        </p:spPr>
+        <p:style>
+          <a:lnRef idx="1">
+            <a:schemeClr val="accent1"/>
+          </a:lnRef>
+          <a:fillRef idx="3">
+            <a:schemeClr val="accent1"/>
+          </a:fillRef>
+          <a:effectRef idx="2">
+            <a:schemeClr val="accent1"/>
+          </a:effectRef>
+          <a:fontRef idx="minor">
+            <a:schemeClr val="lt1"/>
+          </a:fontRef>
+        </p:style>
+        <p:txBody>
+          <a:bodyPr rtlCol="0" anchor="ctr" wrap="square" lIns="73152" rIns="73152" tIns="36576" bIns="36576"/>
+          <a:lstStyle/>
+          <a:p>
+            <a:pPr algn="l">
+              <a:spcAft>
+                <a:spcPts val="0"/>
+              </a:spcAft>
+              <a:defRPr sz="1600" b="0">
+                <a:solidFill>
+                  <a:srgbClr val="FFFFFF"/>
+                </a:solidFill>
+                <a:latin typeface="DejaVu Sans Mono"/>
+              </a:defRPr>
+            </a:pPr>
+            <a:r>
+              <a:t>ros2 topic info /camera/image_raw</a:t>
+            </a:r>
+            <a:br/>
+            <a:r>
+              <a:t>ros2 topic hz /camera/image_raw</a:t>
+            </a:r>
+          </a:p>
+        </p:txBody>
+      </p:sp>
+      <p:sp>
+        <p:nvSpPr>
+          <p:cNvPr id="8" name="Rounded Rectangle 7"/>
+          <p:cNvSpPr/>
+          <p:nvPr/>
+        </p:nvSpPr>
+        <p:spPr>
+          <a:xfrm>
+            <a:off x="658368" y="4206240"/>
+            <a:ext cx="10972800" cy="1554480"/>
+          </a:xfrm>
+          <a:prstGeom prst="roundRect">
+            <a:avLst/>
+          </a:prstGeom>
+          <a:solidFill>
+            <a:srgbClr val="F4F7FB"/>
+          </a:solidFill>
+          <a:ln>
+            <a:solidFill>
+              <a:srgbClr val="D1DFD5"/>
+            </a:solidFill>
+          </a:ln>
+        </p:spPr>
+        <p:style>
+          <a:lnRef idx="1">
+            <a:schemeClr val="accent1"/>
+          </a:lnRef>
+          <a:fillRef idx="3">
+            <a:schemeClr val="accent1"/>
+          </a:fillRef>
+          <a:effectRef idx="2">
+            <a:schemeClr val="accent1"/>
+          </a:effectRef>
+          <a:fontRef idx="minor">
+            <a:schemeClr val="lt1"/>
+          </a:fontRef>
+        </p:style>
+        <p:txBody>
+          <a:bodyPr rtlCol="0" anchor="ctr" wrap="square" lIns="73152" rIns="73152" tIns="36576" bIns="36576"/>
+          <a:lstStyle/>
+          <a:p>
+            <a:pPr algn="l">
+              <a:spcAft>
+                <a:spcPts val="0"/>
+              </a:spcAft>
+              <a:defRPr sz="1800" b="1">
+                <a:solidFill>
+                  <a:srgbClr val="2A8B5A"/>
+                </a:solidFill>
+                <a:latin typeface="Noto Sans CJK KR"/>
+              </a:defRPr>
+            </a:pPr>
+            <a:r>
+              <a:t>완료 체크</a:t>
+            </a:r>
+            <a:br/>
+            <a:r>
+              <a:t>□ 명령이 오류 없이 실행된다.</a:t>
+            </a:r>
+            <a:br/>
+            <a:r>
+              <a:t>□ 기대한 파일·topic·frame·parameter 이름이 보인다.</a:t>
+            </a:r>
+            <a:br/>
+            <a:r>
+              <a:t>□ 값의 단위와 방향을 한 문장으로 설명할 수 있다.</a:t>
+            </a:r>
+          </a:p>
+        </p:txBody>
+      </p:sp>
+      <p:sp>
+        <p:nvSpPr>
+          <p:cNvPr id="9" name="TextBox 8"/>
+          <p:cNvSpPr txBox="1"/>
+          <p:nvPr/>
+        </p:nvSpPr>
+        <p:spPr>
+          <a:xfrm>
+            <a:off x="731520" y="5989320"/>
+            <a:ext cx="10789920" cy="237744"/>
+          </a:xfrm>
+          <a:prstGeom prst="rect">
+            <a:avLst/>
+          </a:prstGeom>
+          <a:noFill/>
+        </p:spPr>
+        <p:txBody>
+          <a:bodyPr wrap="square" lIns="73152" rIns="73152" tIns="36576" bIns="36576">
+            <a:spAutoFit/>
+          </a:bodyPr>
+          <a:lstStyle/>
+          <a:p>
+            <a:pPr algn="l">
+              <a:spcAft>
+                <a:spcPts val="0"/>
+              </a:spcAft>
+              <a:defRPr sz="1500" b="1">
+                <a:solidFill>
+                  <a:srgbClr val="122C4E"/>
+                </a:solidFill>
+                <a:latin typeface="Noto Sans CJK KR"/>
+              </a:defRPr>
+            </a:pPr>
+            <a:r>
+              <a:t>완료 조건: /camera/image_raw가 bridge를 통과하고 cv_bridge 소비 노드가 받을 준비가 된 상태를 확인한다.</a:t>
+            </a:r>
+          </a:p>
+        </p:txBody>
+      </p:sp>
+    </p:spTree>
+  </p:cSld>
+  <p:clrMapOvr>
+    <a:masterClrMapping/>
+  </p:clrMapOvr>
+</p:sld>
+</file>
+
+<file path=ppt/slides/slide44.xml><?xml version="1.0" encoding="utf-8"?>
+<p:sld xmlns:a="http://schemas.openxmlformats.org/drawingml/2006/main" xmlns:p="http://schemas.openxmlformats.org/presentationml/2006/main" xmlns:r="http://schemas.openxmlformats.org/officeDocument/2006/relationships">
+  <p:cSld>
+    <p:spTree>
+      <p:nvGrpSpPr>
+        <p:cNvPr id="1" name=""/>
+        <p:cNvGrpSpPr/>
+        <p:nvPr/>
+      </p:nvGrpSpPr>
+      <p:grpSpPr/>
+      <p:sp>
+        <p:nvSpPr>
+          <p:cNvPr id="2" name="TextBox 1"/>
+          <p:cNvSpPr txBox="1"/>
+          <p:nvPr/>
+        </p:nvSpPr>
+        <p:spPr>
+          <a:xfrm>
+            <a:off x="566928" y="347472"/>
+            <a:ext cx="10881360" cy="438912"/>
+          </a:xfrm>
+          <a:prstGeom prst="rect">
+            <a:avLst/>
+          </a:prstGeom>
+          <a:noFill/>
+        </p:spPr>
+        <p:txBody>
+          <a:bodyPr wrap="square" lIns="73152" rIns="73152" tIns="36576" bIns="36576">
+            <a:spAutoFit/>
+          </a:bodyPr>
+          <a:lstStyle/>
+          <a:p>
+            <a:pPr algn="l">
+              <a:spcAft>
+                <a:spcPts val="0"/>
+              </a:spcAft>
+              <a:defRPr sz="3200" b="1">
+                <a:solidFill>
+                  <a:srgbClr val="122C4E"/>
+                </a:solidFill>
+                <a:latin typeface="Noto Sans CJK KR"/>
+              </a:defRPr>
+            </a:pPr>
+            <a:r>
+              <a:t>막히면: 증상 → 우선 확인 → 재검증</a:t>
+            </a:r>
+          </a:p>
+        </p:txBody>
+      </p:sp>
+      <p:sp>
+        <p:nvSpPr>
+          <p:cNvPr id="3" name="TextBox 2"/>
+          <p:cNvSpPr txBox="1"/>
+          <p:nvPr/>
+        </p:nvSpPr>
+        <p:spPr>
+          <a:xfrm>
+            <a:off x="603504" y="859536"/>
+            <a:ext cx="10698480" cy="292608"/>
+          </a:xfrm>
+          <a:prstGeom prst="rect">
+            <a:avLst/>
+          </a:prstGeom>
+          <a:noFill/>
+        </p:spPr>
+        <p:txBody>
+          <a:bodyPr wrap="square" lIns="73152" rIns="73152" tIns="36576" bIns="36576">
+            <a:spAutoFit/>
+          </a:bodyPr>
+          <a:lstStyle/>
+          <a:p>
+            <a:pPr algn="l">
+              <a:spcAft>
+                <a:spcPts val="0"/>
+              </a:spcAft>
+              <a:defRPr sz="1700" b="0">
+                <a:solidFill>
+                  <a:srgbClr val="5C6672"/>
+                </a:solidFill>
+                <a:latin typeface="Noto Sans CJK KR"/>
+              </a:defRPr>
+            </a:pPr>
+            <a:r>
+              <a:t>오류 메시지를 숨기지 않고 같은 순서로 점검합니다.</a:t>
+            </a:r>
+          </a:p>
+        </p:txBody>
+      </p:sp>
+      <p:sp>
+        <p:nvSpPr>
+          <p:cNvPr id="4" name="TextBox 3"/>
+          <p:cNvSpPr txBox="1"/>
+          <p:nvPr/>
+        </p:nvSpPr>
+        <p:spPr>
+          <a:xfrm>
+            <a:off x="530352" y="6510528"/>
+            <a:ext cx="7772400" cy="201168"/>
+          </a:xfrm>
+          <a:prstGeom prst="rect">
+            <a:avLst/>
+          </a:prstGeom>
+          <a:noFill/>
+        </p:spPr>
+        <p:txBody>
+          <a:bodyPr wrap="square" lIns="73152" rIns="73152" tIns="36576" bIns="36576">
+            <a:spAutoFit/>
+          </a:bodyPr>
+          <a:lstStyle/>
+          <a:p>
+            <a:pPr algn="l">
+              <a:spcAft>
+                <a:spcPts val="0"/>
+              </a:spcAft>
+              <a:defRPr sz="1000" b="0">
+                <a:solidFill>
+                  <a:srgbClr val="5C6672"/>
+                </a:solidFill>
+                <a:latin typeface="Noto Sans CJK KR"/>
+              </a:defRPr>
+            </a:pPr>
+            <a:r>
+              <a:t>ROS 2 Jazzy · Gazebo Harmonic · M12 · 따라 하기형 AGV 실습</a:t>
+            </a:r>
+          </a:p>
+        </p:txBody>
+      </p:sp>
+      <p:sp>
+        <p:nvSpPr>
+          <p:cNvPr id="5" name="TextBox 4"/>
+          <p:cNvSpPr txBox="1"/>
+          <p:nvPr/>
+        </p:nvSpPr>
+        <p:spPr>
+          <a:xfrm>
+            <a:off x="9144000" y="6510528"/>
+            <a:ext cx="2468880" cy="201168"/>
+          </a:xfrm>
+          <a:prstGeom prst="rect">
+            <a:avLst/>
+          </a:prstGeom>
+          <a:noFill/>
+        </p:spPr>
+        <p:txBody>
+          <a:bodyPr wrap="square" lIns="73152" rIns="73152" tIns="36576" bIns="36576">
+            <a:spAutoFit/>
+          </a:bodyPr>
+          <a:lstStyle/>
+          <a:p>
+            <a:pPr algn="r">
+              <a:spcAft>
+                <a:spcPts val="0"/>
+              </a:spcAft>
+              <a:defRPr sz="1000" b="0">
+                <a:solidFill>
+                  <a:srgbClr val="5C6672"/>
+                </a:solidFill>
+                <a:latin typeface="Noto Sans CJK KR"/>
+              </a:defRPr>
+            </a:pPr>
+            <a:r>
+              <a:t>명령·파일 경로는 슬라이드에서 복사 가능</a:t>
+            </a:r>
+          </a:p>
+        </p:txBody>
+      </p:sp>
+      <p:sp>
+        <p:nvSpPr>
+          <p:cNvPr id="6" name="Rectangle 5"/>
+          <p:cNvSpPr/>
+          <p:nvPr/>
+        </p:nvSpPr>
+        <p:spPr>
+          <a:xfrm>
+            <a:off x="566928" y="1188720"/>
+            <a:ext cx="11064240" cy="347472"/>
+          </a:xfrm>
+          <a:prstGeom prst="rect">
+            <a:avLst/>
+          </a:prstGeom>
+          <a:solidFill>
+            <a:srgbClr val="F4F7FB"/>
+          </a:solidFill>
+          <a:ln>
+            <a:solidFill>
+              <a:srgbClr val="F4F7FB"/>
+            </a:solidFill>
+          </a:ln>
+        </p:spPr>
+        <p:style>
+          <a:lnRef idx="1">
+            <a:schemeClr val="accent1"/>
+          </a:lnRef>
+          <a:fillRef idx="3">
+            <a:schemeClr val="accent1"/>
+          </a:fillRef>
+          <a:effectRef idx="2">
+            <a:schemeClr val="accent1"/>
+          </a:effectRef>
+          <a:fontRef idx="minor">
+            <a:schemeClr val="lt1"/>
+          </a:fontRef>
+        </p:style>
+        <p:txBody>
+          <a:bodyPr rtlCol="0" anchor="ctr" wrap="square" lIns="73152" rIns="73152" tIns="36576" bIns="36576"/>
+          <a:lstStyle/>
+          <a:p>
+            <a:pPr algn="l">
+              <a:spcAft>
+                <a:spcPts val="0"/>
+              </a:spcAft>
+              <a:defRPr sz="1300" b="1">
+                <a:solidFill>
+                  <a:srgbClr val="122C4E"/>
+                </a:solidFill>
+                <a:latin typeface="Noto Sans CJK KR"/>
+              </a:defRPr>
+            </a:pPr>
+            <a:r>
+              <a:t>현재 단계 오류 대응    |    현재 폴더 ~/agv_ws    |    현재 터미널</a:t>
+            </a:r>
+          </a:p>
+        </p:txBody>
+      </p:sp>
+      <p:sp>
+        <p:nvSpPr>
+          <p:cNvPr id="7" name="Rounded Rectangle 6"/>
+          <p:cNvSpPr/>
+          <p:nvPr/>
+        </p:nvSpPr>
+        <p:spPr>
+          <a:xfrm>
+            <a:off x="694944" y="1755648"/>
+            <a:ext cx="10972800" cy="1115568"/>
+          </a:xfrm>
+          <a:prstGeom prst="roundRect">
+            <a:avLst/>
+          </a:prstGeom>
+          <a:solidFill>
+            <a:srgbClr val="FFF7F4"/>
+          </a:solidFill>
+          <a:ln>
+            <a:solidFill>
+              <a:srgbClr val="EDBEB4"/>
+            </a:solidFill>
+          </a:ln>
+        </p:spPr>
+        <p:style>
+          <a:lnRef idx="1">
+            <a:schemeClr val="accent1"/>
+          </a:lnRef>
+          <a:fillRef idx="3">
+            <a:schemeClr val="accent1"/>
+          </a:fillRef>
+          <a:effectRef idx="2">
+            <a:schemeClr val="accent1"/>
+          </a:effectRef>
+          <a:fontRef idx="minor">
+            <a:schemeClr val="lt1"/>
+          </a:fontRef>
+        </p:style>
+        <p:txBody>
+          <a:bodyPr rtlCol="0" anchor="ctr"/>
+          <a:lstStyle/>
+          <a:p>
+            <a:pPr algn="ctr"/>
+          </a:p>
+        </p:txBody>
+      </p:sp>
+      <p:sp>
+        <p:nvSpPr>
+          <p:cNvPr id="8" name="TextBox 7"/>
+          <p:cNvSpPr txBox="1"/>
+          <p:nvPr/>
+        </p:nvSpPr>
+        <p:spPr>
+          <a:xfrm>
+            <a:off x="896112" y="1901952"/>
+            <a:ext cx="2926080" cy="274320"/>
+          </a:xfrm>
+          <a:prstGeom prst="rect">
+            <a:avLst/>
+          </a:prstGeom>
+          <a:noFill/>
+        </p:spPr>
+        <p:txBody>
+          <a:bodyPr wrap="square" lIns="73152" rIns="73152" tIns="36576" bIns="36576">
+            <a:spAutoFit/>
+          </a:bodyPr>
+          <a:lstStyle/>
+          <a:p>
+            <a:pPr algn="l">
+              <a:spcAft>
+                <a:spcPts val="0"/>
+              </a:spcAft>
+              <a:defRPr sz="1800" b="1">
+                <a:solidFill>
+                  <a:srgbClr val="BE3B3B"/>
+                </a:solidFill>
+                <a:latin typeface="Noto Sans CJK KR"/>
+              </a:defRPr>
+            </a:pPr>
+            <a:r>
+              <a:t>증상 1: 영상이 검정</a:t>
+            </a:r>
+          </a:p>
+        </p:txBody>
+      </p:sp>
+      <p:sp>
+        <p:nvSpPr>
+          <p:cNvPr id="9" name="TextBox 8"/>
+          <p:cNvSpPr txBox="1"/>
+          <p:nvPr/>
+        </p:nvSpPr>
+        <p:spPr>
+          <a:xfrm>
+            <a:off x="3794760" y="1883664"/>
+            <a:ext cx="7543800" cy="621792"/>
+          </a:xfrm>
+          <a:prstGeom prst="rect">
+            <a:avLst/>
+          </a:prstGeom>
+          <a:noFill/>
+        </p:spPr>
+        <p:txBody>
+          <a:bodyPr wrap="square" lIns="73152" rIns="73152" tIns="36576" bIns="36576">
+            <a:spAutoFit/>
+          </a:bodyPr>
+          <a:lstStyle/>
+          <a:p>
+            <a:pPr algn="l">
+              <a:spcAft>
+                <a:spcPts val="0"/>
+              </a:spcAft>
+              <a:defRPr sz="1600" b="0">
+                <a:solidFill>
+                  <a:srgbClr val="122C4E"/>
+                </a:solidFill>
+                <a:latin typeface="Noto Sans CJK KR"/>
+              </a:defRPr>
+            </a:pPr>
+            <a:r>
+              <a:t>우선 확인: camera pose/FOV·world light·clipping range를 확인한다.</a:t>
+            </a:r>
+            <a:br/>
+            <a:r>
+              <a:t>수정 후: ros2 topic info /camera/image_raw</a:t>
+            </a:r>
+          </a:p>
+        </p:txBody>
+      </p:sp>
+      <p:sp>
+        <p:nvSpPr>
+          <p:cNvPr id="10" name="Rounded Rectangle 9"/>
+          <p:cNvSpPr/>
+          <p:nvPr/>
+        </p:nvSpPr>
+        <p:spPr>
+          <a:xfrm>
+            <a:off x="694944" y="3172968"/>
+            <a:ext cx="10972800" cy="1115568"/>
+          </a:xfrm>
+          <a:prstGeom prst="roundRect">
+            <a:avLst/>
+          </a:prstGeom>
+          <a:solidFill>
+            <a:srgbClr val="FFF7F4"/>
+          </a:solidFill>
+          <a:ln>
+            <a:solidFill>
+              <a:srgbClr val="EDBEB4"/>
+            </a:solidFill>
+          </a:ln>
+        </p:spPr>
+        <p:style>
+          <a:lnRef idx="1">
+            <a:schemeClr val="accent1"/>
+          </a:lnRef>
+          <a:fillRef idx="3">
+            <a:schemeClr val="accent1"/>
+          </a:fillRef>
+          <a:effectRef idx="2">
+            <a:schemeClr val="accent1"/>
+          </a:effectRef>
+          <a:fontRef idx="minor">
+            <a:schemeClr val="lt1"/>
+          </a:fontRef>
+        </p:style>
+        <p:txBody>
+          <a:bodyPr rtlCol="0" anchor="ctr"/>
+          <a:lstStyle/>
+          <a:p>
+            <a:pPr algn="ctr"/>
+          </a:p>
+        </p:txBody>
+      </p:sp>
+      <p:sp>
+        <p:nvSpPr>
+          <p:cNvPr id="11" name="TextBox 10"/>
+          <p:cNvSpPr txBox="1"/>
+          <p:nvPr/>
+        </p:nvSpPr>
+        <p:spPr>
+          <a:xfrm>
+            <a:off x="896112" y="3319272"/>
+            <a:ext cx="2926080" cy="274320"/>
+          </a:xfrm>
+          <a:prstGeom prst="rect">
+            <a:avLst/>
+          </a:prstGeom>
+          <a:noFill/>
+        </p:spPr>
+        <p:txBody>
+          <a:bodyPr wrap="square" lIns="73152" rIns="73152" tIns="36576" bIns="36576">
+            <a:spAutoFit/>
+          </a:bodyPr>
+          <a:lstStyle/>
+          <a:p>
+            <a:pPr algn="l">
+              <a:spcAft>
+                <a:spcPts val="0"/>
+              </a:spcAft>
+              <a:defRPr sz="1800" b="1">
+                <a:solidFill>
+                  <a:srgbClr val="BE3B3B"/>
+                </a:solidFill>
+                <a:latin typeface="Noto Sans CJK KR"/>
+              </a:defRPr>
+            </a:pPr>
+            <a:r>
+              <a:t>증상 2: RViz 이미지가 비어 있음</a:t>
+            </a:r>
+          </a:p>
+        </p:txBody>
+      </p:sp>
+      <p:sp>
+        <p:nvSpPr>
+          <p:cNvPr id="12" name="TextBox 11"/>
+          <p:cNvSpPr txBox="1"/>
+          <p:nvPr/>
+        </p:nvSpPr>
+        <p:spPr>
+          <a:xfrm>
+            <a:off x="3794760" y="3300984"/>
+            <a:ext cx="7543800" cy="621792"/>
+          </a:xfrm>
+          <a:prstGeom prst="rect">
+            <a:avLst/>
+          </a:prstGeom>
+          <a:noFill/>
+        </p:spPr>
+        <p:txBody>
+          <a:bodyPr wrap="square" lIns="73152" rIns="73152" tIns="36576" bIns="36576">
+            <a:spAutoFit/>
+          </a:bodyPr>
+          <a:lstStyle/>
+          <a:p>
+            <a:pPr algn="l">
+              <a:spcAft>
+                <a:spcPts val="0"/>
+              </a:spcAft>
+              <a:defRPr sz="1600" b="0">
+                <a:solidFill>
+                  <a:srgbClr val="122C4E"/>
+                </a:solidFill>
+                <a:latin typeface="Noto Sans CJK KR"/>
+              </a:defRPr>
+            </a:pPr>
+            <a:r>
+              <a:t>우선 확인: Image topic·QoS·bridge mapping을 확인한다.</a:t>
+            </a:r>
+            <a:br/>
+            <a:r>
+              <a:t>수정 후: ros2 topic info /camera/image_raw</a:t>
+            </a:r>
+          </a:p>
+        </p:txBody>
+      </p:sp>
+      <p:sp>
+        <p:nvSpPr>
+          <p:cNvPr id="13" name="TextBox 12"/>
+          <p:cNvSpPr txBox="1"/>
+          <p:nvPr/>
+        </p:nvSpPr>
+        <p:spPr>
+          <a:xfrm>
+            <a:off x="822960" y="5102352"/>
+            <a:ext cx="10607040" cy="402336"/>
+          </a:xfrm>
+          <a:prstGeom prst="rect">
+            <a:avLst/>
+          </a:prstGeom>
+          <a:noFill/>
+        </p:spPr>
+        <p:txBody>
+          <a:bodyPr wrap="square" lIns="73152" rIns="73152" tIns="36576" bIns="36576">
+            <a:spAutoFit/>
+          </a:bodyPr>
+          <a:lstStyle/>
+          <a:p>
+            <a:pPr algn="ctr">
+              <a:spcAft>
+                <a:spcPts val="0"/>
+              </a:spcAft>
+              <a:defRPr sz="1800" b="1">
+                <a:solidFill>
+                  <a:srgbClr val="DB7E22"/>
+                </a:solidFill>
+                <a:latin typeface="Noto Sans CJK KR"/>
+              </a:defRPr>
+            </a:pPr>
+            <a:r>
+              <a:t>공통 순서: ① 현재 폴더 ② source ③ 파일 경로 ④ 이름/타입/단위 ⑤ build·source 후 재실행</a:t>
+            </a:r>
+          </a:p>
+        </p:txBody>
+      </p:sp>
+    </p:spTree>
+  </p:cSld>
+  <p:clrMapOvr>
+    <a:masterClrMapping/>
+  </p:clrMapOvr>
+</p:sld>
+</file>
+
+<file path=ppt/slides/slide45.xml><?xml version="1.0" encoding="utf-8"?>
+<p:sld xmlns:a="http://schemas.openxmlformats.org/drawingml/2006/main" xmlns:p="http://schemas.openxmlformats.org/presentationml/2006/main" xmlns:r="http://schemas.openxmlformats.org/officeDocument/2006/relationships">
+  <p:cSld>
+    <p:spTree>
+      <p:nvGrpSpPr>
+        <p:cNvPr id="1" name=""/>
+        <p:cNvGrpSpPr/>
+        <p:nvPr/>
+      </p:nvGrpSpPr>
+      <p:grpSpPr/>
+      <p:sp>
+        <p:nvSpPr>
+          <p:cNvPr id="2" name="TextBox 1"/>
+          <p:cNvSpPr txBox="1"/>
+          <p:nvPr/>
+        </p:nvSpPr>
+        <p:spPr>
+          <a:xfrm>
+            <a:off x="566928" y="347472"/>
+            <a:ext cx="10881360" cy="438912"/>
+          </a:xfrm>
+          <a:prstGeom prst="rect">
+            <a:avLst/>
+          </a:prstGeom>
+          <a:noFill/>
+        </p:spPr>
+        <p:txBody>
+          <a:bodyPr wrap="square" lIns="73152" rIns="73152" tIns="36576" bIns="36576">
+            <a:spAutoFit/>
+          </a:bodyPr>
+          <a:lstStyle/>
+          <a:p>
+            <a:pPr algn="l">
+              <a:spcAft>
+                <a:spcPts val="0"/>
+              </a:spcAft>
+              <a:defRPr sz="3200" b="1">
+                <a:solidFill>
+                  <a:srgbClr val="122C4E"/>
+                </a:solidFill>
+                <a:latin typeface="Noto Sans CJK KR"/>
+              </a:defRPr>
+            </a:pPr>
+            <a:r>
+              <a:t>미니 실습: 값 하나를 바꾸고 결과를 비교한다</a:t>
+            </a:r>
+          </a:p>
+        </p:txBody>
+      </p:sp>
+      <p:sp>
+        <p:nvSpPr>
+          <p:cNvPr id="3" name="TextBox 2"/>
+          <p:cNvSpPr txBox="1"/>
+          <p:nvPr/>
+        </p:nvSpPr>
+        <p:spPr>
+          <a:xfrm>
+            <a:off x="603504" y="859536"/>
+            <a:ext cx="10698480" cy="292608"/>
+          </a:xfrm>
+          <a:prstGeom prst="rect">
+            <a:avLst/>
+          </a:prstGeom>
+          <a:noFill/>
+        </p:spPr>
+        <p:txBody>
+          <a:bodyPr wrap="square" lIns="73152" rIns="73152" tIns="36576" bIns="36576">
+            <a:spAutoFit/>
+          </a:bodyPr>
+          <a:lstStyle/>
+          <a:p>
+            <a:pPr algn="l">
+              <a:spcAft>
+                <a:spcPts val="0"/>
+              </a:spcAft>
+              <a:defRPr sz="1700" b="0">
+                <a:solidFill>
+                  <a:srgbClr val="5C6672"/>
+                </a:solidFill>
+                <a:latin typeface="Noto Sans CJK KR"/>
+              </a:defRPr>
+            </a:pPr>
+            <a:r>
+              <a:t>정상 결과를 만든 뒤에는 한 번에 하나의 값만 바꿉니다.</a:t>
+            </a:r>
+          </a:p>
+        </p:txBody>
+      </p:sp>
+      <p:sp>
+        <p:nvSpPr>
+          <p:cNvPr id="4" name="TextBox 3"/>
+          <p:cNvSpPr txBox="1"/>
+          <p:nvPr/>
+        </p:nvSpPr>
+        <p:spPr>
+          <a:xfrm>
+            <a:off x="530352" y="6510528"/>
+            <a:ext cx="7772400" cy="201168"/>
+          </a:xfrm>
+          <a:prstGeom prst="rect">
+            <a:avLst/>
+          </a:prstGeom>
+          <a:noFill/>
+        </p:spPr>
+        <p:txBody>
+          <a:bodyPr wrap="square" lIns="73152" rIns="73152" tIns="36576" bIns="36576">
+            <a:spAutoFit/>
+          </a:bodyPr>
+          <a:lstStyle/>
+          <a:p>
+            <a:pPr algn="l">
+              <a:spcAft>
+                <a:spcPts val="0"/>
+              </a:spcAft>
+              <a:defRPr sz="1000" b="0">
+                <a:solidFill>
+                  <a:srgbClr val="5C6672"/>
+                </a:solidFill>
+                <a:latin typeface="Noto Sans CJK KR"/>
+              </a:defRPr>
+            </a:pPr>
+            <a:r>
+              <a:t>ROS 2 Jazzy · Gazebo Harmonic · M12 · 따라 하기형 AGV 실습</a:t>
+            </a:r>
+          </a:p>
+        </p:txBody>
+      </p:sp>
+      <p:sp>
+        <p:nvSpPr>
+          <p:cNvPr id="5" name="TextBox 4"/>
+          <p:cNvSpPr txBox="1"/>
+          <p:nvPr/>
+        </p:nvSpPr>
+        <p:spPr>
+          <a:xfrm>
+            <a:off x="9144000" y="6510528"/>
+            <a:ext cx="2468880" cy="201168"/>
+          </a:xfrm>
+          <a:prstGeom prst="rect">
+            <a:avLst/>
+          </a:prstGeom>
+          <a:noFill/>
+        </p:spPr>
+        <p:txBody>
+          <a:bodyPr wrap="square" lIns="73152" rIns="73152" tIns="36576" bIns="36576">
+            <a:spAutoFit/>
+          </a:bodyPr>
+          <a:lstStyle/>
+          <a:p>
+            <a:pPr algn="r">
+              <a:spcAft>
+                <a:spcPts val="0"/>
+              </a:spcAft>
+              <a:defRPr sz="1000" b="0">
+                <a:solidFill>
+                  <a:srgbClr val="5C6672"/>
+                </a:solidFill>
+                <a:latin typeface="Noto Sans CJK KR"/>
+              </a:defRPr>
+            </a:pPr>
+            <a:r>
+              <a:t>명령·파일 경로는 슬라이드에서 복사 가능</a:t>
+            </a:r>
+          </a:p>
+        </p:txBody>
+      </p:sp>
+      <p:sp>
+        <p:nvSpPr>
+          <p:cNvPr id="6" name="Rectangle 5"/>
+          <p:cNvSpPr/>
+          <p:nvPr/>
+        </p:nvSpPr>
+        <p:spPr>
+          <a:xfrm>
+            <a:off x="566928" y="1188720"/>
+            <a:ext cx="11064240" cy="347472"/>
+          </a:xfrm>
+          <a:prstGeom prst="rect">
+            <a:avLst/>
+          </a:prstGeom>
+          <a:solidFill>
+            <a:srgbClr val="F4F7FB"/>
+          </a:solidFill>
+          <a:ln>
+            <a:solidFill>
+              <a:srgbClr val="F4F7FB"/>
+            </a:solidFill>
+          </a:ln>
+        </p:spPr>
+        <p:style>
+          <a:lnRef idx="1">
+            <a:schemeClr val="accent1"/>
+          </a:lnRef>
+          <a:fillRef idx="3">
+            <a:schemeClr val="accent1"/>
+          </a:fillRef>
+          <a:effectRef idx="2">
+            <a:schemeClr val="accent1"/>
+          </a:effectRef>
+          <a:fontRef idx="minor">
+            <a:schemeClr val="lt1"/>
+          </a:fontRef>
+        </p:style>
+        <p:txBody>
+          <a:bodyPr rtlCol="0" anchor="ctr" wrap="square" lIns="73152" rIns="73152" tIns="36576" bIns="36576"/>
+          <a:lstStyle/>
+          <a:p>
+            <a:pPr algn="l">
+              <a:spcAft>
+                <a:spcPts val="0"/>
+              </a:spcAft>
+              <a:defRPr sz="1300" b="1">
+                <a:solidFill>
+                  <a:srgbClr val="122C4E"/>
+                </a:solidFill>
+                <a:latin typeface="Noto Sans CJK KR"/>
+              </a:defRPr>
+            </a:pPr>
+            <a:r>
+              <a:t>현재 단계 미니 실습    |    현재 폴더 ~/agv_ws    |    현재 터미널</a:t>
+            </a:r>
+          </a:p>
+        </p:txBody>
+      </p:sp>
+      <p:sp>
+        <p:nvSpPr>
+          <p:cNvPr id="7" name="Rounded Rectangle 6"/>
+          <p:cNvSpPr/>
+          <p:nvPr/>
+        </p:nvSpPr>
+        <p:spPr>
+          <a:xfrm>
+            <a:off x="749808" y="1874519"/>
+            <a:ext cx="10652760" cy="1993392"/>
+          </a:xfrm>
+          <a:prstGeom prst="roundRect">
+            <a:avLst/>
+          </a:prstGeom>
+          <a:solidFill>
+            <a:srgbClr val="FFF8EB"/>
+          </a:solidFill>
+          <a:ln>
+            <a:solidFill>
+              <a:srgbClr val="ECC680"/>
+            </a:solidFill>
+          </a:ln>
+        </p:spPr>
+        <p:style>
+          <a:lnRef idx="1">
+            <a:schemeClr val="accent1"/>
+          </a:lnRef>
+          <a:fillRef idx="3">
+            <a:schemeClr val="accent1"/>
+          </a:fillRef>
+          <a:effectRef idx="2">
+            <a:schemeClr val="accent1"/>
+          </a:effectRef>
+          <a:fontRef idx="minor">
+            <a:schemeClr val="lt1"/>
+          </a:fontRef>
+        </p:style>
+        <p:txBody>
+          <a:bodyPr rtlCol="0" anchor="ctr" wrap="square" lIns="73152" rIns="73152" tIns="36576" bIns="36576"/>
+          <a:lstStyle/>
+          <a:p>
+            <a:pPr algn="ctr">
+              <a:spcAft>
+                <a:spcPts val="0"/>
+              </a:spcAft>
+              <a:defRPr sz="2300" b="1">
+                <a:solidFill>
+                  <a:srgbClr val="122C4E"/>
+                </a:solidFill>
+                <a:latin typeface="Noto Sans CJK KR"/>
+              </a:defRPr>
+            </a:pPr>
+            <a:r>
+              <a:t>camera update_rate 15→5 Hz와 width 640→320을 각각 바꾸고 topic hz와 처리량 차이를 기록한다.</a:t>
+            </a:r>
+          </a:p>
+        </p:txBody>
+      </p:sp>
+      <p:sp>
+        <p:nvSpPr>
+          <p:cNvPr id="8" name="TextBox 7"/>
+          <p:cNvSpPr txBox="1"/>
+          <p:nvPr/>
+        </p:nvSpPr>
+        <p:spPr>
+          <a:xfrm>
+            <a:off x="877824" y="4590288"/>
+            <a:ext cx="10241280" cy="594360"/>
+          </a:xfrm>
+          <a:prstGeom prst="rect">
+            <a:avLst/>
+          </a:prstGeom>
+          <a:noFill/>
+        </p:spPr>
+        <p:txBody>
+          <a:bodyPr wrap="square" lIns="73152" rIns="73152" tIns="36576" bIns="36576">
+            <a:spAutoFit/>
+          </a:bodyPr>
+          <a:lstStyle/>
+          <a:p>
+            <a:pPr algn="ctr">
+              <a:spcAft>
+                <a:spcPts val="0"/>
+              </a:spcAft>
+              <a:defRPr sz="1900" b="1">
+                <a:solidFill>
+                  <a:srgbClr val="DB7E22"/>
+                </a:solidFill>
+                <a:latin typeface="Noto Sans CJK KR"/>
+              </a:defRPr>
+            </a:pPr>
+            <a:r>
+              <a:t>기록할 것: 바꾼 값(단위) · 기대한 변화 · 실제 출력/화면 · 원래 값으로 되돌린 결과</a:t>
+            </a:r>
+          </a:p>
+        </p:txBody>
+      </p:sp>
+    </p:spTree>
+  </p:cSld>
+  <p:clrMapOvr>
+    <a:masterClrMapping/>
+  </p:clrMapOvr>
+</p:sld>
+</file>
+
+<file path=ppt/slides/slide46.xml><?xml version="1.0" encoding="utf-8"?>
+<p:sld xmlns:a="http://schemas.openxmlformats.org/drawingml/2006/main" xmlns:p="http://schemas.openxmlformats.org/presentationml/2006/main" xmlns:r="http://schemas.openxmlformats.org/officeDocument/2006/relationships">
+  <p:cSld>
+    <p:spTree>
+      <p:nvGrpSpPr>
+        <p:cNvPr id="1" name=""/>
+        <p:cNvGrpSpPr/>
+        <p:nvPr/>
+      </p:nvGrpSpPr>
+      <p:grpSpPr/>
+      <p:sp>
+        <p:nvSpPr>
+          <p:cNvPr id="2" name="TextBox 1"/>
+          <p:cNvSpPr txBox="1"/>
+          <p:nvPr/>
+        </p:nvSpPr>
+        <p:spPr>
+          <a:xfrm>
+            <a:off x="566928" y="347472"/>
+            <a:ext cx="10881360" cy="438912"/>
+          </a:xfrm>
+          <a:prstGeom prst="rect">
+            <a:avLst/>
+          </a:prstGeom>
+          <a:noFill/>
+        </p:spPr>
+        <p:txBody>
+          <a:bodyPr wrap="square" lIns="73152" rIns="73152" tIns="36576" bIns="36576">
+            <a:spAutoFit/>
+          </a:bodyPr>
+          <a:lstStyle/>
+          <a:p>
+            <a:pPr algn="l">
+              <a:spcAft>
+                <a:spcPts val="0"/>
+              </a:spcAft>
+              <a:defRPr sz="3200" b="1">
+                <a:solidFill>
+                  <a:srgbClr val="122C4E"/>
+                </a:solidFill>
+                <a:latin typeface="Noto Sans CJK KR"/>
+              </a:defRPr>
+            </a:pPr>
+            <a:r>
+              <a:t>체크포인트를 저장하고 다음 모듈로 넘긴다</a:t>
+            </a:r>
+          </a:p>
+        </p:txBody>
+      </p:sp>
+      <p:sp>
+        <p:nvSpPr>
+          <p:cNvPr id="3" name="TextBox 2"/>
+          <p:cNvSpPr txBox="1"/>
+          <p:nvPr/>
+        </p:nvSpPr>
+        <p:spPr>
+          <a:xfrm>
+            <a:off x="603504" y="859536"/>
+            <a:ext cx="10698480" cy="292608"/>
+          </a:xfrm>
+          <a:prstGeom prst="rect">
+            <a:avLst/>
+          </a:prstGeom>
+          <a:noFill/>
+        </p:spPr>
+        <p:txBody>
+          <a:bodyPr wrap="square" lIns="73152" rIns="73152" tIns="36576" bIns="36576">
+            <a:spAutoFit/>
+          </a:bodyPr>
+          <a:lstStyle/>
+          <a:p>
+            <a:pPr algn="l">
+              <a:spcAft>
+                <a:spcPts val="0"/>
+              </a:spcAft>
+              <a:defRPr sz="1700" b="0">
+                <a:solidFill>
+                  <a:srgbClr val="5C6672"/>
+                </a:solidFill>
+                <a:latin typeface="Noto Sans CJK KR"/>
+              </a:defRPr>
+            </a:pPr>
+            <a:r>
+              <a:t>현재 Complete는 다음 Starter의 기준선입니다.</a:t>
+            </a:r>
+          </a:p>
+        </p:txBody>
+      </p:sp>
+      <p:sp>
+        <p:nvSpPr>
+          <p:cNvPr id="4" name="TextBox 3"/>
+          <p:cNvSpPr txBox="1"/>
+          <p:nvPr/>
+        </p:nvSpPr>
+        <p:spPr>
+          <a:xfrm>
+            <a:off x="530352" y="6510528"/>
+            <a:ext cx="7772400" cy="201168"/>
+          </a:xfrm>
+          <a:prstGeom prst="rect">
+            <a:avLst/>
+          </a:prstGeom>
+          <a:noFill/>
+        </p:spPr>
+        <p:txBody>
+          <a:bodyPr wrap="square" lIns="73152" rIns="73152" tIns="36576" bIns="36576">
+            <a:spAutoFit/>
+          </a:bodyPr>
+          <a:lstStyle/>
+          <a:p>
+            <a:pPr algn="l">
+              <a:spcAft>
+                <a:spcPts val="0"/>
+              </a:spcAft>
+              <a:defRPr sz="1000" b="0">
+                <a:solidFill>
+                  <a:srgbClr val="5C6672"/>
+                </a:solidFill>
+                <a:latin typeface="Noto Sans CJK KR"/>
+              </a:defRPr>
+            </a:pPr>
+            <a:r>
+              <a:t>ROS 2 Jazzy · Gazebo Harmonic · M12 · 따라 하기형 AGV 실습</a:t>
+            </a:r>
+          </a:p>
+        </p:txBody>
+      </p:sp>
+      <p:sp>
+        <p:nvSpPr>
+          <p:cNvPr id="5" name="TextBox 4"/>
+          <p:cNvSpPr txBox="1"/>
+          <p:nvPr/>
+        </p:nvSpPr>
+        <p:spPr>
+          <a:xfrm>
+            <a:off x="9144000" y="6510528"/>
+            <a:ext cx="2468880" cy="201168"/>
+          </a:xfrm>
+          <a:prstGeom prst="rect">
+            <a:avLst/>
+          </a:prstGeom>
+          <a:noFill/>
+        </p:spPr>
+        <p:txBody>
+          <a:bodyPr wrap="square" lIns="73152" rIns="73152" tIns="36576" bIns="36576">
+            <a:spAutoFit/>
+          </a:bodyPr>
+          <a:lstStyle/>
+          <a:p>
+            <a:pPr algn="r">
+              <a:spcAft>
+                <a:spcPts val="0"/>
+              </a:spcAft>
+              <a:defRPr sz="1000" b="0">
+                <a:solidFill>
+                  <a:srgbClr val="5C6672"/>
+                </a:solidFill>
+                <a:latin typeface="Noto Sans CJK KR"/>
+              </a:defRPr>
+            </a:pPr>
+            <a:r>
+              <a:t>명령·파일 경로는 슬라이드에서 복사 가능</a:t>
+            </a:r>
+          </a:p>
+        </p:txBody>
+      </p:sp>
+      <p:sp>
+        <p:nvSpPr>
+          <p:cNvPr id="6" name="Rectangle 5"/>
+          <p:cNvSpPr/>
+          <p:nvPr/>
+        </p:nvSpPr>
+        <p:spPr>
+          <a:xfrm>
+            <a:off x="566928" y="1188720"/>
+            <a:ext cx="11064240" cy="347472"/>
+          </a:xfrm>
+          <a:prstGeom prst="rect">
+            <a:avLst/>
+          </a:prstGeom>
+          <a:solidFill>
+            <a:srgbClr val="F4F7FB"/>
+          </a:solidFill>
+          <a:ln>
+            <a:solidFill>
+              <a:srgbClr val="F4F7FB"/>
+            </a:solidFill>
+          </a:ln>
+        </p:spPr>
+        <p:style>
+          <a:lnRef idx="1">
+            <a:schemeClr val="accent1"/>
+          </a:lnRef>
+          <a:fillRef idx="3">
+            <a:schemeClr val="accent1"/>
+          </a:fillRef>
+          <a:effectRef idx="2">
+            <a:schemeClr val="accent1"/>
+          </a:effectRef>
+          <a:fontRef idx="minor">
+            <a:schemeClr val="lt1"/>
+          </a:fontRef>
+        </p:style>
+        <p:txBody>
+          <a:bodyPr rtlCol="0" anchor="ctr" wrap="square" lIns="73152" rIns="73152" tIns="36576" bIns="36576"/>
+          <a:lstStyle/>
+          <a:p>
+            <a:pPr algn="l">
+              <a:spcAft>
+                <a:spcPts val="0"/>
+              </a:spcAft>
+              <a:defRPr sz="1300" b="1">
+                <a:solidFill>
+                  <a:srgbClr val="122C4E"/>
+                </a:solidFill>
+                <a:latin typeface="Noto Sans CJK KR"/>
+              </a:defRPr>
+            </a:pPr>
+            <a:r>
+              <a:t>현재 단계 체크포인트    |    현재 폴더 ~/agv_ws    |    현재 터미널</a:t>
+            </a:r>
+          </a:p>
+        </p:txBody>
+      </p:sp>
+      <p:sp>
+        <p:nvSpPr>
+          <p:cNvPr id="7" name="Rounded Rectangle 6"/>
+          <p:cNvSpPr/>
+          <p:nvPr/>
+        </p:nvSpPr>
+        <p:spPr>
+          <a:xfrm>
+            <a:off x="685800" y="1737360"/>
+            <a:ext cx="10972800" cy="3611880"/>
+          </a:xfrm>
+          <a:prstGeom prst="roundRect">
+            <a:avLst/>
+          </a:prstGeom>
+          <a:solidFill>
+            <a:srgbClr val="F4F7FB"/>
+          </a:solidFill>
+          <a:ln>
+            <a:solidFill>
+              <a:srgbClr val="D2DCE8"/>
+            </a:solidFill>
+          </a:ln>
+        </p:spPr>
+        <p:style>
+          <a:lnRef idx="1">
+            <a:schemeClr val="accent1"/>
+          </a:lnRef>
+          <a:fillRef idx="3">
+            <a:schemeClr val="accent1"/>
+          </a:fillRef>
+          <a:effectRef idx="2">
+            <a:schemeClr val="accent1"/>
+          </a:effectRef>
+          <a:fontRef idx="minor">
+            <a:schemeClr val="lt1"/>
+          </a:fontRef>
+        </p:style>
+        <p:txBody>
+          <a:bodyPr rtlCol="0" anchor="ctr"/>
+          <a:lstStyle/>
+          <a:p>
+            <a:pPr algn="ctr"/>
+          </a:p>
+        </p:txBody>
+      </p:sp>
+      <p:sp>
+        <p:nvSpPr>
+          <p:cNvPr id="8" name="TextBox 7"/>
+          <p:cNvSpPr txBox="1"/>
+          <p:nvPr/>
+        </p:nvSpPr>
+        <p:spPr>
+          <a:xfrm>
+            <a:off x="896112" y="1993392"/>
+            <a:ext cx="10332720" cy="2971800"/>
+          </a:xfrm>
+          <a:prstGeom prst="rect">
+            <a:avLst/>
+          </a:prstGeom>
+          <a:noFill/>
+        </p:spPr>
+        <p:txBody>
+          <a:bodyPr wrap="square" lIns="109728" rIns="109728">
+            <a:spAutoFit/>
+          </a:bodyPr>
+          <a:lstStyle/>
+          <a:p>
+            <a:pPr>
+              <a:spcAft>
+                <a:spcPts val="800"/>
+              </a:spcAft>
+              <a:defRPr sz="1800">
+                <a:solidFill>
+                  <a:srgbClr val="122C4E"/>
+                </a:solidFill>
+                <a:latin typeface="Noto Sans CJK KR"/>
+              </a:defRPr>
+            </a:pPr>
+            <a:r>
+              <a:t>• □ 완료 화면: /camera/image_raw가 bridge를 통과하고 cv_bridge 소비 노드가 받을 준비가 된 상태를 확인한다.</a:t>
+            </a:r>
+          </a:p>
+          <a:p>
+            <a:pPr>
+              <a:spcAft>
+                <a:spcPts val="800"/>
+              </a:spcAft>
+              <a:defRPr sz="1800">
+                <a:solidFill>
+                  <a:srgbClr val="122C4E"/>
+                </a:solidFill>
+                <a:latin typeface="Noto Sans CJK KR"/>
+              </a:defRPr>
+            </a:pPr>
+            <a:r>
+              <a:t>• □ Complete 파일: blocks/D_sensors/M12_camera_sensor/complete/</a:t>
+            </a:r>
+          </a:p>
+          <a:p>
+            <a:pPr>
+              <a:spcAft>
+                <a:spcPts val="800"/>
+              </a:spcAft>
+              <a:defRPr sz="1800">
+                <a:solidFill>
+                  <a:srgbClr val="122C4E"/>
+                </a:solidFill>
+                <a:latin typeface="Noto Sans CJK KR"/>
+              </a:defRPr>
+            </a:pPr>
+            <a:r>
+              <a:t>• □ 정상 로그·캡처: logs/validation.log, screenshots/validation_terminal.png</a:t>
+            </a:r>
+          </a:p>
+          <a:p>
+            <a:pPr>
+              <a:spcAft>
+                <a:spcPts val="800"/>
+              </a:spcAft>
+              <a:defRPr sz="1800">
+                <a:solidFill>
+                  <a:srgbClr val="122C4E"/>
+                </a:solidFill>
+                <a:latin typeface="Noto Sans CJK KR"/>
+              </a:defRPr>
+            </a:pPr>
+            <a:r>
+              <a:t>• □ 버전 식별: CHECKSUM_or_TAG.txt의 SHA-256 manifest</a:t>
+            </a:r>
+          </a:p>
+          <a:p>
+            <a:pPr>
+              <a:spcAft>
+                <a:spcPts val="800"/>
+              </a:spcAft>
+              <a:defRPr sz="1800">
+                <a:solidFill>
+                  <a:srgbClr val="122C4E"/>
+                </a:solidFill>
+                <a:latin typeface="Noto Sans CJK KR"/>
+              </a:defRPr>
+            </a:pPr>
+            <a:r>
+              <a:t>• □ 다음 시작 조건: M13 LiDAR</a:t>
+            </a:r>
+          </a:p>
+        </p:txBody>
+      </p:sp>
+      <p:sp>
+        <p:nvSpPr>
+          <p:cNvPr id="9" name="TextBox 8"/>
+          <p:cNvSpPr txBox="1"/>
+          <p:nvPr/>
+        </p:nvSpPr>
+        <p:spPr>
+          <a:xfrm>
+            <a:off x="868680" y="5596128"/>
+            <a:ext cx="10515600" cy="338328"/>
+          </a:xfrm>
+          <a:prstGeom prst="rect">
+            <a:avLst/>
+          </a:prstGeom>
+          <a:noFill/>
+        </p:spPr>
+        <p:txBody>
+          <a:bodyPr wrap="square" lIns="73152" rIns="73152" tIns="36576" bIns="36576">
+            <a:spAutoFit/>
+          </a:bodyPr>
+          <a:lstStyle/>
+          <a:p>
+            <a:pPr algn="ctr">
+              <a:spcAft>
+                <a:spcPts val="0"/>
+              </a:spcAft>
+              <a:defRPr sz="1700" b="1">
+                <a:solidFill>
+                  <a:srgbClr val="2A8B5A"/>
+                </a:solidFill>
+                <a:latin typeface="Noto Sans CJK KR"/>
+              </a:defRPr>
+            </a:pPr>
+            <a:r>
+              <a:t>다음 모듈을 시작하기 전, 이 슬라이드의 Complete와 다음 모듈의 Starter를 비교합니다.</a:t>
+            </a:r>
+          </a:p>
+        </p:txBody>
+      </p:sp>
+    </p:spTree>
+  </p:cSld>
+  <p:clrMapOvr>
+    <a:masterClrMapping/>
+  </p:clrMapOvr>
+</p:sld>
+</file>
+
+<file path=ppt/slides/slide47.xml><?xml version="1.0" encoding="utf-8"?>
+<p:sld xmlns:a="http://schemas.openxmlformats.org/drawingml/2006/main" xmlns:p="http://schemas.openxmlformats.org/presentationml/2006/main" xmlns:r="http://schemas.openxmlformats.org/officeDocument/2006/relationships">
+  <p:cSld>
+    <p:spTree>
+      <p:nvGrpSpPr>
+        <p:cNvPr id="1" name=""/>
+        <p:cNvGrpSpPr/>
+        <p:nvPr/>
+      </p:nvGrpSpPr>
+      <p:grpSpPr/>
+      <p:sp>
+        <p:nvSpPr>
+          <p:cNvPr id="2" name="TextBox 1"/>
+          <p:cNvSpPr txBox="1"/>
+          <p:nvPr/>
+        </p:nvSpPr>
+        <p:spPr>
+          <a:xfrm>
+            <a:off x="566928" y="347472"/>
+            <a:ext cx="10881360" cy="438912"/>
+          </a:xfrm>
+          <a:prstGeom prst="rect">
+            <a:avLst/>
+          </a:prstGeom>
+          <a:noFill/>
+        </p:spPr>
+        <p:txBody>
+          <a:bodyPr wrap="square" lIns="73152" rIns="73152" tIns="36576" bIns="36576">
+            <a:spAutoFit/>
+          </a:bodyPr>
+          <a:lstStyle/>
+          <a:p>
+            <a:pPr algn="l">
+              <a:spcAft>
+                <a:spcPts val="0"/>
+              </a:spcAft>
+              <a:defRPr sz="3200" b="1">
+                <a:solidFill>
+                  <a:srgbClr val="122C4E"/>
+                </a:solidFill>
+                <a:latin typeface="Noto Sans CJK KR"/>
+              </a:defRPr>
+            </a:pPr>
+            <a:r>
               <a:t>공식 참고 자료</a:t>
             </a:r>
           </a:p>
@@ -24234,7 +26418,7 @@
         </p:nvSpPr>
         <p:spPr>
           <a:xfrm>
-            <a:off x="914400" y="1810512"/>
+            <a:off x="914400" y="1773936"/>
             <a:ext cx="3840480" cy="256032"/>
           </a:xfrm>
           <a:prstGeom prst="rect">
@@ -24273,8 +26457,8 @@
         </p:nvSpPr>
         <p:spPr>
           <a:xfrm>
-            <a:off x="914400" y="2121408"/>
-            <a:ext cx="9966960" cy="256032"/>
+            <a:off x="914400" y="2048255"/>
+            <a:ext cx="9966960" cy="475488"/>
           </a:xfrm>
           <a:prstGeom prst="rect">
             <a:avLst/>
@@ -24291,7 +26475,7 @@
               <a:spcAft>
                 <a:spcPts val="0"/>
               </a:spcAft>
-              <a:defRPr sz="1200" b="0">
+              <a:defRPr sz="1000" b="0">
                 <a:solidFill>
                   <a:srgbClr val="225B9B"/>
                 </a:solidFill>
@@ -24312,7 +26496,7 @@
         </p:nvSpPr>
         <p:spPr>
           <a:xfrm>
-            <a:off x="914400" y="2816352"/>
+            <a:off x="914400" y="2852928"/>
             <a:ext cx="3840480" cy="256032"/>
           </a:xfrm>
           <a:prstGeom prst="rect">
@@ -24352,7 +26536,7 @@
         <p:spPr>
           <a:xfrm>
             <a:off x="914400" y="3127248"/>
-            <a:ext cx="9966960" cy="256032"/>
+            <a:ext cx="9966960" cy="475488"/>
           </a:xfrm>
           <a:prstGeom prst="rect">
             <a:avLst/>
@@ -24369,7 +26553,7 @@
               <a:spcAft>
                 <a:spcPts val="0"/>
               </a:spcAft>
-              <a:defRPr sz="1200" b="0">
+              <a:defRPr sz="1000" b="0">
                 <a:solidFill>
                   <a:srgbClr val="225B9B"/>
                 </a:solidFill>
@@ -24390,7 +26574,7 @@
         </p:nvSpPr>
         <p:spPr>
           <a:xfrm>
-            <a:off x="914400" y="3822191"/>
+            <a:off x="914400" y="3931920"/>
             <a:ext cx="3840480" cy="256032"/>
           </a:xfrm>
           <a:prstGeom prst="rect">
@@ -24429,8 +26613,8 @@
         </p:nvSpPr>
         <p:spPr>
           <a:xfrm>
-            <a:off x="914400" y="4133087"/>
-            <a:ext cx="9966960" cy="256032"/>
+            <a:off x="914400" y="4206240"/>
+            <a:ext cx="9966960" cy="475488"/>
           </a:xfrm>
           <a:prstGeom prst="rect">
             <a:avLst/>
@@ -24447,7 +26631,7 @@
               <a:spcAft>
                 <a:spcPts val="0"/>
               </a:spcAft>
-              <a:defRPr sz="1200" b="0">
+              <a:defRPr sz="1000" b="0">
                 <a:solidFill>
                   <a:srgbClr val="225B9B"/>
                 </a:solidFill>
@@ -24468,7 +26652,7 @@
         </p:nvSpPr>
         <p:spPr>
           <a:xfrm>
-            <a:off x="914400" y="4828032"/>
+            <a:off x="914400" y="5010912"/>
             <a:ext cx="3840480" cy="256032"/>
           </a:xfrm>
           <a:prstGeom prst="rect">
@@ -24507,8 +26691,8 @@
         </p:nvSpPr>
         <p:spPr>
           <a:xfrm>
-            <a:off x="914400" y="5138928"/>
-            <a:ext cx="9966960" cy="256032"/>
+            <a:off x="914400" y="5285232"/>
+            <a:ext cx="9966960" cy="475488"/>
           </a:xfrm>
           <a:prstGeom prst="rect">
             <a:avLst/>
@@ -24525,7 +26709,7 @@
               <a:spcAft>
                 <a:spcPts val="0"/>
               </a:spcAft>
-              <a:defRPr sz="1200" b="0">
+              <a:defRPr sz="1000" b="0">
                 <a:solidFill>
                   <a:srgbClr val="225B9B"/>
                 </a:solidFill>
@@ -26327,7 +28511,7 @@
               </a:defRPr>
             </a:pPr>
             <a:r>
-              <a:t>파일을 새로 만들고 저장한다 (1/21)</a:t>
+              <a:t>파일을 새로 만들고 저장한다 (1/24)</a:t>
             </a:r>
           </a:p>
         </p:txBody>
@@ -26502,7 +28686,7 @@
               </a:defRPr>
             </a:pPr>
             <a:r>
-              <a:t>현재 단계 3/24    |    현재 폴더 ~/agv_ws    |    현재 터미널</a:t>
+              <a:t>현재 단계 3/27    |    현재 폴더 ~/agv_ws    |    현재 터미널</a:t>
             </a:r>
           </a:p>
         </p:txBody>
@@ -26515,8 +28699,8 @@
         </p:nvSpPr>
         <p:spPr>
           <a:xfrm>
-            <a:off x="658368" y="1682496"/>
-            <a:ext cx="10972800" cy="347472"/>
+            <a:off x="658368" y="1627632"/>
+            <a:ext cx="10972800" cy="256032"/>
           </a:xfrm>
           <a:prstGeom prst="rect">
             <a:avLst/>
@@ -26533,7 +28717,7 @@
               <a:spcAft>
                 <a:spcPts val="0"/>
               </a:spcAft>
-              <a:defRPr sz="1700" b="1">
+              <a:defRPr sz="1500" b="1">
                 <a:solidFill>
                   <a:srgbClr val="122C4E"/>
                 </a:solidFill>
@@ -26554,8 +28738,8 @@
         </p:nvSpPr>
         <p:spPr>
           <a:xfrm>
-            <a:off x="658368" y="2103120"/>
-            <a:ext cx="10972800" cy="493776"/>
+            <a:off x="658368" y="1956816"/>
+            <a:ext cx="10972800" cy="603504"/>
           </a:xfrm>
           <a:prstGeom prst="rect">
             <a:avLst/>
@@ -26599,7 +28783,11 @@
               </a:defRPr>
             </a:pPr>
             <a:r>
-              <a:t>파일 생성/열기: mkdir -p ~/agv_ws/src/agv_gazebo/models/agv    &amp;&amp;    nano ~/agv_ws/src/agv_gazebo/models/agv/model.sdf</a:t>
+              <a:t>파일 생성: mkdir -p ~/agv_ws/src/agv_gazebo/models/agv</a:t>
+            </a:r>
+            <a:br/>
+            <a:r>
+              <a:t>파일 열기: nano ~/agv_ws/src/agv_gazebo/models/agv/model.sdf</a:t>
             </a:r>
           </a:p>
         </p:txBody>
@@ -26612,8 +28800,8 @@
         </p:nvSpPr>
         <p:spPr>
           <a:xfrm>
-            <a:off x="658368" y="2761488"/>
-            <a:ext cx="10972800" cy="3383280"/>
+            <a:off x="658368" y="2706624"/>
+            <a:ext cx="10972800" cy="3364992"/>
           </a:xfrm>
           <a:prstGeom prst="rect">
             <a:avLst/>
@@ -26703,14 +28891,6 @@
             <a:r>
               <a:t>      </a:t>
             </a:r>
-            <a:br/>
-            <a:r>
-              <a:t>      </a:t>
-            </a:r>
-            <a:br/>
-            <a:r>
-              <a:t>      &lt;inertial&gt;</a:t>
-            </a:r>
           </a:p>
         </p:txBody>
       </p:sp>
@@ -26722,7 +28902,7 @@
         </p:nvSpPr>
         <p:spPr>
           <a:xfrm>
-            <a:off x="749808" y="6199632"/>
+            <a:off x="749808" y="6181344"/>
             <a:ext cx="10789920" cy="201168"/>
           </a:xfrm>
           <a:prstGeom prst="rect">
@@ -26748,7 +28928,7 @@
               </a:defRPr>
             </a:pPr>
             <a:r>
-              <a:t>파일 전체 1/21 · 이 슬라이드 다음에 같은 파일의 나머지 줄이 이어집니다.</a:t>
+              <a:t>파일 전체 1/24 · 이 슬라이드 다음에 같은 파일의 나머지 줄이 이어집니다.</a:t>
             </a:r>
           </a:p>
         </p:txBody>

--- a/blocks/D_sensors/M12_camera_sensor/M12_Camera_Sensor.pptx
+++ b/blocks/D_sensors/M12_camera_sensor/M12_Camera_Sensor.pptx
@@ -52,6 +52,12 @@
     <p:sldId id="300" r:id="rId52"/>
     <p:sldId id="301" r:id="rId53"/>
     <p:sldId id="302" r:id="rId54"/>
+    <p:sldId id="303" r:id="rId55"/>
+    <p:sldId id="304" r:id="rId56"/>
+    <p:sldId id="305" r:id="rId57"/>
+    <p:sldId id="306" r:id="rId58"/>
+    <p:sldId id="307" r:id="rId59"/>
+    <p:sldId id="308" r:id="rId60"/>
   </p:sldIdLst>
   <p:sldSz cx="12191999" cy="6858000" type="screen4x3"/>
   <p:notesSz cx="6858000" cy="9144000"/>
@@ -638,12 +644,12 @@
           <a:lstStyle/>
           <a:p>
             <a:r>
-              <a:t>[설명] ~/agv_ws/src/agv_gazebo/models/agv/model.sdf의 전체 파일을 2/24 구간으로 작성한다.</a:t>
-            </a:r>
-          </a:p>
-          <a:p>
-            <a:r>
-              <a:t>[실행] nano ~/agv_ws/src/agv_gazebo/models/agv/model.sdf</a:t>
+              <a:t>[설명] ~/ros2_curri/agv_ws/src/agv_gazebo/models/agv/model.sdf의 전체 파일을 2/24 구간으로 작성한다.</a:t>
+            </a:r>
+          </a:p>
+          <a:p>
+            <a:r>
+              <a:t>[실행] nano ~/ros2_curri/agv_ws/src/agv_gazebo/models/agv/model.sdf</a:t>
             </a:r>
           </a:p>
           <a:p>
@@ -728,12 +734,12 @@
           <a:lstStyle/>
           <a:p>
             <a:r>
-              <a:t>[설명] ~/agv_ws/src/agv_gazebo/models/agv/model.sdf의 전체 파일을 3/24 구간으로 작성한다.</a:t>
-            </a:r>
-          </a:p>
-          <a:p>
-            <a:r>
-              <a:t>[실행] nano ~/agv_ws/src/agv_gazebo/models/agv/model.sdf</a:t>
+              <a:t>[설명] ~/ros2_curri/agv_ws/src/agv_gazebo/models/agv/model.sdf의 전체 파일을 3/24 구간으로 작성한다.</a:t>
+            </a:r>
+          </a:p>
+          <a:p>
+            <a:r>
+              <a:t>[실행] nano ~/ros2_curri/agv_ws/src/agv_gazebo/models/agv/model.sdf</a:t>
             </a:r>
           </a:p>
           <a:p>
@@ -818,12 +824,12 @@
           <a:lstStyle/>
           <a:p>
             <a:r>
-              <a:t>[설명] ~/agv_ws/src/agv_gazebo/models/agv/model.sdf의 전체 파일을 4/24 구간으로 작성한다.</a:t>
-            </a:r>
-          </a:p>
-          <a:p>
-            <a:r>
-              <a:t>[실행] nano ~/agv_ws/src/agv_gazebo/models/agv/model.sdf</a:t>
+              <a:t>[설명] ~/ros2_curri/agv_ws/src/agv_gazebo/models/agv/model.sdf의 전체 파일을 4/24 구간으로 작성한다.</a:t>
+            </a:r>
+          </a:p>
+          <a:p>
+            <a:r>
+              <a:t>[실행] nano ~/ros2_curri/agv_ws/src/agv_gazebo/models/agv/model.sdf</a:t>
             </a:r>
           </a:p>
           <a:p>
@@ -908,12 +914,12 @@
           <a:lstStyle/>
           <a:p>
             <a:r>
-              <a:t>[설명] ~/agv_ws/src/agv_gazebo/models/agv/model.sdf의 전체 파일을 5/24 구간으로 작성한다.</a:t>
-            </a:r>
-          </a:p>
-          <a:p>
-            <a:r>
-              <a:t>[실행] nano ~/agv_ws/src/agv_gazebo/models/agv/model.sdf</a:t>
+              <a:t>[설명] ~/ros2_curri/agv_ws/src/agv_gazebo/models/agv/model.sdf의 전체 파일을 5/24 구간으로 작성한다.</a:t>
+            </a:r>
+          </a:p>
+          <a:p>
+            <a:r>
+              <a:t>[실행] nano ~/ros2_curri/agv_ws/src/agv_gazebo/models/agv/model.sdf</a:t>
             </a:r>
           </a:p>
           <a:p>
@@ -998,12 +1004,12 @@
           <a:lstStyle/>
           <a:p>
             <a:r>
-              <a:t>[설명] ~/agv_ws/src/agv_gazebo/models/agv/model.sdf의 전체 파일을 6/24 구간으로 작성한다.</a:t>
-            </a:r>
-          </a:p>
-          <a:p>
-            <a:r>
-              <a:t>[실행] nano ~/agv_ws/src/agv_gazebo/models/agv/model.sdf</a:t>
+              <a:t>[설명] ~/ros2_curri/agv_ws/src/agv_gazebo/models/agv/model.sdf의 전체 파일을 6/24 구간으로 작성한다.</a:t>
+            </a:r>
+          </a:p>
+          <a:p>
+            <a:r>
+              <a:t>[실행] nano ~/ros2_curri/agv_ws/src/agv_gazebo/models/agv/model.sdf</a:t>
             </a:r>
           </a:p>
           <a:p>
@@ -1088,12 +1094,12 @@
           <a:lstStyle/>
           <a:p>
             <a:r>
-              <a:t>[설명] ~/agv_ws/src/agv_gazebo/models/agv/model.sdf의 전체 파일을 7/24 구간으로 작성한다.</a:t>
-            </a:r>
-          </a:p>
-          <a:p>
-            <a:r>
-              <a:t>[실행] nano ~/agv_ws/src/agv_gazebo/models/agv/model.sdf</a:t>
+              <a:t>[설명] ~/ros2_curri/agv_ws/src/agv_gazebo/models/agv/model.sdf의 전체 파일을 7/24 구간으로 작성한다.</a:t>
+            </a:r>
+          </a:p>
+          <a:p>
+            <a:r>
+              <a:t>[실행] nano ~/ros2_curri/agv_ws/src/agv_gazebo/models/agv/model.sdf</a:t>
             </a:r>
           </a:p>
           <a:p>
@@ -1178,12 +1184,12 @@
           <a:lstStyle/>
           <a:p>
             <a:r>
-              <a:t>[설명] ~/agv_ws/src/agv_gazebo/models/agv/model.sdf의 전체 파일을 8/24 구간으로 작성한다.</a:t>
-            </a:r>
-          </a:p>
-          <a:p>
-            <a:r>
-              <a:t>[실행] nano ~/agv_ws/src/agv_gazebo/models/agv/model.sdf</a:t>
+              <a:t>[설명] ~/ros2_curri/agv_ws/src/agv_gazebo/models/agv/model.sdf의 전체 파일을 8/24 구간으로 작성한다.</a:t>
+            </a:r>
+          </a:p>
+          <a:p>
+            <a:r>
+              <a:t>[실행] nano ~/ros2_curri/agv_ws/src/agv_gazebo/models/agv/model.sdf</a:t>
             </a:r>
           </a:p>
           <a:p>
@@ -1268,12 +1274,12 @@
           <a:lstStyle/>
           <a:p>
             <a:r>
-              <a:t>[설명] ~/agv_ws/src/agv_gazebo/models/agv/model.sdf의 전체 파일을 9/24 구간으로 작성한다.</a:t>
-            </a:r>
-          </a:p>
-          <a:p>
-            <a:r>
-              <a:t>[실행] nano ~/agv_ws/src/agv_gazebo/models/agv/model.sdf</a:t>
+              <a:t>[설명] ~/ros2_curri/agv_ws/src/agv_gazebo/models/agv/model.sdf의 전체 파일을 9/24 구간으로 작성한다.</a:t>
+            </a:r>
+          </a:p>
+          <a:p>
+            <a:r>
+              <a:t>[실행] nano ~/ros2_curri/agv_ws/src/agv_gazebo/models/agv/model.sdf</a:t>
             </a:r>
           </a:p>
           <a:p>
@@ -1358,12 +1364,12 @@
           <a:lstStyle/>
           <a:p>
             <a:r>
-              <a:t>[설명] ~/agv_ws/src/agv_gazebo/models/agv/model.sdf의 전체 파일을 10/24 구간으로 작성한다.</a:t>
-            </a:r>
-          </a:p>
-          <a:p>
-            <a:r>
-              <a:t>[실행] nano ~/agv_ws/src/agv_gazebo/models/agv/model.sdf</a:t>
+              <a:t>[설명] ~/ros2_curri/agv_ws/src/agv_gazebo/models/agv/model.sdf의 전체 파일을 10/24 구간으로 작성한다.</a:t>
+            </a:r>
+          </a:p>
+          <a:p>
+            <a:r>
+              <a:t>[실행] nano ~/ros2_curri/agv_ws/src/agv_gazebo/models/agv/model.sdf</a:t>
             </a:r>
           </a:p>
           <a:p>
@@ -1448,12 +1454,12 @@
           <a:lstStyle/>
           <a:p>
             <a:r>
-              <a:t>[설명] ~/agv_ws/src/agv_gazebo/models/agv/model.sdf의 전체 파일을 11/24 구간으로 작성한다.</a:t>
-            </a:r>
-          </a:p>
-          <a:p>
-            <a:r>
-              <a:t>[실행] nano ~/agv_ws/src/agv_gazebo/models/agv/model.sdf</a:t>
+              <a:t>[설명] ~/ros2_curri/agv_ws/src/agv_gazebo/models/agv/model.sdf의 전체 파일을 11/24 구간으로 작성한다.</a:t>
+            </a:r>
+          </a:p>
+          <a:p>
+            <a:r>
+              <a:t>[실행] nano ~/ros2_curri/agv_ws/src/agv_gazebo/models/agv/model.sdf</a:t>
             </a:r>
           </a:p>
           <a:p>
@@ -1628,12 +1634,12 @@
           <a:lstStyle/>
           <a:p>
             <a:r>
-              <a:t>[설명] ~/agv_ws/src/agv_gazebo/models/agv/model.sdf의 전체 파일을 12/24 구간으로 작성한다.</a:t>
-            </a:r>
-          </a:p>
-          <a:p>
-            <a:r>
-              <a:t>[실행] nano ~/agv_ws/src/agv_gazebo/models/agv/model.sdf</a:t>
+              <a:t>[설명] ~/ros2_curri/agv_ws/src/agv_gazebo/models/agv/model.sdf의 전체 파일을 12/24 구간으로 작성한다.</a:t>
+            </a:r>
+          </a:p>
+          <a:p>
+            <a:r>
+              <a:t>[실행] nano ~/ros2_curri/agv_ws/src/agv_gazebo/models/agv/model.sdf</a:t>
             </a:r>
           </a:p>
           <a:p>
@@ -1718,12 +1724,12 @@
           <a:lstStyle/>
           <a:p>
             <a:r>
-              <a:t>[설명] ~/agv_ws/src/agv_gazebo/models/agv/model.sdf의 전체 파일을 13/24 구간으로 작성한다.</a:t>
-            </a:r>
-          </a:p>
-          <a:p>
-            <a:r>
-              <a:t>[실행] nano ~/agv_ws/src/agv_gazebo/models/agv/model.sdf</a:t>
+              <a:t>[설명] ~/ros2_curri/agv_ws/src/agv_gazebo/models/agv/model.sdf의 전체 파일을 13/24 구간으로 작성한다.</a:t>
+            </a:r>
+          </a:p>
+          <a:p>
+            <a:r>
+              <a:t>[실행] nano ~/ros2_curri/agv_ws/src/agv_gazebo/models/agv/model.sdf</a:t>
             </a:r>
           </a:p>
           <a:p>
@@ -1808,12 +1814,12 @@
           <a:lstStyle/>
           <a:p>
             <a:r>
-              <a:t>[설명] ~/agv_ws/src/agv_gazebo/models/agv/model.sdf의 전체 파일을 14/24 구간으로 작성한다.</a:t>
-            </a:r>
-          </a:p>
-          <a:p>
-            <a:r>
-              <a:t>[실행] nano ~/agv_ws/src/agv_gazebo/models/agv/model.sdf</a:t>
+              <a:t>[설명] ~/ros2_curri/agv_ws/src/agv_gazebo/models/agv/model.sdf의 전체 파일을 14/24 구간으로 작성한다.</a:t>
+            </a:r>
+          </a:p>
+          <a:p>
+            <a:r>
+              <a:t>[실행] nano ~/ros2_curri/agv_ws/src/agv_gazebo/models/agv/model.sdf</a:t>
             </a:r>
           </a:p>
           <a:p>
@@ -1898,12 +1904,12 @@
           <a:lstStyle/>
           <a:p>
             <a:r>
-              <a:t>[설명] ~/agv_ws/src/agv_gazebo/models/agv/model.sdf의 전체 파일을 15/24 구간으로 작성한다.</a:t>
-            </a:r>
-          </a:p>
-          <a:p>
-            <a:r>
-              <a:t>[실행] nano ~/agv_ws/src/agv_gazebo/models/agv/model.sdf</a:t>
+              <a:t>[설명] ~/ros2_curri/agv_ws/src/agv_gazebo/models/agv/model.sdf의 전체 파일을 15/24 구간으로 작성한다.</a:t>
+            </a:r>
+          </a:p>
+          <a:p>
+            <a:r>
+              <a:t>[실행] nano ~/ros2_curri/agv_ws/src/agv_gazebo/models/agv/model.sdf</a:t>
             </a:r>
           </a:p>
           <a:p>
@@ -1988,12 +1994,12 @@
           <a:lstStyle/>
           <a:p>
             <a:r>
-              <a:t>[설명] ~/agv_ws/src/agv_gazebo/models/agv/model.sdf의 전체 파일을 16/24 구간으로 작성한다.</a:t>
-            </a:r>
-          </a:p>
-          <a:p>
-            <a:r>
-              <a:t>[실행] nano ~/agv_ws/src/agv_gazebo/models/agv/model.sdf</a:t>
+              <a:t>[설명] ~/ros2_curri/agv_ws/src/agv_gazebo/models/agv/model.sdf의 전체 파일을 16/24 구간으로 작성한다.</a:t>
+            </a:r>
+          </a:p>
+          <a:p>
+            <a:r>
+              <a:t>[실행] nano ~/ros2_curri/agv_ws/src/agv_gazebo/models/agv/model.sdf</a:t>
             </a:r>
           </a:p>
           <a:p>
@@ -2078,12 +2084,12 @@
           <a:lstStyle/>
           <a:p>
             <a:r>
-              <a:t>[설명] ~/agv_ws/src/agv_gazebo/models/agv/model.sdf의 전체 파일을 17/24 구간으로 작성한다.</a:t>
-            </a:r>
-          </a:p>
-          <a:p>
-            <a:r>
-              <a:t>[실행] nano ~/agv_ws/src/agv_gazebo/models/agv/model.sdf</a:t>
+              <a:t>[설명] ~/ros2_curri/agv_ws/src/agv_gazebo/models/agv/model.sdf의 전체 파일을 17/24 구간으로 작성한다.</a:t>
+            </a:r>
+          </a:p>
+          <a:p>
+            <a:r>
+              <a:t>[실행] nano ~/ros2_curri/agv_ws/src/agv_gazebo/models/agv/model.sdf</a:t>
             </a:r>
           </a:p>
           <a:p>
@@ -2168,12 +2174,12 @@
           <a:lstStyle/>
           <a:p>
             <a:r>
-              <a:t>[설명] ~/agv_ws/src/agv_gazebo/models/agv/model.sdf의 전체 파일을 18/24 구간으로 작성한다.</a:t>
-            </a:r>
-          </a:p>
-          <a:p>
-            <a:r>
-              <a:t>[실행] nano ~/agv_ws/src/agv_gazebo/models/agv/model.sdf</a:t>
+              <a:t>[설명] ~/ros2_curri/agv_ws/src/agv_gazebo/models/agv/model.sdf의 전체 파일을 18/24 구간으로 작성한다.</a:t>
+            </a:r>
+          </a:p>
+          <a:p>
+            <a:r>
+              <a:t>[실행] nano ~/ros2_curri/agv_ws/src/agv_gazebo/models/agv/model.sdf</a:t>
             </a:r>
           </a:p>
           <a:p>
@@ -2258,12 +2264,12 @@
           <a:lstStyle/>
           <a:p>
             <a:r>
-              <a:t>[설명] ~/agv_ws/src/agv_gazebo/models/agv/model.sdf의 전체 파일을 19/24 구간으로 작성한다.</a:t>
-            </a:r>
-          </a:p>
-          <a:p>
-            <a:r>
-              <a:t>[실행] nano ~/agv_ws/src/agv_gazebo/models/agv/model.sdf</a:t>
+              <a:t>[설명] ~/ros2_curri/agv_ws/src/agv_gazebo/models/agv/model.sdf의 전체 파일을 19/24 구간으로 작성한다.</a:t>
+            </a:r>
+          </a:p>
+          <a:p>
+            <a:r>
+              <a:t>[실행] nano ~/ros2_curri/agv_ws/src/agv_gazebo/models/agv/model.sdf</a:t>
             </a:r>
           </a:p>
           <a:p>
@@ -2348,12 +2354,12 @@
           <a:lstStyle/>
           <a:p>
             <a:r>
-              <a:t>[설명] ~/agv_ws/src/agv_gazebo/models/agv/model.sdf의 전체 파일을 20/24 구간으로 작성한다.</a:t>
-            </a:r>
-          </a:p>
-          <a:p>
-            <a:r>
-              <a:t>[실행] nano ~/agv_ws/src/agv_gazebo/models/agv/model.sdf</a:t>
+              <a:t>[설명] ~/ros2_curri/agv_ws/src/agv_gazebo/models/agv/model.sdf의 전체 파일을 20/24 구간으로 작성한다.</a:t>
+            </a:r>
+          </a:p>
+          <a:p>
+            <a:r>
+              <a:t>[실행] nano ~/ros2_curri/agv_ws/src/agv_gazebo/models/agv/model.sdf</a:t>
             </a:r>
           </a:p>
           <a:p>
@@ -2438,12 +2444,12 @@
           <a:lstStyle/>
           <a:p>
             <a:r>
-              <a:t>[설명] ~/agv_ws/src/agv_gazebo/models/agv/model.sdf의 전체 파일을 21/24 구간으로 작성한다.</a:t>
-            </a:r>
-          </a:p>
-          <a:p>
-            <a:r>
-              <a:t>[실행] nano ~/agv_ws/src/agv_gazebo/models/agv/model.sdf</a:t>
+              <a:t>[설명] ~/ros2_curri/agv_ws/src/agv_gazebo/models/agv/model.sdf의 전체 파일을 21/24 구간으로 작성한다.</a:t>
+            </a:r>
+          </a:p>
+          <a:p>
+            <a:r>
+              <a:t>[실행] nano ~/ros2_curri/agv_ws/src/agv_gazebo/models/agv/model.sdf</a:t>
             </a:r>
           </a:p>
           <a:p>
@@ -2533,7 +2539,7 @@
           </a:p>
           <a:p>
             <a:r>
-              <a:t>[실행] pwd; source /opt/ros/jazzy/setup.bash; source ~/agv_ws/install/setup.bash</a:t>
+              <a:t>[실행] pwd; source /opt/ros/jazzy/setup.bash; source ~/ros2_curri/agv_ws/install/setup.bash</a:t>
             </a:r>
           </a:p>
           <a:p>
@@ -2618,12 +2624,12 @@
           <a:lstStyle/>
           <a:p>
             <a:r>
-              <a:t>[설명] ~/agv_ws/src/agv_gazebo/models/agv/model.sdf의 전체 파일을 22/24 구간으로 작성한다.</a:t>
-            </a:r>
-          </a:p>
-          <a:p>
-            <a:r>
-              <a:t>[실행] nano ~/agv_ws/src/agv_gazebo/models/agv/model.sdf</a:t>
+              <a:t>[설명] ~/ros2_curri/agv_ws/src/agv_gazebo/models/agv/model.sdf의 전체 파일을 22/24 구간으로 작성한다.</a:t>
+            </a:r>
+          </a:p>
+          <a:p>
+            <a:r>
+              <a:t>[실행] nano ~/ros2_curri/agv_ws/src/agv_gazebo/models/agv/model.sdf</a:t>
             </a:r>
           </a:p>
           <a:p>
@@ -2708,12 +2714,12 @@
           <a:lstStyle/>
           <a:p>
             <a:r>
-              <a:t>[설명] ~/agv_ws/src/agv_gazebo/models/agv/model.sdf의 전체 파일을 23/24 구간으로 작성한다.</a:t>
-            </a:r>
-          </a:p>
-          <a:p>
-            <a:r>
-              <a:t>[실행] nano ~/agv_ws/src/agv_gazebo/models/agv/model.sdf</a:t>
+              <a:t>[설명] ~/ros2_curri/agv_ws/src/agv_gazebo/models/agv/model.sdf의 전체 파일을 23/24 구간으로 작성한다.</a:t>
+            </a:r>
+          </a:p>
+          <a:p>
+            <a:r>
+              <a:t>[실행] nano ~/ros2_curri/agv_ws/src/agv_gazebo/models/agv/model.sdf</a:t>
             </a:r>
           </a:p>
           <a:p>
@@ -2798,12 +2804,12 @@
           <a:lstStyle/>
           <a:p>
             <a:r>
-              <a:t>[설명] ~/agv_ws/src/agv_gazebo/models/agv/model.sdf의 전체 파일을 24/24 구간으로 작성한다.</a:t>
-            </a:r>
-          </a:p>
-          <a:p>
-            <a:r>
-              <a:t>[실행] nano ~/agv_ws/src/agv_gazebo/models/agv/model.sdf</a:t>
+              <a:t>[설명] ~/ros2_curri/agv_ws/src/agv_gazebo/models/agv/model.sdf의 전체 파일을 24/24 구간으로 작성한다.</a:t>
+            </a:r>
+          </a:p>
+          <a:p>
+            <a:r>
+              <a:t>[실행] nano ~/ros2_curri/agv_ws/src/agv_gazebo/models/agv/model.sdf</a:t>
             </a:r>
           </a:p>
           <a:p>
@@ -2888,12 +2894,12 @@
           <a:lstStyle/>
           <a:p>
             <a:r>
-              <a:t>[설명] ~/agv_ws/src/agv_gazebo/config/bridge.yaml의 전체 파일을 1/3 구간으로 작성한다.</a:t>
-            </a:r>
-          </a:p>
-          <a:p>
-            <a:r>
-              <a:t>[실행] nano ~/agv_ws/src/agv_gazebo/config/bridge.yaml</a:t>
+              <a:t>[설명] ~/ros2_curri/agv_ws/src/agv_gazebo/config/bridge.yaml의 전체 파일을 1/3 구간으로 작성한다.</a:t>
+            </a:r>
+          </a:p>
+          <a:p>
+            <a:r>
+              <a:t>[실행] nano ~/ros2_curri/agv_ws/src/agv_gazebo/config/bridge.yaml</a:t>
             </a:r>
           </a:p>
           <a:p>
@@ -2978,12 +2984,12 @@
           <a:lstStyle/>
           <a:p>
             <a:r>
-              <a:t>[설명] ~/agv_ws/src/agv_gazebo/config/bridge.yaml의 전체 파일을 2/3 구간으로 작성한다.</a:t>
-            </a:r>
-          </a:p>
-          <a:p>
-            <a:r>
-              <a:t>[실행] nano ~/agv_ws/src/agv_gazebo/config/bridge.yaml</a:t>
+              <a:t>[설명] ~/ros2_curri/agv_ws/src/agv_gazebo/config/bridge.yaml의 전체 파일을 2/3 구간으로 작성한다.</a:t>
+            </a:r>
+          </a:p>
+          <a:p>
+            <a:r>
+              <a:t>[실행] nano ~/ros2_curri/agv_ws/src/agv_gazebo/config/bridge.yaml</a:t>
             </a:r>
           </a:p>
           <a:p>
@@ -3068,12 +3074,12 @@
           <a:lstStyle/>
           <a:p>
             <a:r>
-              <a:t>[설명] ~/agv_ws/src/agv_gazebo/config/bridge.yaml의 전체 파일을 3/3 구간으로 작성한다.</a:t>
-            </a:r>
-          </a:p>
-          <a:p>
-            <a:r>
-              <a:t>[실행] nano ~/agv_ws/src/agv_gazebo/config/bridge.yaml</a:t>
+              <a:t>[설명] ~/ros2_curri/agv_ws/src/agv_gazebo/config/bridge.yaml의 전체 파일을 3/3 구간으로 작성한다.</a:t>
+            </a:r>
+          </a:p>
+          <a:p>
+            <a:r>
+              <a:t>[실행] nano ~/ros2_curri/agv_ws/src/agv_gazebo/config/bridge.yaml</a:t>
             </a:r>
           </a:p>
           <a:p>
@@ -3158,12 +3164,12 @@
           <a:lstStyle/>
           <a:p>
             <a:r>
-              <a:t>[설명] ~/agv_ws/src/agv_vision/agv_vision/yolo_node.py의 전체 파일을 1/5 구간으로 작성한다.</a:t>
-            </a:r>
-          </a:p>
-          <a:p>
-            <a:r>
-              <a:t>[실행] nano ~/agv_ws/src/agv_vision/agv_vision/yolo_node.py</a:t>
+              <a:t>[설명] ~/ros2_curri/agv_ws/src/agv_vision/agv_vision/yolo_node.py의 전체 파일을 1/10 구간으로 작성한다.</a:t>
+            </a:r>
+          </a:p>
+          <a:p>
+            <a:r>
+              <a:t>[실행] nano ~/ros2_curri/agv_ws/src/agv_vision/agv_vision/yolo_node.py</a:t>
             </a:r>
           </a:p>
           <a:p>
@@ -3248,12 +3254,12 @@
           <a:lstStyle/>
           <a:p>
             <a:r>
-              <a:t>[설명] ~/agv_ws/src/agv_vision/agv_vision/yolo_node.py의 전체 파일을 2/5 구간으로 작성한다.</a:t>
-            </a:r>
-          </a:p>
-          <a:p>
-            <a:r>
-              <a:t>[실행] nano ~/agv_ws/src/agv_vision/agv_vision/yolo_node.py</a:t>
+              <a:t>[설명] ~/ros2_curri/agv_ws/src/agv_vision/agv_vision/yolo_node.py의 전체 파일을 2/10 구간으로 작성한다.</a:t>
+            </a:r>
+          </a:p>
+          <a:p>
+            <a:r>
+              <a:t>[실행] nano ~/ros2_curri/agv_ws/src/agv_vision/agv_vision/yolo_node.py</a:t>
             </a:r>
           </a:p>
           <a:p>
@@ -3338,12 +3344,12 @@
           <a:lstStyle/>
           <a:p>
             <a:r>
-              <a:t>[설명] ~/agv_ws/src/agv_vision/agv_vision/yolo_node.py의 전체 파일을 3/5 구간으로 작성한다.</a:t>
-            </a:r>
-          </a:p>
-          <a:p>
-            <a:r>
-              <a:t>[실행] nano ~/agv_ws/src/agv_vision/agv_vision/yolo_node.py</a:t>
+              <a:t>[설명] ~/ros2_curri/agv_ws/src/agv_vision/agv_vision/yolo_node.py의 전체 파일을 3/10 구간으로 작성한다.</a:t>
+            </a:r>
+          </a:p>
+          <a:p>
+            <a:r>
+              <a:t>[실행] nano ~/ros2_curri/agv_ws/src/agv_vision/agv_vision/yolo_node.py</a:t>
             </a:r>
           </a:p>
           <a:p>
@@ -3428,12 +3434,12 @@
           <a:lstStyle/>
           <a:p>
             <a:r>
-              <a:t>[설명] ~/agv_ws/src/agv_vision/agv_vision/yolo_node.py의 전체 파일을 4/5 구간으로 작성한다.</a:t>
-            </a:r>
-          </a:p>
-          <a:p>
-            <a:r>
-              <a:t>[실행] nano ~/agv_ws/src/agv_vision/agv_vision/yolo_node.py</a:t>
+              <a:t>[설명] ~/ros2_curri/agv_ws/src/agv_vision/agv_vision/yolo_node.py의 전체 파일을 4/10 구간으로 작성한다.</a:t>
+            </a:r>
+          </a:p>
+          <a:p>
+            <a:r>
+              <a:t>[실행] nano ~/ros2_curri/agv_ws/src/agv_vision/agv_vision/yolo_node.py</a:t>
             </a:r>
           </a:p>
           <a:p>
@@ -3608,12 +3614,12 @@
           <a:lstStyle/>
           <a:p>
             <a:r>
-              <a:t>[설명] ~/agv_ws/src/agv_vision/agv_vision/yolo_node.py의 전체 파일을 5/5 구간으로 작성한다.</a:t>
-            </a:r>
-          </a:p>
-          <a:p>
-            <a:r>
-              <a:t>[실행] nano ~/agv_ws/src/agv_vision/agv_vision/yolo_node.py</a:t>
+              <a:t>[설명] ~/ros2_curri/agv_ws/src/agv_vision/agv_vision/yolo_node.py의 전체 파일을 5/10 구간으로 작성한다.</a:t>
+            </a:r>
+          </a:p>
+          <a:p>
+            <a:r>
+              <a:t>[실행] nano ~/ros2_curri/agv_ws/src/agv_vision/agv_vision/yolo_node.py</a:t>
             </a:r>
           </a:p>
           <a:p>
@@ -3698,22 +3704,17 @@
           <a:lstStyle/>
           <a:p>
             <a:r>
-              <a:t>[설명] build/source/run을 생략 없이 실행한다.</a:t>
-            </a:r>
-          </a:p>
-          <a:p>
-            <a:r>
-              <a:t>[실행] ros2 launch agv_bringup agv_sim.launch.py rviz:=false</a:t>
-            </a:r>
-          </a:p>
-          <a:p>
-            <a:r>
-              <a:t># 새 터미널: ros2 run rqt_image_view rqt_image_view</a:t>
-            </a:r>
-          </a:p>
-          <a:p>
-            <a:r>
-              <a:t>[확인] /camera/image_raw가 bridge를 통과하고 cv_bridge 소비 노드가 받을 준비가 된 상태를 확인한다.</a:t>
+              <a:t>[설명] ~/ros2_curri/agv_ws/src/agv_vision/agv_vision/yolo_node.py의 전체 파일을 6/10 구간으로 작성한다.</a:t>
+            </a:r>
+          </a:p>
+          <a:p>
+            <a:r>
+              <a:t>[실행] nano ~/ros2_curri/agv_ws/src/agv_vision/agv_vision/yolo_node.py</a:t>
+            </a:r>
+          </a:p>
+          <a:p>
+            <a:r>
+              <a:t>[확인] 코드를 저장하고 다음 코드 슬라이드 또는 build 단계로 이동한다.</a:t>
             </a:r>
           </a:p>
           <a:p>
@@ -3723,7 +3724,7 @@
           </a:p>
           <a:p>
             <a:r>
-              <a:t>[오류] 오류가 나면 현재 폴더, source, 파일 경로를 먼저 확인한다.</a:t>
+              <a:t>[오류] 들여쓰기·XML 태그·따옴표가 슬라이드와 정확히 같은지 확인한다.</a:t>
             </a:r>
           </a:p>
         </p:txBody>
@@ -3793,17 +3794,17 @@
           <a:lstStyle/>
           <a:p>
             <a:r>
-              <a:t>[설명] 실제 Ubuntu/ROS 2 환경에서 생성한 검증 화면이다.</a:t>
-            </a:r>
-          </a:p>
-          <a:p>
-            <a:r>
-              <a:t>[실행] 슬라이드의 명령 또는 파일 작성 단계를 진행한다.</a:t>
-            </a:r>
-          </a:p>
-          <a:p>
-            <a:r>
-              <a:t>[확인] 캡처의 명령과 다음 슬라이드의 검증 명령을 비교한다.</a:t>
+              <a:t>[설명] ~/ros2_curri/agv_ws/src/agv_vision/agv_vision/yolo_node.py의 전체 파일을 7/10 구간으로 작성한다.</a:t>
+            </a:r>
+          </a:p>
+          <a:p>
+            <a:r>
+              <a:t>[실행] nano ~/ros2_curri/agv_ws/src/agv_vision/agv_vision/yolo_node.py</a:t>
+            </a:r>
+          </a:p>
+          <a:p>
+            <a:r>
+              <a:t>[확인] 코드를 저장하고 다음 코드 슬라이드 또는 build 단계로 이동한다.</a:t>
             </a:r>
           </a:p>
           <a:p>
@@ -3813,7 +3814,7 @@
           </a:p>
           <a:p>
             <a:r>
-              <a:t>[오류] 오류가 나면 현재 폴더, source, 파일 경로를 먼저 확인한다.</a:t>
+              <a:t>[오류] 들여쓰기·XML 태그·따옴표가 슬라이드와 정확히 같은지 확인한다.</a:t>
             </a:r>
           </a:p>
         </p:txBody>
@@ -3883,22 +3884,17 @@
           <a:lstStyle/>
           <a:p>
             <a:r>
-              <a:t>[설명] 검증 명령은 GUI 결과와 별도로 실행해 재현 가능한 완료 기준을 만든다.</a:t>
-            </a:r>
-          </a:p>
-          <a:p>
-            <a:r>
-              <a:t>[실행] ros2 topic info /camera/image_raw</a:t>
-            </a:r>
-          </a:p>
-          <a:p>
-            <a:r>
-              <a:t>ros2 topic hz /camera/image_raw</a:t>
-            </a:r>
-          </a:p>
-          <a:p>
-            <a:r>
-              <a:t>[확인] /camera/image_raw가 bridge를 통과하고 cv_bridge 소비 노드가 받을 준비가 된 상태를 확인한다.</a:t>
+              <a:t>[설명] ~/ros2_curri/agv_ws/src/agv_vision/agv_vision/yolo_node.py의 전체 파일을 8/10 구간으로 작성한다.</a:t>
+            </a:r>
+          </a:p>
+          <a:p>
+            <a:r>
+              <a:t>[실행] nano ~/ros2_curri/agv_ws/src/agv_vision/agv_vision/yolo_node.py</a:t>
+            </a:r>
+          </a:p>
+          <a:p>
+            <a:r>
+              <a:t>[확인] 코드를 저장하고 다음 코드 슬라이드 또는 build 단계로 이동한다.</a:t>
             </a:r>
           </a:p>
           <a:p>
@@ -3908,7 +3904,7 @@
           </a:p>
           <a:p>
             <a:r>
-              <a:t>[오류] 오류가 나면 현재 폴더, source, 파일 경로를 먼저 확인한다.</a:t>
+              <a:t>[오류] 들여쓰기·XML 태그·따옴표가 슬라이드와 정확히 같은지 확인한다.</a:t>
             </a:r>
           </a:p>
         </p:txBody>
@@ -3978,17 +3974,17 @@
           <a:lstStyle/>
           <a:p>
             <a:r>
-              <a:t>[설명] 오류를 대신 해결하지 말고 증상부터 우선 확인 순서대로 교육생이 실행하게 한다.</a:t>
-            </a:r>
-          </a:p>
-          <a:p>
-            <a:r>
-              <a:t>[실행] 슬라이드의 명령 또는 파일 작성 단계를 진행한다.</a:t>
-            </a:r>
-          </a:p>
-          <a:p>
-            <a:r>
-              <a:t>[확인] 수정 뒤 첫 검증 명령을 다시 실행한다.</a:t>
+              <a:t>[설명] ~/ros2_curri/agv_ws/src/agv_vision/agv_vision/yolo_node.py의 전체 파일을 9/10 구간으로 작성한다.</a:t>
+            </a:r>
+          </a:p>
+          <a:p>
+            <a:r>
+              <a:t>[실행] nano ~/ros2_curri/agv_ws/src/agv_vision/agv_vision/yolo_node.py</a:t>
+            </a:r>
+          </a:p>
+          <a:p>
+            <a:r>
+              <a:t>[확인] 코드를 저장하고 다음 코드 슬라이드 또는 build 단계로 이동한다.</a:t>
             </a:r>
           </a:p>
           <a:p>
@@ -3998,7 +3994,7 @@
           </a:p>
           <a:p>
             <a:r>
-              <a:t>[오류] 슬라이드의 두 대표 오류를 먼저 사용한다.</a:t>
+              <a:t>[오류] 들여쓰기·XML 태그·따옴표가 슬라이드와 정확히 같은지 확인한다.</a:t>
             </a:r>
           </a:p>
         </p:txBody>
@@ -4068,17 +4064,17 @@
           <a:lstStyle/>
           <a:p>
             <a:r>
-              <a:t>[설명] 교육생이 직접 한 값만 바꿔 원인과 결과를 연결하게 한다.</a:t>
-            </a:r>
-          </a:p>
-          <a:p>
-            <a:r>
-              <a:t>[실행] 슬라이드의 명령 또는 파일 작성 단계를 진행한다.</a:t>
-            </a:r>
-          </a:p>
-          <a:p>
-            <a:r>
-              <a:t>[확인] 원래 값과 변경 값을 모두 기록한다.</a:t>
+              <a:t>[설명] ~/ros2_curri/agv_ws/src/agv_vision/agv_vision/yolo_node.py의 전체 파일을 10/10 구간으로 작성한다.</a:t>
+            </a:r>
+          </a:p>
+          <a:p>
+            <a:r>
+              <a:t>[실행] nano ~/ros2_curri/agv_ws/src/agv_vision/agv_vision/yolo_node.py</a:t>
+            </a:r>
+          </a:p>
+          <a:p>
+            <a:r>
+              <a:t>[확인] 코드를 저장하고 다음 코드 슬라이드 또는 build 단계로 이동한다.</a:t>
             </a:r>
           </a:p>
           <a:p>
@@ -4088,7 +4084,7 @@
           </a:p>
           <a:p>
             <a:r>
-              <a:t>[오류] 오류가 나면 현재 폴더, source, 파일 경로를 먼저 확인한다.</a:t>
+              <a:t>[오류] 들여쓰기·XML 태그·따옴표가 슬라이드와 정확히 같은지 확인한다.</a:t>
             </a:r>
           </a:p>
         </p:txBody>
@@ -4158,17 +4154,22 @@
           <a:lstStyle/>
           <a:p>
             <a:r>
-              <a:t>[설명] 교육생이 Complete·캡처·로그를 저장했는지 확인하고 다음 모듈의 시작 상태를 읽는다.</a:t>
-            </a:r>
-          </a:p>
-          <a:p>
-            <a:r>
-              <a:t>[실행] 슬라이드의 명령 또는 파일 작성 단계를 진행한다.</a:t>
-            </a:r>
-          </a:p>
-          <a:p>
-            <a:r>
-              <a:t>[확인] M13 LiDAR 시작 조건을 말할 수 있다.</a:t>
+              <a:t>[설명] build/source/run을 생략 없이 실행한다.</a:t>
+            </a:r>
+          </a:p>
+          <a:p>
+            <a:r>
+              <a:t>[실행] ros2 launch agv_bringup agv_sim.launch.py rviz:=false autonomy:=false</a:t>
+            </a:r>
+          </a:p>
+          <a:p>
+            <a:r>
+              <a:t># 새 터미널: ros2 run rqt_image_view rqt_image_view /camera/image_raw</a:t>
+            </a:r>
+          </a:p>
+          <a:p>
+            <a:r>
+              <a:t>[확인] /camera/image_raw가 bridge를 통과하고 cv_bridge 소비 노드가 받을 준비가 된 상태를 확인한다.</a:t>
             </a:r>
           </a:p>
           <a:p>
@@ -4248,7 +4249,7 @@
           <a:lstStyle/>
           <a:p>
             <a:r>
-              <a:t>[설명] 공식 문서는 버전 차이와 확장 학습을 확인할 때 사용한다.</a:t>
+              <a:t>[설명] 실제 Ubuntu/ROS 2 환경에서 생성한 검증 화면이다.</a:t>
             </a:r>
           </a:p>
           <a:p>
@@ -4258,7 +4259,192 @@
           </a:p>
           <a:p>
             <a:r>
-              <a:t>[확인] 학습자는 본문만으로 현재 모듈을 완료한 상태여야 한다.</a:t>
+              <a:t>[확인] 캡처의 명령과 다음 슬라이드의 검증 명령을 비교한다.</a:t>
+            </a:r>
+          </a:p>
+          <a:p>
+            <a:r>
+              <a:t>[멈춤] 교육생이 현재 체크포인트를 통과할 때까지 기다린다.</a:t>
+            </a:r>
+          </a:p>
+          <a:p>
+            <a:r>
+              <a:t>[오류] 오류가 나면 현재 폴더, source, 파일 경로를 먼저 확인한다.</a:t>
+            </a:r>
+          </a:p>
+        </p:txBody>
+      </p:sp>
+      <p:sp>
+        <p:nvSpPr>
+          <p:cNvPr id="4" name="Slide Number Placeholder 3"/>
+          <p:cNvSpPr>
+            <a:spLocks noGrp="1"/>
+          </p:cNvSpPr>
+          <p:nvPr>
+            <p:ph type="sldNum" idx="5" sz="quarter"/>
+          </p:nvPr>
+        </p:nvSpPr>
+        <p:spPr/>
+      </p:sp>
+    </p:spTree>
+  </p:cSld>
+  <p:clrMapOvr>
+    <a:masterClrMapping/>
+  </p:clrMapOvr>
+</p:notes>
+</file>
+
+<file path=ppt/notesSlides/notesSlide48.xml><?xml version="1.0" encoding="utf-8"?>
+<p:notes xmlns:a="http://schemas.openxmlformats.org/drawingml/2006/main" xmlns:p="http://schemas.openxmlformats.org/presentationml/2006/main" xmlns:r="http://schemas.openxmlformats.org/officeDocument/2006/relationships">
+  <p:cSld>
+    <p:spTree>
+      <p:nvGrpSpPr>
+        <p:cNvPr id="1" name=""/>
+        <p:cNvGrpSpPr/>
+        <p:nvPr/>
+      </p:nvGrpSpPr>
+      <p:grpSpPr>
+        <a:xfrm>
+          <a:off x="0" y="0"/>
+          <a:ext cx="0" cy="0"/>
+          <a:chOff x="0" y="0"/>
+          <a:chExt cx="0" cy="0"/>
+        </a:xfrm>
+      </p:grpSpPr>
+      <p:sp>
+        <p:nvSpPr>
+          <p:cNvPr id="2" name="Slide Image Placeholder 1"/>
+          <p:cNvSpPr>
+            <a:spLocks noGrp="1"/>
+          </p:cNvSpPr>
+          <p:nvPr>
+            <p:ph type="sldImg" idx="2"/>
+          </p:nvPr>
+        </p:nvSpPr>
+        <p:spPr/>
+      </p:sp>
+      <p:sp>
+        <p:nvSpPr>
+          <p:cNvPr id="3" name="Notes Placeholder 2"/>
+          <p:cNvSpPr>
+            <a:spLocks noGrp="1"/>
+          </p:cNvSpPr>
+          <p:nvPr>
+            <p:ph type="body" idx="3" sz="quarter"/>
+          </p:nvPr>
+        </p:nvSpPr>
+        <p:spPr/>
+        <p:txBody>
+          <a:bodyPr/>
+          <a:lstStyle/>
+          <a:p>
+            <a:r>
+              <a:t>[설명] 실제 Ubuntu/ROS 2 환경에서 생성한 검증 화면이다.</a:t>
+            </a:r>
+          </a:p>
+          <a:p>
+            <a:r>
+              <a:t>[실행] 슬라이드의 명령 또는 파일 작성 단계를 진행한다.</a:t>
+            </a:r>
+          </a:p>
+          <a:p>
+            <a:r>
+              <a:t>[확인] 캡처의 명령과 다음 슬라이드의 검증 명령을 비교한다.</a:t>
+            </a:r>
+          </a:p>
+          <a:p>
+            <a:r>
+              <a:t>[멈춤] 교육생이 현재 체크포인트를 통과할 때까지 기다린다.</a:t>
+            </a:r>
+          </a:p>
+          <a:p>
+            <a:r>
+              <a:t>[오류] 오류가 나면 현재 폴더, source, 파일 경로를 먼저 확인한다.</a:t>
+            </a:r>
+          </a:p>
+        </p:txBody>
+      </p:sp>
+      <p:sp>
+        <p:nvSpPr>
+          <p:cNvPr id="4" name="Slide Number Placeholder 3"/>
+          <p:cNvSpPr>
+            <a:spLocks noGrp="1"/>
+          </p:cNvSpPr>
+          <p:nvPr>
+            <p:ph type="sldNum" idx="5" sz="quarter"/>
+          </p:nvPr>
+        </p:nvSpPr>
+        <p:spPr/>
+      </p:sp>
+    </p:spTree>
+  </p:cSld>
+  <p:clrMapOvr>
+    <a:masterClrMapping/>
+  </p:clrMapOvr>
+</p:notes>
+</file>
+
+<file path=ppt/notesSlides/notesSlide49.xml><?xml version="1.0" encoding="utf-8"?>
+<p:notes xmlns:a="http://schemas.openxmlformats.org/drawingml/2006/main" xmlns:p="http://schemas.openxmlformats.org/presentationml/2006/main" xmlns:r="http://schemas.openxmlformats.org/officeDocument/2006/relationships">
+  <p:cSld>
+    <p:spTree>
+      <p:nvGrpSpPr>
+        <p:cNvPr id="1" name=""/>
+        <p:cNvGrpSpPr/>
+        <p:nvPr/>
+      </p:nvGrpSpPr>
+      <p:grpSpPr>
+        <a:xfrm>
+          <a:off x="0" y="0"/>
+          <a:ext cx="0" cy="0"/>
+          <a:chOff x="0" y="0"/>
+          <a:chExt cx="0" cy="0"/>
+        </a:xfrm>
+      </p:grpSpPr>
+      <p:sp>
+        <p:nvSpPr>
+          <p:cNvPr id="2" name="Slide Image Placeholder 1"/>
+          <p:cNvSpPr>
+            <a:spLocks noGrp="1"/>
+          </p:cNvSpPr>
+          <p:nvPr>
+            <p:ph type="sldImg" idx="2"/>
+          </p:nvPr>
+        </p:nvSpPr>
+        <p:spPr/>
+      </p:sp>
+      <p:sp>
+        <p:nvSpPr>
+          <p:cNvPr id="3" name="Notes Placeholder 2"/>
+          <p:cNvSpPr>
+            <a:spLocks noGrp="1"/>
+          </p:cNvSpPr>
+          <p:nvPr>
+            <p:ph type="body" idx="3" sz="quarter"/>
+          </p:nvPr>
+        </p:nvSpPr>
+        <p:spPr/>
+        <p:txBody>
+          <a:bodyPr/>
+          <a:lstStyle/>
+          <a:p>
+            <a:r>
+              <a:t>[설명] 검증 명령은 GUI 결과와 별도로 실행해 재현 가능한 완료 기준을 만든다.</a:t>
+            </a:r>
+          </a:p>
+          <a:p>
+            <a:r>
+              <a:t>[실행] ros2 topic info /camera/image_raw</a:t>
+            </a:r>
+          </a:p>
+          <a:p>
+            <a:r>
+              <a:t>ros2 topic hz /camera/image_raw</a:t>
+            </a:r>
+          </a:p>
+          <a:p>
+            <a:r>
+              <a:t>[확인] /camera/image_raw가 bridge를 통과하고 cv_bridge 소비 노드가 받을 준비가 된 상태를 확인한다.</a:t>
             </a:r>
           </a:p>
           <a:p>
@@ -4383,6 +4569,366 @@
 </p:notes>
 </file>
 
+<file path=ppt/notesSlides/notesSlide50.xml><?xml version="1.0" encoding="utf-8"?>
+<p:notes xmlns:a="http://schemas.openxmlformats.org/drawingml/2006/main" xmlns:p="http://schemas.openxmlformats.org/presentationml/2006/main" xmlns:r="http://schemas.openxmlformats.org/officeDocument/2006/relationships">
+  <p:cSld>
+    <p:spTree>
+      <p:nvGrpSpPr>
+        <p:cNvPr id="1" name=""/>
+        <p:cNvGrpSpPr/>
+        <p:nvPr/>
+      </p:nvGrpSpPr>
+      <p:grpSpPr>
+        <a:xfrm>
+          <a:off x="0" y="0"/>
+          <a:ext cx="0" cy="0"/>
+          <a:chOff x="0" y="0"/>
+          <a:chExt cx="0" cy="0"/>
+        </a:xfrm>
+      </p:grpSpPr>
+      <p:sp>
+        <p:nvSpPr>
+          <p:cNvPr id="2" name="Slide Image Placeholder 1"/>
+          <p:cNvSpPr>
+            <a:spLocks noGrp="1"/>
+          </p:cNvSpPr>
+          <p:nvPr>
+            <p:ph type="sldImg" idx="2"/>
+          </p:nvPr>
+        </p:nvSpPr>
+        <p:spPr/>
+      </p:sp>
+      <p:sp>
+        <p:nvSpPr>
+          <p:cNvPr id="3" name="Notes Placeholder 2"/>
+          <p:cNvSpPr>
+            <a:spLocks noGrp="1"/>
+          </p:cNvSpPr>
+          <p:nvPr>
+            <p:ph type="body" idx="3" sz="quarter"/>
+          </p:nvPr>
+        </p:nvSpPr>
+        <p:spPr/>
+        <p:txBody>
+          <a:bodyPr/>
+          <a:lstStyle/>
+          <a:p>
+            <a:r>
+              <a:t>[설명] 오류를 대신 해결하지 말고 증상부터 우선 확인 순서대로 교육생이 실행하게 한다.</a:t>
+            </a:r>
+          </a:p>
+          <a:p>
+            <a:r>
+              <a:t>[실행] 슬라이드의 명령 또는 파일 작성 단계를 진행한다.</a:t>
+            </a:r>
+          </a:p>
+          <a:p>
+            <a:r>
+              <a:t>[확인] 수정 뒤 첫 검증 명령을 다시 실행한다.</a:t>
+            </a:r>
+          </a:p>
+          <a:p>
+            <a:r>
+              <a:t>[멈춤] 교육생이 현재 체크포인트를 통과할 때까지 기다린다.</a:t>
+            </a:r>
+          </a:p>
+          <a:p>
+            <a:r>
+              <a:t>[오류] 슬라이드의 두 대표 오류를 먼저 사용한다.</a:t>
+            </a:r>
+          </a:p>
+        </p:txBody>
+      </p:sp>
+      <p:sp>
+        <p:nvSpPr>
+          <p:cNvPr id="4" name="Slide Number Placeholder 3"/>
+          <p:cNvSpPr>
+            <a:spLocks noGrp="1"/>
+          </p:cNvSpPr>
+          <p:nvPr>
+            <p:ph type="sldNum" idx="5" sz="quarter"/>
+          </p:nvPr>
+        </p:nvSpPr>
+        <p:spPr/>
+      </p:sp>
+    </p:spTree>
+  </p:cSld>
+  <p:clrMapOvr>
+    <a:masterClrMapping/>
+  </p:clrMapOvr>
+</p:notes>
+</file>
+
+<file path=ppt/notesSlides/notesSlide51.xml><?xml version="1.0" encoding="utf-8"?>
+<p:notes xmlns:a="http://schemas.openxmlformats.org/drawingml/2006/main" xmlns:p="http://schemas.openxmlformats.org/presentationml/2006/main" xmlns:r="http://schemas.openxmlformats.org/officeDocument/2006/relationships">
+  <p:cSld>
+    <p:spTree>
+      <p:nvGrpSpPr>
+        <p:cNvPr id="1" name=""/>
+        <p:cNvGrpSpPr/>
+        <p:nvPr/>
+      </p:nvGrpSpPr>
+      <p:grpSpPr>
+        <a:xfrm>
+          <a:off x="0" y="0"/>
+          <a:ext cx="0" cy="0"/>
+          <a:chOff x="0" y="0"/>
+          <a:chExt cx="0" cy="0"/>
+        </a:xfrm>
+      </p:grpSpPr>
+      <p:sp>
+        <p:nvSpPr>
+          <p:cNvPr id="2" name="Slide Image Placeholder 1"/>
+          <p:cNvSpPr>
+            <a:spLocks noGrp="1"/>
+          </p:cNvSpPr>
+          <p:nvPr>
+            <p:ph type="sldImg" idx="2"/>
+          </p:nvPr>
+        </p:nvSpPr>
+        <p:spPr/>
+      </p:sp>
+      <p:sp>
+        <p:nvSpPr>
+          <p:cNvPr id="3" name="Notes Placeholder 2"/>
+          <p:cNvSpPr>
+            <a:spLocks noGrp="1"/>
+          </p:cNvSpPr>
+          <p:nvPr>
+            <p:ph type="body" idx="3" sz="quarter"/>
+          </p:nvPr>
+        </p:nvSpPr>
+        <p:spPr/>
+        <p:txBody>
+          <a:bodyPr/>
+          <a:lstStyle/>
+          <a:p>
+            <a:r>
+              <a:t>[설명] 교육생이 직접 한 값만 바꿔 원인과 결과를 연결하게 한다.</a:t>
+            </a:r>
+          </a:p>
+          <a:p>
+            <a:r>
+              <a:t>[실행] 슬라이드의 명령 또는 파일 작성 단계를 진행한다.</a:t>
+            </a:r>
+          </a:p>
+          <a:p>
+            <a:r>
+              <a:t>[확인] 원래 값과 변경 값을 모두 기록한다.</a:t>
+            </a:r>
+          </a:p>
+          <a:p>
+            <a:r>
+              <a:t>[멈춤] 교육생이 현재 체크포인트를 통과할 때까지 기다린다.</a:t>
+            </a:r>
+          </a:p>
+          <a:p>
+            <a:r>
+              <a:t>[오류] 오류가 나면 현재 폴더, source, 파일 경로를 먼저 확인한다.</a:t>
+            </a:r>
+          </a:p>
+        </p:txBody>
+      </p:sp>
+      <p:sp>
+        <p:nvSpPr>
+          <p:cNvPr id="4" name="Slide Number Placeholder 3"/>
+          <p:cNvSpPr>
+            <a:spLocks noGrp="1"/>
+          </p:cNvSpPr>
+          <p:nvPr>
+            <p:ph type="sldNum" idx="5" sz="quarter"/>
+          </p:nvPr>
+        </p:nvSpPr>
+        <p:spPr/>
+      </p:sp>
+    </p:spTree>
+  </p:cSld>
+  <p:clrMapOvr>
+    <a:masterClrMapping/>
+  </p:clrMapOvr>
+</p:notes>
+</file>
+
+<file path=ppt/notesSlides/notesSlide52.xml><?xml version="1.0" encoding="utf-8"?>
+<p:notes xmlns:a="http://schemas.openxmlformats.org/drawingml/2006/main" xmlns:p="http://schemas.openxmlformats.org/presentationml/2006/main" xmlns:r="http://schemas.openxmlformats.org/officeDocument/2006/relationships">
+  <p:cSld>
+    <p:spTree>
+      <p:nvGrpSpPr>
+        <p:cNvPr id="1" name=""/>
+        <p:cNvGrpSpPr/>
+        <p:nvPr/>
+      </p:nvGrpSpPr>
+      <p:grpSpPr>
+        <a:xfrm>
+          <a:off x="0" y="0"/>
+          <a:ext cx="0" cy="0"/>
+          <a:chOff x="0" y="0"/>
+          <a:chExt cx="0" cy="0"/>
+        </a:xfrm>
+      </p:grpSpPr>
+      <p:sp>
+        <p:nvSpPr>
+          <p:cNvPr id="2" name="Slide Image Placeholder 1"/>
+          <p:cNvSpPr>
+            <a:spLocks noGrp="1"/>
+          </p:cNvSpPr>
+          <p:nvPr>
+            <p:ph type="sldImg" idx="2"/>
+          </p:nvPr>
+        </p:nvSpPr>
+        <p:spPr/>
+      </p:sp>
+      <p:sp>
+        <p:nvSpPr>
+          <p:cNvPr id="3" name="Notes Placeholder 2"/>
+          <p:cNvSpPr>
+            <a:spLocks noGrp="1"/>
+          </p:cNvSpPr>
+          <p:nvPr>
+            <p:ph type="body" idx="3" sz="quarter"/>
+          </p:nvPr>
+        </p:nvSpPr>
+        <p:spPr/>
+        <p:txBody>
+          <a:bodyPr/>
+          <a:lstStyle/>
+          <a:p>
+            <a:r>
+              <a:t>[설명] 교육생이 Complete·캡처·로그를 저장했는지 확인하고 다음 모듈의 시작 상태를 읽는다.</a:t>
+            </a:r>
+          </a:p>
+          <a:p>
+            <a:r>
+              <a:t>[실행] 슬라이드의 명령 또는 파일 작성 단계를 진행한다.</a:t>
+            </a:r>
+          </a:p>
+          <a:p>
+            <a:r>
+              <a:t>[확인] M13 LiDAR 시작 조건을 말할 수 있다.</a:t>
+            </a:r>
+          </a:p>
+          <a:p>
+            <a:r>
+              <a:t>[멈춤] 교육생이 현재 체크포인트를 통과할 때까지 기다린다.</a:t>
+            </a:r>
+          </a:p>
+          <a:p>
+            <a:r>
+              <a:t>[오류] 오류가 나면 현재 폴더, source, 파일 경로를 먼저 확인한다.</a:t>
+            </a:r>
+          </a:p>
+        </p:txBody>
+      </p:sp>
+      <p:sp>
+        <p:nvSpPr>
+          <p:cNvPr id="4" name="Slide Number Placeholder 3"/>
+          <p:cNvSpPr>
+            <a:spLocks noGrp="1"/>
+          </p:cNvSpPr>
+          <p:nvPr>
+            <p:ph type="sldNum" idx="5" sz="quarter"/>
+          </p:nvPr>
+        </p:nvSpPr>
+        <p:spPr/>
+      </p:sp>
+    </p:spTree>
+  </p:cSld>
+  <p:clrMapOvr>
+    <a:masterClrMapping/>
+  </p:clrMapOvr>
+</p:notes>
+</file>
+
+<file path=ppt/notesSlides/notesSlide53.xml><?xml version="1.0" encoding="utf-8"?>
+<p:notes xmlns:a="http://schemas.openxmlformats.org/drawingml/2006/main" xmlns:p="http://schemas.openxmlformats.org/presentationml/2006/main" xmlns:r="http://schemas.openxmlformats.org/officeDocument/2006/relationships">
+  <p:cSld>
+    <p:spTree>
+      <p:nvGrpSpPr>
+        <p:cNvPr id="1" name=""/>
+        <p:cNvGrpSpPr/>
+        <p:nvPr/>
+      </p:nvGrpSpPr>
+      <p:grpSpPr>
+        <a:xfrm>
+          <a:off x="0" y="0"/>
+          <a:ext cx="0" cy="0"/>
+          <a:chOff x="0" y="0"/>
+          <a:chExt cx="0" cy="0"/>
+        </a:xfrm>
+      </p:grpSpPr>
+      <p:sp>
+        <p:nvSpPr>
+          <p:cNvPr id="2" name="Slide Image Placeholder 1"/>
+          <p:cNvSpPr>
+            <a:spLocks noGrp="1"/>
+          </p:cNvSpPr>
+          <p:nvPr>
+            <p:ph type="sldImg" idx="2"/>
+          </p:nvPr>
+        </p:nvSpPr>
+        <p:spPr/>
+      </p:sp>
+      <p:sp>
+        <p:nvSpPr>
+          <p:cNvPr id="3" name="Notes Placeholder 2"/>
+          <p:cNvSpPr>
+            <a:spLocks noGrp="1"/>
+          </p:cNvSpPr>
+          <p:nvPr>
+            <p:ph type="body" idx="3" sz="quarter"/>
+          </p:nvPr>
+        </p:nvSpPr>
+        <p:spPr/>
+        <p:txBody>
+          <a:bodyPr/>
+          <a:lstStyle/>
+          <a:p>
+            <a:r>
+              <a:t>[설명] 공식 문서는 버전 차이와 확장 학습을 확인할 때 사용한다.</a:t>
+            </a:r>
+          </a:p>
+          <a:p>
+            <a:r>
+              <a:t>[실행] 슬라이드의 명령 또는 파일 작성 단계를 진행한다.</a:t>
+            </a:r>
+          </a:p>
+          <a:p>
+            <a:r>
+              <a:t>[확인] 학습자는 본문만으로 현재 모듈을 완료한 상태여야 한다.</a:t>
+            </a:r>
+          </a:p>
+          <a:p>
+            <a:r>
+              <a:t>[멈춤] 교육생이 현재 체크포인트를 통과할 때까지 기다린다.</a:t>
+            </a:r>
+          </a:p>
+          <a:p>
+            <a:r>
+              <a:t>[오류] 오류가 나면 현재 폴더, source, 파일 경로를 먼저 확인한다.</a:t>
+            </a:r>
+          </a:p>
+        </p:txBody>
+      </p:sp>
+      <p:sp>
+        <p:nvSpPr>
+          <p:cNvPr id="4" name="Slide Number Placeholder 3"/>
+          <p:cNvSpPr>
+            <a:spLocks noGrp="1"/>
+          </p:cNvSpPr>
+          <p:nvPr>
+            <p:ph type="sldNum" idx="5" sz="quarter"/>
+          </p:nvPr>
+        </p:nvSpPr>
+        <p:spPr/>
+      </p:sp>
+    </p:spTree>
+  </p:cSld>
+  <p:clrMapOvr>
+    <a:masterClrMapping/>
+  </p:clrMapOvr>
+</p:notes>
+</file>
+
 <file path=ppt/notesSlides/notesSlide6.xml><?xml version="1.0" encoding="utf-8"?>
 <p:notes xmlns:a="http://schemas.openxmlformats.org/drawingml/2006/main" xmlns:p="http://schemas.openxmlformats.org/presentationml/2006/main" xmlns:r="http://schemas.openxmlformats.org/officeDocument/2006/relationships">
   <p:cSld>
@@ -4528,7 +5074,7 @@
           </a:p>
           <a:p>
             <a:r>
-              <a:t>  ~/agv_ws/src/agv_gazebo/models/agv/model.sdf</a:t>
+              <a:t>  ~/ros2_curri/agv_ws/src/agv_gazebo/models/agv/model.sdf</a:t>
             </a:r>
           </a:p>
           <a:p>
@@ -4713,12 +5259,12 @@
           <a:lstStyle/>
           <a:p>
             <a:r>
-              <a:t>[설명] ~/agv_ws/src/agv_gazebo/models/agv/model.sdf의 전체 파일을 1/24 구간으로 작성한다.</a:t>
-            </a:r>
-          </a:p>
-          <a:p>
-            <a:r>
-              <a:t>[실행] nano ~/agv_ws/src/agv_gazebo/models/agv/model.sdf</a:t>
+              <a:t>[설명] ~/ros2_curri/agv_ws/src/agv_gazebo/models/agv/model.sdf의 전체 파일을 1/24 구간으로 작성한다.</a:t>
+            </a:r>
+          </a:p>
+          <a:p>
+            <a:r>
+              <a:t>[실행] nano ~/ros2_curri/agv_ws/src/agv_gazebo/models/agv/model.sdf</a:t>
             </a:r>
           </a:p>
           <a:p>
@@ -8145,7 +8691,7 @@
               </a:defRPr>
             </a:pPr>
             <a:r>
-              <a:t>~/agv_ws/src/agv_gazebo/models/agv/model.sdf</a:t>
+              <a:t>~/ros2_curri/agv_ws/src/agv_gazebo/models/agv/model.sdf</a:t>
             </a:r>
           </a:p>
         </p:txBody>
@@ -8281,7 +8827,7 @@
               </a:defRPr>
             </a:pPr>
             <a:r>
-              <a:t>현재 단계 4/27    |    현재 폴더 ~/agv_ws    |    현재 터미널</a:t>
+              <a:t>현재 단계 4/27    |    현재 폴더 ~/ros2_curri/agv_ws    |    현재 터미널</a:t>
             </a:r>
           </a:p>
         </p:txBody>
@@ -8378,11 +8924,11 @@
               </a:defRPr>
             </a:pPr>
             <a:r>
-              <a:t>파일 생성: mkdir -p ~/agv_ws/src/agv_gazebo/models/agv</a:t>
-            </a:r>
-            <a:br/>
-            <a:r>
-              <a:t>파일 열기: nano ~/agv_ws/src/agv_gazebo/models/agv/model.sdf</a:t>
+              <a:t>파일 생성: mkdir -p ~/ros2_curri/agv_ws/src/agv_gazebo/models/agv</a:t>
+            </a:r>
+            <a:br/>
+            <a:r>
+              <a:t>파일 열기: nano ~/ros2_curri/agv_ws/src/agv_gazebo/models/agv/model.sdf</a:t>
             </a:r>
           </a:p>
         </p:txBody>
@@ -8619,7 +9165,7 @@
               </a:defRPr>
             </a:pPr>
             <a:r>
-              <a:t>~/agv_ws/src/agv_gazebo/models/agv/model.sdf</a:t>
+              <a:t>~/ros2_curri/agv_ws/src/agv_gazebo/models/agv/model.sdf</a:t>
             </a:r>
           </a:p>
         </p:txBody>
@@ -8755,7 +9301,7 @@
               </a:defRPr>
             </a:pPr>
             <a:r>
-              <a:t>현재 단계 5/27    |    현재 폴더 ~/agv_ws    |    현재 터미널</a:t>
+              <a:t>현재 단계 5/27    |    현재 폴더 ~/ros2_curri/agv_ws    |    현재 터미널</a:t>
             </a:r>
           </a:p>
         </p:txBody>
@@ -8852,11 +9398,11 @@
               </a:defRPr>
             </a:pPr>
             <a:r>
-              <a:t>파일 생성: mkdir -p ~/agv_ws/src/agv_gazebo/models/agv</a:t>
-            </a:r>
-            <a:br/>
-            <a:r>
-              <a:t>파일 열기: nano ~/agv_ws/src/agv_gazebo/models/agv/model.sdf</a:t>
+              <a:t>파일 생성: mkdir -p ~/ros2_curri/agv_ws/src/agv_gazebo/models/agv</a:t>
+            </a:r>
+            <a:br/>
+            <a:r>
+              <a:t>파일 열기: nano ~/ros2_curri/agv_ws/src/agv_gazebo/models/agv/model.sdf</a:t>
             </a:r>
           </a:p>
         </p:txBody>
@@ -9093,7 +9639,7 @@
               </a:defRPr>
             </a:pPr>
             <a:r>
-              <a:t>~/agv_ws/src/agv_gazebo/models/agv/model.sdf</a:t>
+              <a:t>~/ros2_curri/agv_ws/src/agv_gazebo/models/agv/model.sdf</a:t>
             </a:r>
           </a:p>
         </p:txBody>
@@ -9229,7 +9775,7 @@
               </a:defRPr>
             </a:pPr>
             <a:r>
-              <a:t>현재 단계 6/27    |    현재 폴더 ~/agv_ws    |    현재 터미널</a:t>
+              <a:t>현재 단계 6/27    |    현재 폴더 ~/ros2_curri/agv_ws    |    현재 터미널</a:t>
             </a:r>
           </a:p>
         </p:txBody>
@@ -9326,11 +9872,11 @@
               </a:defRPr>
             </a:pPr>
             <a:r>
-              <a:t>파일 생성: mkdir -p ~/agv_ws/src/agv_gazebo/models/agv</a:t>
-            </a:r>
-            <a:br/>
-            <a:r>
-              <a:t>파일 열기: nano ~/agv_ws/src/agv_gazebo/models/agv/model.sdf</a:t>
+              <a:t>파일 생성: mkdir -p ~/ros2_curri/agv_ws/src/agv_gazebo/models/agv</a:t>
+            </a:r>
+            <a:br/>
+            <a:r>
+              <a:t>파일 열기: nano ~/ros2_curri/agv_ws/src/agv_gazebo/models/agv/model.sdf</a:t>
             </a:r>
           </a:p>
         </p:txBody>
@@ -9567,7 +10113,7 @@
               </a:defRPr>
             </a:pPr>
             <a:r>
-              <a:t>~/agv_ws/src/agv_gazebo/models/agv/model.sdf</a:t>
+              <a:t>~/ros2_curri/agv_ws/src/agv_gazebo/models/agv/model.sdf</a:t>
             </a:r>
           </a:p>
         </p:txBody>
@@ -9703,7 +10249,7 @@
               </a:defRPr>
             </a:pPr>
             <a:r>
-              <a:t>현재 단계 7/27    |    현재 폴더 ~/agv_ws    |    현재 터미널</a:t>
+              <a:t>현재 단계 7/27    |    현재 폴더 ~/ros2_curri/agv_ws    |    현재 터미널</a:t>
             </a:r>
           </a:p>
         </p:txBody>
@@ -9800,11 +10346,11 @@
               </a:defRPr>
             </a:pPr>
             <a:r>
-              <a:t>파일 생성: mkdir -p ~/agv_ws/src/agv_gazebo/models/agv</a:t>
-            </a:r>
-            <a:br/>
-            <a:r>
-              <a:t>파일 열기: nano ~/agv_ws/src/agv_gazebo/models/agv/model.sdf</a:t>
+              <a:t>파일 생성: mkdir -p ~/ros2_curri/agv_ws/src/agv_gazebo/models/agv</a:t>
+            </a:r>
+            <a:br/>
+            <a:r>
+              <a:t>파일 열기: nano ~/ros2_curri/agv_ws/src/agv_gazebo/models/agv/model.sdf</a:t>
             </a:r>
           </a:p>
         </p:txBody>
@@ -10041,7 +10587,7 @@
               </a:defRPr>
             </a:pPr>
             <a:r>
-              <a:t>~/agv_ws/src/agv_gazebo/models/agv/model.sdf</a:t>
+              <a:t>~/ros2_curri/agv_ws/src/agv_gazebo/models/agv/model.sdf</a:t>
             </a:r>
           </a:p>
         </p:txBody>
@@ -10177,7 +10723,7 @@
               </a:defRPr>
             </a:pPr>
             <a:r>
-              <a:t>현재 단계 8/27    |    현재 폴더 ~/agv_ws    |    현재 터미널</a:t>
+              <a:t>현재 단계 8/27    |    현재 폴더 ~/ros2_curri/agv_ws    |    현재 터미널</a:t>
             </a:r>
           </a:p>
         </p:txBody>
@@ -10274,11 +10820,11 @@
               </a:defRPr>
             </a:pPr>
             <a:r>
-              <a:t>파일 생성: mkdir -p ~/agv_ws/src/agv_gazebo/models/agv</a:t>
-            </a:r>
-            <a:br/>
-            <a:r>
-              <a:t>파일 열기: nano ~/agv_ws/src/agv_gazebo/models/agv/model.sdf</a:t>
+              <a:t>파일 생성: mkdir -p ~/ros2_curri/agv_ws/src/agv_gazebo/models/agv</a:t>
+            </a:r>
+            <a:br/>
+            <a:r>
+              <a:t>파일 열기: nano ~/ros2_curri/agv_ws/src/agv_gazebo/models/agv/model.sdf</a:t>
             </a:r>
           </a:p>
         </p:txBody>
@@ -10515,7 +11061,7 @@
               </a:defRPr>
             </a:pPr>
             <a:r>
-              <a:t>~/agv_ws/src/agv_gazebo/models/agv/model.sdf</a:t>
+              <a:t>~/ros2_curri/agv_ws/src/agv_gazebo/models/agv/model.sdf</a:t>
             </a:r>
           </a:p>
         </p:txBody>
@@ -10651,7 +11197,7 @@
               </a:defRPr>
             </a:pPr>
             <a:r>
-              <a:t>현재 단계 9/27    |    현재 폴더 ~/agv_ws    |    현재 터미널</a:t>
+              <a:t>현재 단계 9/27    |    현재 폴더 ~/ros2_curri/agv_ws    |    현재 터미널</a:t>
             </a:r>
           </a:p>
         </p:txBody>
@@ -10748,11 +11294,11 @@
               </a:defRPr>
             </a:pPr>
             <a:r>
-              <a:t>파일 생성: mkdir -p ~/agv_ws/src/agv_gazebo/models/agv</a:t>
-            </a:r>
-            <a:br/>
-            <a:r>
-              <a:t>파일 열기: nano ~/agv_ws/src/agv_gazebo/models/agv/model.sdf</a:t>
+              <a:t>파일 생성: mkdir -p ~/ros2_curri/agv_ws/src/agv_gazebo/models/agv</a:t>
+            </a:r>
+            <a:br/>
+            <a:r>
+              <a:t>파일 열기: nano ~/ros2_curri/agv_ws/src/agv_gazebo/models/agv/model.sdf</a:t>
             </a:r>
           </a:p>
         </p:txBody>
@@ -10989,7 +11535,7 @@
               </a:defRPr>
             </a:pPr>
             <a:r>
-              <a:t>~/agv_ws/src/agv_gazebo/models/agv/model.sdf</a:t>
+              <a:t>~/ros2_curri/agv_ws/src/agv_gazebo/models/agv/model.sdf</a:t>
             </a:r>
           </a:p>
         </p:txBody>
@@ -11125,7 +11671,7 @@
               </a:defRPr>
             </a:pPr>
             <a:r>
-              <a:t>현재 단계 10/27    |    현재 폴더 ~/agv_ws    |    현재 터미널</a:t>
+              <a:t>현재 단계 10/27    |    현재 폴더 ~/ros2_curri/agv_ws    |    현재 터미널</a:t>
             </a:r>
           </a:p>
         </p:txBody>
@@ -11222,11 +11768,11 @@
               </a:defRPr>
             </a:pPr>
             <a:r>
-              <a:t>파일 생성: mkdir -p ~/agv_ws/src/agv_gazebo/models/agv</a:t>
-            </a:r>
-            <a:br/>
-            <a:r>
-              <a:t>파일 열기: nano ~/agv_ws/src/agv_gazebo/models/agv/model.sdf</a:t>
+              <a:t>파일 생성: mkdir -p ~/ros2_curri/agv_ws/src/agv_gazebo/models/agv</a:t>
+            </a:r>
+            <a:br/>
+            <a:r>
+              <a:t>파일 열기: nano ~/ros2_curri/agv_ws/src/agv_gazebo/models/agv/model.sdf</a:t>
             </a:r>
           </a:p>
         </p:txBody>
@@ -11463,7 +12009,7 @@
               </a:defRPr>
             </a:pPr>
             <a:r>
-              <a:t>~/agv_ws/src/agv_gazebo/models/agv/model.sdf</a:t>
+              <a:t>~/ros2_curri/agv_ws/src/agv_gazebo/models/agv/model.sdf</a:t>
             </a:r>
           </a:p>
         </p:txBody>
@@ -11599,7 +12145,7 @@
               </a:defRPr>
             </a:pPr>
             <a:r>
-              <a:t>현재 단계 11/27    |    현재 폴더 ~/agv_ws    |    현재 터미널</a:t>
+              <a:t>현재 단계 11/27    |    현재 폴더 ~/ros2_curri/agv_ws    |    현재 터미널</a:t>
             </a:r>
           </a:p>
         </p:txBody>
@@ -11696,11 +12242,11 @@
               </a:defRPr>
             </a:pPr>
             <a:r>
-              <a:t>파일 생성: mkdir -p ~/agv_ws/src/agv_gazebo/models/agv</a:t>
-            </a:r>
-            <a:br/>
-            <a:r>
-              <a:t>파일 열기: nano ~/agv_ws/src/agv_gazebo/models/agv/model.sdf</a:t>
+              <a:t>파일 생성: mkdir -p ~/ros2_curri/agv_ws/src/agv_gazebo/models/agv</a:t>
+            </a:r>
+            <a:br/>
+            <a:r>
+              <a:t>파일 열기: nano ~/ros2_curri/agv_ws/src/agv_gazebo/models/agv/model.sdf</a:t>
             </a:r>
           </a:p>
         </p:txBody>
@@ -11937,7 +12483,7 @@
               </a:defRPr>
             </a:pPr>
             <a:r>
-              <a:t>~/agv_ws/src/agv_gazebo/models/agv/model.sdf</a:t>
+              <a:t>~/ros2_curri/agv_ws/src/agv_gazebo/models/agv/model.sdf</a:t>
             </a:r>
           </a:p>
         </p:txBody>
@@ -12073,7 +12619,7 @@
               </a:defRPr>
             </a:pPr>
             <a:r>
-              <a:t>현재 단계 12/27    |    현재 폴더 ~/agv_ws    |    현재 터미널</a:t>
+              <a:t>현재 단계 12/27    |    현재 폴더 ~/ros2_curri/agv_ws    |    현재 터미널</a:t>
             </a:r>
           </a:p>
         </p:txBody>
@@ -12170,11 +12716,11 @@
               </a:defRPr>
             </a:pPr>
             <a:r>
-              <a:t>파일 생성: mkdir -p ~/agv_ws/src/agv_gazebo/models/agv</a:t>
-            </a:r>
-            <a:br/>
-            <a:r>
-              <a:t>파일 열기: nano ~/agv_ws/src/agv_gazebo/models/agv/model.sdf</a:t>
+              <a:t>파일 생성: mkdir -p ~/ros2_curri/agv_ws/src/agv_gazebo/models/agv</a:t>
+            </a:r>
+            <a:br/>
+            <a:r>
+              <a:t>파일 열기: nano ~/ros2_curri/agv_ws/src/agv_gazebo/models/agv/model.sdf</a:t>
             </a:r>
           </a:p>
         </p:txBody>
@@ -12411,7 +12957,7 @@
               </a:defRPr>
             </a:pPr>
             <a:r>
-              <a:t>~/agv_ws/src/agv_gazebo/models/agv/model.sdf</a:t>
+              <a:t>~/ros2_curri/agv_ws/src/agv_gazebo/models/agv/model.sdf</a:t>
             </a:r>
           </a:p>
         </p:txBody>
@@ -12547,7 +13093,7 @@
               </a:defRPr>
             </a:pPr>
             <a:r>
-              <a:t>현재 단계 13/27    |    현재 폴더 ~/agv_ws    |    현재 터미널</a:t>
+              <a:t>현재 단계 13/27    |    현재 폴더 ~/ros2_curri/agv_ws    |    현재 터미널</a:t>
             </a:r>
           </a:p>
         </p:txBody>
@@ -12644,11 +13190,11 @@
               </a:defRPr>
             </a:pPr>
             <a:r>
-              <a:t>파일 생성: mkdir -p ~/agv_ws/src/agv_gazebo/models/agv</a:t>
-            </a:r>
-            <a:br/>
-            <a:r>
-              <a:t>파일 열기: nano ~/agv_ws/src/agv_gazebo/models/agv/model.sdf</a:t>
+              <a:t>파일 생성: mkdir -p ~/ros2_curri/agv_ws/src/agv_gazebo/models/agv</a:t>
+            </a:r>
+            <a:br/>
+            <a:r>
+              <a:t>파일 열기: nano ~/ros2_curri/agv_ws/src/agv_gazebo/models/agv/model.sdf</a:t>
             </a:r>
           </a:p>
         </p:txBody>
@@ -13346,7 +13892,7 @@
               </a:defRPr>
             </a:pPr>
             <a:r>
-              <a:t>~/agv_ws/src/agv_gazebo/models/agv/model.sdf</a:t>
+              <a:t>~/ros2_curri/agv_ws/src/agv_gazebo/models/agv/model.sdf</a:t>
             </a:r>
           </a:p>
         </p:txBody>
@@ -13482,7 +14028,7 @@
               </a:defRPr>
             </a:pPr>
             <a:r>
-              <a:t>현재 단계 14/27    |    현재 폴더 ~/agv_ws    |    현재 터미널</a:t>
+              <a:t>현재 단계 14/27    |    현재 폴더 ~/ros2_curri/agv_ws    |    현재 터미널</a:t>
             </a:r>
           </a:p>
         </p:txBody>
@@ -13579,11 +14125,11 @@
               </a:defRPr>
             </a:pPr>
             <a:r>
-              <a:t>파일 생성: mkdir -p ~/agv_ws/src/agv_gazebo/models/agv</a:t>
-            </a:r>
-            <a:br/>
-            <a:r>
-              <a:t>파일 열기: nano ~/agv_ws/src/agv_gazebo/models/agv/model.sdf</a:t>
+              <a:t>파일 생성: mkdir -p ~/ros2_curri/agv_ws/src/agv_gazebo/models/agv</a:t>
+            </a:r>
+            <a:br/>
+            <a:r>
+              <a:t>파일 열기: nano ~/ros2_curri/agv_ws/src/agv_gazebo/models/agv/model.sdf</a:t>
             </a:r>
           </a:p>
         </p:txBody>
@@ -13820,7 +14366,7 @@
               </a:defRPr>
             </a:pPr>
             <a:r>
-              <a:t>~/agv_ws/src/agv_gazebo/models/agv/model.sdf</a:t>
+              <a:t>~/ros2_curri/agv_ws/src/agv_gazebo/models/agv/model.sdf</a:t>
             </a:r>
           </a:p>
         </p:txBody>
@@ -13956,7 +14502,7 @@
               </a:defRPr>
             </a:pPr>
             <a:r>
-              <a:t>현재 단계 15/27    |    현재 폴더 ~/agv_ws    |    현재 터미널</a:t>
+              <a:t>현재 단계 15/27    |    현재 폴더 ~/ros2_curri/agv_ws    |    현재 터미널</a:t>
             </a:r>
           </a:p>
         </p:txBody>
@@ -14053,11 +14599,11 @@
               </a:defRPr>
             </a:pPr>
             <a:r>
-              <a:t>파일 생성: mkdir -p ~/agv_ws/src/agv_gazebo/models/agv</a:t>
-            </a:r>
-            <a:br/>
-            <a:r>
-              <a:t>파일 열기: nano ~/agv_ws/src/agv_gazebo/models/agv/model.sdf</a:t>
+              <a:t>파일 생성: mkdir -p ~/ros2_curri/agv_ws/src/agv_gazebo/models/agv</a:t>
+            </a:r>
+            <a:br/>
+            <a:r>
+              <a:t>파일 열기: nano ~/ros2_curri/agv_ws/src/agv_gazebo/models/agv/model.sdf</a:t>
             </a:r>
           </a:p>
         </p:txBody>
@@ -14294,7 +14840,7 @@
               </a:defRPr>
             </a:pPr>
             <a:r>
-              <a:t>~/agv_ws/src/agv_gazebo/models/agv/model.sdf</a:t>
+              <a:t>~/ros2_curri/agv_ws/src/agv_gazebo/models/agv/model.sdf</a:t>
             </a:r>
           </a:p>
         </p:txBody>
@@ -14430,7 +14976,7 @@
               </a:defRPr>
             </a:pPr>
             <a:r>
-              <a:t>현재 단계 16/27    |    현재 폴더 ~/agv_ws    |    현재 터미널</a:t>
+              <a:t>현재 단계 16/27    |    현재 폴더 ~/ros2_curri/agv_ws    |    현재 터미널</a:t>
             </a:r>
           </a:p>
         </p:txBody>
@@ -14527,11 +15073,11 @@
               </a:defRPr>
             </a:pPr>
             <a:r>
-              <a:t>파일 생성: mkdir -p ~/agv_ws/src/agv_gazebo/models/agv</a:t>
-            </a:r>
-            <a:br/>
-            <a:r>
-              <a:t>파일 열기: nano ~/agv_ws/src/agv_gazebo/models/agv/model.sdf</a:t>
+              <a:t>파일 생성: mkdir -p ~/ros2_curri/agv_ws/src/agv_gazebo/models/agv</a:t>
+            </a:r>
+            <a:br/>
+            <a:r>
+              <a:t>파일 열기: nano ~/ros2_curri/agv_ws/src/agv_gazebo/models/agv/model.sdf</a:t>
             </a:r>
           </a:p>
         </p:txBody>
@@ -14768,7 +15314,7 @@
               </a:defRPr>
             </a:pPr>
             <a:r>
-              <a:t>~/agv_ws/src/agv_gazebo/models/agv/model.sdf</a:t>
+              <a:t>~/ros2_curri/agv_ws/src/agv_gazebo/models/agv/model.sdf</a:t>
             </a:r>
           </a:p>
         </p:txBody>
@@ -14904,7 +15450,7 @@
               </a:defRPr>
             </a:pPr>
             <a:r>
-              <a:t>현재 단계 17/27    |    현재 폴더 ~/agv_ws    |    현재 터미널</a:t>
+              <a:t>현재 단계 17/27    |    현재 폴더 ~/ros2_curri/agv_ws    |    현재 터미널</a:t>
             </a:r>
           </a:p>
         </p:txBody>
@@ -15001,11 +15547,11 @@
               </a:defRPr>
             </a:pPr>
             <a:r>
-              <a:t>파일 생성: mkdir -p ~/agv_ws/src/agv_gazebo/models/agv</a:t>
-            </a:r>
-            <a:br/>
-            <a:r>
-              <a:t>파일 열기: nano ~/agv_ws/src/agv_gazebo/models/agv/model.sdf</a:t>
+              <a:t>파일 생성: mkdir -p ~/ros2_curri/agv_ws/src/agv_gazebo/models/agv</a:t>
+            </a:r>
+            <a:br/>
+            <a:r>
+              <a:t>파일 열기: nano ~/ros2_curri/agv_ws/src/agv_gazebo/models/agv/model.sdf</a:t>
             </a:r>
           </a:p>
         </p:txBody>
@@ -15242,7 +15788,7 @@
               </a:defRPr>
             </a:pPr>
             <a:r>
-              <a:t>~/agv_ws/src/agv_gazebo/models/agv/model.sdf</a:t>
+              <a:t>~/ros2_curri/agv_ws/src/agv_gazebo/models/agv/model.sdf</a:t>
             </a:r>
           </a:p>
         </p:txBody>
@@ -15378,7 +15924,7 @@
               </a:defRPr>
             </a:pPr>
             <a:r>
-              <a:t>현재 단계 18/27    |    현재 폴더 ~/agv_ws    |    현재 터미널</a:t>
+              <a:t>현재 단계 18/27    |    현재 폴더 ~/ros2_curri/agv_ws    |    현재 터미널</a:t>
             </a:r>
           </a:p>
         </p:txBody>
@@ -15475,11 +16021,11 @@
               </a:defRPr>
             </a:pPr>
             <a:r>
-              <a:t>파일 생성: mkdir -p ~/agv_ws/src/agv_gazebo/models/agv</a:t>
-            </a:r>
-            <a:br/>
-            <a:r>
-              <a:t>파일 열기: nano ~/agv_ws/src/agv_gazebo/models/agv/model.sdf</a:t>
+              <a:t>파일 생성: mkdir -p ~/ros2_curri/agv_ws/src/agv_gazebo/models/agv</a:t>
+            </a:r>
+            <a:br/>
+            <a:r>
+              <a:t>파일 열기: nano ~/ros2_curri/agv_ws/src/agv_gazebo/models/agv/model.sdf</a:t>
             </a:r>
           </a:p>
         </p:txBody>
@@ -15716,7 +16262,7 @@
               </a:defRPr>
             </a:pPr>
             <a:r>
-              <a:t>~/agv_ws/src/agv_gazebo/models/agv/model.sdf</a:t>
+              <a:t>~/ros2_curri/agv_ws/src/agv_gazebo/models/agv/model.sdf</a:t>
             </a:r>
           </a:p>
         </p:txBody>
@@ -15852,7 +16398,7 @@
               </a:defRPr>
             </a:pPr>
             <a:r>
-              <a:t>현재 단계 19/27    |    현재 폴더 ~/agv_ws    |    현재 터미널</a:t>
+              <a:t>현재 단계 19/27    |    현재 폴더 ~/ros2_curri/agv_ws    |    현재 터미널</a:t>
             </a:r>
           </a:p>
         </p:txBody>
@@ -15949,11 +16495,11 @@
               </a:defRPr>
             </a:pPr>
             <a:r>
-              <a:t>파일 생성: mkdir -p ~/agv_ws/src/agv_gazebo/models/agv</a:t>
-            </a:r>
-            <a:br/>
-            <a:r>
-              <a:t>파일 열기: nano ~/agv_ws/src/agv_gazebo/models/agv/model.sdf</a:t>
+              <a:t>파일 생성: mkdir -p ~/ros2_curri/agv_ws/src/agv_gazebo/models/agv</a:t>
+            </a:r>
+            <a:br/>
+            <a:r>
+              <a:t>파일 열기: nano ~/ros2_curri/agv_ws/src/agv_gazebo/models/agv/model.sdf</a:t>
             </a:r>
           </a:p>
         </p:txBody>
@@ -16190,7 +16736,7 @@
               </a:defRPr>
             </a:pPr>
             <a:r>
-              <a:t>~/agv_ws/src/agv_gazebo/models/agv/model.sdf</a:t>
+              <a:t>~/ros2_curri/agv_ws/src/agv_gazebo/models/agv/model.sdf</a:t>
             </a:r>
           </a:p>
         </p:txBody>
@@ -16326,7 +16872,7 @@
               </a:defRPr>
             </a:pPr>
             <a:r>
-              <a:t>현재 단계 20/27    |    현재 폴더 ~/agv_ws    |    현재 터미널</a:t>
+              <a:t>현재 단계 20/27    |    현재 폴더 ~/ros2_curri/agv_ws    |    현재 터미널</a:t>
             </a:r>
           </a:p>
         </p:txBody>
@@ -16423,11 +16969,11 @@
               </a:defRPr>
             </a:pPr>
             <a:r>
-              <a:t>파일 생성: mkdir -p ~/agv_ws/src/agv_gazebo/models/agv</a:t>
-            </a:r>
-            <a:br/>
-            <a:r>
-              <a:t>파일 열기: nano ~/agv_ws/src/agv_gazebo/models/agv/model.sdf</a:t>
+              <a:t>파일 생성: mkdir -p ~/ros2_curri/agv_ws/src/agv_gazebo/models/agv</a:t>
+            </a:r>
+            <a:br/>
+            <a:r>
+              <a:t>파일 열기: nano ~/ros2_curri/agv_ws/src/agv_gazebo/models/agv/model.sdf</a:t>
             </a:r>
           </a:p>
         </p:txBody>
@@ -16664,7 +17210,7 @@
               </a:defRPr>
             </a:pPr>
             <a:r>
-              <a:t>~/agv_ws/src/agv_gazebo/models/agv/model.sdf</a:t>
+              <a:t>~/ros2_curri/agv_ws/src/agv_gazebo/models/agv/model.sdf</a:t>
             </a:r>
           </a:p>
         </p:txBody>
@@ -16800,7 +17346,7 @@
               </a:defRPr>
             </a:pPr>
             <a:r>
-              <a:t>현재 단계 21/27    |    현재 폴더 ~/agv_ws    |    현재 터미널</a:t>
+              <a:t>현재 단계 21/27    |    현재 폴더 ~/ros2_curri/agv_ws    |    현재 터미널</a:t>
             </a:r>
           </a:p>
         </p:txBody>
@@ -16897,11 +17443,11 @@
               </a:defRPr>
             </a:pPr>
             <a:r>
-              <a:t>파일 생성: mkdir -p ~/agv_ws/src/agv_gazebo/models/agv</a:t>
-            </a:r>
-            <a:br/>
-            <a:r>
-              <a:t>파일 열기: nano ~/agv_ws/src/agv_gazebo/models/agv/model.sdf</a:t>
+              <a:t>파일 생성: mkdir -p ~/ros2_curri/agv_ws/src/agv_gazebo/models/agv</a:t>
+            </a:r>
+            <a:br/>
+            <a:r>
+              <a:t>파일 열기: nano ~/ros2_curri/agv_ws/src/agv_gazebo/models/agv/model.sdf</a:t>
             </a:r>
           </a:p>
         </p:txBody>
@@ -17138,7 +17684,7 @@
               </a:defRPr>
             </a:pPr>
             <a:r>
-              <a:t>~/agv_ws/src/agv_gazebo/models/agv/model.sdf</a:t>
+              <a:t>~/ros2_curri/agv_ws/src/agv_gazebo/models/agv/model.sdf</a:t>
             </a:r>
           </a:p>
         </p:txBody>
@@ -17274,7 +17820,7 @@
               </a:defRPr>
             </a:pPr>
             <a:r>
-              <a:t>현재 단계 22/27    |    현재 폴더 ~/agv_ws    |    현재 터미널</a:t>
+              <a:t>현재 단계 22/27    |    현재 폴더 ~/ros2_curri/agv_ws    |    현재 터미널</a:t>
             </a:r>
           </a:p>
         </p:txBody>
@@ -17371,11 +17917,11 @@
               </a:defRPr>
             </a:pPr>
             <a:r>
-              <a:t>파일 생성: mkdir -p ~/agv_ws/src/agv_gazebo/models/agv</a:t>
-            </a:r>
-            <a:br/>
-            <a:r>
-              <a:t>파일 열기: nano ~/agv_ws/src/agv_gazebo/models/agv/model.sdf</a:t>
+              <a:t>파일 생성: mkdir -p ~/ros2_curri/agv_ws/src/agv_gazebo/models/agv</a:t>
+            </a:r>
+            <a:br/>
+            <a:r>
+              <a:t>파일 열기: nano ~/ros2_curri/agv_ws/src/agv_gazebo/models/agv/model.sdf</a:t>
             </a:r>
           </a:p>
         </p:txBody>
@@ -17612,7 +18158,7 @@
               </a:defRPr>
             </a:pPr>
             <a:r>
-              <a:t>~/agv_ws/src/agv_gazebo/models/agv/model.sdf</a:t>
+              <a:t>~/ros2_curri/agv_ws/src/agv_gazebo/models/agv/model.sdf</a:t>
             </a:r>
           </a:p>
         </p:txBody>
@@ -17748,7 +18294,7 @@
               </a:defRPr>
             </a:pPr>
             <a:r>
-              <a:t>현재 단계 23/27    |    현재 폴더 ~/agv_ws    |    현재 터미널</a:t>
+              <a:t>현재 단계 23/27    |    현재 폴더 ~/ros2_curri/agv_ws    |    현재 터미널</a:t>
             </a:r>
           </a:p>
         </p:txBody>
@@ -17845,11 +18391,11 @@
               </a:defRPr>
             </a:pPr>
             <a:r>
-              <a:t>파일 생성: mkdir -p ~/agv_ws/src/agv_gazebo/models/agv</a:t>
-            </a:r>
-            <a:br/>
-            <a:r>
-              <a:t>파일 열기: nano ~/agv_ws/src/agv_gazebo/models/agv/model.sdf</a:t>
+              <a:t>파일 생성: mkdir -p ~/ros2_curri/agv_ws/src/agv_gazebo/models/agv</a:t>
+            </a:r>
+            <a:br/>
+            <a:r>
+              <a:t>파일 열기: nano ~/ros2_curri/agv_ws/src/agv_gazebo/models/agv/model.sdf</a:t>
             </a:r>
           </a:p>
         </p:txBody>
@@ -18222,7 +18768,7 @@
               </a:defRPr>
             </a:pPr>
             <a:r>
-              <a:t>현재 단계 시작    |    현재 폴더 ~/agv_ws    |    현재 터미널</a:t>
+              <a:t>현재 단계 시작    |    현재 폴더 ~/ros2_curri/agv_ws    |    현재 터미널</a:t>
             </a:r>
           </a:p>
         </p:txBody>
@@ -18338,7 +18884,7 @@
               </a:defRPr>
             </a:pPr>
             <a:r>
-              <a:t>• 현재 폴더: ~/agv_ws</a:t>
+              <a:t>• 현재 폴더: ~/ros2_curri/agv_ws</a:t>
             </a:r>
           </a:p>
           <a:p>
@@ -18409,7 +18955,7 @@
               </a:defRPr>
             </a:pPr>
             <a:r>
-              <a:t>확인: pwd가 ~/agv_ws이고, 이전 모듈의 완료 조건을 한 문장으로 설명할 수 있으면 시작합니다.</a:t>
+              <a:t>확인: pwd가 ~/ros2_curri/agv_ws이고, 이전 모듈의 완료 조건을 한 문장으로 설명할 수 있으면 시작합니다.</a:t>
             </a:r>
           </a:p>
         </p:txBody>
@@ -18505,7 +19051,7 @@
               </a:defRPr>
             </a:pPr>
             <a:r>
-              <a:t>~/agv_ws/src/agv_gazebo/models/agv/model.sdf</a:t>
+              <a:t>~/ros2_curri/agv_ws/src/agv_gazebo/models/agv/model.sdf</a:t>
             </a:r>
           </a:p>
         </p:txBody>
@@ -18641,7 +19187,7 @@
               </a:defRPr>
             </a:pPr>
             <a:r>
-              <a:t>현재 단계 24/27    |    현재 폴더 ~/agv_ws    |    현재 터미널</a:t>
+              <a:t>현재 단계 24/27    |    현재 폴더 ~/ros2_curri/agv_ws    |    현재 터미널</a:t>
             </a:r>
           </a:p>
         </p:txBody>
@@ -18738,11 +19284,11 @@
               </a:defRPr>
             </a:pPr>
             <a:r>
-              <a:t>파일 생성: mkdir -p ~/agv_ws/src/agv_gazebo/models/agv</a:t>
-            </a:r>
-            <a:br/>
-            <a:r>
-              <a:t>파일 열기: nano ~/agv_ws/src/agv_gazebo/models/agv/model.sdf</a:t>
+              <a:t>파일 생성: mkdir -p ~/ros2_curri/agv_ws/src/agv_gazebo/models/agv</a:t>
+            </a:r>
+            <a:br/>
+            <a:r>
+              <a:t>파일 열기: nano ~/ros2_curri/agv_ws/src/agv_gazebo/models/agv/model.sdf</a:t>
             </a:r>
           </a:p>
         </p:txBody>
@@ -18979,7 +19525,7 @@
               </a:defRPr>
             </a:pPr>
             <a:r>
-              <a:t>~/agv_ws/src/agv_gazebo/models/agv/model.sdf</a:t>
+              <a:t>~/ros2_curri/agv_ws/src/agv_gazebo/models/agv/model.sdf</a:t>
             </a:r>
           </a:p>
         </p:txBody>
@@ -19115,7 +19661,7 @@
               </a:defRPr>
             </a:pPr>
             <a:r>
-              <a:t>현재 단계 25/27    |    현재 폴더 ~/agv_ws    |    현재 터미널</a:t>
+              <a:t>현재 단계 25/27    |    현재 폴더 ~/ros2_curri/agv_ws    |    현재 터미널</a:t>
             </a:r>
           </a:p>
         </p:txBody>
@@ -19212,11 +19758,11 @@
               </a:defRPr>
             </a:pPr>
             <a:r>
-              <a:t>파일 생성: mkdir -p ~/agv_ws/src/agv_gazebo/models/agv</a:t>
-            </a:r>
-            <a:br/>
-            <a:r>
-              <a:t>파일 열기: nano ~/agv_ws/src/agv_gazebo/models/agv/model.sdf</a:t>
+              <a:t>파일 생성: mkdir -p ~/ros2_curri/agv_ws/src/agv_gazebo/models/agv</a:t>
+            </a:r>
+            <a:br/>
+            <a:r>
+              <a:t>파일 열기: nano ~/ros2_curri/agv_ws/src/agv_gazebo/models/agv/model.sdf</a:t>
             </a:r>
           </a:p>
         </p:txBody>
@@ -19453,7 +19999,7 @@
               </a:defRPr>
             </a:pPr>
             <a:r>
-              <a:t>~/agv_ws/src/agv_gazebo/models/agv/model.sdf</a:t>
+              <a:t>~/ros2_curri/agv_ws/src/agv_gazebo/models/agv/model.sdf</a:t>
             </a:r>
           </a:p>
         </p:txBody>
@@ -19589,7 +20135,7 @@
               </a:defRPr>
             </a:pPr>
             <a:r>
-              <a:t>현재 단계 26/27    |    현재 폴더 ~/agv_ws    |    현재 터미널</a:t>
+              <a:t>현재 단계 26/27    |    현재 폴더 ~/ros2_curri/agv_ws    |    현재 터미널</a:t>
             </a:r>
           </a:p>
         </p:txBody>
@@ -19686,11 +20232,11 @@
               </a:defRPr>
             </a:pPr>
             <a:r>
-              <a:t>파일 생성: mkdir -p ~/agv_ws/src/agv_gazebo/models/agv</a:t>
-            </a:r>
-            <a:br/>
-            <a:r>
-              <a:t>파일 열기: nano ~/agv_ws/src/agv_gazebo/models/agv/model.sdf</a:t>
+              <a:t>파일 생성: mkdir -p ~/ros2_curri/agv_ws/src/agv_gazebo/models/agv</a:t>
+            </a:r>
+            <a:br/>
+            <a:r>
+              <a:t>파일 열기: nano ~/ros2_curri/agv_ws/src/agv_gazebo/models/agv/model.sdf</a:t>
             </a:r>
           </a:p>
         </p:txBody>
@@ -19924,7 +20470,7 @@
               </a:defRPr>
             </a:pPr>
             <a:r>
-              <a:t>~/agv_ws/src/agv_gazebo/config/bridge.yaml</a:t>
+              <a:t>~/ros2_curri/agv_ws/src/agv_gazebo/config/bridge.yaml</a:t>
             </a:r>
           </a:p>
         </p:txBody>
@@ -20060,7 +20606,7 @@
               </a:defRPr>
             </a:pPr>
             <a:r>
-              <a:t>현재 단계 27/30    |    현재 폴더 ~/agv_ws    |    현재 터미널</a:t>
+              <a:t>현재 단계 27/30    |    현재 폴더 ~/ros2_curri/agv_ws    |    현재 터미널</a:t>
             </a:r>
           </a:p>
         </p:txBody>
@@ -20157,11 +20703,11 @@
               </a:defRPr>
             </a:pPr>
             <a:r>
-              <a:t>파일 생성: mkdir -p ~/agv_ws/src/agv_gazebo/config</a:t>
-            </a:r>
-            <a:br/>
-            <a:r>
-              <a:t>파일 열기: nano ~/agv_ws/src/agv_gazebo/config/bridge.yaml</a:t>
+              <a:t>파일 생성: mkdir -p ~/ros2_curri/agv_ws/src/agv_gazebo/config</a:t>
+            </a:r>
+            <a:br/>
+            <a:r>
+              <a:t>파일 열기: nano ~/ros2_curri/agv_ws/src/agv_gazebo/config/bridge.yaml</a:t>
             </a:r>
           </a:p>
         </p:txBody>
@@ -20398,7 +20944,7 @@
               </a:defRPr>
             </a:pPr>
             <a:r>
-              <a:t>~/agv_ws/src/agv_gazebo/config/bridge.yaml</a:t>
+              <a:t>~/ros2_curri/agv_ws/src/agv_gazebo/config/bridge.yaml</a:t>
             </a:r>
           </a:p>
         </p:txBody>
@@ -20534,7 +21080,7 @@
               </a:defRPr>
             </a:pPr>
             <a:r>
-              <a:t>현재 단계 28/30    |    현재 폴더 ~/agv_ws    |    현재 터미널</a:t>
+              <a:t>현재 단계 28/30    |    현재 폴더 ~/ros2_curri/agv_ws    |    현재 터미널</a:t>
             </a:r>
           </a:p>
         </p:txBody>
@@ -20631,11 +21177,11 @@
               </a:defRPr>
             </a:pPr>
             <a:r>
-              <a:t>파일 생성: mkdir -p ~/agv_ws/src/agv_gazebo/config</a:t>
-            </a:r>
-            <a:br/>
-            <a:r>
-              <a:t>파일 열기: nano ~/agv_ws/src/agv_gazebo/config/bridge.yaml</a:t>
+              <a:t>파일 생성: mkdir -p ~/ros2_curri/agv_ws/src/agv_gazebo/config</a:t>
+            </a:r>
+            <a:br/>
+            <a:r>
+              <a:t>파일 열기: nano ~/ros2_curri/agv_ws/src/agv_gazebo/config/bridge.yaml</a:t>
             </a:r>
           </a:p>
         </p:txBody>
@@ -20872,7 +21418,7 @@
               </a:defRPr>
             </a:pPr>
             <a:r>
-              <a:t>~/agv_ws/src/agv_gazebo/config/bridge.yaml</a:t>
+              <a:t>~/ros2_curri/agv_ws/src/agv_gazebo/config/bridge.yaml</a:t>
             </a:r>
           </a:p>
         </p:txBody>
@@ -21008,7 +21554,7 @@
               </a:defRPr>
             </a:pPr>
             <a:r>
-              <a:t>현재 단계 29/30    |    현재 폴더 ~/agv_ws    |    현재 터미널</a:t>
+              <a:t>현재 단계 29/30    |    현재 폴더 ~/ros2_curri/agv_ws    |    현재 터미널</a:t>
             </a:r>
           </a:p>
         </p:txBody>
@@ -21105,11 +21651,11 @@
               </a:defRPr>
             </a:pPr>
             <a:r>
-              <a:t>파일 생성: mkdir -p ~/agv_ws/src/agv_gazebo/config</a:t>
-            </a:r>
-            <a:br/>
-            <a:r>
-              <a:t>파일 열기: nano ~/agv_ws/src/agv_gazebo/config/bridge.yaml</a:t>
+              <a:t>파일 생성: mkdir -p ~/ros2_curri/agv_ws/src/agv_gazebo/config</a:t>
+            </a:r>
+            <a:br/>
+            <a:r>
+              <a:t>파일 열기: nano ~/ros2_curri/agv_ws/src/agv_gazebo/config/bridge.yaml</a:t>
             </a:r>
           </a:p>
         </p:txBody>
@@ -21283,7 +21829,7 @@
               </a:defRPr>
             </a:pPr>
             <a:r>
-              <a:t>파일을 새로 만들고 저장한다 (1/5)</a:t>
+              <a:t>파일을 새로 만들고 저장한다 (1/10)</a:t>
             </a:r>
           </a:p>
         </p:txBody>
@@ -21322,7 +21868,7 @@
               </a:defRPr>
             </a:pPr>
             <a:r>
-              <a:t>~/agv_ws/src/agv_vision/agv_vision/yolo_node.py</a:t>
+              <a:t>~/ros2_curri/agv_ws/src/agv_vision/agv_vision/yolo_node.py</a:t>
             </a:r>
           </a:p>
         </p:txBody>
@@ -21458,7 +22004,7 @@
               </a:defRPr>
             </a:pPr>
             <a:r>
-              <a:t>현재 단계 30/35    |    현재 폴더 ~/agv_ws    |    현재 터미널</a:t>
+              <a:t>현재 단계 30/40    |    현재 폴더 ~/ros2_curri/agv_ws    |    현재 터미널</a:t>
             </a:r>
           </a:p>
         </p:txBody>
@@ -21555,11 +22101,11 @@
               </a:defRPr>
             </a:pPr>
             <a:r>
-              <a:t>파일 생성: mkdir -p ~/agv_ws/src/agv_vision/agv_vision</a:t>
-            </a:r>
-            <a:br/>
-            <a:r>
-              <a:t>파일 열기: nano ~/agv_ws/src/agv_vision/agv_vision/yolo_node.py</a:t>
+              <a:t>파일 생성: mkdir -p ~/ros2_curri/agv_ws/src/agv_vision/agv_vision</a:t>
+            </a:r>
+            <a:br/>
+            <a:r>
+              <a:t>파일 열기: nano ~/ros2_curri/agv_ws/src/agv_vision/agv_vision/yolo_node.py</a:t>
             </a:r>
           </a:p>
         </p:txBody>
@@ -21640,6 +22186,10 @@
               <a:t>from agv_interfaces.msg import Detection, DetectionArray</a:t>
             </a:r>
             <a:br/>
+            <a:r>
+              <a:t>import cv2</a:t>
+            </a:r>
+            <a:br/>
             <a:br/>
             <a:r>
               <a:t>class YoloNode(Node):</a:t>
@@ -21652,10 +22202,6 @@
             <a:br/>
             <a:r>
               <a:t>        super().__init__('yolo_node')</a:t>
-            </a:r>
-            <a:br/>
-            <a:r>
-              <a:t>        self.declare_parameter('model_path', 'yolo11n.pt')</a:t>
             </a:r>
           </a:p>
         </p:txBody>
@@ -21694,7 +22240,7 @@
               </a:defRPr>
             </a:pPr>
             <a:r>
-              <a:t>파일 전체 1/5 · 이 슬라이드 다음에 같은 파일의 나머지 줄이 이어집니다.</a:t>
+              <a:t>파일 전체 1/10 · 이 슬라이드 다음에 같은 파일의 나머지 줄이 이어집니다.</a:t>
             </a:r>
           </a:p>
         </p:txBody>
@@ -21751,7 +22297,7 @@
               </a:defRPr>
             </a:pPr>
             <a:r>
-              <a:t>파일을 계속 작성하고 저장한다 (2/5)</a:t>
+              <a:t>파일을 계속 작성하고 저장한다 (2/10)</a:t>
             </a:r>
           </a:p>
         </p:txBody>
@@ -21790,7 +22336,7 @@
               </a:defRPr>
             </a:pPr>
             <a:r>
-              <a:t>~/agv_ws/src/agv_vision/agv_vision/yolo_node.py</a:t>
+              <a:t>~/ros2_curri/agv_ws/src/agv_vision/agv_vision/yolo_node.py</a:t>
             </a:r>
           </a:p>
         </p:txBody>
@@ -21926,7 +22472,7 @@
               </a:defRPr>
             </a:pPr>
             <a:r>
-              <a:t>현재 단계 31/35    |    현재 폴더 ~/agv_ws    |    현재 터미널</a:t>
+              <a:t>현재 단계 31/40    |    현재 폴더 ~/ros2_curri/agv_ws    |    현재 터미널</a:t>
             </a:r>
           </a:p>
         </p:txBody>
@@ -22023,11 +22569,11 @@
               </a:defRPr>
             </a:pPr>
             <a:r>
-              <a:t>파일 생성: mkdir -p ~/agv_ws/src/agv_vision/agv_vision</a:t>
-            </a:r>
-            <a:br/>
-            <a:r>
-              <a:t>파일 열기: nano ~/agv_ws/src/agv_vision/agv_vision/yolo_node.py</a:t>
+              <a:t>파일 생성: mkdir -p ~/ros2_curri/agv_ws/src/agv_vision/agv_vision</a:t>
+            </a:r>
+            <a:br/>
+            <a:r>
+              <a:t>파일 열기: nano ~/ros2_curri/agv_ws/src/agv_vision/agv_vision/yolo_node.py</a:t>
             </a:r>
           </a:p>
         </p:txBody>
@@ -22085,6 +22631,10 @@
               </a:defRPr>
             </a:pPr>
             <a:r>
+              <a:t>        self.declare_parameter('model_path', 'yolo11n.pt')</a:t>
+            </a:r>
+            <a:br/>
+            <a:r>
               <a:t>        self.declare_parameter('confidence_threshold', 0.5)</a:t>
             </a:r>
             <a:br/>
@@ -22093,6 +22643,14 @@
             </a:r>
             <a:br/>
             <a:r>
+              <a:t>        self.declare_parameter('enable_red_target_fallback', True)</a:t>
+            </a:r>
+            <a:br/>
+            <a:r>
+              <a:t>        self.declare_parameter('target_width_m', 0.25)</a:t>
+            </a:r>
+            <a:br/>
+            <a:r>
               <a:t>        self.bridge = CvBridge()</a:t>
             </a:r>
             <a:br/>
@@ -22101,6 +22659,14 @@
             </a:r>
             <a:br/>
             <a:r>
+              <a:t>        self.debug_publisher = self.create_publisher(Image, '/vision/debug_image',</a:t>
+            </a:r>
+            <a:br/>
+            <a:r>
+              <a:t>            qos_profile_sensor_data)</a:t>
+            </a:r>
+            <a:br/>
+            <a:r>
               <a:t>        self.create_subscription(Image, '/camera/image_raw', self.callback,</a:t>
             </a:r>
             <a:br/>
@@ -22110,26 +22676,6 @@
             <a:br/>
             <a:r>
               <a:t>        self.model = None</a:t>
-            </a:r>
-            <a:br/>
-            <a:r>
-              <a:t>        if self.get_parameter('enable_yolo').value:</a:t>
-            </a:r>
-            <a:br/>
-            <a:r>
-              <a:t>            try:</a:t>
-            </a:r>
-            <a:br/>
-            <a:r>
-              <a:t>                from ultralytics import YOLO</a:t>
-            </a:r>
-            <a:br/>
-            <a:r>
-              <a:t>                self.model = YOLO(self.get_parameter('model_path').value)</a:t>
-            </a:r>
-            <a:br/>
-            <a:r>
-              <a:t>                self.get_logger().info('YOLO model loaded')</a:t>
             </a:r>
           </a:p>
         </p:txBody>
@@ -22168,7 +22714,7 @@
               </a:defRPr>
             </a:pPr>
             <a:r>
-              <a:t>파일 전체 2/5 · 이 슬라이드 다음에 같은 파일의 나머지 줄이 이어집니다.</a:t>
+              <a:t>파일 전체 2/10 · 이 슬라이드 다음에 같은 파일의 나머지 줄이 이어집니다.</a:t>
             </a:r>
           </a:p>
         </p:txBody>
@@ -22225,7 +22771,7 @@
               </a:defRPr>
             </a:pPr>
             <a:r>
-              <a:t>파일을 계속 작성하고 저장한다 (3/5)</a:t>
+              <a:t>파일을 계속 작성하고 저장한다 (3/10)</a:t>
             </a:r>
           </a:p>
         </p:txBody>
@@ -22264,7 +22810,7 @@
               </a:defRPr>
             </a:pPr>
             <a:r>
-              <a:t>~/agv_ws/src/agv_vision/agv_vision/yolo_node.py</a:t>
+              <a:t>~/ros2_curri/agv_ws/src/agv_vision/agv_vision/yolo_node.py</a:t>
             </a:r>
           </a:p>
         </p:txBody>
@@ -22400,7 +22946,7 @@
               </a:defRPr>
             </a:pPr>
             <a:r>
-              <a:t>현재 단계 32/35    |    현재 폴더 ~/agv_ws    |    현재 터미널</a:t>
+              <a:t>현재 단계 32/40    |    현재 폴더 ~/ros2_curri/agv_ws    |    현재 터미널</a:t>
             </a:r>
           </a:p>
         </p:txBody>
@@ -22497,11 +23043,11 @@
               </a:defRPr>
             </a:pPr>
             <a:r>
-              <a:t>파일 생성: mkdir -p ~/agv_ws/src/agv_vision/agv_vision</a:t>
-            </a:r>
-            <a:br/>
-            <a:r>
-              <a:t>파일 열기: nano ~/agv_ws/src/agv_vision/agv_vision/yolo_node.py</a:t>
+              <a:t>파일 생성: mkdir -p ~/ros2_curri/agv_ws/src/agv_vision/agv_vision</a:t>
+            </a:r>
+            <a:br/>
+            <a:r>
+              <a:t>파일 열기: nano ~/ros2_curri/agv_ws/src/agv_vision/agv_vision/yolo_node.py</a:t>
             </a:r>
           </a:p>
         </p:txBody>
@@ -22559,6 +23105,26 @@
               </a:defRPr>
             </a:pPr>
             <a:r>
+              <a:t>        if self.get_parameter('enable_yolo').value:</a:t>
+            </a:r>
+            <a:br/>
+            <a:r>
+              <a:t>            try:</a:t>
+            </a:r>
+            <a:br/>
+            <a:r>
+              <a:t>                from ultralytics import YOLO</a:t>
+            </a:r>
+            <a:br/>
+            <a:r>
+              <a:t>                self.model = YOLO(self.get_parameter('model_path').value)</a:t>
+            </a:r>
+            <a:br/>
+            <a:r>
+              <a:t>                self.get_logger().info('YOLO model loaded')</a:t>
+            </a:r>
+            <a:br/>
+            <a:r>
               <a:t>            except ImportError:</a:t>
             </a:r>
             <a:br/>
@@ -22568,39 +23134,19 @@
             <a:br/>
             <a:br/>
             <a:r>
-              <a:t>    def callback(self, image_message):</a:t>
-            </a:r>
-            <a:br/>
-            <a:r>
-              <a:t>        output = DetectionArray(header=image_message.header)</a:t>
-            </a:r>
-            <a:br/>
-            <a:r>
-              <a:t>        if self.model is not None:</a:t>
-            </a:r>
-            <a:br/>
-            <a:r>
-              <a:t>            image = self.bridge.imgmsg_to_cv2(image_message, desired_encoding='bgr8')</a:t>
-            </a:r>
-            <a:br/>
-            <a:r>
-              <a:t>            result = self.model(image, verbose=False)[0]</a:t>
-            </a:r>
-            <a:br/>
-            <a:r>
-              <a:t>            threshold = self.get_parameter('confidence_threshold').value</a:t>
-            </a:r>
-            <a:br/>
-            <a:r>
-              <a:t>            for box in result.boxes:</a:t>
-            </a:r>
-            <a:br/>
-            <a:r>
-              <a:t>                confidence = float(box.conf[0])</a:t>
-            </a:r>
-            <a:br/>
-            <a:r>
-              <a:t>                if confidence &lt; threshold:</a:t>
+              <a:t>    def make_detection(self, header, class_name, confidence, x1, y1, x2, y2, image_width):</a:t>
+            </a:r>
+            <a:br/>
+            <a:r>
+              <a:t>        """Estimate distance with a pinhole model for the fixed 60-degree course camera."""</a:t>
+            </a:r>
+            <a:br/>
+            <a:r>
+              <a:t>        width = max(1, x2 - x1)</a:t>
+            </a:r>
+            <a:br/>
+            <a:r>
+              <a:t>        focal_px = image_width / (2.0 * 0.57735)</a:t>
             </a:r>
           </a:p>
         </p:txBody>
@@ -22639,7 +23185,7 @@
               </a:defRPr>
             </a:pPr>
             <a:r>
-              <a:t>파일 전체 3/5 · 이 슬라이드 다음에 같은 파일의 나머지 줄이 이어집니다.</a:t>
+              <a:t>파일 전체 3/10 · 이 슬라이드 다음에 같은 파일의 나머지 줄이 이어집니다.</a:t>
             </a:r>
           </a:p>
         </p:txBody>
@@ -22696,7 +23242,7 @@
               </a:defRPr>
             </a:pPr>
             <a:r>
-              <a:t>파일을 계속 작성하고 저장한다 (4/5)</a:t>
+              <a:t>파일을 계속 작성하고 저장한다 (4/10)</a:t>
             </a:r>
           </a:p>
         </p:txBody>
@@ -22735,7 +23281,7 @@
               </a:defRPr>
             </a:pPr>
             <a:r>
-              <a:t>~/agv_ws/src/agv_vision/agv_vision/yolo_node.py</a:t>
+              <a:t>~/ros2_curri/agv_ws/src/agv_vision/agv_vision/yolo_node.py</a:t>
             </a:r>
           </a:p>
         </p:txBody>
@@ -22871,7 +23417,7 @@
               </a:defRPr>
             </a:pPr>
             <a:r>
-              <a:t>현재 단계 33/35    |    현재 폴더 ~/agv_ws    |    현재 터미널</a:t>
+              <a:t>현재 단계 33/40    |    현재 폴더 ~/ros2_curri/agv_ws    |    현재 터미널</a:t>
             </a:r>
           </a:p>
         </p:txBody>
@@ -22968,11 +23514,11 @@
               </a:defRPr>
             </a:pPr>
             <a:r>
-              <a:t>파일 생성: mkdir -p ~/agv_ws/src/agv_vision/agv_vision</a:t>
-            </a:r>
-            <a:br/>
-            <a:r>
-              <a:t>파일 열기: nano ~/agv_ws/src/agv_vision/agv_vision/yolo_node.py</a:t>
+              <a:t>파일 생성: mkdir -p ~/ros2_curri/agv_ws/src/agv_vision/agv_vision</a:t>
+            </a:r>
+            <a:br/>
+            <a:r>
+              <a:t>파일 열기: nano ~/ros2_curri/agv_ws/src/agv_vision/agv_vision/yolo_node.py</a:t>
             </a:r>
           </a:p>
         </p:txBody>
@@ -23030,48 +23576,45 @@
               </a:defRPr>
             </a:pPr>
             <a:r>
-              <a:t>                    continue</a:t>
-            </a:r>
-            <a:br/>
-            <a:r>
-              <a:t>                x1, y1, x2, y2 = [int(value) for value in box.xyxy[0].tolist()]</a:t>
-            </a:r>
-            <a:br/>
-            <a:r>
-              <a:t>                detection = Detection(header=image_message.header,</a:t>
-            </a:r>
-            <a:br/>
-            <a:r>
-              <a:t>                    class_name=result.names[int(box.cls[0])], confidence=confidence,</a:t>
-            </a:r>
-            <a:br/>
-            <a:r>
-              <a:t>                    center_x=(x1 + x2) // 2, center_y=(y1 + y2) // 2, width=x2 - x1,</a:t>
-            </a:r>
-            <a:br/>
-            <a:r>
-              <a:t>                    height=y2 - y1, estimated_distance=0.0)</a:t>
-            </a:r>
-            <a:br/>
-            <a:r>
-              <a:t>                output.detections.append(detection)</a:t>
-            </a:r>
-            <a:br/>
-            <a:r>
-              <a:t>        self.publisher.publish(output)</a:t>
-            </a:r>
-            <a:br/>
-            <a:br/>
-            <a:r>
-              <a:t>def main():</a:t>
-            </a:r>
-            <a:br/>
-            <a:r>
-              <a:t>    rclpy.init()</a:t>
-            </a:r>
-            <a:br/>
-            <a:r>
-              <a:t>    node = YoloNode()</a:t>
+              <a:t>        distance = float(self.get_parameter('target_width_m').value) * focal_px / width</a:t>
+            </a:r>
+            <a:br/>
+            <a:r>
+              <a:t>        return Detection(header=header, class_name=class_name,</a:t>
+            </a:r>
+            <a:br/>
+            <a:r>
+              <a:t>            confidence=float(confidence), center_x=(x1 + x2) // 2,</a:t>
+            </a:r>
+            <a:br/>
+            <a:r>
+              <a:t>            center_y=(y1 + y2) // 2, width=width, height=max(1, y2 - y1),</a:t>
+            </a:r>
+            <a:br/>
+            <a:r>
+              <a:t>            estimated_distance=distance)</a:t>
+            </a:r>
+            <a:br/>
+            <a:br/>
+            <a:r>
+              <a:t>    def red_target_detection(self, image, header):</a:t>
+            </a:r>
+            <a:br/>
+            <a:r>
+              <a:t>        """Dependency-free fallback for the red target placed in warehouse.sdf.</a:t>
+            </a:r>
+            <a:br/>
+            <a:br/>
+            <a:r>
+              <a:t>        This is deliberately labelled as a fallback in the debug image.  It keeps</a:t>
+            </a:r>
+            <a:br/>
+            <a:r>
+              <a:t>        M17--M22 runnable before a learner downloads a YOLO model, while the same</a:t>
+            </a:r>
+            <a:br/>
+            <a:r>
+              <a:t>        Detection message and mission interface are used by real YOLO inference.</a:t>
             </a:r>
           </a:p>
         </p:txBody>
@@ -23110,7 +23653,7 @@
               </a:defRPr>
             </a:pPr>
             <a:r>
-              <a:t>파일 전체 4/5 · 이 슬라이드 다음에 같은 파일의 나머지 줄이 이어집니다.</a:t>
+              <a:t>파일 전체 4/10 · 이 슬라이드 다음에 같은 파일의 나머지 줄이 이어집니다.</a:t>
             </a:r>
           </a:p>
         </p:txBody>
@@ -23500,7 +24043,7 @@
               </a:defRPr>
             </a:pPr>
             <a:r>
-              <a:t>파일을 계속 작성하고 저장한다 (5/5)</a:t>
+              <a:t>파일을 계속 작성하고 저장한다 (5/10)</a:t>
             </a:r>
           </a:p>
         </p:txBody>
@@ -23539,7 +24082,7 @@
               </a:defRPr>
             </a:pPr>
             <a:r>
-              <a:t>~/agv_ws/src/agv_vision/agv_vision/yolo_node.py</a:t>
+              <a:t>~/ros2_curri/agv_ws/src/agv_vision/agv_vision/yolo_node.py</a:t>
             </a:r>
           </a:p>
         </p:txBody>
@@ -23675,7 +24218,7 @@
               </a:defRPr>
             </a:pPr>
             <a:r>
-              <a:t>현재 단계 34/35    |    현재 폴더 ~/agv_ws    |    현재 터미널</a:t>
+              <a:t>현재 단계 34/40    |    현재 폴더 ~/ros2_curri/agv_ws    |    현재 터미널</a:t>
             </a:r>
           </a:p>
         </p:txBody>
@@ -23772,11 +24315,11 @@
               </a:defRPr>
             </a:pPr>
             <a:r>
-              <a:t>파일 생성: mkdir -p ~/agv_ws/src/agv_vision/agv_vision</a:t>
-            </a:r>
-            <a:br/>
-            <a:r>
-              <a:t>파일 열기: nano ~/agv_ws/src/agv_vision/agv_vision/yolo_node.py</a:t>
+              <a:t>파일 생성: mkdir -p ~/ros2_curri/agv_ws/src/agv_vision/agv_vision</a:t>
+            </a:r>
+            <a:br/>
+            <a:r>
+              <a:t>파일 열기: nano ~/ros2_curri/agv_ws/src/agv_vision/agv_vision/yolo_node.py</a:t>
             </a:r>
           </a:p>
         </p:txBody>
@@ -23834,35 +24377,51 @@
               </a:defRPr>
             </a:pPr>
             <a:r>
-              <a:t>    try:</a:t>
-            </a:r>
-            <a:br/>
-            <a:r>
-              <a:t>        rclpy.spin(node)</a:t>
-            </a:r>
-            <a:br/>
-            <a:r>
-              <a:t>    except KeyboardInterrupt:</a:t>
-            </a:r>
-            <a:br/>
-            <a:r>
-              <a:t>        pass</a:t>
-            </a:r>
-            <a:br/>
-            <a:r>
-              <a:t>    finally:</a:t>
-            </a:r>
-            <a:br/>
-            <a:r>
-              <a:t>        node.destroy_node()</a:t>
-            </a:r>
-            <a:br/>
-            <a:r>
-              <a:t>        if rclpy.ok():</a:t>
-            </a:r>
-            <a:br/>
-            <a:r>
-              <a:t>            rclpy.shutdown()</a:t>
+              <a:t>        """</a:t>
+            </a:r>
+            <a:br/>
+            <a:r>
+              <a:t>        hsv = cv2.cvtColor(image, cv2.COLOR_BGR2HSV)</a:t>
+            </a:r>
+            <a:br/>
+            <a:r>
+              <a:t>        lower_red = cv2.inRange(hsv, (0, 90, 70), (12, 255, 255))</a:t>
+            </a:r>
+            <a:br/>
+            <a:r>
+              <a:t>        upper_red = cv2.inRange(hsv, (165, 90, 70), (179, 255, 255))</a:t>
+            </a:r>
+            <a:br/>
+            <a:r>
+              <a:t>        mask = cv2.bitwise_or(lower_red, upper_red)</a:t>
+            </a:r>
+            <a:br/>
+            <a:r>
+              <a:t>        contours, _ = cv2.findContours(mask, cv2.RETR_EXTERNAL, cv2.CHAIN_APPROX_SIMPLE)</a:t>
+            </a:r>
+            <a:br/>
+            <a:r>
+              <a:t>        if not contours:</a:t>
+            </a:r>
+            <a:br/>
+            <a:r>
+              <a:t>            return None</a:t>
+            </a:r>
+            <a:br/>
+            <a:r>
+              <a:t>        contour = max(contours, key=cv2.contourArea)</a:t>
+            </a:r>
+            <a:br/>
+            <a:r>
+              <a:t>        if cv2.contourArea(contour) &lt; 80:</a:t>
+            </a:r>
+            <a:br/>
+            <a:r>
+              <a:t>            return None</a:t>
+            </a:r>
+            <a:br/>
+            <a:r>
+              <a:t>        x, y, width, height = cv2.boundingRect(contour)</a:t>
             </a:r>
           </a:p>
         </p:txBody>
@@ -23901,7 +24460,7 @@
               </a:defRPr>
             </a:pPr>
             <a:r>
-              <a:t>파일 전체 5/5 · 이 슬라이드 다음에 같은 파일의 나머지 줄이 이어집니다.</a:t>
+              <a:t>파일 전체 5/10 · 이 슬라이드 다음에 같은 파일의 나머지 줄이 이어집니다.</a:t>
             </a:r>
           </a:p>
         </p:txBody>
@@ -23958,7 +24517,7 @@
               </a:defRPr>
             </a:pPr>
             <a:r>
-              <a:t>build → source → run 순서로 실행한다</a:t>
+              <a:t>파일을 계속 작성하고 저장한다 (6/10)</a:t>
             </a:r>
           </a:p>
         </p:txBody>
@@ -23997,7 +24556,7 @@
               </a:defRPr>
             </a:pPr>
             <a:r>
-              <a:t>새 파일 또는 수정 파일은 build와 source 뒤에만 실행 이름·설정에 반영됩니다.</a:t>
+              <a:t>~/ros2_curri/agv_ws/src/agv_vision/agv_vision/yolo_node.py</a:t>
             </a:r>
           </a:p>
         </p:txBody>
@@ -24133,23 +24692,124 @@
               </a:defRPr>
             </a:pPr>
             <a:r>
-              <a:t>현재 단계 실행    |    현재 폴더 ~/agv_ws    |    현재 터미널</a:t>
-            </a:r>
-          </a:p>
-        </p:txBody>
-      </p:sp>
-      <p:sp>
-        <p:nvSpPr>
-          <p:cNvPr id="7" name="Rounded Rectangle 6"/>
+              <a:t>현재 단계 35/40    |    현재 폴더 ~/ros2_curri/agv_ws    |    현재 터미널</a:t>
+            </a:r>
+          </a:p>
+        </p:txBody>
+      </p:sp>
+      <p:sp>
+        <p:nvSpPr>
+          <p:cNvPr id="7" name="TextBox 6"/>
+          <p:cNvSpPr txBox="1"/>
+          <p:nvPr/>
+        </p:nvSpPr>
+        <p:spPr>
+          <a:xfrm>
+            <a:off x="658368" y="1627632"/>
+            <a:ext cx="10972800" cy="256032"/>
+          </a:xfrm>
+          <a:prstGeom prst="rect">
+            <a:avLst/>
+          </a:prstGeom>
+          <a:noFill/>
+        </p:spPr>
+        <p:txBody>
+          <a:bodyPr wrap="square" lIns="73152" rIns="73152" tIns="36576" bIns="36576">
+            <a:spAutoFit/>
+          </a:bodyPr>
+          <a:lstStyle/>
+          <a:p>
+            <a:pPr algn="l">
+              <a:spcAft>
+                <a:spcPts val="0"/>
+              </a:spcAft>
+              <a:defRPr sz="1500" b="1">
+                <a:solidFill>
+                  <a:srgbClr val="122C4E"/>
+                </a:solidFill>
+                <a:latin typeface="Noto Sans CJK KR"/>
+              </a:defRPr>
+            </a:pPr>
+            <a:r>
+              <a:t>이번 단계: 파일의 전체 내용을 중간 생략 없이 작성합니다. 아래 줄 범위를 끝까지 입력하세요.</a:t>
+            </a:r>
+          </a:p>
+        </p:txBody>
+      </p:sp>
+      <p:sp>
+        <p:nvSpPr>
+          <p:cNvPr id="8" name="Rectangle 7"/>
           <p:cNvSpPr/>
           <p:nvPr/>
         </p:nvSpPr>
         <p:spPr>
           <a:xfrm>
-            <a:off x="658368" y="1700784"/>
-            <a:ext cx="10972800" cy="3182112"/>
-          </a:xfrm>
-          <a:prstGeom prst="roundRect">
+            <a:off x="658368" y="1956816"/>
+            <a:ext cx="10972800" cy="603504"/>
+          </a:xfrm>
+          <a:prstGeom prst="rect">
+            <a:avLst/>
+          </a:prstGeom>
+          <a:solidFill>
+            <a:srgbClr val="F4F7FB"/>
+          </a:solidFill>
+          <a:ln>
+            <a:solidFill>
+              <a:srgbClr val="F4F7FB"/>
+            </a:solidFill>
+          </a:ln>
+        </p:spPr>
+        <p:style>
+          <a:lnRef idx="1">
+            <a:schemeClr val="accent1"/>
+          </a:lnRef>
+          <a:fillRef idx="3">
+            <a:schemeClr val="accent1"/>
+          </a:fillRef>
+          <a:effectRef idx="2">
+            <a:schemeClr val="accent1"/>
+          </a:effectRef>
+          <a:fontRef idx="minor">
+            <a:schemeClr val="lt1"/>
+          </a:fontRef>
+        </p:style>
+        <p:txBody>
+          <a:bodyPr rtlCol="0" anchor="ctr" wrap="square" lIns="73152" rIns="73152" tIns="36576" bIns="36576"/>
+          <a:lstStyle/>
+          <a:p>
+            <a:pPr algn="l">
+              <a:spcAft>
+                <a:spcPts val="0"/>
+              </a:spcAft>
+              <a:defRPr sz="1400" b="0">
+                <a:solidFill>
+                  <a:srgbClr val="122C4E"/>
+                </a:solidFill>
+                <a:latin typeface="DejaVu Sans Mono"/>
+              </a:defRPr>
+            </a:pPr>
+            <a:r>
+              <a:t>파일 생성: mkdir -p ~/ros2_curri/agv_ws/src/agv_vision/agv_vision</a:t>
+            </a:r>
+            <a:br/>
+            <a:r>
+              <a:t>파일 열기: nano ~/ros2_curri/agv_ws/src/agv_vision/agv_vision/yolo_node.py</a:t>
+            </a:r>
+          </a:p>
+        </p:txBody>
+      </p:sp>
+      <p:sp>
+        <p:nvSpPr>
+          <p:cNvPr id="9" name="Rectangle 8"/>
+          <p:cNvSpPr/>
+          <p:nvPr/>
+        </p:nvSpPr>
+        <p:spPr>
+          <a:xfrm>
+            <a:off x="658368" y="2706624"/>
+            <a:ext cx="10972800" cy="3364992"/>
+          </a:xfrm>
+          <a:prstGeom prst="rect">
             <a:avLst/>
           </a:prstGeom>
           <a:solidFill>
@@ -24176,14 +24836,14 @@
           </a:fontRef>
         </p:style>
         <p:txBody>
-          <a:bodyPr rtlCol="0" anchor="ctr" wrap="square" lIns="73152" rIns="73152" tIns="36576" bIns="36576"/>
-          <a:lstStyle/>
-          <a:p>
-            <a:pPr algn="l">
-              <a:spcAft>
-                <a:spcPts val="0"/>
-              </a:spcAft>
-              <a:defRPr sz="1600" b="0">
+          <a:bodyPr rtlCol="0" anchor="ctr" wrap="square" lIns="164592" rIns="164592" tIns="109728" bIns="36576"/>
+          <a:lstStyle/>
+          <a:p>
+            <a:pPr algn="l">
+              <a:spcAft>
+                <a:spcPts val="0"/>
+              </a:spcAft>
+              <a:defRPr sz="1400" b="0">
                 <a:solidFill>
                   <a:srgbClr val="FFFFFF"/>
                 </a:solidFill>
@@ -24191,25 +24851,62 @@
               </a:defRPr>
             </a:pPr>
             <a:r>
-              <a:t>ros2 launch agv_bringup agv_sim.launch.py rviz:=false</a:t>
-            </a:r>
-            <a:br/>
-            <a:r>
-              <a:t># 새 터미널: ros2 run rqt_image_view rqt_image_view</a:t>
-            </a:r>
-          </a:p>
-        </p:txBody>
-      </p:sp>
-      <p:sp>
-        <p:nvSpPr>
-          <p:cNvPr id="8" name="TextBox 7"/>
+              <a:t>        return self.make_detection(header, 'red_target_fallback', 0.9, x, y, x + width,</a:t>
+            </a:r>
+            <a:br/>
+            <a:r>
+              <a:t>            y + height, image.shape[1])</a:t>
+            </a:r>
+            <a:br/>
+            <a:br/>
+            <a:r>
+              <a:t>    def callback(self, image_message):</a:t>
+            </a:r>
+            <a:br/>
+            <a:r>
+              <a:t>        image = self.bridge.imgmsg_to_cv2(image_message, desired_encoding='bgr8')</a:t>
+            </a:r>
+            <a:br/>
+            <a:r>
+              <a:t>        debug = image.copy()</a:t>
+            </a:r>
+            <a:br/>
+            <a:r>
+              <a:t>        output = DetectionArray(header=image_message.header)</a:t>
+            </a:r>
+            <a:br/>
+            <a:r>
+              <a:t>        label = 'no detection'</a:t>
+            </a:r>
+            <a:br/>
+            <a:r>
+              <a:t>        if self.model is not None:</a:t>
+            </a:r>
+            <a:br/>
+            <a:r>
+              <a:t>            result = self.model(image, verbose=False)[0]</a:t>
+            </a:r>
+            <a:br/>
+            <a:r>
+              <a:t>            threshold = self.get_parameter('confidence_threshold').value</a:t>
+            </a:r>
+            <a:br/>
+            <a:r>
+              <a:t>            for box in result.boxes:</a:t>
+            </a:r>
+          </a:p>
+        </p:txBody>
+      </p:sp>
+      <p:sp>
+        <p:nvSpPr>
+          <p:cNvPr id="10" name="TextBox 9"/>
           <p:cNvSpPr txBox="1"/>
           <p:nvPr/>
         </p:nvSpPr>
         <p:spPr>
           <a:xfrm>
-            <a:off x="786384" y="5239512"/>
-            <a:ext cx="1261872" cy="237744"/>
+            <a:off x="749808" y="6181344"/>
+            <a:ext cx="10789920" cy="201168"/>
           </a:xfrm>
           <a:prstGeom prst="rect">
             <a:avLst/>
@@ -24226,54 +24923,15 @@
               <a:spcAft>
                 <a:spcPts val="0"/>
               </a:spcAft>
-              <a:defRPr sz="1800" b="1">
-                <a:solidFill>
-                  <a:srgbClr val="2A8B5A"/>
-                </a:solidFill>
-                <a:latin typeface="Noto Sans CJK KR"/>
-              </a:defRPr>
-            </a:pPr>
-            <a:r>
-              <a:t>확인 기준</a:t>
-            </a:r>
-          </a:p>
-        </p:txBody>
-      </p:sp>
-      <p:sp>
-        <p:nvSpPr>
-          <p:cNvPr id="9" name="TextBox 8"/>
-          <p:cNvSpPr txBox="1"/>
-          <p:nvPr/>
-        </p:nvSpPr>
-        <p:spPr>
-          <a:xfrm>
-            <a:off x="786384" y="5532120"/>
-            <a:ext cx="10469880" cy="420624"/>
-          </a:xfrm>
-          <a:prstGeom prst="rect">
-            <a:avLst/>
-          </a:prstGeom>
-          <a:noFill/>
-        </p:spPr>
-        <p:txBody>
-          <a:bodyPr wrap="square" lIns="73152" rIns="73152" tIns="36576" bIns="36576">
-            <a:spAutoFit/>
-          </a:bodyPr>
-          <a:lstStyle/>
-          <a:p>
-            <a:pPr algn="l">
-              <a:spcAft>
-                <a:spcPts val="0"/>
-              </a:spcAft>
-              <a:defRPr sz="1800" b="0">
-                <a:solidFill>
-                  <a:srgbClr val="122C4E"/>
-                </a:solidFill>
-                <a:latin typeface="Noto Sans CJK KR"/>
-              </a:defRPr>
-            </a:pPr>
-            <a:r>
-              <a:t>/camera/image_raw가 bridge를 통과하고 cv_bridge 소비 노드가 받을 준비가 된 상태를 확인한다.</a:t>
+              <a:defRPr sz="1000" b="0">
+                <a:solidFill>
+                  <a:srgbClr val="5C6672"/>
+                </a:solidFill>
+                <a:latin typeface="Noto Sans CJK KR"/>
+              </a:defRPr>
+            </a:pPr>
+            <a:r>
+              <a:t>파일 전체 6/10 · 이 슬라이드 다음에 같은 파일의 나머지 줄이 이어집니다.</a:t>
             </a:r>
           </a:p>
         </p:txBody>
@@ -24330,7 +24988,7 @@
               </a:defRPr>
             </a:pPr>
             <a:r>
-              <a:t>정상 결과: 실제 환경에서 확인한 출력</a:t>
+              <a:t>파일을 계속 작성하고 저장한다 (7/10)</a:t>
             </a:r>
           </a:p>
         </p:txBody>
@@ -24369,7 +25027,7 @@
               </a:defRPr>
             </a:pPr>
             <a:r>
-              <a:t>실제 ROS 2 환경의 파일·패키지·구성 검증 로그</a:t>
+              <a:t>~/ros2_curri/agv_ws/src/agv_vision/agv_vision/yolo_node.py</a:t>
             </a:r>
           </a:p>
         </p:txBody>
@@ -24452,30 +25110,64 @@
           </a:p>
         </p:txBody>
       </p:sp>
-      <p:pic>
-        <p:nvPicPr>
-          <p:cNvPr id="6" name="Picture 5" descr="validation_terminal.png"/>
-          <p:cNvPicPr>
-            <a:picLocks noChangeAspect="1"/>
-          </p:cNvPicPr>
-          <p:nvPr/>
-        </p:nvPicPr>
-        <p:blipFill>
-          <a:blip r:embed="rId2"/>
-          <a:stretch>
-            <a:fillRect/>
-          </a:stretch>
-        </p:blipFill>
-        <p:spPr>
-          <a:xfrm>
-            <a:off x="790956" y="1884338"/>
-            <a:ext cx="10607040" cy="3738546"/>
-          </a:xfrm>
-          <a:prstGeom prst="rect">
-            <a:avLst/>
-          </a:prstGeom>
-        </p:spPr>
-      </p:pic>
+      <p:sp>
+        <p:nvSpPr>
+          <p:cNvPr id="6" name="Rectangle 5"/>
+          <p:cNvSpPr/>
+          <p:nvPr/>
+        </p:nvSpPr>
+        <p:spPr>
+          <a:xfrm>
+            <a:off x="566928" y="1188720"/>
+            <a:ext cx="11064240" cy="347472"/>
+          </a:xfrm>
+          <a:prstGeom prst="rect">
+            <a:avLst/>
+          </a:prstGeom>
+          <a:solidFill>
+            <a:srgbClr val="F4F7FB"/>
+          </a:solidFill>
+          <a:ln>
+            <a:solidFill>
+              <a:srgbClr val="F4F7FB"/>
+            </a:solidFill>
+          </a:ln>
+        </p:spPr>
+        <p:style>
+          <a:lnRef idx="1">
+            <a:schemeClr val="accent1"/>
+          </a:lnRef>
+          <a:fillRef idx="3">
+            <a:schemeClr val="accent1"/>
+          </a:fillRef>
+          <a:effectRef idx="2">
+            <a:schemeClr val="accent1"/>
+          </a:effectRef>
+          <a:fontRef idx="minor">
+            <a:schemeClr val="lt1"/>
+          </a:fontRef>
+        </p:style>
+        <p:txBody>
+          <a:bodyPr rtlCol="0" anchor="ctr" wrap="square" lIns="73152" rIns="73152" tIns="36576" bIns="36576"/>
+          <a:lstStyle/>
+          <a:p>
+            <a:pPr algn="l">
+              <a:spcAft>
+                <a:spcPts val="0"/>
+              </a:spcAft>
+              <a:defRPr sz="1300" b="1">
+                <a:solidFill>
+                  <a:srgbClr val="122C4E"/>
+                </a:solidFill>
+                <a:latin typeface="Noto Sans CJK KR"/>
+              </a:defRPr>
+            </a:pPr>
+            <a:r>
+              <a:t>현재 단계 36/40    |    현재 폴더 ~/ros2_curri/agv_ws    |    현재 터미널</a:t>
+            </a:r>
+          </a:p>
+        </p:txBody>
+      </p:sp>
       <p:sp>
         <p:nvSpPr>
           <p:cNvPr id="7" name="TextBox 6"/>
@@ -24484,8 +25176,8 @@
         </p:nvSpPr>
         <p:spPr>
           <a:xfrm>
-            <a:off x="777240" y="6217920"/>
-            <a:ext cx="10607040" cy="182880"/>
+            <a:off x="658368" y="1627632"/>
+            <a:ext cx="10972800" cy="256032"/>
           </a:xfrm>
           <a:prstGeom prst="rect">
             <a:avLst/>
@@ -24498,19 +25190,222 @@
           </a:bodyPr>
           <a:lstStyle/>
           <a:p>
-            <a:pPr algn="ctr">
-              <a:spcAft>
-                <a:spcPts val="0"/>
-              </a:spcAft>
-              <a:defRPr sz="1100" b="1">
-                <a:solidFill>
-                  <a:srgbClr val="2A8B5A"/>
-                </a:solidFill>
-                <a:latin typeface="Noto Sans CJK KR"/>
-              </a:defRPr>
-            </a:pPr>
-            <a:r>
-              <a:t>① 명령/설정  ② 정상 출력 또는 화면  ③ 다음 검증 명령으로 재확인</a:t>
+            <a:pPr algn="l">
+              <a:spcAft>
+                <a:spcPts val="0"/>
+              </a:spcAft>
+              <a:defRPr sz="1500" b="1">
+                <a:solidFill>
+                  <a:srgbClr val="122C4E"/>
+                </a:solidFill>
+                <a:latin typeface="Noto Sans CJK KR"/>
+              </a:defRPr>
+            </a:pPr>
+            <a:r>
+              <a:t>이번 단계: 파일의 전체 내용을 중간 생략 없이 작성합니다. 아래 줄 범위를 끝까지 입력하세요.</a:t>
+            </a:r>
+          </a:p>
+        </p:txBody>
+      </p:sp>
+      <p:sp>
+        <p:nvSpPr>
+          <p:cNvPr id="8" name="Rectangle 7"/>
+          <p:cNvSpPr/>
+          <p:nvPr/>
+        </p:nvSpPr>
+        <p:spPr>
+          <a:xfrm>
+            <a:off x="658368" y="1956816"/>
+            <a:ext cx="10972800" cy="603504"/>
+          </a:xfrm>
+          <a:prstGeom prst="rect">
+            <a:avLst/>
+          </a:prstGeom>
+          <a:solidFill>
+            <a:srgbClr val="F4F7FB"/>
+          </a:solidFill>
+          <a:ln>
+            <a:solidFill>
+              <a:srgbClr val="F4F7FB"/>
+            </a:solidFill>
+          </a:ln>
+        </p:spPr>
+        <p:style>
+          <a:lnRef idx="1">
+            <a:schemeClr val="accent1"/>
+          </a:lnRef>
+          <a:fillRef idx="3">
+            <a:schemeClr val="accent1"/>
+          </a:fillRef>
+          <a:effectRef idx="2">
+            <a:schemeClr val="accent1"/>
+          </a:effectRef>
+          <a:fontRef idx="minor">
+            <a:schemeClr val="lt1"/>
+          </a:fontRef>
+        </p:style>
+        <p:txBody>
+          <a:bodyPr rtlCol="0" anchor="ctr" wrap="square" lIns="73152" rIns="73152" tIns="36576" bIns="36576"/>
+          <a:lstStyle/>
+          <a:p>
+            <a:pPr algn="l">
+              <a:spcAft>
+                <a:spcPts val="0"/>
+              </a:spcAft>
+              <a:defRPr sz="1400" b="0">
+                <a:solidFill>
+                  <a:srgbClr val="122C4E"/>
+                </a:solidFill>
+                <a:latin typeface="DejaVu Sans Mono"/>
+              </a:defRPr>
+            </a:pPr>
+            <a:r>
+              <a:t>파일 생성: mkdir -p ~/ros2_curri/agv_ws/src/agv_vision/agv_vision</a:t>
+            </a:r>
+            <a:br/>
+            <a:r>
+              <a:t>파일 열기: nano ~/ros2_curri/agv_ws/src/agv_vision/agv_vision/yolo_node.py</a:t>
+            </a:r>
+          </a:p>
+        </p:txBody>
+      </p:sp>
+      <p:sp>
+        <p:nvSpPr>
+          <p:cNvPr id="9" name="Rectangle 8"/>
+          <p:cNvSpPr/>
+          <p:nvPr/>
+        </p:nvSpPr>
+        <p:spPr>
+          <a:xfrm>
+            <a:off x="658368" y="2706624"/>
+            <a:ext cx="10972800" cy="3364992"/>
+          </a:xfrm>
+          <a:prstGeom prst="rect">
+            <a:avLst/>
+          </a:prstGeom>
+          <a:solidFill>
+            <a:srgbClr val="1D232D"/>
+          </a:solidFill>
+          <a:ln>
+            <a:solidFill>
+              <a:srgbClr val="1D232D"/>
+            </a:solidFill>
+          </a:ln>
+        </p:spPr>
+        <p:style>
+          <a:lnRef idx="1">
+            <a:schemeClr val="accent1"/>
+          </a:lnRef>
+          <a:fillRef idx="3">
+            <a:schemeClr val="accent1"/>
+          </a:fillRef>
+          <a:effectRef idx="2">
+            <a:schemeClr val="accent1"/>
+          </a:effectRef>
+          <a:fontRef idx="minor">
+            <a:schemeClr val="lt1"/>
+          </a:fontRef>
+        </p:style>
+        <p:txBody>
+          <a:bodyPr rtlCol="0" anchor="ctr" wrap="square" lIns="164592" rIns="164592" tIns="109728" bIns="36576"/>
+          <a:lstStyle/>
+          <a:p>
+            <a:pPr algn="l">
+              <a:spcAft>
+                <a:spcPts val="0"/>
+              </a:spcAft>
+              <a:defRPr sz="1400" b="0">
+                <a:solidFill>
+                  <a:srgbClr val="FFFFFF"/>
+                </a:solidFill>
+                <a:latin typeface="DejaVu Sans Mono"/>
+              </a:defRPr>
+            </a:pPr>
+            <a:r>
+              <a:t>                confidence = float(box.conf[0])</a:t>
+            </a:r>
+            <a:br/>
+            <a:r>
+              <a:t>                if confidence &lt; threshold:</a:t>
+            </a:r>
+            <a:br/>
+            <a:r>
+              <a:t>                    continue</a:t>
+            </a:r>
+            <a:br/>
+            <a:r>
+              <a:t>                x1, y1, x2, y2 = [int(value) for value in box.xyxy[0].tolist()]</a:t>
+            </a:r>
+            <a:br/>
+            <a:r>
+              <a:t>                detection = self.make_detection(image_message.header,</a:t>
+            </a:r>
+            <a:br/>
+            <a:r>
+              <a:t>                    result.names[int(box.cls[0])], confidence, x1, y1, x2, y2,</a:t>
+            </a:r>
+            <a:br/>
+            <a:r>
+              <a:t>                    image.shape[1])</a:t>
+            </a:r>
+            <a:br/>
+            <a:r>
+              <a:t>                output.detections.append(detection)</a:t>
+            </a:r>
+            <a:br/>
+            <a:r>
+              <a:t>                cv2.rectangle(debug, (x1, y1), (x2, y2), (30, 220, 30), 2)</a:t>
+            </a:r>
+            <a:br/>
+            <a:r>
+              <a:t>                label = f'YOLO {detection.class_name} {confidence:.2f}'</a:t>
+            </a:r>
+            <a:br/>
+            <a:r>
+              <a:t>        elif self.get_parameter('enable_red_target_fallback').value:</a:t>
+            </a:r>
+            <a:br/>
+            <a:r>
+              <a:t>            detection = self.red_target_detection(image, image_message.header)</a:t>
+            </a:r>
+          </a:p>
+        </p:txBody>
+      </p:sp>
+      <p:sp>
+        <p:nvSpPr>
+          <p:cNvPr id="10" name="TextBox 9"/>
+          <p:cNvSpPr txBox="1"/>
+          <p:nvPr/>
+        </p:nvSpPr>
+        <p:spPr>
+          <a:xfrm>
+            <a:off x="749808" y="6181344"/>
+            <a:ext cx="10789920" cy="201168"/>
+          </a:xfrm>
+          <a:prstGeom prst="rect">
+            <a:avLst/>
+          </a:prstGeom>
+          <a:noFill/>
+        </p:spPr>
+        <p:txBody>
+          <a:bodyPr wrap="square" lIns="73152" rIns="73152" tIns="36576" bIns="36576">
+            <a:spAutoFit/>
+          </a:bodyPr>
+          <a:lstStyle/>
+          <a:p>
+            <a:pPr algn="l">
+              <a:spcAft>
+                <a:spcPts val="0"/>
+              </a:spcAft>
+              <a:defRPr sz="1000" b="0">
+                <a:solidFill>
+                  <a:srgbClr val="5C6672"/>
+                </a:solidFill>
+                <a:latin typeface="Noto Sans CJK KR"/>
+              </a:defRPr>
+            </a:pPr>
+            <a:r>
+              <a:t>파일 전체 7/10 · 이 슬라이드 다음에 같은 파일의 나머지 줄이 이어집니다.</a:t>
             </a:r>
           </a:p>
         </p:txBody>
@@ -24567,7 +25462,7 @@
               </a:defRPr>
             </a:pPr>
             <a:r>
-              <a:t>객관적 검증 명령으로 완료를 확인한다</a:t>
+              <a:t>파일을 계속 작성하고 저장한다 (8/10)</a:t>
             </a:r>
           </a:p>
         </p:txBody>
@@ -24606,7 +25501,7 @@
               </a:defRPr>
             </a:pPr>
             <a:r>
-              <a:t>화면만 보지 말고 topic·frame·파일·parameter를 다시 확인합니다.</a:t>
+              <a:t>~/ros2_curri/agv_ws/src/agv_vision/agv_vision/yolo_node.py</a:t>
             </a:r>
           </a:p>
         </p:txBody>
@@ -24742,23 +25637,124 @@
               </a:defRPr>
             </a:pPr>
             <a:r>
-              <a:t>현재 단계 검증    |    현재 폴더 ~/agv_ws    |    현재 터미널</a:t>
-            </a:r>
-          </a:p>
-        </p:txBody>
-      </p:sp>
-      <p:sp>
-        <p:nvSpPr>
-          <p:cNvPr id="7" name="Rounded Rectangle 6"/>
+              <a:t>현재 단계 37/40    |    현재 폴더 ~/ros2_curri/agv_ws    |    현재 터미널</a:t>
+            </a:r>
+          </a:p>
+        </p:txBody>
+      </p:sp>
+      <p:sp>
+        <p:nvSpPr>
+          <p:cNvPr id="7" name="TextBox 6"/>
+          <p:cNvSpPr txBox="1"/>
+          <p:nvPr/>
+        </p:nvSpPr>
+        <p:spPr>
+          <a:xfrm>
+            <a:off x="658368" y="1627632"/>
+            <a:ext cx="10972800" cy="256032"/>
+          </a:xfrm>
+          <a:prstGeom prst="rect">
+            <a:avLst/>
+          </a:prstGeom>
+          <a:noFill/>
+        </p:spPr>
+        <p:txBody>
+          <a:bodyPr wrap="square" lIns="73152" rIns="73152" tIns="36576" bIns="36576">
+            <a:spAutoFit/>
+          </a:bodyPr>
+          <a:lstStyle/>
+          <a:p>
+            <a:pPr algn="l">
+              <a:spcAft>
+                <a:spcPts val="0"/>
+              </a:spcAft>
+              <a:defRPr sz="1500" b="1">
+                <a:solidFill>
+                  <a:srgbClr val="122C4E"/>
+                </a:solidFill>
+                <a:latin typeface="Noto Sans CJK KR"/>
+              </a:defRPr>
+            </a:pPr>
+            <a:r>
+              <a:t>이번 단계: 파일의 전체 내용을 중간 생략 없이 작성합니다. 아래 줄 범위를 끝까지 입력하세요.</a:t>
+            </a:r>
+          </a:p>
+        </p:txBody>
+      </p:sp>
+      <p:sp>
+        <p:nvSpPr>
+          <p:cNvPr id="8" name="Rectangle 7"/>
           <p:cNvSpPr/>
           <p:nvPr/>
         </p:nvSpPr>
         <p:spPr>
           <a:xfrm>
-            <a:off x="658368" y="1755648"/>
-            <a:ext cx="10972800" cy="2148840"/>
-          </a:xfrm>
-          <a:prstGeom prst="roundRect">
+            <a:off x="658368" y="1956816"/>
+            <a:ext cx="10972800" cy="603504"/>
+          </a:xfrm>
+          <a:prstGeom prst="rect">
+            <a:avLst/>
+          </a:prstGeom>
+          <a:solidFill>
+            <a:srgbClr val="F4F7FB"/>
+          </a:solidFill>
+          <a:ln>
+            <a:solidFill>
+              <a:srgbClr val="F4F7FB"/>
+            </a:solidFill>
+          </a:ln>
+        </p:spPr>
+        <p:style>
+          <a:lnRef idx="1">
+            <a:schemeClr val="accent1"/>
+          </a:lnRef>
+          <a:fillRef idx="3">
+            <a:schemeClr val="accent1"/>
+          </a:fillRef>
+          <a:effectRef idx="2">
+            <a:schemeClr val="accent1"/>
+          </a:effectRef>
+          <a:fontRef idx="minor">
+            <a:schemeClr val="lt1"/>
+          </a:fontRef>
+        </p:style>
+        <p:txBody>
+          <a:bodyPr rtlCol="0" anchor="ctr" wrap="square" lIns="73152" rIns="73152" tIns="36576" bIns="36576"/>
+          <a:lstStyle/>
+          <a:p>
+            <a:pPr algn="l">
+              <a:spcAft>
+                <a:spcPts val="0"/>
+              </a:spcAft>
+              <a:defRPr sz="1400" b="0">
+                <a:solidFill>
+                  <a:srgbClr val="122C4E"/>
+                </a:solidFill>
+                <a:latin typeface="DejaVu Sans Mono"/>
+              </a:defRPr>
+            </a:pPr>
+            <a:r>
+              <a:t>파일 생성: mkdir -p ~/ros2_curri/agv_ws/src/agv_vision/agv_vision</a:t>
+            </a:r>
+            <a:br/>
+            <a:r>
+              <a:t>파일 열기: nano ~/ros2_curri/agv_ws/src/agv_vision/agv_vision/yolo_node.py</a:t>
+            </a:r>
+          </a:p>
+        </p:txBody>
+      </p:sp>
+      <p:sp>
+        <p:nvSpPr>
+          <p:cNvPr id="9" name="Rectangle 8"/>
+          <p:cNvSpPr/>
+          <p:nvPr/>
+        </p:nvSpPr>
+        <p:spPr>
+          <a:xfrm>
+            <a:off x="658368" y="2706624"/>
+            <a:ext cx="10972800" cy="3364992"/>
+          </a:xfrm>
+          <a:prstGeom prst="rect">
             <a:avLst/>
           </a:prstGeom>
           <a:solidFill>
@@ -24785,14 +25781,14 @@
           </a:fontRef>
         </p:style>
         <p:txBody>
-          <a:bodyPr rtlCol="0" anchor="ctr" wrap="square" lIns="73152" rIns="73152" tIns="36576" bIns="36576"/>
-          <a:lstStyle/>
-          <a:p>
-            <a:pPr algn="l">
-              <a:spcAft>
-                <a:spcPts val="0"/>
-              </a:spcAft>
-              <a:defRPr sz="1600" b="0">
+          <a:bodyPr rtlCol="0" anchor="ctr" wrap="square" lIns="164592" rIns="164592" tIns="109728" bIns="36576"/>
+          <a:lstStyle/>
+          <a:p>
+            <a:pPr algn="l">
+              <a:spcAft>
+                <a:spcPts val="0"/>
+              </a:spcAft>
+              <a:defRPr sz="1400" b="0">
                 <a:solidFill>
                   <a:srgbClr val="FFFFFF"/>
                 </a:solidFill>
@@ -24800,95 +25796,65 @@
               </a:defRPr>
             </a:pPr>
             <a:r>
-              <a:t>ros2 topic info /camera/image_raw</a:t>
-            </a:r>
-            <a:br/>
-            <a:r>
-              <a:t>ros2 topic hz /camera/image_raw</a:t>
-            </a:r>
-          </a:p>
-        </p:txBody>
-      </p:sp>
-      <p:sp>
-        <p:nvSpPr>
-          <p:cNvPr id="8" name="Rounded Rectangle 7"/>
-          <p:cNvSpPr/>
-          <p:nvPr/>
-        </p:nvSpPr>
-        <p:spPr>
-          <a:xfrm>
-            <a:off x="658368" y="4206240"/>
-            <a:ext cx="10972800" cy="1554480"/>
-          </a:xfrm>
-          <a:prstGeom prst="roundRect">
-            <a:avLst/>
-          </a:prstGeom>
-          <a:solidFill>
-            <a:srgbClr val="F4F7FB"/>
-          </a:solidFill>
-          <a:ln>
-            <a:solidFill>
-              <a:srgbClr val="D1DFD5"/>
-            </a:solidFill>
-          </a:ln>
-        </p:spPr>
-        <p:style>
-          <a:lnRef idx="1">
-            <a:schemeClr val="accent1"/>
-          </a:lnRef>
-          <a:fillRef idx="3">
-            <a:schemeClr val="accent1"/>
-          </a:fillRef>
-          <a:effectRef idx="2">
-            <a:schemeClr val="accent1"/>
-          </a:effectRef>
-          <a:fontRef idx="minor">
-            <a:schemeClr val="lt1"/>
-          </a:fontRef>
-        </p:style>
-        <p:txBody>
-          <a:bodyPr rtlCol="0" anchor="ctr" wrap="square" lIns="73152" rIns="73152" tIns="36576" bIns="36576"/>
-          <a:lstStyle/>
-          <a:p>
-            <a:pPr algn="l">
-              <a:spcAft>
-                <a:spcPts val="0"/>
-              </a:spcAft>
-              <a:defRPr sz="1800" b="1">
-                <a:solidFill>
-                  <a:srgbClr val="2A8B5A"/>
-                </a:solidFill>
-                <a:latin typeface="Noto Sans CJK KR"/>
-              </a:defRPr>
-            </a:pPr>
-            <a:r>
-              <a:t>완료 체크</a:t>
-            </a:r>
-            <a:br/>
-            <a:r>
-              <a:t>□ 명령이 오류 없이 실행된다.</a:t>
-            </a:r>
-            <a:br/>
-            <a:r>
-              <a:t>□ 기대한 파일·topic·frame·parameter 이름이 보인다.</a:t>
-            </a:r>
-            <a:br/>
-            <a:r>
-              <a:t>□ 값의 단위와 방향을 한 문장으로 설명할 수 있다.</a:t>
-            </a:r>
-          </a:p>
-        </p:txBody>
-      </p:sp>
-      <p:sp>
-        <p:nvSpPr>
-          <p:cNvPr id="9" name="TextBox 8"/>
+              <a:t>            if detection is not None:</a:t>
+            </a:r>
+            <a:br/>
+            <a:r>
+              <a:t>                output.detections.append(detection)</a:t>
+            </a:r>
+            <a:br/>
+            <a:r>
+              <a:t>                x1 = detection.center_x - detection.width // 2</a:t>
+            </a:r>
+            <a:br/>
+            <a:r>
+              <a:t>                y1 = detection.center_y - detection.height // 2</a:t>
+            </a:r>
+            <a:br/>
+            <a:r>
+              <a:t>                x2, y2 = (x1 + detection.width, y1 + detection.height)</a:t>
+            </a:r>
+            <a:br/>
+            <a:r>
+              <a:t>                cv2.rectangle(debug, (x1, y1), (x2, y2), (0, 215, 255), 2)</a:t>
+            </a:r>
+            <a:br/>
+            <a:r>
+              <a:t>                label = f'course fallback target {detection.estimated_distance:.2f} m'</a:t>
+            </a:r>
+            <a:br/>
+            <a:r>
+              <a:t>            else:</a:t>
+            </a:r>
+            <a:br/>
+            <a:r>
+              <a:t>                label = 'course fallback: red target not visible'</a:t>
+            </a:r>
+            <a:br/>
+            <a:r>
+              <a:t>        cv2.putText(debug, label, (12, 28), cv2.FONT_HERSHEY_SIMPLEX, 0.65, (255, 255,</a:t>
+            </a:r>
+            <a:br/>
+            <a:r>
+              <a:t>            255), 2)</a:t>
+            </a:r>
+            <a:br/>
+            <a:r>
+              <a:t>        self.publisher.publish(output)</a:t>
+            </a:r>
+          </a:p>
+        </p:txBody>
+      </p:sp>
+      <p:sp>
+        <p:nvSpPr>
+          <p:cNvPr id="10" name="TextBox 9"/>
           <p:cNvSpPr txBox="1"/>
           <p:nvPr/>
         </p:nvSpPr>
         <p:spPr>
           <a:xfrm>
-            <a:off x="731520" y="5989320"/>
-            <a:ext cx="10789920" cy="237744"/>
+            <a:off x="749808" y="6181344"/>
+            <a:ext cx="10789920" cy="201168"/>
           </a:xfrm>
           <a:prstGeom prst="rect">
             <a:avLst/>
@@ -24905,15 +25871,15 @@
               <a:spcAft>
                 <a:spcPts val="0"/>
               </a:spcAft>
-              <a:defRPr sz="1500" b="1">
-                <a:solidFill>
-                  <a:srgbClr val="122C4E"/>
-                </a:solidFill>
-                <a:latin typeface="Noto Sans CJK KR"/>
-              </a:defRPr>
-            </a:pPr>
-            <a:r>
-              <a:t>완료 조건: /camera/image_raw가 bridge를 통과하고 cv_bridge 소비 노드가 받을 준비가 된 상태를 확인한다.</a:t>
+              <a:defRPr sz="1000" b="0">
+                <a:solidFill>
+                  <a:srgbClr val="5C6672"/>
+                </a:solidFill>
+                <a:latin typeface="Noto Sans CJK KR"/>
+              </a:defRPr>
+            </a:pPr>
+            <a:r>
+              <a:t>파일 전체 8/10 · 이 슬라이드 다음에 같은 파일의 나머지 줄이 이어집니다.</a:t>
             </a:r>
           </a:p>
         </p:txBody>
@@ -24970,7 +25936,7 @@
               </a:defRPr>
             </a:pPr>
             <a:r>
-              <a:t>막히면: 증상 → 우선 확인 → 재검증</a:t>
+              <a:t>파일을 계속 작성하고 저장한다 (9/10)</a:t>
             </a:r>
           </a:p>
         </p:txBody>
@@ -25009,7 +25975,7 @@
               </a:defRPr>
             </a:pPr>
             <a:r>
-              <a:t>오류 메시지를 숨기지 않고 같은 순서로 점검합니다.</a:t>
+              <a:t>~/ros2_curri/agv_ws/src/agv_vision/agv_vision/yolo_node.py</a:t>
             </a:r>
           </a:p>
         </p:txBody>
@@ -25145,31 +26111,70 @@
               </a:defRPr>
             </a:pPr>
             <a:r>
-              <a:t>현재 단계 오류 대응    |    현재 폴더 ~/agv_ws    |    현재 터미널</a:t>
-            </a:r>
-          </a:p>
-        </p:txBody>
-      </p:sp>
-      <p:sp>
-        <p:nvSpPr>
-          <p:cNvPr id="7" name="Rounded Rectangle 6"/>
+              <a:t>현재 단계 38/40    |    현재 폴더 ~/ros2_curri/agv_ws    |    현재 터미널</a:t>
+            </a:r>
+          </a:p>
+        </p:txBody>
+      </p:sp>
+      <p:sp>
+        <p:nvSpPr>
+          <p:cNvPr id="7" name="TextBox 6"/>
+          <p:cNvSpPr txBox="1"/>
+          <p:nvPr/>
+        </p:nvSpPr>
+        <p:spPr>
+          <a:xfrm>
+            <a:off x="658368" y="1627632"/>
+            <a:ext cx="10972800" cy="256032"/>
+          </a:xfrm>
+          <a:prstGeom prst="rect">
+            <a:avLst/>
+          </a:prstGeom>
+          <a:noFill/>
+        </p:spPr>
+        <p:txBody>
+          <a:bodyPr wrap="square" lIns="73152" rIns="73152" tIns="36576" bIns="36576">
+            <a:spAutoFit/>
+          </a:bodyPr>
+          <a:lstStyle/>
+          <a:p>
+            <a:pPr algn="l">
+              <a:spcAft>
+                <a:spcPts val="0"/>
+              </a:spcAft>
+              <a:defRPr sz="1500" b="1">
+                <a:solidFill>
+                  <a:srgbClr val="122C4E"/>
+                </a:solidFill>
+                <a:latin typeface="Noto Sans CJK KR"/>
+              </a:defRPr>
+            </a:pPr>
+            <a:r>
+              <a:t>이번 단계: 파일의 전체 내용을 중간 생략 없이 작성합니다. 아래 줄 범위를 끝까지 입력하세요.</a:t>
+            </a:r>
+          </a:p>
+        </p:txBody>
+      </p:sp>
+      <p:sp>
+        <p:nvSpPr>
+          <p:cNvPr id="8" name="Rectangle 7"/>
           <p:cNvSpPr/>
           <p:nvPr/>
         </p:nvSpPr>
         <p:spPr>
           <a:xfrm>
-            <a:off x="694944" y="1755648"/>
-            <a:ext cx="10972800" cy="1115568"/>
-          </a:xfrm>
-          <a:prstGeom prst="roundRect">
+            <a:off x="658368" y="1956816"/>
+            <a:ext cx="10972800" cy="603504"/>
+          </a:xfrm>
+          <a:prstGeom prst="rect">
             <a:avLst/>
           </a:prstGeom>
           <a:solidFill>
-            <a:srgbClr val="FFF7F4"/>
+            <a:srgbClr val="F4F7FB"/>
           </a:solidFill>
           <a:ln>
             <a:solidFill>
-              <a:srgbClr val="EDBEB4"/>
+              <a:srgbClr val="F4F7FB"/>
             </a:solidFill>
           </a:ln>
         </p:spPr>
@@ -25188,115 +26193,50 @@
           </a:fontRef>
         </p:style>
         <p:txBody>
-          <a:bodyPr rtlCol="0" anchor="ctr"/>
-          <a:lstStyle/>
-          <a:p>
-            <a:pPr algn="ctr"/>
-          </a:p>
-        </p:txBody>
-      </p:sp>
-      <p:sp>
-        <p:nvSpPr>
-          <p:cNvPr id="8" name="TextBox 7"/>
-          <p:cNvSpPr txBox="1"/>
-          <p:nvPr/>
-        </p:nvSpPr>
-        <p:spPr>
-          <a:xfrm>
-            <a:off x="896112" y="1901952"/>
-            <a:ext cx="2926080" cy="274320"/>
-          </a:xfrm>
-          <a:prstGeom prst="rect">
-            <a:avLst/>
-          </a:prstGeom>
-          <a:noFill/>
-        </p:spPr>
-        <p:txBody>
-          <a:bodyPr wrap="square" lIns="73152" rIns="73152" tIns="36576" bIns="36576">
-            <a:spAutoFit/>
-          </a:bodyPr>
-          <a:lstStyle/>
-          <a:p>
-            <a:pPr algn="l">
-              <a:spcAft>
-                <a:spcPts val="0"/>
-              </a:spcAft>
-              <a:defRPr sz="1800" b="1">
-                <a:solidFill>
-                  <a:srgbClr val="BE3B3B"/>
-                </a:solidFill>
-                <a:latin typeface="Noto Sans CJK KR"/>
-              </a:defRPr>
-            </a:pPr>
-            <a:r>
-              <a:t>증상 1: 영상이 검정</a:t>
-            </a:r>
-          </a:p>
-        </p:txBody>
-      </p:sp>
-      <p:sp>
-        <p:nvSpPr>
-          <p:cNvPr id="9" name="TextBox 8"/>
-          <p:cNvSpPr txBox="1"/>
-          <p:nvPr/>
-        </p:nvSpPr>
-        <p:spPr>
-          <a:xfrm>
-            <a:off x="3794760" y="1883664"/>
-            <a:ext cx="7543800" cy="621792"/>
-          </a:xfrm>
-          <a:prstGeom prst="rect">
-            <a:avLst/>
-          </a:prstGeom>
-          <a:noFill/>
-        </p:spPr>
-        <p:txBody>
-          <a:bodyPr wrap="square" lIns="73152" rIns="73152" tIns="36576" bIns="36576">
-            <a:spAutoFit/>
-          </a:bodyPr>
-          <a:lstStyle/>
-          <a:p>
-            <a:pPr algn="l">
-              <a:spcAft>
-                <a:spcPts val="0"/>
-              </a:spcAft>
-              <a:defRPr sz="1600" b="0">
+          <a:bodyPr rtlCol="0" anchor="ctr" wrap="square" lIns="73152" rIns="73152" tIns="36576" bIns="36576"/>
+          <a:lstStyle/>
+          <a:p>
+            <a:pPr algn="l">
+              <a:spcAft>
+                <a:spcPts val="0"/>
+              </a:spcAft>
+              <a:defRPr sz="1400" b="0">
                 <a:solidFill>
                   <a:srgbClr val="122C4E"/>
                 </a:solidFill>
-                <a:latin typeface="Noto Sans CJK KR"/>
-              </a:defRPr>
-            </a:pPr>
-            <a:r>
-              <a:t>우선 확인: camera pose/FOV·world light·clipping range를 확인한다.</a:t>
-            </a:r>
-            <a:br/>
-            <a:r>
-              <a:t>수정 후: ros2 topic info /camera/image_raw</a:t>
-            </a:r>
-          </a:p>
-        </p:txBody>
-      </p:sp>
-      <p:sp>
-        <p:nvSpPr>
-          <p:cNvPr id="10" name="Rounded Rectangle 9"/>
+                <a:latin typeface="DejaVu Sans Mono"/>
+              </a:defRPr>
+            </a:pPr>
+            <a:r>
+              <a:t>파일 생성: mkdir -p ~/ros2_curri/agv_ws/src/agv_vision/agv_vision</a:t>
+            </a:r>
+            <a:br/>
+            <a:r>
+              <a:t>파일 열기: nano ~/ros2_curri/agv_ws/src/agv_vision/agv_vision/yolo_node.py</a:t>
+            </a:r>
+          </a:p>
+        </p:txBody>
+      </p:sp>
+      <p:sp>
+        <p:nvSpPr>
+          <p:cNvPr id="9" name="Rectangle 8"/>
           <p:cNvSpPr/>
           <p:nvPr/>
         </p:nvSpPr>
         <p:spPr>
           <a:xfrm>
-            <a:off x="694944" y="3172968"/>
-            <a:ext cx="10972800" cy="1115568"/>
-          </a:xfrm>
-          <a:prstGeom prst="roundRect">
+            <a:off x="658368" y="2706624"/>
+            <a:ext cx="10972800" cy="3364992"/>
+          </a:xfrm>
+          <a:prstGeom prst="rect">
             <a:avLst/>
           </a:prstGeom>
           <a:solidFill>
-            <a:srgbClr val="FFF7F4"/>
+            <a:srgbClr val="1D232D"/>
           </a:solidFill>
           <a:ln>
             <a:solidFill>
-              <a:srgbClr val="EDBEB4"/>
+              <a:srgbClr val="1D232D"/>
             </a:solidFill>
           </a:ln>
         </p:spPr>
@@ -25315,23 +26255,77 @@
           </a:fontRef>
         </p:style>
         <p:txBody>
-          <a:bodyPr rtlCol="0" anchor="ctr"/>
-          <a:lstStyle/>
-          <a:p>
-            <a:pPr algn="ctr"/>
-          </a:p>
-        </p:txBody>
-      </p:sp>
-      <p:sp>
-        <p:nvSpPr>
-          <p:cNvPr id="11" name="TextBox 10"/>
+          <a:bodyPr rtlCol="0" anchor="ctr" wrap="square" lIns="164592" rIns="164592" tIns="109728" bIns="36576"/>
+          <a:lstStyle/>
+          <a:p>
+            <a:pPr algn="l">
+              <a:spcAft>
+                <a:spcPts val="0"/>
+              </a:spcAft>
+              <a:defRPr sz="1400" b="0">
+                <a:solidFill>
+                  <a:srgbClr val="FFFFFF"/>
+                </a:solidFill>
+                <a:latin typeface="DejaVu Sans Mono"/>
+              </a:defRPr>
+            </a:pPr>
+            <a:r>
+              <a:t>        self.debug_publisher.publish(self.bridge.cv2_to_imgmsg(debug, encoding='bgr8'))</a:t>
+            </a:r>
+            <a:br/>
+            <a:br/>
+            <a:r>
+              <a:t>def main():</a:t>
+            </a:r>
+            <a:br/>
+            <a:r>
+              <a:t>    rclpy.init()</a:t>
+            </a:r>
+            <a:br/>
+            <a:r>
+              <a:t>    node = YoloNode()</a:t>
+            </a:r>
+            <a:br/>
+            <a:r>
+              <a:t>    try:</a:t>
+            </a:r>
+            <a:br/>
+            <a:r>
+              <a:t>        rclpy.spin(node)</a:t>
+            </a:r>
+            <a:br/>
+            <a:r>
+              <a:t>    except KeyboardInterrupt:</a:t>
+            </a:r>
+            <a:br/>
+            <a:r>
+              <a:t>        pass</a:t>
+            </a:r>
+            <a:br/>
+            <a:r>
+              <a:t>    finally:</a:t>
+            </a:r>
+            <a:br/>
+            <a:r>
+              <a:t>        node.destroy_node()</a:t>
+            </a:r>
+            <a:br/>
+            <a:r>
+              <a:t>        if rclpy.ok():</a:t>
+            </a:r>
+          </a:p>
+        </p:txBody>
+      </p:sp>
+      <p:sp>
+        <p:nvSpPr>
+          <p:cNvPr id="10" name="TextBox 9"/>
           <p:cNvSpPr txBox="1"/>
           <p:nvPr/>
         </p:nvSpPr>
         <p:spPr>
           <a:xfrm>
-            <a:off x="896112" y="3319272"/>
-            <a:ext cx="2926080" cy="274320"/>
+            <a:off x="749808" y="6181344"/>
+            <a:ext cx="10789920" cy="201168"/>
           </a:xfrm>
           <a:prstGeom prst="rect">
             <a:avLst/>
@@ -25348,97 +26342,15 @@
               <a:spcAft>
                 <a:spcPts val="0"/>
               </a:spcAft>
-              <a:defRPr sz="1800" b="1">
-                <a:solidFill>
-                  <a:srgbClr val="BE3B3B"/>
-                </a:solidFill>
-                <a:latin typeface="Noto Sans CJK KR"/>
-              </a:defRPr>
-            </a:pPr>
-            <a:r>
-              <a:t>증상 2: RViz 이미지가 비어 있음</a:t>
-            </a:r>
-          </a:p>
-        </p:txBody>
-      </p:sp>
-      <p:sp>
-        <p:nvSpPr>
-          <p:cNvPr id="12" name="TextBox 11"/>
-          <p:cNvSpPr txBox="1"/>
-          <p:nvPr/>
-        </p:nvSpPr>
-        <p:spPr>
-          <a:xfrm>
-            <a:off x="3794760" y="3300984"/>
-            <a:ext cx="7543800" cy="621792"/>
-          </a:xfrm>
-          <a:prstGeom prst="rect">
-            <a:avLst/>
-          </a:prstGeom>
-          <a:noFill/>
-        </p:spPr>
-        <p:txBody>
-          <a:bodyPr wrap="square" lIns="73152" rIns="73152" tIns="36576" bIns="36576">
-            <a:spAutoFit/>
-          </a:bodyPr>
-          <a:lstStyle/>
-          <a:p>
-            <a:pPr algn="l">
-              <a:spcAft>
-                <a:spcPts val="0"/>
-              </a:spcAft>
-              <a:defRPr sz="1600" b="0">
-                <a:solidFill>
-                  <a:srgbClr val="122C4E"/>
-                </a:solidFill>
-                <a:latin typeface="Noto Sans CJK KR"/>
-              </a:defRPr>
-            </a:pPr>
-            <a:r>
-              <a:t>우선 확인: Image topic·QoS·bridge mapping을 확인한다.</a:t>
-            </a:r>
-            <a:br/>
-            <a:r>
-              <a:t>수정 후: ros2 topic info /camera/image_raw</a:t>
-            </a:r>
-          </a:p>
-        </p:txBody>
-      </p:sp>
-      <p:sp>
-        <p:nvSpPr>
-          <p:cNvPr id="13" name="TextBox 12"/>
-          <p:cNvSpPr txBox="1"/>
-          <p:nvPr/>
-        </p:nvSpPr>
-        <p:spPr>
-          <a:xfrm>
-            <a:off x="822960" y="5102352"/>
-            <a:ext cx="10607040" cy="402336"/>
-          </a:xfrm>
-          <a:prstGeom prst="rect">
-            <a:avLst/>
-          </a:prstGeom>
-          <a:noFill/>
-        </p:spPr>
-        <p:txBody>
-          <a:bodyPr wrap="square" lIns="73152" rIns="73152" tIns="36576" bIns="36576">
-            <a:spAutoFit/>
-          </a:bodyPr>
-          <a:lstStyle/>
-          <a:p>
-            <a:pPr algn="ctr">
-              <a:spcAft>
-                <a:spcPts val="0"/>
-              </a:spcAft>
-              <a:defRPr sz="1800" b="1">
-                <a:solidFill>
-                  <a:srgbClr val="DB7E22"/>
-                </a:solidFill>
-                <a:latin typeface="Noto Sans CJK KR"/>
-              </a:defRPr>
-            </a:pPr>
-            <a:r>
-              <a:t>공통 순서: ① 현재 폴더 ② source ③ 파일 경로 ④ 이름/타입/단위 ⑤ build·source 후 재실행</a:t>
+              <a:defRPr sz="1000" b="0">
+                <a:solidFill>
+                  <a:srgbClr val="5C6672"/>
+                </a:solidFill>
+                <a:latin typeface="Noto Sans CJK KR"/>
+              </a:defRPr>
+            </a:pPr>
+            <a:r>
+              <a:t>파일 전체 9/10 · 이 슬라이드 다음에 같은 파일의 나머지 줄이 이어집니다.</a:t>
             </a:r>
           </a:p>
         </p:txBody>
@@ -25495,7 +26407,7 @@
               </a:defRPr>
             </a:pPr>
             <a:r>
-              <a:t>미니 실습: 값 하나를 바꾸고 결과를 비교한다</a:t>
+              <a:t>파일을 계속 작성하고 저장한다 (10/10)</a:t>
             </a:r>
           </a:p>
         </p:txBody>
@@ -25534,7 +26446,7 @@
               </a:defRPr>
             </a:pPr>
             <a:r>
-              <a:t>정상 결과를 만든 뒤에는 한 번에 하나의 값만 바꿉니다.</a:t>
+              <a:t>~/ros2_curri/agv_ws/src/agv_vision/agv_vision/yolo_node.py</a:t>
             </a:r>
           </a:p>
         </p:txBody>
@@ -25670,31 +26582,70 @@
               </a:defRPr>
             </a:pPr>
             <a:r>
-              <a:t>현재 단계 미니 실습    |    현재 폴더 ~/agv_ws    |    현재 터미널</a:t>
-            </a:r>
-          </a:p>
-        </p:txBody>
-      </p:sp>
-      <p:sp>
-        <p:nvSpPr>
-          <p:cNvPr id="7" name="Rounded Rectangle 6"/>
+              <a:t>현재 단계 39/40    |    현재 폴더 ~/ros2_curri/agv_ws    |    현재 터미널</a:t>
+            </a:r>
+          </a:p>
+        </p:txBody>
+      </p:sp>
+      <p:sp>
+        <p:nvSpPr>
+          <p:cNvPr id="7" name="TextBox 6"/>
+          <p:cNvSpPr txBox="1"/>
+          <p:nvPr/>
+        </p:nvSpPr>
+        <p:spPr>
+          <a:xfrm>
+            <a:off x="658368" y="1627632"/>
+            <a:ext cx="10972800" cy="256032"/>
+          </a:xfrm>
+          <a:prstGeom prst="rect">
+            <a:avLst/>
+          </a:prstGeom>
+          <a:noFill/>
+        </p:spPr>
+        <p:txBody>
+          <a:bodyPr wrap="square" lIns="73152" rIns="73152" tIns="36576" bIns="36576">
+            <a:spAutoFit/>
+          </a:bodyPr>
+          <a:lstStyle/>
+          <a:p>
+            <a:pPr algn="l">
+              <a:spcAft>
+                <a:spcPts val="0"/>
+              </a:spcAft>
+              <a:defRPr sz="1500" b="1">
+                <a:solidFill>
+                  <a:srgbClr val="122C4E"/>
+                </a:solidFill>
+                <a:latin typeface="Noto Sans CJK KR"/>
+              </a:defRPr>
+            </a:pPr>
+            <a:r>
+              <a:t>이번 단계: 파일의 전체 내용을 중간 생략 없이 작성합니다. 아래 줄 범위를 끝까지 입력하세요.</a:t>
+            </a:r>
+          </a:p>
+        </p:txBody>
+      </p:sp>
+      <p:sp>
+        <p:nvSpPr>
+          <p:cNvPr id="8" name="Rectangle 7"/>
           <p:cNvSpPr/>
           <p:nvPr/>
         </p:nvSpPr>
         <p:spPr>
           <a:xfrm>
-            <a:off x="749808" y="1874519"/>
-            <a:ext cx="10652760" cy="1993392"/>
-          </a:xfrm>
-          <a:prstGeom prst="roundRect">
+            <a:off x="658368" y="1956816"/>
+            <a:ext cx="10972800" cy="603504"/>
+          </a:xfrm>
+          <a:prstGeom prst="rect">
             <a:avLst/>
           </a:prstGeom>
           <a:solidFill>
-            <a:srgbClr val="FFF8EB"/>
+            <a:srgbClr val="F4F7FB"/>
           </a:solidFill>
           <a:ln>
             <a:solidFill>
-              <a:srgbClr val="ECC680"/>
+              <a:srgbClr val="F4F7FB"/>
             </a:solidFill>
           </a:ln>
         </p:spPr>
@@ -25716,33 +26667,95 @@
           <a:bodyPr rtlCol="0" anchor="ctr" wrap="square" lIns="73152" rIns="73152" tIns="36576" bIns="36576"/>
           <a:lstStyle/>
           <a:p>
-            <a:pPr algn="ctr">
-              <a:spcAft>
-                <a:spcPts val="0"/>
-              </a:spcAft>
-              <a:defRPr sz="2300" b="1">
+            <a:pPr algn="l">
+              <a:spcAft>
+                <a:spcPts val="0"/>
+              </a:spcAft>
+              <a:defRPr sz="1400" b="0">
                 <a:solidFill>
                   <a:srgbClr val="122C4E"/>
                 </a:solidFill>
-                <a:latin typeface="Noto Sans CJK KR"/>
-              </a:defRPr>
-            </a:pPr>
-            <a:r>
-              <a:t>camera update_rate 15→5 Hz와 width 640→320을 각각 바꾸고 topic hz와 처리량 차이를 기록한다.</a:t>
-            </a:r>
-          </a:p>
-        </p:txBody>
-      </p:sp>
-      <p:sp>
-        <p:nvSpPr>
-          <p:cNvPr id="8" name="TextBox 7"/>
+                <a:latin typeface="DejaVu Sans Mono"/>
+              </a:defRPr>
+            </a:pPr>
+            <a:r>
+              <a:t>파일 생성: mkdir -p ~/ros2_curri/agv_ws/src/agv_vision/agv_vision</a:t>
+            </a:r>
+            <a:br/>
+            <a:r>
+              <a:t>파일 열기: nano ~/ros2_curri/agv_ws/src/agv_vision/agv_vision/yolo_node.py</a:t>
+            </a:r>
+          </a:p>
+        </p:txBody>
+      </p:sp>
+      <p:sp>
+        <p:nvSpPr>
+          <p:cNvPr id="9" name="Rectangle 8"/>
+          <p:cNvSpPr/>
+          <p:nvPr/>
+        </p:nvSpPr>
+        <p:spPr>
+          <a:xfrm>
+            <a:off x="658368" y="2706624"/>
+            <a:ext cx="10972800" cy="3364992"/>
+          </a:xfrm>
+          <a:prstGeom prst="rect">
+            <a:avLst/>
+          </a:prstGeom>
+          <a:solidFill>
+            <a:srgbClr val="1D232D"/>
+          </a:solidFill>
+          <a:ln>
+            <a:solidFill>
+              <a:srgbClr val="1D232D"/>
+            </a:solidFill>
+          </a:ln>
+        </p:spPr>
+        <p:style>
+          <a:lnRef idx="1">
+            <a:schemeClr val="accent1"/>
+          </a:lnRef>
+          <a:fillRef idx="3">
+            <a:schemeClr val="accent1"/>
+          </a:fillRef>
+          <a:effectRef idx="2">
+            <a:schemeClr val="accent1"/>
+          </a:effectRef>
+          <a:fontRef idx="minor">
+            <a:schemeClr val="lt1"/>
+          </a:fontRef>
+        </p:style>
+        <p:txBody>
+          <a:bodyPr rtlCol="0" anchor="ctr" wrap="square" lIns="164592" rIns="164592" tIns="109728" bIns="36576"/>
+          <a:lstStyle/>
+          <a:p>
+            <a:pPr algn="l">
+              <a:spcAft>
+                <a:spcPts val="0"/>
+              </a:spcAft>
+              <a:defRPr sz="1400" b="0">
+                <a:solidFill>
+                  <a:srgbClr val="FFFFFF"/>
+                </a:solidFill>
+                <a:latin typeface="DejaVu Sans Mono"/>
+              </a:defRPr>
+            </a:pPr>
+            <a:r>
+              <a:t>            rclpy.shutdown()</a:t>
+            </a:r>
+          </a:p>
+        </p:txBody>
+      </p:sp>
+      <p:sp>
+        <p:nvSpPr>
+          <p:cNvPr id="10" name="TextBox 9"/>
           <p:cNvSpPr txBox="1"/>
           <p:nvPr/>
         </p:nvSpPr>
         <p:spPr>
           <a:xfrm>
-            <a:off x="877824" y="4590288"/>
-            <a:ext cx="10241280" cy="594360"/>
+            <a:off x="749808" y="6181344"/>
+            <a:ext cx="10789920" cy="201168"/>
           </a:xfrm>
           <a:prstGeom prst="rect">
             <a:avLst/>
@@ -25755,19 +26768,19 @@
           </a:bodyPr>
           <a:lstStyle/>
           <a:p>
-            <a:pPr algn="ctr">
-              <a:spcAft>
-                <a:spcPts val="0"/>
-              </a:spcAft>
-              <a:defRPr sz="1900" b="1">
-                <a:solidFill>
-                  <a:srgbClr val="DB7E22"/>
-                </a:solidFill>
-                <a:latin typeface="Noto Sans CJK KR"/>
-              </a:defRPr>
-            </a:pPr>
-            <a:r>
-              <a:t>기록할 것: 바꾼 값(단위) · 기대한 변화 · 실제 출력/화면 · 원래 값으로 되돌린 결과</a:t>
+            <a:pPr algn="l">
+              <a:spcAft>
+                <a:spcPts val="0"/>
+              </a:spcAft>
+              <a:defRPr sz="1000" b="0">
+                <a:solidFill>
+                  <a:srgbClr val="5C6672"/>
+                </a:solidFill>
+                <a:latin typeface="Noto Sans CJK KR"/>
+              </a:defRPr>
+            </a:pPr>
+            <a:r>
+              <a:t>파일 전체 10/10 · 이 슬라이드 다음에 같은 파일의 나머지 줄이 이어집니다.</a:t>
             </a:r>
           </a:p>
         </p:txBody>
@@ -25824,7 +26837,7 @@
               </a:defRPr>
             </a:pPr>
             <a:r>
-              <a:t>체크포인트를 저장하고 다음 모듈로 넘긴다</a:t>
+              <a:t>build → source → run 순서로 실행한다</a:t>
             </a:r>
           </a:p>
         </p:txBody>
@@ -25863,7 +26876,7 @@
               </a:defRPr>
             </a:pPr>
             <a:r>
-              <a:t>현재 Complete는 다음 Starter의 기준선입니다.</a:t>
+              <a:t>새 파일 또는 수정 파일은 build와 source 뒤에만 실행 이름·설정에 반영됩니다.</a:t>
             </a:r>
           </a:p>
         </p:txBody>
@@ -25999,7 +27012,7 @@
               </a:defRPr>
             </a:pPr>
             <a:r>
-              <a:t>현재 단계 체크포인트    |    현재 폴더 ~/agv_ws    |    현재 터미널</a:t>
+              <a:t>현재 단계 실행    |    현재 폴더 ~/ros2_curri/agv_ws    |    현재 터미널</a:t>
             </a:r>
           </a:p>
         </p:txBody>
@@ -26012,18 +27025,18 @@
         </p:nvSpPr>
         <p:spPr>
           <a:xfrm>
-            <a:off x="685800" y="1737360"/>
-            <a:ext cx="10972800" cy="3611880"/>
+            <a:off x="658368" y="1700784"/>
+            <a:ext cx="10972800" cy="3182112"/>
           </a:xfrm>
           <a:prstGeom prst="roundRect">
             <a:avLst/>
           </a:prstGeom>
           <a:solidFill>
-            <a:srgbClr val="F4F7FB"/>
+            <a:srgbClr val="1D232D"/>
           </a:solidFill>
           <a:ln>
             <a:solidFill>
-              <a:srgbClr val="D2DCE8"/>
+              <a:srgbClr val="1D232D"/>
             </a:solidFill>
           </a:ln>
         </p:spPr>
@@ -26042,10 +27055,27 @@
           </a:fontRef>
         </p:style>
         <p:txBody>
-          <a:bodyPr rtlCol="0" anchor="ctr"/>
-          <a:lstStyle/>
-          <a:p>
-            <a:pPr algn="ctr"/>
+          <a:bodyPr rtlCol="0" anchor="ctr" wrap="square" lIns="73152" rIns="73152" tIns="36576" bIns="36576"/>
+          <a:lstStyle/>
+          <a:p>
+            <a:pPr algn="l">
+              <a:spcAft>
+                <a:spcPts val="0"/>
+              </a:spcAft>
+              <a:defRPr sz="1600" b="0">
+                <a:solidFill>
+                  <a:srgbClr val="FFFFFF"/>
+                </a:solidFill>
+                <a:latin typeface="DejaVu Sans Mono"/>
+              </a:defRPr>
+            </a:pPr>
+            <a:r>
+              <a:t>ros2 launch agv_bringup agv_sim.launch.py rviz:=false autonomy:=false</a:t>
+            </a:r>
+            <a:br/>
+            <a:r>
+              <a:t># 새 터미널: ros2 run rqt_image_view rqt_image_view /camera/image_raw</a:t>
+            </a:r>
           </a:p>
         </p:txBody>
       </p:sp>
@@ -26057,111 +27087,8 @@
         </p:nvSpPr>
         <p:spPr>
           <a:xfrm>
-            <a:off x="896112" y="1993392"/>
-            <a:ext cx="10332720" cy="2971800"/>
-          </a:xfrm>
-          <a:prstGeom prst="rect">
-            <a:avLst/>
-          </a:prstGeom>
-          <a:noFill/>
-        </p:spPr>
-        <p:txBody>
-          <a:bodyPr wrap="square" lIns="109728" rIns="109728">
-            <a:spAutoFit/>
-          </a:bodyPr>
-          <a:lstStyle/>
-          <a:p>
-            <a:pPr>
-              <a:spcAft>
-                <a:spcPts val="800"/>
-              </a:spcAft>
-              <a:defRPr sz="1800">
-                <a:solidFill>
-                  <a:srgbClr val="122C4E"/>
-                </a:solidFill>
-                <a:latin typeface="Noto Sans CJK KR"/>
-              </a:defRPr>
-            </a:pPr>
-            <a:r>
-              <a:t>• □ 완료 화면: /camera/image_raw가 bridge를 통과하고 cv_bridge 소비 노드가 받을 준비가 된 상태를 확인한다.</a:t>
-            </a:r>
-          </a:p>
-          <a:p>
-            <a:pPr>
-              <a:spcAft>
-                <a:spcPts val="800"/>
-              </a:spcAft>
-              <a:defRPr sz="1800">
-                <a:solidFill>
-                  <a:srgbClr val="122C4E"/>
-                </a:solidFill>
-                <a:latin typeface="Noto Sans CJK KR"/>
-              </a:defRPr>
-            </a:pPr>
-            <a:r>
-              <a:t>• □ Complete 파일: blocks/D_sensors/M12_camera_sensor/complete/</a:t>
-            </a:r>
-          </a:p>
-          <a:p>
-            <a:pPr>
-              <a:spcAft>
-                <a:spcPts val="800"/>
-              </a:spcAft>
-              <a:defRPr sz="1800">
-                <a:solidFill>
-                  <a:srgbClr val="122C4E"/>
-                </a:solidFill>
-                <a:latin typeface="Noto Sans CJK KR"/>
-              </a:defRPr>
-            </a:pPr>
-            <a:r>
-              <a:t>• □ 정상 로그·캡처: logs/validation.log, screenshots/validation_terminal.png</a:t>
-            </a:r>
-          </a:p>
-          <a:p>
-            <a:pPr>
-              <a:spcAft>
-                <a:spcPts val="800"/>
-              </a:spcAft>
-              <a:defRPr sz="1800">
-                <a:solidFill>
-                  <a:srgbClr val="122C4E"/>
-                </a:solidFill>
-                <a:latin typeface="Noto Sans CJK KR"/>
-              </a:defRPr>
-            </a:pPr>
-            <a:r>
-              <a:t>• □ 버전 식별: CHECKSUM_or_TAG.txt의 SHA-256 manifest</a:t>
-            </a:r>
-          </a:p>
-          <a:p>
-            <a:pPr>
-              <a:spcAft>
-                <a:spcPts val="800"/>
-              </a:spcAft>
-              <a:defRPr sz="1800">
-                <a:solidFill>
-                  <a:srgbClr val="122C4E"/>
-                </a:solidFill>
-                <a:latin typeface="Noto Sans CJK KR"/>
-              </a:defRPr>
-            </a:pPr>
-            <a:r>
-              <a:t>• □ 다음 시작 조건: M13 LiDAR</a:t>
-            </a:r>
-          </a:p>
-        </p:txBody>
-      </p:sp>
-      <p:sp>
-        <p:nvSpPr>
-          <p:cNvPr id="9" name="TextBox 8"/>
-          <p:cNvSpPr txBox="1"/>
-          <p:nvPr/>
-        </p:nvSpPr>
-        <p:spPr>
-          <a:xfrm>
-            <a:off x="868680" y="5596128"/>
-            <a:ext cx="10515600" cy="338328"/>
+            <a:off x="786384" y="5239512"/>
+            <a:ext cx="1261872" cy="237744"/>
           </a:xfrm>
           <a:prstGeom prst="rect">
             <a:avLst/>
@@ -26174,11 +27101,11 @@
           </a:bodyPr>
           <a:lstStyle/>
           <a:p>
-            <a:pPr algn="ctr">
-              <a:spcAft>
-                <a:spcPts val="0"/>
-              </a:spcAft>
-              <a:defRPr sz="1700" b="1">
+            <a:pPr algn="l">
+              <a:spcAft>
+                <a:spcPts val="0"/>
+              </a:spcAft>
+              <a:defRPr sz="1800" b="1">
                 <a:solidFill>
                   <a:srgbClr val="2A8B5A"/>
                 </a:solidFill>
@@ -26186,7 +27113,46 @@
               </a:defRPr>
             </a:pPr>
             <a:r>
-              <a:t>다음 모듈을 시작하기 전, 이 슬라이드의 Complete와 다음 모듈의 Starter를 비교합니다.</a:t>
+              <a:t>확인 기준</a:t>
+            </a:r>
+          </a:p>
+        </p:txBody>
+      </p:sp>
+      <p:sp>
+        <p:nvSpPr>
+          <p:cNvPr id="9" name="TextBox 8"/>
+          <p:cNvSpPr txBox="1"/>
+          <p:nvPr/>
+        </p:nvSpPr>
+        <p:spPr>
+          <a:xfrm>
+            <a:off x="786384" y="5532120"/>
+            <a:ext cx="10469880" cy="420624"/>
+          </a:xfrm>
+          <a:prstGeom prst="rect">
+            <a:avLst/>
+          </a:prstGeom>
+          <a:noFill/>
+        </p:spPr>
+        <p:txBody>
+          <a:bodyPr wrap="square" lIns="73152" rIns="73152" tIns="36576" bIns="36576">
+            <a:spAutoFit/>
+          </a:bodyPr>
+          <a:lstStyle/>
+          <a:p>
+            <a:pPr algn="l">
+              <a:spcAft>
+                <a:spcPts val="0"/>
+              </a:spcAft>
+              <a:defRPr sz="1800" b="0">
+                <a:solidFill>
+                  <a:srgbClr val="122C4E"/>
+                </a:solidFill>
+                <a:latin typeface="Noto Sans CJK KR"/>
+              </a:defRPr>
+            </a:pPr>
+            <a:r>
+              <a:t>/camera/image_raw가 bridge를 통과하고 cv_bridge 소비 노드가 받을 준비가 된 상태를 확인한다.</a:t>
             </a:r>
           </a:p>
         </p:txBody>
@@ -26243,7 +27209,7 @@
               </a:defRPr>
             </a:pPr>
             <a:r>
-              <a:t>공식 참고 자료</a:t>
+              <a:t>정상 결과: 실제 환경에서 확인한 출력</a:t>
             </a:r>
           </a:p>
         </p:txBody>
@@ -26282,7 +27248,7 @@
               </a:defRPr>
             </a:pPr>
             <a:r>
-              <a:t>본문 단계는 링크를 열지 않아도 완료할 수 있으며, 링크는 개념을 더 확인할 때만 사용합니다.</a:t>
+              <a:t>실제 ROS 2 환경의 파일·패키지·구성 검증 로그</a:t>
             </a:r>
           </a:p>
         </p:txBody>
@@ -26365,18 +27331,492 @@
           </a:p>
         </p:txBody>
       </p:sp>
-      <p:sp>
-        <p:nvSpPr>
-          <p:cNvPr id="6" name="Rounded Rectangle 5"/>
+      <p:pic>
+        <p:nvPicPr>
+          <p:cNvPr id="6" name="Picture 5" descr="validation_terminal.png"/>
+          <p:cNvPicPr>
+            <a:picLocks noChangeAspect="1"/>
+          </p:cNvPicPr>
+          <p:nvPr/>
+        </p:nvPicPr>
+        <p:blipFill>
+          <a:blip r:embed="rId2"/>
+          <a:stretch>
+            <a:fillRect/>
+          </a:stretch>
+        </p:blipFill>
+        <p:spPr>
+          <a:xfrm>
+            <a:off x="790956" y="1884338"/>
+            <a:ext cx="10607040" cy="3738546"/>
+          </a:xfrm>
+          <a:prstGeom prst="rect">
+            <a:avLst/>
+          </a:prstGeom>
+        </p:spPr>
+      </p:pic>
+      <p:sp>
+        <p:nvSpPr>
+          <p:cNvPr id="7" name="TextBox 6"/>
+          <p:cNvSpPr txBox="1"/>
+          <p:nvPr/>
+        </p:nvSpPr>
+        <p:spPr>
+          <a:xfrm>
+            <a:off x="777240" y="6217920"/>
+            <a:ext cx="10607040" cy="182880"/>
+          </a:xfrm>
+          <a:prstGeom prst="rect">
+            <a:avLst/>
+          </a:prstGeom>
+          <a:noFill/>
+        </p:spPr>
+        <p:txBody>
+          <a:bodyPr wrap="square" lIns="73152" rIns="73152" tIns="36576" bIns="36576">
+            <a:spAutoFit/>
+          </a:bodyPr>
+          <a:lstStyle/>
+          <a:p>
+            <a:pPr algn="ctr">
+              <a:spcAft>
+                <a:spcPts val="0"/>
+              </a:spcAft>
+              <a:defRPr sz="1100" b="1">
+                <a:solidFill>
+                  <a:srgbClr val="2A8B5A"/>
+                </a:solidFill>
+                <a:latin typeface="Noto Sans CJK KR"/>
+              </a:defRPr>
+            </a:pPr>
+            <a:r>
+              <a:t>① 명령/설정  ② 정상 출력 또는 화면  ③ 다음 검증 명령으로 재확인</a:t>
+            </a:r>
+          </a:p>
+        </p:txBody>
+      </p:sp>
+    </p:spTree>
+  </p:cSld>
+  <p:clrMapOvr>
+    <a:masterClrMapping/>
+  </p:clrMapOvr>
+</p:sld>
+</file>
+
+<file path=ppt/slides/slide48.xml><?xml version="1.0" encoding="utf-8"?>
+<p:sld xmlns:a="http://schemas.openxmlformats.org/drawingml/2006/main" xmlns:p="http://schemas.openxmlformats.org/presentationml/2006/main" xmlns:r="http://schemas.openxmlformats.org/officeDocument/2006/relationships">
+  <p:cSld>
+    <p:spTree>
+      <p:nvGrpSpPr>
+        <p:cNvPr id="1" name=""/>
+        <p:cNvGrpSpPr/>
+        <p:nvPr/>
+      </p:nvGrpSpPr>
+      <p:grpSpPr/>
+      <p:sp>
+        <p:nvSpPr>
+          <p:cNvPr id="2" name="TextBox 1"/>
+          <p:cNvSpPr txBox="1"/>
+          <p:nvPr/>
+        </p:nvSpPr>
+        <p:spPr>
+          <a:xfrm>
+            <a:off x="566928" y="347472"/>
+            <a:ext cx="10881360" cy="438912"/>
+          </a:xfrm>
+          <a:prstGeom prst="rect">
+            <a:avLst/>
+          </a:prstGeom>
+          <a:noFill/>
+        </p:spPr>
+        <p:txBody>
+          <a:bodyPr wrap="square" lIns="73152" rIns="73152" tIns="36576" bIns="36576">
+            <a:spAutoFit/>
+          </a:bodyPr>
+          <a:lstStyle/>
+          <a:p>
+            <a:pPr algn="l">
+              <a:spcAft>
+                <a:spcPts val="0"/>
+              </a:spcAft>
+              <a:defRPr sz="3200" b="1">
+                <a:solidFill>
+                  <a:srgbClr val="122C4E"/>
+                </a:solidFill>
+                <a:latin typeface="Noto Sans CJK KR"/>
+              </a:defRPr>
+            </a:pPr>
+            <a:r>
+              <a:t>정상 결과: 실제 환경에서 확인한 출력</a:t>
+            </a:r>
+          </a:p>
+        </p:txBody>
+      </p:sp>
+      <p:sp>
+        <p:nvSpPr>
+          <p:cNvPr id="3" name="TextBox 2"/>
+          <p:cNvSpPr txBox="1"/>
+          <p:nvPr/>
+        </p:nvSpPr>
+        <p:spPr>
+          <a:xfrm>
+            <a:off x="603504" y="859536"/>
+            <a:ext cx="10698480" cy="292608"/>
+          </a:xfrm>
+          <a:prstGeom prst="rect">
+            <a:avLst/>
+          </a:prstGeom>
+          <a:noFill/>
+        </p:spPr>
+        <p:txBody>
+          <a:bodyPr wrap="square" lIns="73152" rIns="73152" tIns="36576" bIns="36576">
+            <a:spAutoFit/>
+          </a:bodyPr>
+          <a:lstStyle/>
+          <a:p>
+            <a:pPr algn="l">
+              <a:spcAft>
+                <a:spcPts val="0"/>
+              </a:spcAft>
+              <a:defRPr sz="1700" b="0">
+                <a:solidFill>
+                  <a:srgbClr val="5C6672"/>
+                </a:solidFill>
+                <a:latin typeface="Noto Sans CJK KR"/>
+              </a:defRPr>
+            </a:pPr>
+            <a:r>
+              <a:t>실제 /camera/image_raw 캡처: 화면 방향·FOV·world 배치를 점검하는 기준</a:t>
+            </a:r>
+          </a:p>
+        </p:txBody>
+      </p:sp>
+      <p:sp>
+        <p:nvSpPr>
+          <p:cNvPr id="4" name="TextBox 3"/>
+          <p:cNvSpPr txBox="1"/>
+          <p:nvPr/>
+        </p:nvSpPr>
+        <p:spPr>
+          <a:xfrm>
+            <a:off x="530352" y="6510528"/>
+            <a:ext cx="7772400" cy="201168"/>
+          </a:xfrm>
+          <a:prstGeom prst="rect">
+            <a:avLst/>
+          </a:prstGeom>
+          <a:noFill/>
+        </p:spPr>
+        <p:txBody>
+          <a:bodyPr wrap="square" lIns="73152" rIns="73152" tIns="36576" bIns="36576">
+            <a:spAutoFit/>
+          </a:bodyPr>
+          <a:lstStyle/>
+          <a:p>
+            <a:pPr algn="l">
+              <a:spcAft>
+                <a:spcPts val="0"/>
+              </a:spcAft>
+              <a:defRPr sz="1000" b="0">
+                <a:solidFill>
+                  <a:srgbClr val="5C6672"/>
+                </a:solidFill>
+                <a:latin typeface="Noto Sans CJK KR"/>
+              </a:defRPr>
+            </a:pPr>
+            <a:r>
+              <a:t>ROS 2 Jazzy · Gazebo Harmonic · M12 · 따라 하기형 AGV 실습</a:t>
+            </a:r>
+          </a:p>
+        </p:txBody>
+      </p:sp>
+      <p:sp>
+        <p:nvSpPr>
+          <p:cNvPr id="5" name="TextBox 4"/>
+          <p:cNvSpPr txBox="1"/>
+          <p:nvPr/>
+        </p:nvSpPr>
+        <p:spPr>
+          <a:xfrm>
+            <a:off x="9144000" y="6510528"/>
+            <a:ext cx="2468880" cy="201168"/>
+          </a:xfrm>
+          <a:prstGeom prst="rect">
+            <a:avLst/>
+          </a:prstGeom>
+          <a:noFill/>
+        </p:spPr>
+        <p:txBody>
+          <a:bodyPr wrap="square" lIns="73152" rIns="73152" tIns="36576" bIns="36576">
+            <a:spAutoFit/>
+          </a:bodyPr>
+          <a:lstStyle/>
+          <a:p>
+            <a:pPr algn="r">
+              <a:spcAft>
+                <a:spcPts val="0"/>
+              </a:spcAft>
+              <a:defRPr sz="1000" b="0">
+                <a:solidFill>
+                  <a:srgbClr val="5C6672"/>
+                </a:solidFill>
+                <a:latin typeface="Noto Sans CJK KR"/>
+              </a:defRPr>
+            </a:pPr>
+            <a:r>
+              <a:t>명령·파일 경로는 슬라이드에서 복사 가능</a:t>
+            </a:r>
+          </a:p>
+        </p:txBody>
+      </p:sp>
+      <p:pic>
+        <p:nvPicPr>
+          <p:cNvPr id="6" name="Picture 5" descr="02_camera_image_actual.png"/>
+          <p:cNvPicPr>
+            <a:picLocks noChangeAspect="1"/>
+          </p:cNvPicPr>
+          <p:nvPr/>
+        </p:nvPicPr>
+        <p:blipFill>
+          <a:blip r:embed="rId2"/>
+          <a:stretch>
+            <a:fillRect/>
+          </a:stretch>
+        </p:blipFill>
+        <p:spPr>
+          <a:xfrm>
+            <a:off x="2894076" y="1353312"/>
+            <a:ext cx="6400800" cy="4800600"/>
+          </a:xfrm>
+          <a:prstGeom prst="rect">
+            <a:avLst/>
+          </a:prstGeom>
+        </p:spPr>
+      </p:pic>
+      <p:sp>
+        <p:nvSpPr>
+          <p:cNvPr id="7" name="TextBox 6"/>
+          <p:cNvSpPr txBox="1"/>
+          <p:nvPr/>
+        </p:nvSpPr>
+        <p:spPr>
+          <a:xfrm>
+            <a:off x="777240" y="6217920"/>
+            <a:ext cx="10607040" cy="182880"/>
+          </a:xfrm>
+          <a:prstGeom prst="rect">
+            <a:avLst/>
+          </a:prstGeom>
+          <a:noFill/>
+        </p:spPr>
+        <p:txBody>
+          <a:bodyPr wrap="square" lIns="73152" rIns="73152" tIns="36576" bIns="36576">
+            <a:spAutoFit/>
+          </a:bodyPr>
+          <a:lstStyle/>
+          <a:p>
+            <a:pPr algn="ctr">
+              <a:spcAft>
+                <a:spcPts val="0"/>
+              </a:spcAft>
+              <a:defRPr sz="1100" b="1">
+                <a:solidFill>
+                  <a:srgbClr val="2A8B5A"/>
+                </a:solidFill>
+                <a:latin typeface="Noto Sans CJK KR"/>
+              </a:defRPr>
+            </a:pPr>
+            <a:r>
+              <a:t>① 명령/설정  ② 정상 출력 또는 화면  ③ 다음 검증 명령으로 재확인</a:t>
+            </a:r>
+          </a:p>
+        </p:txBody>
+      </p:sp>
+    </p:spTree>
+  </p:cSld>
+  <p:clrMapOvr>
+    <a:masterClrMapping/>
+  </p:clrMapOvr>
+</p:sld>
+</file>
+
+<file path=ppt/slides/slide49.xml><?xml version="1.0" encoding="utf-8"?>
+<p:sld xmlns:a="http://schemas.openxmlformats.org/drawingml/2006/main" xmlns:p="http://schemas.openxmlformats.org/presentationml/2006/main" xmlns:r="http://schemas.openxmlformats.org/officeDocument/2006/relationships">
+  <p:cSld>
+    <p:spTree>
+      <p:nvGrpSpPr>
+        <p:cNvPr id="1" name=""/>
+        <p:cNvGrpSpPr/>
+        <p:nvPr/>
+      </p:nvGrpSpPr>
+      <p:grpSpPr/>
+      <p:sp>
+        <p:nvSpPr>
+          <p:cNvPr id="2" name="TextBox 1"/>
+          <p:cNvSpPr txBox="1"/>
+          <p:nvPr/>
+        </p:nvSpPr>
+        <p:spPr>
+          <a:xfrm>
+            <a:off x="566928" y="347472"/>
+            <a:ext cx="10881360" cy="438912"/>
+          </a:xfrm>
+          <a:prstGeom prst="rect">
+            <a:avLst/>
+          </a:prstGeom>
+          <a:noFill/>
+        </p:spPr>
+        <p:txBody>
+          <a:bodyPr wrap="square" lIns="73152" rIns="73152" tIns="36576" bIns="36576">
+            <a:spAutoFit/>
+          </a:bodyPr>
+          <a:lstStyle/>
+          <a:p>
+            <a:pPr algn="l">
+              <a:spcAft>
+                <a:spcPts val="0"/>
+              </a:spcAft>
+              <a:defRPr sz="3200" b="1">
+                <a:solidFill>
+                  <a:srgbClr val="122C4E"/>
+                </a:solidFill>
+                <a:latin typeface="Noto Sans CJK KR"/>
+              </a:defRPr>
+            </a:pPr>
+            <a:r>
+              <a:t>객관적 검증 명령으로 완료를 확인한다</a:t>
+            </a:r>
+          </a:p>
+        </p:txBody>
+      </p:sp>
+      <p:sp>
+        <p:nvSpPr>
+          <p:cNvPr id="3" name="TextBox 2"/>
+          <p:cNvSpPr txBox="1"/>
+          <p:nvPr/>
+        </p:nvSpPr>
+        <p:spPr>
+          <a:xfrm>
+            <a:off x="603504" y="859536"/>
+            <a:ext cx="10698480" cy="292608"/>
+          </a:xfrm>
+          <a:prstGeom prst="rect">
+            <a:avLst/>
+          </a:prstGeom>
+          <a:noFill/>
+        </p:spPr>
+        <p:txBody>
+          <a:bodyPr wrap="square" lIns="73152" rIns="73152" tIns="36576" bIns="36576">
+            <a:spAutoFit/>
+          </a:bodyPr>
+          <a:lstStyle/>
+          <a:p>
+            <a:pPr algn="l">
+              <a:spcAft>
+                <a:spcPts val="0"/>
+              </a:spcAft>
+              <a:defRPr sz="1700" b="0">
+                <a:solidFill>
+                  <a:srgbClr val="5C6672"/>
+                </a:solidFill>
+                <a:latin typeface="Noto Sans CJK KR"/>
+              </a:defRPr>
+            </a:pPr>
+            <a:r>
+              <a:t>화면만 보지 말고 topic·frame·파일·parameter를 다시 확인합니다.</a:t>
+            </a:r>
+          </a:p>
+        </p:txBody>
+      </p:sp>
+      <p:sp>
+        <p:nvSpPr>
+          <p:cNvPr id="4" name="TextBox 3"/>
+          <p:cNvSpPr txBox="1"/>
+          <p:nvPr/>
+        </p:nvSpPr>
+        <p:spPr>
+          <a:xfrm>
+            <a:off x="530352" y="6510528"/>
+            <a:ext cx="7772400" cy="201168"/>
+          </a:xfrm>
+          <a:prstGeom prst="rect">
+            <a:avLst/>
+          </a:prstGeom>
+          <a:noFill/>
+        </p:spPr>
+        <p:txBody>
+          <a:bodyPr wrap="square" lIns="73152" rIns="73152" tIns="36576" bIns="36576">
+            <a:spAutoFit/>
+          </a:bodyPr>
+          <a:lstStyle/>
+          <a:p>
+            <a:pPr algn="l">
+              <a:spcAft>
+                <a:spcPts val="0"/>
+              </a:spcAft>
+              <a:defRPr sz="1000" b="0">
+                <a:solidFill>
+                  <a:srgbClr val="5C6672"/>
+                </a:solidFill>
+                <a:latin typeface="Noto Sans CJK KR"/>
+              </a:defRPr>
+            </a:pPr>
+            <a:r>
+              <a:t>ROS 2 Jazzy · Gazebo Harmonic · M12 · 따라 하기형 AGV 실습</a:t>
+            </a:r>
+          </a:p>
+        </p:txBody>
+      </p:sp>
+      <p:sp>
+        <p:nvSpPr>
+          <p:cNvPr id="5" name="TextBox 4"/>
+          <p:cNvSpPr txBox="1"/>
+          <p:nvPr/>
+        </p:nvSpPr>
+        <p:spPr>
+          <a:xfrm>
+            <a:off x="9144000" y="6510528"/>
+            <a:ext cx="2468880" cy="201168"/>
+          </a:xfrm>
+          <a:prstGeom prst="rect">
+            <a:avLst/>
+          </a:prstGeom>
+          <a:noFill/>
+        </p:spPr>
+        <p:txBody>
+          <a:bodyPr wrap="square" lIns="73152" rIns="73152" tIns="36576" bIns="36576">
+            <a:spAutoFit/>
+          </a:bodyPr>
+          <a:lstStyle/>
+          <a:p>
+            <a:pPr algn="r">
+              <a:spcAft>
+                <a:spcPts val="0"/>
+              </a:spcAft>
+              <a:defRPr sz="1000" b="0">
+                <a:solidFill>
+                  <a:srgbClr val="5C6672"/>
+                </a:solidFill>
+                <a:latin typeface="Noto Sans CJK KR"/>
+              </a:defRPr>
+            </a:pPr>
+            <a:r>
+              <a:t>명령·파일 경로는 슬라이드에서 복사 가능</a:t>
+            </a:r>
+          </a:p>
+        </p:txBody>
+      </p:sp>
+      <p:sp>
+        <p:nvSpPr>
+          <p:cNvPr id="6" name="Rectangle 5"/>
           <p:cNvSpPr/>
           <p:nvPr/>
         </p:nvSpPr>
         <p:spPr>
           <a:xfrm>
-            <a:off x="658368" y="1554480"/>
-            <a:ext cx="10972800" cy="4526280"/>
-          </a:xfrm>
-          <a:prstGeom prst="roundRect">
+            <a:off x="566928" y="1188720"/>
+            <a:ext cx="11064240" cy="347472"/>
+          </a:xfrm>
+          <a:prstGeom prst="rect">
             <a:avLst/>
           </a:prstGeom>
           <a:solidFill>
@@ -26384,7 +27824,7 @@
           </a:solidFill>
           <a:ln>
             <a:solidFill>
-              <a:srgbClr val="D7DFE9"/>
+              <a:srgbClr val="F4F7FB"/>
             </a:solidFill>
           </a:ln>
         </p:spPr>
@@ -26403,23 +27843,168 @@
           </a:fontRef>
         </p:style>
         <p:txBody>
-          <a:bodyPr rtlCol="0" anchor="ctr"/>
-          <a:lstStyle/>
-          <a:p>
-            <a:pPr algn="ctr"/>
-          </a:p>
-        </p:txBody>
-      </p:sp>
-      <p:sp>
-        <p:nvSpPr>
-          <p:cNvPr id="7" name="TextBox 6"/>
+          <a:bodyPr rtlCol="0" anchor="ctr" wrap="square" lIns="73152" rIns="73152" tIns="36576" bIns="36576"/>
+          <a:lstStyle/>
+          <a:p>
+            <a:pPr algn="l">
+              <a:spcAft>
+                <a:spcPts val="0"/>
+              </a:spcAft>
+              <a:defRPr sz="1300" b="1">
+                <a:solidFill>
+                  <a:srgbClr val="122C4E"/>
+                </a:solidFill>
+                <a:latin typeface="Noto Sans CJK KR"/>
+              </a:defRPr>
+            </a:pPr>
+            <a:r>
+              <a:t>현재 단계 검증    |    현재 폴더 ~/ros2_curri/agv_ws    |    현재 터미널</a:t>
+            </a:r>
+          </a:p>
+        </p:txBody>
+      </p:sp>
+      <p:sp>
+        <p:nvSpPr>
+          <p:cNvPr id="7" name="Rounded Rectangle 6"/>
+          <p:cNvSpPr/>
+          <p:nvPr/>
+        </p:nvSpPr>
+        <p:spPr>
+          <a:xfrm>
+            <a:off x="658368" y="1755648"/>
+            <a:ext cx="10972800" cy="2148840"/>
+          </a:xfrm>
+          <a:prstGeom prst="roundRect">
+            <a:avLst/>
+          </a:prstGeom>
+          <a:solidFill>
+            <a:srgbClr val="1D232D"/>
+          </a:solidFill>
+          <a:ln>
+            <a:solidFill>
+              <a:srgbClr val="1D232D"/>
+            </a:solidFill>
+          </a:ln>
+        </p:spPr>
+        <p:style>
+          <a:lnRef idx="1">
+            <a:schemeClr val="accent1"/>
+          </a:lnRef>
+          <a:fillRef idx="3">
+            <a:schemeClr val="accent1"/>
+          </a:fillRef>
+          <a:effectRef idx="2">
+            <a:schemeClr val="accent1"/>
+          </a:effectRef>
+          <a:fontRef idx="minor">
+            <a:schemeClr val="lt1"/>
+          </a:fontRef>
+        </p:style>
+        <p:txBody>
+          <a:bodyPr rtlCol="0" anchor="ctr" wrap="square" lIns="73152" rIns="73152" tIns="36576" bIns="36576"/>
+          <a:lstStyle/>
+          <a:p>
+            <a:pPr algn="l">
+              <a:spcAft>
+                <a:spcPts val="0"/>
+              </a:spcAft>
+              <a:defRPr sz="1600" b="0">
+                <a:solidFill>
+                  <a:srgbClr val="FFFFFF"/>
+                </a:solidFill>
+                <a:latin typeface="DejaVu Sans Mono"/>
+              </a:defRPr>
+            </a:pPr>
+            <a:r>
+              <a:t>ros2 topic info /camera/image_raw</a:t>
+            </a:r>
+            <a:br/>
+            <a:r>
+              <a:t>ros2 topic hz /camera/image_raw</a:t>
+            </a:r>
+          </a:p>
+        </p:txBody>
+      </p:sp>
+      <p:sp>
+        <p:nvSpPr>
+          <p:cNvPr id="8" name="Rounded Rectangle 7"/>
+          <p:cNvSpPr/>
+          <p:nvPr/>
+        </p:nvSpPr>
+        <p:spPr>
+          <a:xfrm>
+            <a:off x="658368" y="4206240"/>
+            <a:ext cx="10972800" cy="1554480"/>
+          </a:xfrm>
+          <a:prstGeom prst="roundRect">
+            <a:avLst/>
+          </a:prstGeom>
+          <a:solidFill>
+            <a:srgbClr val="F4F7FB"/>
+          </a:solidFill>
+          <a:ln>
+            <a:solidFill>
+              <a:srgbClr val="D1DFD5"/>
+            </a:solidFill>
+          </a:ln>
+        </p:spPr>
+        <p:style>
+          <a:lnRef idx="1">
+            <a:schemeClr val="accent1"/>
+          </a:lnRef>
+          <a:fillRef idx="3">
+            <a:schemeClr val="accent1"/>
+          </a:fillRef>
+          <a:effectRef idx="2">
+            <a:schemeClr val="accent1"/>
+          </a:effectRef>
+          <a:fontRef idx="minor">
+            <a:schemeClr val="lt1"/>
+          </a:fontRef>
+        </p:style>
+        <p:txBody>
+          <a:bodyPr rtlCol="0" anchor="ctr" wrap="square" lIns="73152" rIns="73152" tIns="36576" bIns="36576"/>
+          <a:lstStyle/>
+          <a:p>
+            <a:pPr algn="l">
+              <a:spcAft>
+                <a:spcPts val="0"/>
+              </a:spcAft>
+              <a:defRPr sz="1800" b="1">
+                <a:solidFill>
+                  <a:srgbClr val="2A8B5A"/>
+                </a:solidFill>
+                <a:latin typeface="Noto Sans CJK KR"/>
+              </a:defRPr>
+            </a:pPr>
+            <a:r>
+              <a:t>완료 체크</a:t>
+            </a:r>
+            <a:br/>
+            <a:r>
+              <a:t>□ 명령이 오류 없이 실행된다.</a:t>
+            </a:r>
+            <a:br/>
+            <a:r>
+              <a:t>□ 기대한 파일·topic·frame·parameter 이름이 보인다.</a:t>
+            </a:r>
+            <a:br/>
+            <a:r>
+              <a:t>□ 값의 단위와 방향을 한 문장으로 설명할 수 있다.</a:t>
+            </a:r>
+          </a:p>
+        </p:txBody>
+      </p:sp>
+      <p:sp>
+        <p:nvSpPr>
+          <p:cNvPr id="9" name="TextBox 8"/>
           <p:cNvSpPr txBox="1"/>
           <p:nvPr/>
         </p:nvSpPr>
         <p:spPr>
           <a:xfrm>
-            <a:off x="914400" y="1773936"/>
-            <a:ext cx="3840480" cy="256032"/>
+            <a:off x="731520" y="5989320"/>
+            <a:ext cx="10789920" cy="237744"/>
           </a:xfrm>
           <a:prstGeom prst="rect">
             <a:avLst/>
@@ -26436,7 +28021,7 @@
               <a:spcAft>
                 <a:spcPts val="0"/>
               </a:spcAft>
-              <a:defRPr sz="1700" b="1">
+              <a:defRPr sz="1500" b="1">
                 <a:solidFill>
                   <a:srgbClr val="122C4E"/>
                 </a:solidFill>
@@ -26444,280 +28029,7 @@
               </a:defRPr>
             </a:pPr>
             <a:r>
-              <a:t>ROS 2 Jazzy — Gazebo Simulation</a:t>
-            </a:r>
-          </a:p>
-        </p:txBody>
-      </p:sp>
-      <p:sp>
-        <p:nvSpPr>
-          <p:cNvPr id="8" name="TextBox 7"/>
-          <p:cNvSpPr txBox="1"/>
-          <p:nvPr/>
-        </p:nvSpPr>
-        <p:spPr>
-          <a:xfrm>
-            <a:off x="914400" y="2048255"/>
-            <a:ext cx="9966960" cy="475488"/>
-          </a:xfrm>
-          <a:prstGeom prst="rect">
-            <a:avLst/>
-          </a:prstGeom>
-          <a:noFill/>
-        </p:spPr>
-        <p:txBody>
-          <a:bodyPr wrap="square" lIns="73152" rIns="73152" tIns="36576" bIns="36576">
-            <a:spAutoFit/>
-          </a:bodyPr>
-          <a:lstStyle/>
-          <a:p>
-            <a:pPr algn="l">
-              <a:spcAft>
-                <a:spcPts val="0"/>
-              </a:spcAft>
-              <a:defRPr sz="1000" b="0">
-                <a:solidFill>
-                  <a:srgbClr val="225B9B"/>
-                </a:solidFill>
-                <a:latin typeface="DejaVu Sans Mono"/>
-              </a:defRPr>
-            </a:pPr>
-            <a:r>
-              <a:t>https://docs.ros.org/en/jazzy/Tutorials/Advanced/Simulators/Gazebo/Simulation-Gazebo.html</a:t>
-            </a:r>
-          </a:p>
-        </p:txBody>
-      </p:sp>
-      <p:sp>
-        <p:nvSpPr>
-          <p:cNvPr id="9" name="TextBox 8"/>
-          <p:cNvSpPr txBox="1"/>
-          <p:nvPr/>
-        </p:nvSpPr>
-        <p:spPr>
-          <a:xfrm>
-            <a:off x="914400" y="2852928"/>
-            <a:ext cx="3840480" cy="256032"/>
-          </a:xfrm>
-          <a:prstGeom prst="rect">
-            <a:avLst/>
-          </a:prstGeom>
-          <a:noFill/>
-        </p:spPr>
-        <p:txBody>
-          <a:bodyPr wrap="square" lIns="73152" rIns="73152" tIns="36576" bIns="36576">
-            <a:spAutoFit/>
-          </a:bodyPr>
-          <a:lstStyle/>
-          <a:p>
-            <a:pPr algn="l">
-              <a:spcAft>
-                <a:spcPts val="0"/>
-              </a:spcAft>
-              <a:defRPr sz="1700" b="1">
-                <a:solidFill>
-                  <a:srgbClr val="122C4E"/>
-                </a:solidFill>
-                <a:latin typeface="Noto Sans CJK KR"/>
-              </a:defRPr>
-            </a:pPr>
-            <a:r>
-              <a:t>ROS 2 Jazzy — URDF / robot_state_publisher</a:t>
-            </a:r>
-          </a:p>
-        </p:txBody>
-      </p:sp>
-      <p:sp>
-        <p:nvSpPr>
-          <p:cNvPr id="10" name="TextBox 9"/>
-          <p:cNvSpPr txBox="1"/>
-          <p:nvPr/>
-        </p:nvSpPr>
-        <p:spPr>
-          <a:xfrm>
-            <a:off x="914400" y="3127248"/>
-            <a:ext cx="9966960" cy="475488"/>
-          </a:xfrm>
-          <a:prstGeom prst="rect">
-            <a:avLst/>
-          </a:prstGeom>
-          <a:noFill/>
-        </p:spPr>
-        <p:txBody>
-          <a:bodyPr wrap="square" lIns="73152" rIns="73152" tIns="36576" bIns="36576">
-            <a:spAutoFit/>
-          </a:bodyPr>
-          <a:lstStyle/>
-          <a:p>
-            <a:pPr algn="l">
-              <a:spcAft>
-                <a:spcPts val="0"/>
-              </a:spcAft>
-              <a:defRPr sz="1000" b="0">
-                <a:solidFill>
-                  <a:srgbClr val="225B9B"/>
-                </a:solidFill>
-                <a:latin typeface="DejaVu Sans Mono"/>
-              </a:defRPr>
-            </a:pPr>
-            <a:r>
-              <a:t>https://docs.ros.org/en/jazzy/Tutorials/Intermediate/URDF/Using-URDF-with-Robot-State-Publisher-py.html</a:t>
-            </a:r>
-          </a:p>
-        </p:txBody>
-      </p:sp>
-      <p:sp>
-        <p:nvSpPr>
-          <p:cNvPr id="11" name="TextBox 10"/>
-          <p:cNvSpPr txBox="1"/>
-          <p:nvPr/>
-        </p:nvSpPr>
-        <p:spPr>
-          <a:xfrm>
-            <a:off x="914400" y="3931920"/>
-            <a:ext cx="3840480" cy="256032"/>
-          </a:xfrm>
-          <a:prstGeom prst="rect">
-            <a:avLst/>
-          </a:prstGeom>
-          <a:noFill/>
-        </p:spPr>
-        <p:txBody>
-          <a:bodyPr wrap="square" lIns="73152" rIns="73152" tIns="36576" bIns="36576">
-            <a:spAutoFit/>
-          </a:bodyPr>
-          <a:lstStyle/>
-          <a:p>
-            <a:pPr algn="l">
-              <a:spcAft>
-                <a:spcPts val="0"/>
-              </a:spcAft>
-              <a:defRPr sz="1700" b="1">
-                <a:solidFill>
-                  <a:srgbClr val="122C4E"/>
-                </a:solidFill>
-                <a:latin typeface="Noto Sans CJK KR"/>
-              </a:defRPr>
-            </a:pPr>
-            <a:r>
-              <a:t>Gazebo — ROS 2 Integration / ros_gz_bridge</a:t>
-            </a:r>
-          </a:p>
-        </p:txBody>
-      </p:sp>
-      <p:sp>
-        <p:nvSpPr>
-          <p:cNvPr id="12" name="TextBox 11"/>
-          <p:cNvSpPr txBox="1"/>
-          <p:nvPr/>
-        </p:nvSpPr>
-        <p:spPr>
-          <a:xfrm>
-            <a:off x="914400" y="4206240"/>
-            <a:ext cx="9966960" cy="475488"/>
-          </a:xfrm>
-          <a:prstGeom prst="rect">
-            <a:avLst/>
-          </a:prstGeom>
-          <a:noFill/>
-        </p:spPr>
-        <p:txBody>
-          <a:bodyPr wrap="square" lIns="73152" rIns="73152" tIns="36576" bIns="36576">
-            <a:spAutoFit/>
-          </a:bodyPr>
-          <a:lstStyle/>
-          <a:p>
-            <a:pPr algn="l">
-              <a:spcAft>
-                <a:spcPts val="0"/>
-              </a:spcAft>
-              <a:defRPr sz="1000" b="0">
-                <a:solidFill>
-                  <a:srgbClr val="225B9B"/>
-                </a:solidFill>
-                <a:latin typeface="DejaVu Sans Mono"/>
-              </a:defRPr>
-            </a:pPr>
-            <a:r>
-              <a:t>https://gazebosim.org/docs/latest/ros2_integration/</a:t>
-            </a:r>
-          </a:p>
-        </p:txBody>
-      </p:sp>
-      <p:sp>
-        <p:nvSpPr>
-          <p:cNvPr id="13" name="TextBox 12"/>
-          <p:cNvSpPr txBox="1"/>
-          <p:nvPr/>
-        </p:nvSpPr>
-        <p:spPr>
-          <a:xfrm>
-            <a:off x="914400" y="5010912"/>
-            <a:ext cx="3840480" cy="256032"/>
-          </a:xfrm>
-          <a:prstGeom prst="rect">
-            <a:avLst/>
-          </a:prstGeom>
-          <a:noFill/>
-        </p:spPr>
-        <p:txBody>
-          <a:bodyPr wrap="square" lIns="73152" rIns="73152" tIns="36576" bIns="36576">
-            <a:spAutoFit/>
-          </a:bodyPr>
-          <a:lstStyle/>
-          <a:p>
-            <a:pPr algn="l">
-              <a:spcAft>
-                <a:spcPts val="0"/>
-              </a:spcAft>
-              <a:defRPr sz="1700" b="1">
-                <a:solidFill>
-                  <a:srgbClr val="122C4E"/>
-                </a:solidFill>
-                <a:latin typeface="Noto Sans CJK KR"/>
-              </a:defRPr>
-            </a:pPr>
-            <a:r>
-              <a:t>ROS 2 Jazzy — rosbag2 Recording and Playback</a:t>
-            </a:r>
-          </a:p>
-        </p:txBody>
-      </p:sp>
-      <p:sp>
-        <p:nvSpPr>
-          <p:cNvPr id="14" name="TextBox 13"/>
-          <p:cNvSpPr txBox="1"/>
-          <p:nvPr/>
-        </p:nvSpPr>
-        <p:spPr>
-          <a:xfrm>
-            <a:off x="914400" y="5285232"/>
-            <a:ext cx="9966960" cy="475488"/>
-          </a:xfrm>
-          <a:prstGeom prst="rect">
-            <a:avLst/>
-          </a:prstGeom>
-          <a:noFill/>
-        </p:spPr>
-        <p:txBody>
-          <a:bodyPr wrap="square" lIns="73152" rIns="73152" tIns="36576" bIns="36576">
-            <a:spAutoFit/>
-          </a:bodyPr>
-          <a:lstStyle/>
-          <a:p>
-            <a:pPr algn="l">
-              <a:spcAft>
-                <a:spcPts val="0"/>
-              </a:spcAft>
-              <a:defRPr sz="1000" b="0">
-                <a:solidFill>
-                  <a:srgbClr val="225B9B"/>
-                </a:solidFill>
-                <a:latin typeface="DejaVu Sans Mono"/>
-              </a:defRPr>
-            </a:pPr>
-            <a:r>
-              <a:t>https://docs.ros.org/en/jazzy/Tutorials/Beginner-CLI-Tools/Recording-And-Playing-Back-Data/Recording-And-Playing-Back-Data.html</a:t>
+              <a:t>완료 조건: /camera/image_raw가 bridge를 통과하고 cv_bridge 소비 노드가 받을 준비가 된 상태를 확인한다.</a:t>
             </a:r>
           </a:p>
         </p:txBody>
@@ -27280,6 +28592,1810 @@
 </p:sld>
 </file>
 
+<file path=ppt/slides/slide50.xml><?xml version="1.0" encoding="utf-8"?>
+<p:sld xmlns:a="http://schemas.openxmlformats.org/drawingml/2006/main" xmlns:p="http://schemas.openxmlformats.org/presentationml/2006/main" xmlns:r="http://schemas.openxmlformats.org/officeDocument/2006/relationships">
+  <p:cSld>
+    <p:spTree>
+      <p:nvGrpSpPr>
+        <p:cNvPr id="1" name=""/>
+        <p:cNvGrpSpPr/>
+        <p:nvPr/>
+      </p:nvGrpSpPr>
+      <p:grpSpPr/>
+      <p:sp>
+        <p:nvSpPr>
+          <p:cNvPr id="2" name="TextBox 1"/>
+          <p:cNvSpPr txBox="1"/>
+          <p:nvPr/>
+        </p:nvSpPr>
+        <p:spPr>
+          <a:xfrm>
+            <a:off x="566928" y="347472"/>
+            <a:ext cx="10881360" cy="438912"/>
+          </a:xfrm>
+          <a:prstGeom prst="rect">
+            <a:avLst/>
+          </a:prstGeom>
+          <a:noFill/>
+        </p:spPr>
+        <p:txBody>
+          <a:bodyPr wrap="square" lIns="73152" rIns="73152" tIns="36576" bIns="36576">
+            <a:spAutoFit/>
+          </a:bodyPr>
+          <a:lstStyle/>
+          <a:p>
+            <a:pPr algn="l">
+              <a:spcAft>
+                <a:spcPts val="0"/>
+              </a:spcAft>
+              <a:defRPr sz="3200" b="1">
+                <a:solidFill>
+                  <a:srgbClr val="122C4E"/>
+                </a:solidFill>
+                <a:latin typeface="Noto Sans CJK KR"/>
+              </a:defRPr>
+            </a:pPr>
+            <a:r>
+              <a:t>막히면: 증상 → 우선 확인 → 재검증</a:t>
+            </a:r>
+          </a:p>
+        </p:txBody>
+      </p:sp>
+      <p:sp>
+        <p:nvSpPr>
+          <p:cNvPr id="3" name="TextBox 2"/>
+          <p:cNvSpPr txBox="1"/>
+          <p:nvPr/>
+        </p:nvSpPr>
+        <p:spPr>
+          <a:xfrm>
+            <a:off x="603504" y="859536"/>
+            <a:ext cx="10698480" cy="292608"/>
+          </a:xfrm>
+          <a:prstGeom prst="rect">
+            <a:avLst/>
+          </a:prstGeom>
+          <a:noFill/>
+        </p:spPr>
+        <p:txBody>
+          <a:bodyPr wrap="square" lIns="73152" rIns="73152" tIns="36576" bIns="36576">
+            <a:spAutoFit/>
+          </a:bodyPr>
+          <a:lstStyle/>
+          <a:p>
+            <a:pPr algn="l">
+              <a:spcAft>
+                <a:spcPts val="0"/>
+              </a:spcAft>
+              <a:defRPr sz="1700" b="0">
+                <a:solidFill>
+                  <a:srgbClr val="5C6672"/>
+                </a:solidFill>
+                <a:latin typeface="Noto Sans CJK KR"/>
+              </a:defRPr>
+            </a:pPr>
+            <a:r>
+              <a:t>오류 메시지를 숨기지 않고 같은 순서로 점검합니다.</a:t>
+            </a:r>
+          </a:p>
+        </p:txBody>
+      </p:sp>
+      <p:sp>
+        <p:nvSpPr>
+          <p:cNvPr id="4" name="TextBox 3"/>
+          <p:cNvSpPr txBox="1"/>
+          <p:nvPr/>
+        </p:nvSpPr>
+        <p:spPr>
+          <a:xfrm>
+            <a:off x="530352" y="6510528"/>
+            <a:ext cx="7772400" cy="201168"/>
+          </a:xfrm>
+          <a:prstGeom prst="rect">
+            <a:avLst/>
+          </a:prstGeom>
+          <a:noFill/>
+        </p:spPr>
+        <p:txBody>
+          <a:bodyPr wrap="square" lIns="73152" rIns="73152" tIns="36576" bIns="36576">
+            <a:spAutoFit/>
+          </a:bodyPr>
+          <a:lstStyle/>
+          <a:p>
+            <a:pPr algn="l">
+              <a:spcAft>
+                <a:spcPts val="0"/>
+              </a:spcAft>
+              <a:defRPr sz="1000" b="0">
+                <a:solidFill>
+                  <a:srgbClr val="5C6672"/>
+                </a:solidFill>
+                <a:latin typeface="Noto Sans CJK KR"/>
+              </a:defRPr>
+            </a:pPr>
+            <a:r>
+              <a:t>ROS 2 Jazzy · Gazebo Harmonic · M12 · 따라 하기형 AGV 실습</a:t>
+            </a:r>
+          </a:p>
+        </p:txBody>
+      </p:sp>
+      <p:sp>
+        <p:nvSpPr>
+          <p:cNvPr id="5" name="TextBox 4"/>
+          <p:cNvSpPr txBox="1"/>
+          <p:nvPr/>
+        </p:nvSpPr>
+        <p:spPr>
+          <a:xfrm>
+            <a:off x="9144000" y="6510528"/>
+            <a:ext cx="2468880" cy="201168"/>
+          </a:xfrm>
+          <a:prstGeom prst="rect">
+            <a:avLst/>
+          </a:prstGeom>
+          <a:noFill/>
+        </p:spPr>
+        <p:txBody>
+          <a:bodyPr wrap="square" lIns="73152" rIns="73152" tIns="36576" bIns="36576">
+            <a:spAutoFit/>
+          </a:bodyPr>
+          <a:lstStyle/>
+          <a:p>
+            <a:pPr algn="r">
+              <a:spcAft>
+                <a:spcPts val="0"/>
+              </a:spcAft>
+              <a:defRPr sz="1000" b="0">
+                <a:solidFill>
+                  <a:srgbClr val="5C6672"/>
+                </a:solidFill>
+                <a:latin typeface="Noto Sans CJK KR"/>
+              </a:defRPr>
+            </a:pPr>
+            <a:r>
+              <a:t>명령·파일 경로는 슬라이드에서 복사 가능</a:t>
+            </a:r>
+          </a:p>
+        </p:txBody>
+      </p:sp>
+      <p:sp>
+        <p:nvSpPr>
+          <p:cNvPr id="6" name="Rectangle 5"/>
+          <p:cNvSpPr/>
+          <p:nvPr/>
+        </p:nvSpPr>
+        <p:spPr>
+          <a:xfrm>
+            <a:off x="566928" y="1188720"/>
+            <a:ext cx="11064240" cy="347472"/>
+          </a:xfrm>
+          <a:prstGeom prst="rect">
+            <a:avLst/>
+          </a:prstGeom>
+          <a:solidFill>
+            <a:srgbClr val="F4F7FB"/>
+          </a:solidFill>
+          <a:ln>
+            <a:solidFill>
+              <a:srgbClr val="F4F7FB"/>
+            </a:solidFill>
+          </a:ln>
+        </p:spPr>
+        <p:style>
+          <a:lnRef idx="1">
+            <a:schemeClr val="accent1"/>
+          </a:lnRef>
+          <a:fillRef idx="3">
+            <a:schemeClr val="accent1"/>
+          </a:fillRef>
+          <a:effectRef idx="2">
+            <a:schemeClr val="accent1"/>
+          </a:effectRef>
+          <a:fontRef idx="minor">
+            <a:schemeClr val="lt1"/>
+          </a:fontRef>
+        </p:style>
+        <p:txBody>
+          <a:bodyPr rtlCol="0" anchor="ctr" wrap="square" lIns="73152" rIns="73152" tIns="36576" bIns="36576"/>
+          <a:lstStyle/>
+          <a:p>
+            <a:pPr algn="l">
+              <a:spcAft>
+                <a:spcPts val="0"/>
+              </a:spcAft>
+              <a:defRPr sz="1300" b="1">
+                <a:solidFill>
+                  <a:srgbClr val="122C4E"/>
+                </a:solidFill>
+                <a:latin typeface="Noto Sans CJK KR"/>
+              </a:defRPr>
+            </a:pPr>
+            <a:r>
+              <a:t>현재 단계 오류 대응    |    현재 폴더 ~/ros2_curri/agv_ws    |    현재 터미널</a:t>
+            </a:r>
+          </a:p>
+        </p:txBody>
+      </p:sp>
+      <p:sp>
+        <p:nvSpPr>
+          <p:cNvPr id="7" name="Rounded Rectangle 6"/>
+          <p:cNvSpPr/>
+          <p:nvPr/>
+        </p:nvSpPr>
+        <p:spPr>
+          <a:xfrm>
+            <a:off x="694944" y="1755648"/>
+            <a:ext cx="10972800" cy="1115568"/>
+          </a:xfrm>
+          <a:prstGeom prst="roundRect">
+            <a:avLst/>
+          </a:prstGeom>
+          <a:solidFill>
+            <a:srgbClr val="FFF7F4"/>
+          </a:solidFill>
+          <a:ln>
+            <a:solidFill>
+              <a:srgbClr val="EDBEB4"/>
+            </a:solidFill>
+          </a:ln>
+        </p:spPr>
+        <p:style>
+          <a:lnRef idx="1">
+            <a:schemeClr val="accent1"/>
+          </a:lnRef>
+          <a:fillRef idx="3">
+            <a:schemeClr val="accent1"/>
+          </a:fillRef>
+          <a:effectRef idx="2">
+            <a:schemeClr val="accent1"/>
+          </a:effectRef>
+          <a:fontRef idx="minor">
+            <a:schemeClr val="lt1"/>
+          </a:fontRef>
+        </p:style>
+        <p:txBody>
+          <a:bodyPr rtlCol="0" anchor="ctr"/>
+          <a:lstStyle/>
+          <a:p>
+            <a:pPr algn="ctr"/>
+          </a:p>
+        </p:txBody>
+      </p:sp>
+      <p:sp>
+        <p:nvSpPr>
+          <p:cNvPr id="8" name="TextBox 7"/>
+          <p:cNvSpPr txBox="1"/>
+          <p:nvPr/>
+        </p:nvSpPr>
+        <p:spPr>
+          <a:xfrm>
+            <a:off x="896112" y="1901952"/>
+            <a:ext cx="2926080" cy="274320"/>
+          </a:xfrm>
+          <a:prstGeom prst="rect">
+            <a:avLst/>
+          </a:prstGeom>
+          <a:noFill/>
+        </p:spPr>
+        <p:txBody>
+          <a:bodyPr wrap="square" lIns="73152" rIns="73152" tIns="36576" bIns="36576">
+            <a:spAutoFit/>
+          </a:bodyPr>
+          <a:lstStyle/>
+          <a:p>
+            <a:pPr algn="l">
+              <a:spcAft>
+                <a:spcPts val="0"/>
+              </a:spcAft>
+              <a:defRPr sz="1800" b="1">
+                <a:solidFill>
+                  <a:srgbClr val="BE3B3B"/>
+                </a:solidFill>
+                <a:latin typeface="Noto Sans CJK KR"/>
+              </a:defRPr>
+            </a:pPr>
+            <a:r>
+              <a:t>증상 1: 영상이 검정</a:t>
+            </a:r>
+          </a:p>
+        </p:txBody>
+      </p:sp>
+      <p:sp>
+        <p:nvSpPr>
+          <p:cNvPr id="9" name="TextBox 8"/>
+          <p:cNvSpPr txBox="1"/>
+          <p:nvPr/>
+        </p:nvSpPr>
+        <p:spPr>
+          <a:xfrm>
+            <a:off x="3794760" y="1883664"/>
+            <a:ext cx="7543800" cy="621792"/>
+          </a:xfrm>
+          <a:prstGeom prst="rect">
+            <a:avLst/>
+          </a:prstGeom>
+          <a:noFill/>
+        </p:spPr>
+        <p:txBody>
+          <a:bodyPr wrap="square" lIns="73152" rIns="73152" tIns="36576" bIns="36576">
+            <a:spAutoFit/>
+          </a:bodyPr>
+          <a:lstStyle/>
+          <a:p>
+            <a:pPr algn="l">
+              <a:spcAft>
+                <a:spcPts val="0"/>
+              </a:spcAft>
+              <a:defRPr sz="1600" b="0">
+                <a:solidFill>
+                  <a:srgbClr val="122C4E"/>
+                </a:solidFill>
+                <a:latin typeface="Noto Sans CJK KR"/>
+              </a:defRPr>
+            </a:pPr>
+            <a:r>
+              <a:t>우선 확인: camera pose/FOV·world light·clipping range를 확인한다.</a:t>
+            </a:r>
+            <a:br/>
+            <a:r>
+              <a:t>수정 후: ros2 topic info /camera/image_raw</a:t>
+            </a:r>
+          </a:p>
+        </p:txBody>
+      </p:sp>
+      <p:sp>
+        <p:nvSpPr>
+          <p:cNvPr id="10" name="Rounded Rectangle 9"/>
+          <p:cNvSpPr/>
+          <p:nvPr/>
+        </p:nvSpPr>
+        <p:spPr>
+          <a:xfrm>
+            <a:off x="694944" y="3172968"/>
+            <a:ext cx="10972800" cy="1115568"/>
+          </a:xfrm>
+          <a:prstGeom prst="roundRect">
+            <a:avLst/>
+          </a:prstGeom>
+          <a:solidFill>
+            <a:srgbClr val="FFF7F4"/>
+          </a:solidFill>
+          <a:ln>
+            <a:solidFill>
+              <a:srgbClr val="EDBEB4"/>
+            </a:solidFill>
+          </a:ln>
+        </p:spPr>
+        <p:style>
+          <a:lnRef idx="1">
+            <a:schemeClr val="accent1"/>
+          </a:lnRef>
+          <a:fillRef idx="3">
+            <a:schemeClr val="accent1"/>
+          </a:fillRef>
+          <a:effectRef idx="2">
+            <a:schemeClr val="accent1"/>
+          </a:effectRef>
+          <a:fontRef idx="minor">
+            <a:schemeClr val="lt1"/>
+          </a:fontRef>
+        </p:style>
+        <p:txBody>
+          <a:bodyPr rtlCol="0" anchor="ctr"/>
+          <a:lstStyle/>
+          <a:p>
+            <a:pPr algn="ctr"/>
+          </a:p>
+        </p:txBody>
+      </p:sp>
+      <p:sp>
+        <p:nvSpPr>
+          <p:cNvPr id="11" name="TextBox 10"/>
+          <p:cNvSpPr txBox="1"/>
+          <p:nvPr/>
+        </p:nvSpPr>
+        <p:spPr>
+          <a:xfrm>
+            <a:off x="896112" y="3319272"/>
+            <a:ext cx="2926080" cy="274320"/>
+          </a:xfrm>
+          <a:prstGeom prst="rect">
+            <a:avLst/>
+          </a:prstGeom>
+          <a:noFill/>
+        </p:spPr>
+        <p:txBody>
+          <a:bodyPr wrap="square" lIns="73152" rIns="73152" tIns="36576" bIns="36576">
+            <a:spAutoFit/>
+          </a:bodyPr>
+          <a:lstStyle/>
+          <a:p>
+            <a:pPr algn="l">
+              <a:spcAft>
+                <a:spcPts val="0"/>
+              </a:spcAft>
+              <a:defRPr sz="1800" b="1">
+                <a:solidFill>
+                  <a:srgbClr val="BE3B3B"/>
+                </a:solidFill>
+                <a:latin typeface="Noto Sans CJK KR"/>
+              </a:defRPr>
+            </a:pPr>
+            <a:r>
+              <a:t>증상 2: RViz 이미지가 비어 있음</a:t>
+            </a:r>
+          </a:p>
+        </p:txBody>
+      </p:sp>
+      <p:sp>
+        <p:nvSpPr>
+          <p:cNvPr id="12" name="TextBox 11"/>
+          <p:cNvSpPr txBox="1"/>
+          <p:nvPr/>
+        </p:nvSpPr>
+        <p:spPr>
+          <a:xfrm>
+            <a:off x="3794760" y="3300984"/>
+            <a:ext cx="7543800" cy="621792"/>
+          </a:xfrm>
+          <a:prstGeom prst="rect">
+            <a:avLst/>
+          </a:prstGeom>
+          <a:noFill/>
+        </p:spPr>
+        <p:txBody>
+          <a:bodyPr wrap="square" lIns="73152" rIns="73152" tIns="36576" bIns="36576">
+            <a:spAutoFit/>
+          </a:bodyPr>
+          <a:lstStyle/>
+          <a:p>
+            <a:pPr algn="l">
+              <a:spcAft>
+                <a:spcPts val="0"/>
+              </a:spcAft>
+              <a:defRPr sz="1600" b="0">
+                <a:solidFill>
+                  <a:srgbClr val="122C4E"/>
+                </a:solidFill>
+                <a:latin typeface="Noto Sans CJK KR"/>
+              </a:defRPr>
+            </a:pPr>
+            <a:r>
+              <a:t>우선 확인: Image topic·QoS·bridge mapping을 확인한다.</a:t>
+            </a:r>
+            <a:br/>
+            <a:r>
+              <a:t>수정 후: ros2 topic info /camera/image_raw</a:t>
+            </a:r>
+          </a:p>
+        </p:txBody>
+      </p:sp>
+      <p:sp>
+        <p:nvSpPr>
+          <p:cNvPr id="13" name="TextBox 12"/>
+          <p:cNvSpPr txBox="1"/>
+          <p:nvPr/>
+        </p:nvSpPr>
+        <p:spPr>
+          <a:xfrm>
+            <a:off x="822960" y="5102352"/>
+            <a:ext cx="10607040" cy="402336"/>
+          </a:xfrm>
+          <a:prstGeom prst="rect">
+            <a:avLst/>
+          </a:prstGeom>
+          <a:noFill/>
+        </p:spPr>
+        <p:txBody>
+          <a:bodyPr wrap="square" lIns="73152" rIns="73152" tIns="36576" bIns="36576">
+            <a:spAutoFit/>
+          </a:bodyPr>
+          <a:lstStyle/>
+          <a:p>
+            <a:pPr algn="ctr">
+              <a:spcAft>
+                <a:spcPts val="0"/>
+              </a:spcAft>
+              <a:defRPr sz="1800" b="1">
+                <a:solidFill>
+                  <a:srgbClr val="DB7E22"/>
+                </a:solidFill>
+                <a:latin typeface="Noto Sans CJK KR"/>
+              </a:defRPr>
+            </a:pPr>
+            <a:r>
+              <a:t>공통 순서: ① 현재 폴더 ② source ③ 파일 경로 ④ 이름/타입/단위 ⑤ build·source 후 재실행</a:t>
+            </a:r>
+          </a:p>
+        </p:txBody>
+      </p:sp>
+    </p:spTree>
+  </p:cSld>
+  <p:clrMapOvr>
+    <a:masterClrMapping/>
+  </p:clrMapOvr>
+</p:sld>
+</file>
+
+<file path=ppt/slides/slide51.xml><?xml version="1.0" encoding="utf-8"?>
+<p:sld xmlns:a="http://schemas.openxmlformats.org/drawingml/2006/main" xmlns:p="http://schemas.openxmlformats.org/presentationml/2006/main" xmlns:r="http://schemas.openxmlformats.org/officeDocument/2006/relationships">
+  <p:cSld>
+    <p:spTree>
+      <p:nvGrpSpPr>
+        <p:cNvPr id="1" name=""/>
+        <p:cNvGrpSpPr/>
+        <p:nvPr/>
+      </p:nvGrpSpPr>
+      <p:grpSpPr/>
+      <p:sp>
+        <p:nvSpPr>
+          <p:cNvPr id="2" name="TextBox 1"/>
+          <p:cNvSpPr txBox="1"/>
+          <p:nvPr/>
+        </p:nvSpPr>
+        <p:spPr>
+          <a:xfrm>
+            <a:off x="566928" y="347472"/>
+            <a:ext cx="10881360" cy="438912"/>
+          </a:xfrm>
+          <a:prstGeom prst="rect">
+            <a:avLst/>
+          </a:prstGeom>
+          <a:noFill/>
+        </p:spPr>
+        <p:txBody>
+          <a:bodyPr wrap="square" lIns="73152" rIns="73152" tIns="36576" bIns="36576">
+            <a:spAutoFit/>
+          </a:bodyPr>
+          <a:lstStyle/>
+          <a:p>
+            <a:pPr algn="l">
+              <a:spcAft>
+                <a:spcPts val="0"/>
+              </a:spcAft>
+              <a:defRPr sz="3200" b="1">
+                <a:solidFill>
+                  <a:srgbClr val="122C4E"/>
+                </a:solidFill>
+                <a:latin typeface="Noto Sans CJK KR"/>
+              </a:defRPr>
+            </a:pPr>
+            <a:r>
+              <a:t>미니 실습: 값 하나를 바꾸고 결과를 비교한다</a:t>
+            </a:r>
+          </a:p>
+        </p:txBody>
+      </p:sp>
+      <p:sp>
+        <p:nvSpPr>
+          <p:cNvPr id="3" name="TextBox 2"/>
+          <p:cNvSpPr txBox="1"/>
+          <p:nvPr/>
+        </p:nvSpPr>
+        <p:spPr>
+          <a:xfrm>
+            <a:off x="603504" y="859536"/>
+            <a:ext cx="10698480" cy="292608"/>
+          </a:xfrm>
+          <a:prstGeom prst="rect">
+            <a:avLst/>
+          </a:prstGeom>
+          <a:noFill/>
+        </p:spPr>
+        <p:txBody>
+          <a:bodyPr wrap="square" lIns="73152" rIns="73152" tIns="36576" bIns="36576">
+            <a:spAutoFit/>
+          </a:bodyPr>
+          <a:lstStyle/>
+          <a:p>
+            <a:pPr algn="l">
+              <a:spcAft>
+                <a:spcPts val="0"/>
+              </a:spcAft>
+              <a:defRPr sz="1700" b="0">
+                <a:solidFill>
+                  <a:srgbClr val="5C6672"/>
+                </a:solidFill>
+                <a:latin typeface="Noto Sans CJK KR"/>
+              </a:defRPr>
+            </a:pPr>
+            <a:r>
+              <a:t>정상 결과를 만든 뒤에는 한 번에 하나의 값만 바꿉니다.</a:t>
+            </a:r>
+          </a:p>
+        </p:txBody>
+      </p:sp>
+      <p:sp>
+        <p:nvSpPr>
+          <p:cNvPr id="4" name="TextBox 3"/>
+          <p:cNvSpPr txBox="1"/>
+          <p:nvPr/>
+        </p:nvSpPr>
+        <p:spPr>
+          <a:xfrm>
+            <a:off x="530352" y="6510528"/>
+            <a:ext cx="7772400" cy="201168"/>
+          </a:xfrm>
+          <a:prstGeom prst="rect">
+            <a:avLst/>
+          </a:prstGeom>
+          <a:noFill/>
+        </p:spPr>
+        <p:txBody>
+          <a:bodyPr wrap="square" lIns="73152" rIns="73152" tIns="36576" bIns="36576">
+            <a:spAutoFit/>
+          </a:bodyPr>
+          <a:lstStyle/>
+          <a:p>
+            <a:pPr algn="l">
+              <a:spcAft>
+                <a:spcPts val="0"/>
+              </a:spcAft>
+              <a:defRPr sz="1000" b="0">
+                <a:solidFill>
+                  <a:srgbClr val="5C6672"/>
+                </a:solidFill>
+                <a:latin typeface="Noto Sans CJK KR"/>
+              </a:defRPr>
+            </a:pPr>
+            <a:r>
+              <a:t>ROS 2 Jazzy · Gazebo Harmonic · M12 · 따라 하기형 AGV 실습</a:t>
+            </a:r>
+          </a:p>
+        </p:txBody>
+      </p:sp>
+      <p:sp>
+        <p:nvSpPr>
+          <p:cNvPr id="5" name="TextBox 4"/>
+          <p:cNvSpPr txBox="1"/>
+          <p:nvPr/>
+        </p:nvSpPr>
+        <p:spPr>
+          <a:xfrm>
+            <a:off x="9144000" y="6510528"/>
+            <a:ext cx="2468880" cy="201168"/>
+          </a:xfrm>
+          <a:prstGeom prst="rect">
+            <a:avLst/>
+          </a:prstGeom>
+          <a:noFill/>
+        </p:spPr>
+        <p:txBody>
+          <a:bodyPr wrap="square" lIns="73152" rIns="73152" tIns="36576" bIns="36576">
+            <a:spAutoFit/>
+          </a:bodyPr>
+          <a:lstStyle/>
+          <a:p>
+            <a:pPr algn="r">
+              <a:spcAft>
+                <a:spcPts val="0"/>
+              </a:spcAft>
+              <a:defRPr sz="1000" b="0">
+                <a:solidFill>
+                  <a:srgbClr val="5C6672"/>
+                </a:solidFill>
+                <a:latin typeface="Noto Sans CJK KR"/>
+              </a:defRPr>
+            </a:pPr>
+            <a:r>
+              <a:t>명령·파일 경로는 슬라이드에서 복사 가능</a:t>
+            </a:r>
+          </a:p>
+        </p:txBody>
+      </p:sp>
+      <p:sp>
+        <p:nvSpPr>
+          <p:cNvPr id="6" name="Rectangle 5"/>
+          <p:cNvSpPr/>
+          <p:nvPr/>
+        </p:nvSpPr>
+        <p:spPr>
+          <a:xfrm>
+            <a:off x="566928" y="1188720"/>
+            <a:ext cx="11064240" cy="347472"/>
+          </a:xfrm>
+          <a:prstGeom prst="rect">
+            <a:avLst/>
+          </a:prstGeom>
+          <a:solidFill>
+            <a:srgbClr val="F4F7FB"/>
+          </a:solidFill>
+          <a:ln>
+            <a:solidFill>
+              <a:srgbClr val="F4F7FB"/>
+            </a:solidFill>
+          </a:ln>
+        </p:spPr>
+        <p:style>
+          <a:lnRef idx="1">
+            <a:schemeClr val="accent1"/>
+          </a:lnRef>
+          <a:fillRef idx="3">
+            <a:schemeClr val="accent1"/>
+          </a:fillRef>
+          <a:effectRef idx="2">
+            <a:schemeClr val="accent1"/>
+          </a:effectRef>
+          <a:fontRef idx="minor">
+            <a:schemeClr val="lt1"/>
+          </a:fontRef>
+        </p:style>
+        <p:txBody>
+          <a:bodyPr rtlCol="0" anchor="ctr" wrap="square" lIns="73152" rIns="73152" tIns="36576" bIns="36576"/>
+          <a:lstStyle/>
+          <a:p>
+            <a:pPr algn="l">
+              <a:spcAft>
+                <a:spcPts val="0"/>
+              </a:spcAft>
+              <a:defRPr sz="1300" b="1">
+                <a:solidFill>
+                  <a:srgbClr val="122C4E"/>
+                </a:solidFill>
+                <a:latin typeface="Noto Sans CJK KR"/>
+              </a:defRPr>
+            </a:pPr>
+            <a:r>
+              <a:t>현재 단계 미니 실습    |    현재 폴더 ~/ros2_curri/agv_ws    |    현재 터미널</a:t>
+            </a:r>
+          </a:p>
+        </p:txBody>
+      </p:sp>
+      <p:sp>
+        <p:nvSpPr>
+          <p:cNvPr id="7" name="Rounded Rectangle 6"/>
+          <p:cNvSpPr/>
+          <p:nvPr/>
+        </p:nvSpPr>
+        <p:spPr>
+          <a:xfrm>
+            <a:off x="749808" y="1874519"/>
+            <a:ext cx="10652760" cy="1993392"/>
+          </a:xfrm>
+          <a:prstGeom prst="roundRect">
+            <a:avLst/>
+          </a:prstGeom>
+          <a:solidFill>
+            <a:srgbClr val="FFF8EB"/>
+          </a:solidFill>
+          <a:ln>
+            <a:solidFill>
+              <a:srgbClr val="ECC680"/>
+            </a:solidFill>
+          </a:ln>
+        </p:spPr>
+        <p:style>
+          <a:lnRef idx="1">
+            <a:schemeClr val="accent1"/>
+          </a:lnRef>
+          <a:fillRef idx="3">
+            <a:schemeClr val="accent1"/>
+          </a:fillRef>
+          <a:effectRef idx="2">
+            <a:schemeClr val="accent1"/>
+          </a:effectRef>
+          <a:fontRef idx="minor">
+            <a:schemeClr val="lt1"/>
+          </a:fontRef>
+        </p:style>
+        <p:txBody>
+          <a:bodyPr rtlCol="0" anchor="ctr" wrap="square" lIns="73152" rIns="73152" tIns="36576" bIns="36576"/>
+          <a:lstStyle/>
+          <a:p>
+            <a:pPr algn="ctr">
+              <a:spcAft>
+                <a:spcPts val="0"/>
+              </a:spcAft>
+              <a:defRPr sz="2300" b="1">
+                <a:solidFill>
+                  <a:srgbClr val="122C4E"/>
+                </a:solidFill>
+                <a:latin typeface="Noto Sans CJK KR"/>
+              </a:defRPr>
+            </a:pPr>
+            <a:r>
+              <a:t>camera update_rate 15→5 Hz와 width 640→320을 각각 바꾸고 topic hz와 처리량 차이를 기록한다.</a:t>
+            </a:r>
+          </a:p>
+        </p:txBody>
+      </p:sp>
+      <p:sp>
+        <p:nvSpPr>
+          <p:cNvPr id="8" name="TextBox 7"/>
+          <p:cNvSpPr txBox="1"/>
+          <p:nvPr/>
+        </p:nvSpPr>
+        <p:spPr>
+          <a:xfrm>
+            <a:off x="877824" y="4590288"/>
+            <a:ext cx="10241280" cy="594360"/>
+          </a:xfrm>
+          <a:prstGeom prst="rect">
+            <a:avLst/>
+          </a:prstGeom>
+          <a:noFill/>
+        </p:spPr>
+        <p:txBody>
+          <a:bodyPr wrap="square" lIns="73152" rIns="73152" tIns="36576" bIns="36576">
+            <a:spAutoFit/>
+          </a:bodyPr>
+          <a:lstStyle/>
+          <a:p>
+            <a:pPr algn="ctr">
+              <a:spcAft>
+                <a:spcPts val="0"/>
+              </a:spcAft>
+              <a:defRPr sz="1900" b="1">
+                <a:solidFill>
+                  <a:srgbClr val="DB7E22"/>
+                </a:solidFill>
+                <a:latin typeface="Noto Sans CJK KR"/>
+              </a:defRPr>
+            </a:pPr>
+            <a:r>
+              <a:t>기록할 것: 바꾼 값(단위) · 기대한 변화 · 실제 출력/화면 · 원래 값으로 되돌린 결과</a:t>
+            </a:r>
+          </a:p>
+        </p:txBody>
+      </p:sp>
+    </p:spTree>
+  </p:cSld>
+  <p:clrMapOvr>
+    <a:masterClrMapping/>
+  </p:clrMapOvr>
+</p:sld>
+</file>
+
+<file path=ppt/slides/slide52.xml><?xml version="1.0" encoding="utf-8"?>
+<p:sld xmlns:a="http://schemas.openxmlformats.org/drawingml/2006/main" xmlns:p="http://schemas.openxmlformats.org/presentationml/2006/main" xmlns:r="http://schemas.openxmlformats.org/officeDocument/2006/relationships">
+  <p:cSld>
+    <p:spTree>
+      <p:nvGrpSpPr>
+        <p:cNvPr id="1" name=""/>
+        <p:cNvGrpSpPr/>
+        <p:nvPr/>
+      </p:nvGrpSpPr>
+      <p:grpSpPr/>
+      <p:sp>
+        <p:nvSpPr>
+          <p:cNvPr id="2" name="TextBox 1"/>
+          <p:cNvSpPr txBox="1"/>
+          <p:nvPr/>
+        </p:nvSpPr>
+        <p:spPr>
+          <a:xfrm>
+            <a:off x="566928" y="347472"/>
+            <a:ext cx="10881360" cy="438912"/>
+          </a:xfrm>
+          <a:prstGeom prst="rect">
+            <a:avLst/>
+          </a:prstGeom>
+          <a:noFill/>
+        </p:spPr>
+        <p:txBody>
+          <a:bodyPr wrap="square" lIns="73152" rIns="73152" tIns="36576" bIns="36576">
+            <a:spAutoFit/>
+          </a:bodyPr>
+          <a:lstStyle/>
+          <a:p>
+            <a:pPr algn="l">
+              <a:spcAft>
+                <a:spcPts val="0"/>
+              </a:spcAft>
+              <a:defRPr sz="3200" b="1">
+                <a:solidFill>
+                  <a:srgbClr val="122C4E"/>
+                </a:solidFill>
+                <a:latin typeface="Noto Sans CJK KR"/>
+              </a:defRPr>
+            </a:pPr>
+            <a:r>
+              <a:t>체크포인트를 저장하고 다음 모듈로 넘긴다</a:t>
+            </a:r>
+          </a:p>
+        </p:txBody>
+      </p:sp>
+      <p:sp>
+        <p:nvSpPr>
+          <p:cNvPr id="3" name="TextBox 2"/>
+          <p:cNvSpPr txBox="1"/>
+          <p:nvPr/>
+        </p:nvSpPr>
+        <p:spPr>
+          <a:xfrm>
+            <a:off x="603504" y="859536"/>
+            <a:ext cx="10698480" cy="292608"/>
+          </a:xfrm>
+          <a:prstGeom prst="rect">
+            <a:avLst/>
+          </a:prstGeom>
+          <a:noFill/>
+        </p:spPr>
+        <p:txBody>
+          <a:bodyPr wrap="square" lIns="73152" rIns="73152" tIns="36576" bIns="36576">
+            <a:spAutoFit/>
+          </a:bodyPr>
+          <a:lstStyle/>
+          <a:p>
+            <a:pPr algn="l">
+              <a:spcAft>
+                <a:spcPts val="0"/>
+              </a:spcAft>
+              <a:defRPr sz="1700" b="0">
+                <a:solidFill>
+                  <a:srgbClr val="5C6672"/>
+                </a:solidFill>
+                <a:latin typeface="Noto Sans CJK KR"/>
+              </a:defRPr>
+            </a:pPr>
+            <a:r>
+              <a:t>현재 Complete는 다음 Starter의 기준선입니다.</a:t>
+            </a:r>
+          </a:p>
+        </p:txBody>
+      </p:sp>
+      <p:sp>
+        <p:nvSpPr>
+          <p:cNvPr id="4" name="TextBox 3"/>
+          <p:cNvSpPr txBox="1"/>
+          <p:nvPr/>
+        </p:nvSpPr>
+        <p:spPr>
+          <a:xfrm>
+            <a:off x="530352" y="6510528"/>
+            <a:ext cx="7772400" cy="201168"/>
+          </a:xfrm>
+          <a:prstGeom prst="rect">
+            <a:avLst/>
+          </a:prstGeom>
+          <a:noFill/>
+        </p:spPr>
+        <p:txBody>
+          <a:bodyPr wrap="square" lIns="73152" rIns="73152" tIns="36576" bIns="36576">
+            <a:spAutoFit/>
+          </a:bodyPr>
+          <a:lstStyle/>
+          <a:p>
+            <a:pPr algn="l">
+              <a:spcAft>
+                <a:spcPts val="0"/>
+              </a:spcAft>
+              <a:defRPr sz="1000" b="0">
+                <a:solidFill>
+                  <a:srgbClr val="5C6672"/>
+                </a:solidFill>
+                <a:latin typeface="Noto Sans CJK KR"/>
+              </a:defRPr>
+            </a:pPr>
+            <a:r>
+              <a:t>ROS 2 Jazzy · Gazebo Harmonic · M12 · 따라 하기형 AGV 실습</a:t>
+            </a:r>
+          </a:p>
+        </p:txBody>
+      </p:sp>
+      <p:sp>
+        <p:nvSpPr>
+          <p:cNvPr id="5" name="TextBox 4"/>
+          <p:cNvSpPr txBox="1"/>
+          <p:nvPr/>
+        </p:nvSpPr>
+        <p:spPr>
+          <a:xfrm>
+            <a:off x="9144000" y="6510528"/>
+            <a:ext cx="2468880" cy="201168"/>
+          </a:xfrm>
+          <a:prstGeom prst="rect">
+            <a:avLst/>
+          </a:prstGeom>
+          <a:noFill/>
+        </p:spPr>
+        <p:txBody>
+          <a:bodyPr wrap="square" lIns="73152" rIns="73152" tIns="36576" bIns="36576">
+            <a:spAutoFit/>
+          </a:bodyPr>
+          <a:lstStyle/>
+          <a:p>
+            <a:pPr algn="r">
+              <a:spcAft>
+                <a:spcPts val="0"/>
+              </a:spcAft>
+              <a:defRPr sz="1000" b="0">
+                <a:solidFill>
+                  <a:srgbClr val="5C6672"/>
+                </a:solidFill>
+                <a:latin typeface="Noto Sans CJK KR"/>
+              </a:defRPr>
+            </a:pPr>
+            <a:r>
+              <a:t>명령·파일 경로는 슬라이드에서 복사 가능</a:t>
+            </a:r>
+          </a:p>
+        </p:txBody>
+      </p:sp>
+      <p:sp>
+        <p:nvSpPr>
+          <p:cNvPr id="6" name="Rectangle 5"/>
+          <p:cNvSpPr/>
+          <p:nvPr/>
+        </p:nvSpPr>
+        <p:spPr>
+          <a:xfrm>
+            <a:off x="566928" y="1188720"/>
+            <a:ext cx="11064240" cy="347472"/>
+          </a:xfrm>
+          <a:prstGeom prst="rect">
+            <a:avLst/>
+          </a:prstGeom>
+          <a:solidFill>
+            <a:srgbClr val="F4F7FB"/>
+          </a:solidFill>
+          <a:ln>
+            <a:solidFill>
+              <a:srgbClr val="F4F7FB"/>
+            </a:solidFill>
+          </a:ln>
+        </p:spPr>
+        <p:style>
+          <a:lnRef idx="1">
+            <a:schemeClr val="accent1"/>
+          </a:lnRef>
+          <a:fillRef idx="3">
+            <a:schemeClr val="accent1"/>
+          </a:fillRef>
+          <a:effectRef idx="2">
+            <a:schemeClr val="accent1"/>
+          </a:effectRef>
+          <a:fontRef idx="minor">
+            <a:schemeClr val="lt1"/>
+          </a:fontRef>
+        </p:style>
+        <p:txBody>
+          <a:bodyPr rtlCol="0" anchor="ctr" wrap="square" lIns="73152" rIns="73152" tIns="36576" bIns="36576"/>
+          <a:lstStyle/>
+          <a:p>
+            <a:pPr algn="l">
+              <a:spcAft>
+                <a:spcPts val="0"/>
+              </a:spcAft>
+              <a:defRPr sz="1300" b="1">
+                <a:solidFill>
+                  <a:srgbClr val="122C4E"/>
+                </a:solidFill>
+                <a:latin typeface="Noto Sans CJK KR"/>
+              </a:defRPr>
+            </a:pPr>
+            <a:r>
+              <a:t>현재 단계 체크포인트    |    현재 폴더 ~/ros2_curri/agv_ws    |    현재 터미널</a:t>
+            </a:r>
+          </a:p>
+        </p:txBody>
+      </p:sp>
+      <p:sp>
+        <p:nvSpPr>
+          <p:cNvPr id="7" name="Rounded Rectangle 6"/>
+          <p:cNvSpPr/>
+          <p:nvPr/>
+        </p:nvSpPr>
+        <p:spPr>
+          <a:xfrm>
+            <a:off x="685800" y="1737360"/>
+            <a:ext cx="10972800" cy="3611880"/>
+          </a:xfrm>
+          <a:prstGeom prst="roundRect">
+            <a:avLst/>
+          </a:prstGeom>
+          <a:solidFill>
+            <a:srgbClr val="F4F7FB"/>
+          </a:solidFill>
+          <a:ln>
+            <a:solidFill>
+              <a:srgbClr val="D2DCE8"/>
+            </a:solidFill>
+          </a:ln>
+        </p:spPr>
+        <p:style>
+          <a:lnRef idx="1">
+            <a:schemeClr val="accent1"/>
+          </a:lnRef>
+          <a:fillRef idx="3">
+            <a:schemeClr val="accent1"/>
+          </a:fillRef>
+          <a:effectRef idx="2">
+            <a:schemeClr val="accent1"/>
+          </a:effectRef>
+          <a:fontRef idx="minor">
+            <a:schemeClr val="lt1"/>
+          </a:fontRef>
+        </p:style>
+        <p:txBody>
+          <a:bodyPr rtlCol="0" anchor="ctr"/>
+          <a:lstStyle/>
+          <a:p>
+            <a:pPr algn="ctr"/>
+          </a:p>
+        </p:txBody>
+      </p:sp>
+      <p:sp>
+        <p:nvSpPr>
+          <p:cNvPr id="8" name="TextBox 7"/>
+          <p:cNvSpPr txBox="1"/>
+          <p:nvPr/>
+        </p:nvSpPr>
+        <p:spPr>
+          <a:xfrm>
+            <a:off x="896112" y="1993392"/>
+            <a:ext cx="10332720" cy="2971800"/>
+          </a:xfrm>
+          <a:prstGeom prst="rect">
+            <a:avLst/>
+          </a:prstGeom>
+          <a:noFill/>
+        </p:spPr>
+        <p:txBody>
+          <a:bodyPr wrap="square" lIns="109728" rIns="109728">
+            <a:spAutoFit/>
+          </a:bodyPr>
+          <a:lstStyle/>
+          <a:p>
+            <a:pPr>
+              <a:spcAft>
+                <a:spcPts val="800"/>
+              </a:spcAft>
+              <a:defRPr sz="1800">
+                <a:solidFill>
+                  <a:srgbClr val="122C4E"/>
+                </a:solidFill>
+                <a:latin typeface="Noto Sans CJK KR"/>
+              </a:defRPr>
+            </a:pPr>
+            <a:r>
+              <a:t>• □ 완료 화면: /camera/image_raw가 bridge를 통과하고 cv_bridge 소비 노드가 받을 준비가 된 상태를 확인한다.</a:t>
+            </a:r>
+          </a:p>
+          <a:p>
+            <a:pPr>
+              <a:spcAft>
+                <a:spcPts val="800"/>
+              </a:spcAft>
+              <a:defRPr sz="1800">
+                <a:solidFill>
+                  <a:srgbClr val="122C4E"/>
+                </a:solidFill>
+                <a:latin typeface="Noto Sans CJK KR"/>
+              </a:defRPr>
+            </a:pPr>
+            <a:r>
+              <a:t>• □ Complete 파일: blocks/D_sensors/M12_camera_sensor/complete/</a:t>
+            </a:r>
+          </a:p>
+          <a:p>
+            <a:pPr>
+              <a:spcAft>
+                <a:spcPts val="800"/>
+              </a:spcAft>
+              <a:defRPr sz="1800">
+                <a:solidFill>
+                  <a:srgbClr val="122C4E"/>
+                </a:solidFill>
+                <a:latin typeface="Noto Sans CJK KR"/>
+              </a:defRPr>
+            </a:pPr>
+            <a:r>
+              <a:t>• □ 정상 로그·캡처: logs/validation.log, screenshots/validation_terminal.png</a:t>
+            </a:r>
+          </a:p>
+          <a:p>
+            <a:pPr>
+              <a:spcAft>
+                <a:spcPts val="800"/>
+              </a:spcAft>
+              <a:defRPr sz="1800">
+                <a:solidFill>
+                  <a:srgbClr val="122C4E"/>
+                </a:solidFill>
+                <a:latin typeface="Noto Sans CJK KR"/>
+              </a:defRPr>
+            </a:pPr>
+            <a:r>
+              <a:t>• □ 버전 식별: CHECKSUM_or_TAG.txt의 SHA-256 manifest</a:t>
+            </a:r>
+          </a:p>
+          <a:p>
+            <a:pPr>
+              <a:spcAft>
+                <a:spcPts val="800"/>
+              </a:spcAft>
+              <a:defRPr sz="1800">
+                <a:solidFill>
+                  <a:srgbClr val="122C4E"/>
+                </a:solidFill>
+                <a:latin typeface="Noto Sans CJK KR"/>
+              </a:defRPr>
+            </a:pPr>
+            <a:r>
+              <a:t>• □ 다음 시작 조건: M13 LiDAR</a:t>
+            </a:r>
+          </a:p>
+        </p:txBody>
+      </p:sp>
+      <p:sp>
+        <p:nvSpPr>
+          <p:cNvPr id="9" name="TextBox 8"/>
+          <p:cNvSpPr txBox="1"/>
+          <p:nvPr/>
+        </p:nvSpPr>
+        <p:spPr>
+          <a:xfrm>
+            <a:off x="868680" y="5596128"/>
+            <a:ext cx="10515600" cy="338328"/>
+          </a:xfrm>
+          <a:prstGeom prst="rect">
+            <a:avLst/>
+          </a:prstGeom>
+          <a:noFill/>
+        </p:spPr>
+        <p:txBody>
+          <a:bodyPr wrap="square" lIns="73152" rIns="73152" tIns="36576" bIns="36576">
+            <a:spAutoFit/>
+          </a:bodyPr>
+          <a:lstStyle/>
+          <a:p>
+            <a:pPr algn="ctr">
+              <a:spcAft>
+                <a:spcPts val="0"/>
+              </a:spcAft>
+              <a:defRPr sz="1700" b="1">
+                <a:solidFill>
+                  <a:srgbClr val="2A8B5A"/>
+                </a:solidFill>
+                <a:latin typeface="Noto Sans CJK KR"/>
+              </a:defRPr>
+            </a:pPr>
+            <a:r>
+              <a:t>다음 모듈을 시작하기 전, 이 슬라이드의 Complete와 다음 모듈의 Starter를 비교합니다.</a:t>
+            </a:r>
+          </a:p>
+        </p:txBody>
+      </p:sp>
+    </p:spTree>
+  </p:cSld>
+  <p:clrMapOvr>
+    <a:masterClrMapping/>
+  </p:clrMapOvr>
+</p:sld>
+</file>
+
+<file path=ppt/slides/slide53.xml><?xml version="1.0" encoding="utf-8"?>
+<p:sld xmlns:a="http://schemas.openxmlformats.org/drawingml/2006/main" xmlns:p="http://schemas.openxmlformats.org/presentationml/2006/main" xmlns:r="http://schemas.openxmlformats.org/officeDocument/2006/relationships">
+  <p:cSld>
+    <p:spTree>
+      <p:nvGrpSpPr>
+        <p:cNvPr id="1" name=""/>
+        <p:cNvGrpSpPr/>
+        <p:nvPr/>
+      </p:nvGrpSpPr>
+      <p:grpSpPr/>
+      <p:sp>
+        <p:nvSpPr>
+          <p:cNvPr id="2" name="TextBox 1"/>
+          <p:cNvSpPr txBox="1"/>
+          <p:nvPr/>
+        </p:nvSpPr>
+        <p:spPr>
+          <a:xfrm>
+            <a:off x="566928" y="347472"/>
+            <a:ext cx="10881360" cy="438912"/>
+          </a:xfrm>
+          <a:prstGeom prst="rect">
+            <a:avLst/>
+          </a:prstGeom>
+          <a:noFill/>
+        </p:spPr>
+        <p:txBody>
+          <a:bodyPr wrap="square" lIns="73152" rIns="73152" tIns="36576" bIns="36576">
+            <a:spAutoFit/>
+          </a:bodyPr>
+          <a:lstStyle/>
+          <a:p>
+            <a:pPr algn="l">
+              <a:spcAft>
+                <a:spcPts val="0"/>
+              </a:spcAft>
+              <a:defRPr sz="3200" b="1">
+                <a:solidFill>
+                  <a:srgbClr val="122C4E"/>
+                </a:solidFill>
+                <a:latin typeface="Noto Sans CJK KR"/>
+              </a:defRPr>
+            </a:pPr>
+            <a:r>
+              <a:t>공식 참고 자료</a:t>
+            </a:r>
+          </a:p>
+        </p:txBody>
+      </p:sp>
+      <p:sp>
+        <p:nvSpPr>
+          <p:cNvPr id="3" name="TextBox 2"/>
+          <p:cNvSpPr txBox="1"/>
+          <p:nvPr/>
+        </p:nvSpPr>
+        <p:spPr>
+          <a:xfrm>
+            <a:off x="603504" y="859536"/>
+            <a:ext cx="10698480" cy="292608"/>
+          </a:xfrm>
+          <a:prstGeom prst="rect">
+            <a:avLst/>
+          </a:prstGeom>
+          <a:noFill/>
+        </p:spPr>
+        <p:txBody>
+          <a:bodyPr wrap="square" lIns="73152" rIns="73152" tIns="36576" bIns="36576">
+            <a:spAutoFit/>
+          </a:bodyPr>
+          <a:lstStyle/>
+          <a:p>
+            <a:pPr algn="l">
+              <a:spcAft>
+                <a:spcPts val="0"/>
+              </a:spcAft>
+              <a:defRPr sz="1700" b="0">
+                <a:solidFill>
+                  <a:srgbClr val="5C6672"/>
+                </a:solidFill>
+                <a:latin typeface="Noto Sans CJK KR"/>
+              </a:defRPr>
+            </a:pPr>
+            <a:r>
+              <a:t>본문 단계는 링크를 열지 않아도 완료할 수 있으며, 링크는 개념을 더 확인할 때만 사용합니다.</a:t>
+            </a:r>
+          </a:p>
+        </p:txBody>
+      </p:sp>
+      <p:sp>
+        <p:nvSpPr>
+          <p:cNvPr id="4" name="TextBox 3"/>
+          <p:cNvSpPr txBox="1"/>
+          <p:nvPr/>
+        </p:nvSpPr>
+        <p:spPr>
+          <a:xfrm>
+            <a:off x="530352" y="6510528"/>
+            <a:ext cx="7772400" cy="201168"/>
+          </a:xfrm>
+          <a:prstGeom prst="rect">
+            <a:avLst/>
+          </a:prstGeom>
+          <a:noFill/>
+        </p:spPr>
+        <p:txBody>
+          <a:bodyPr wrap="square" lIns="73152" rIns="73152" tIns="36576" bIns="36576">
+            <a:spAutoFit/>
+          </a:bodyPr>
+          <a:lstStyle/>
+          <a:p>
+            <a:pPr algn="l">
+              <a:spcAft>
+                <a:spcPts val="0"/>
+              </a:spcAft>
+              <a:defRPr sz="1000" b="0">
+                <a:solidFill>
+                  <a:srgbClr val="5C6672"/>
+                </a:solidFill>
+                <a:latin typeface="Noto Sans CJK KR"/>
+              </a:defRPr>
+            </a:pPr>
+            <a:r>
+              <a:t>ROS 2 Jazzy · Gazebo Harmonic · M12 · 따라 하기형 AGV 실습</a:t>
+            </a:r>
+          </a:p>
+        </p:txBody>
+      </p:sp>
+      <p:sp>
+        <p:nvSpPr>
+          <p:cNvPr id="5" name="TextBox 4"/>
+          <p:cNvSpPr txBox="1"/>
+          <p:nvPr/>
+        </p:nvSpPr>
+        <p:spPr>
+          <a:xfrm>
+            <a:off x="9144000" y="6510528"/>
+            <a:ext cx="2468880" cy="201168"/>
+          </a:xfrm>
+          <a:prstGeom prst="rect">
+            <a:avLst/>
+          </a:prstGeom>
+          <a:noFill/>
+        </p:spPr>
+        <p:txBody>
+          <a:bodyPr wrap="square" lIns="73152" rIns="73152" tIns="36576" bIns="36576">
+            <a:spAutoFit/>
+          </a:bodyPr>
+          <a:lstStyle/>
+          <a:p>
+            <a:pPr algn="r">
+              <a:spcAft>
+                <a:spcPts val="0"/>
+              </a:spcAft>
+              <a:defRPr sz="1000" b="0">
+                <a:solidFill>
+                  <a:srgbClr val="5C6672"/>
+                </a:solidFill>
+                <a:latin typeface="Noto Sans CJK KR"/>
+              </a:defRPr>
+            </a:pPr>
+            <a:r>
+              <a:t>명령·파일 경로는 슬라이드에서 복사 가능</a:t>
+            </a:r>
+          </a:p>
+        </p:txBody>
+      </p:sp>
+      <p:sp>
+        <p:nvSpPr>
+          <p:cNvPr id="6" name="Rounded Rectangle 5"/>
+          <p:cNvSpPr/>
+          <p:nvPr/>
+        </p:nvSpPr>
+        <p:spPr>
+          <a:xfrm>
+            <a:off x="658368" y="1554480"/>
+            <a:ext cx="10972800" cy="4526280"/>
+          </a:xfrm>
+          <a:prstGeom prst="roundRect">
+            <a:avLst/>
+          </a:prstGeom>
+          <a:solidFill>
+            <a:srgbClr val="F4F7FB"/>
+          </a:solidFill>
+          <a:ln>
+            <a:solidFill>
+              <a:srgbClr val="D7DFE9"/>
+            </a:solidFill>
+          </a:ln>
+        </p:spPr>
+        <p:style>
+          <a:lnRef idx="1">
+            <a:schemeClr val="accent1"/>
+          </a:lnRef>
+          <a:fillRef idx="3">
+            <a:schemeClr val="accent1"/>
+          </a:fillRef>
+          <a:effectRef idx="2">
+            <a:schemeClr val="accent1"/>
+          </a:effectRef>
+          <a:fontRef idx="minor">
+            <a:schemeClr val="lt1"/>
+          </a:fontRef>
+        </p:style>
+        <p:txBody>
+          <a:bodyPr rtlCol="0" anchor="ctr"/>
+          <a:lstStyle/>
+          <a:p>
+            <a:pPr algn="ctr"/>
+          </a:p>
+        </p:txBody>
+      </p:sp>
+      <p:sp>
+        <p:nvSpPr>
+          <p:cNvPr id="7" name="TextBox 6"/>
+          <p:cNvSpPr txBox="1"/>
+          <p:nvPr/>
+        </p:nvSpPr>
+        <p:spPr>
+          <a:xfrm>
+            <a:off x="914400" y="1773936"/>
+            <a:ext cx="3840480" cy="256032"/>
+          </a:xfrm>
+          <a:prstGeom prst="rect">
+            <a:avLst/>
+          </a:prstGeom>
+          <a:noFill/>
+        </p:spPr>
+        <p:txBody>
+          <a:bodyPr wrap="square" lIns="73152" rIns="73152" tIns="36576" bIns="36576">
+            <a:spAutoFit/>
+          </a:bodyPr>
+          <a:lstStyle/>
+          <a:p>
+            <a:pPr algn="l">
+              <a:spcAft>
+                <a:spcPts val="0"/>
+              </a:spcAft>
+              <a:defRPr sz="1700" b="1">
+                <a:solidFill>
+                  <a:srgbClr val="122C4E"/>
+                </a:solidFill>
+                <a:latin typeface="Noto Sans CJK KR"/>
+              </a:defRPr>
+            </a:pPr>
+            <a:r>
+              <a:t>ROS 2 Jazzy — Gazebo Simulation</a:t>
+            </a:r>
+          </a:p>
+        </p:txBody>
+      </p:sp>
+      <p:sp>
+        <p:nvSpPr>
+          <p:cNvPr id="8" name="TextBox 7"/>
+          <p:cNvSpPr txBox="1"/>
+          <p:nvPr/>
+        </p:nvSpPr>
+        <p:spPr>
+          <a:xfrm>
+            <a:off x="914400" y="2048255"/>
+            <a:ext cx="9966960" cy="475488"/>
+          </a:xfrm>
+          <a:prstGeom prst="rect">
+            <a:avLst/>
+          </a:prstGeom>
+          <a:noFill/>
+        </p:spPr>
+        <p:txBody>
+          <a:bodyPr wrap="square" lIns="73152" rIns="73152" tIns="36576" bIns="36576">
+            <a:spAutoFit/>
+          </a:bodyPr>
+          <a:lstStyle/>
+          <a:p>
+            <a:pPr algn="l">
+              <a:spcAft>
+                <a:spcPts val="0"/>
+              </a:spcAft>
+              <a:defRPr sz="1000" b="0">
+                <a:solidFill>
+                  <a:srgbClr val="225B9B"/>
+                </a:solidFill>
+                <a:latin typeface="DejaVu Sans Mono"/>
+              </a:defRPr>
+            </a:pPr>
+            <a:r>
+              <a:t>https://docs.ros.org/en/jazzy/Tutorials/Advanced/Simulators/Gazebo/Simulation-Gazebo.html</a:t>
+            </a:r>
+          </a:p>
+        </p:txBody>
+      </p:sp>
+      <p:sp>
+        <p:nvSpPr>
+          <p:cNvPr id="9" name="TextBox 8"/>
+          <p:cNvSpPr txBox="1"/>
+          <p:nvPr/>
+        </p:nvSpPr>
+        <p:spPr>
+          <a:xfrm>
+            <a:off x="914400" y="2852928"/>
+            <a:ext cx="3840480" cy="256032"/>
+          </a:xfrm>
+          <a:prstGeom prst="rect">
+            <a:avLst/>
+          </a:prstGeom>
+          <a:noFill/>
+        </p:spPr>
+        <p:txBody>
+          <a:bodyPr wrap="square" lIns="73152" rIns="73152" tIns="36576" bIns="36576">
+            <a:spAutoFit/>
+          </a:bodyPr>
+          <a:lstStyle/>
+          <a:p>
+            <a:pPr algn="l">
+              <a:spcAft>
+                <a:spcPts val="0"/>
+              </a:spcAft>
+              <a:defRPr sz="1700" b="1">
+                <a:solidFill>
+                  <a:srgbClr val="122C4E"/>
+                </a:solidFill>
+                <a:latin typeface="Noto Sans CJK KR"/>
+              </a:defRPr>
+            </a:pPr>
+            <a:r>
+              <a:t>ROS 2 Jazzy — URDF / robot_state_publisher</a:t>
+            </a:r>
+          </a:p>
+        </p:txBody>
+      </p:sp>
+      <p:sp>
+        <p:nvSpPr>
+          <p:cNvPr id="10" name="TextBox 9"/>
+          <p:cNvSpPr txBox="1"/>
+          <p:nvPr/>
+        </p:nvSpPr>
+        <p:spPr>
+          <a:xfrm>
+            <a:off x="914400" y="3127248"/>
+            <a:ext cx="9966960" cy="475488"/>
+          </a:xfrm>
+          <a:prstGeom prst="rect">
+            <a:avLst/>
+          </a:prstGeom>
+          <a:noFill/>
+        </p:spPr>
+        <p:txBody>
+          <a:bodyPr wrap="square" lIns="73152" rIns="73152" tIns="36576" bIns="36576">
+            <a:spAutoFit/>
+          </a:bodyPr>
+          <a:lstStyle/>
+          <a:p>
+            <a:pPr algn="l">
+              <a:spcAft>
+                <a:spcPts val="0"/>
+              </a:spcAft>
+              <a:defRPr sz="1000" b="0">
+                <a:solidFill>
+                  <a:srgbClr val="225B9B"/>
+                </a:solidFill>
+                <a:latin typeface="DejaVu Sans Mono"/>
+              </a:defRPr>
+            </a:pPr>
+            <a:r>
+              <a:t>https://docs.ros.org/en/jazzy/Tutorials/Intermediate/URDF/Using-URDF-with-Robot-State-Publisher-py.html</a:t>
+            </a:r>
+          </a:p>
+        </p:txBody>
+      </p:sp>
+      <p:sp>
+        <p:nvSpPr>
+          <p:cNvPr id="11" name="TextBox 10"/>
+          <p:cNvSpPr txBox="1"/>
+          <p:nvPr/>
+        </p:nvSpPr>
+        <p:spPr>
+          <a:xfrm>
+            <a:off x="914400" y="3931920"/>
+            <a:ext cx="3840480" cy="256032"/>
+          </a:xfrm>
+          <a:prstGeom prst="rect">
+            <a:avLst/>
+          </a:prstGeom>
+          <a:noFill/>
+        </p:spPr>
+        <p:txBody>
+          <a:bodyPr wrap="square" lIns="73152" rIns="73152" tIns="36576" bIns="36576">
+            <a:spAutoFit/>
+          </a:bodyPr>
+          <a:lstStyle/>
+          <a:p>
+            <a:pPr algn="l">
+              <a:spcAft>
+                <a:spcPts val="0"/>
+              </a:spcAft>
+              <a:defRPr sz="1700" b="1">
+                <a:solidFill>
+                  <a:srgbClr val="122C4E"/>
+                </a:solidFill>
+                <a:latin typeface="Noto Sans CJK KR"/>
+              </a:defRPr>
+            </a:pPr>
+            <a:r>
+              <a:t>Gazebo — ROS 2 Integration / ros_gz_bridge</a:t>
+            </a:r>
+          </a:p>
+        </p:txBody>
+      </p:sp>
+      <p:sp>
+        <p:nvSpPr>
+          <p:cNvPr id="12" name="TextBox 11"/>
+          <p:cNvSpPr txBox="1"/>
+          <p:nvPr/>
+        </p:nvSpPr>
+        <p:spPr>
+          <a:xfrm>
+            <a:off x="914400" y="4206240"/>
+            <a:ext cx="9966960" cy="475488"/>
+          </a:xfrm>
+          <a:prstGeom prst="rect">
+            <a:avLst/>
+          </a:prstGeom>
+          <a:noFill/>
+        </p:spPr>
+        <p:txBody>
+          <a:bodyPr wrap="square" lIns="73152" rIns="73152" tIns="36576" bIns="36576">
+            <a:spAutoFit/>
+          </a:bodyPr>
+          <a:lstStyle/>
+          <a:p>
+            <a:pPr algn="l">
+              <a:spcAft>
+                <a:spcPts val="0"/>
+              </a:spcAft>
+              <a:defRPr sz="1000" b="0">
+                <a:solidFill>
+                  <a:srgbClr val="225B9B"/>
+                </a:solidFill>
+                <a:latin typeface="DejaVu Sans Mono"/>
+              </a:defRPr>
+            </a:pPr>
+            <a:r>
+              <a:t>https://gazebosim.org/docs/latest/ros2_integration/</a:t>
+            </a:r>
+          </a:p>
+        </p:txBody>
+      </p:sp>
+      <p:sp>
+        <p:nvSpPr>
+          <p:cNvPr id="13" name="TextBox 12"/>
+          <p:cNvSpPr txBox="1"/>
+          <p:nvPr/>
+        </p:nvSpPr>
+        <p:spPr>
+          <a:xfrm>
+            <a:off x="914400" y="5010912"/>
+            <a:ext cx="3840480" cy="256032"/>
+          </a:xfrm>
+          <a:prstGeom prst="rect">
+            <a:avLst/>
+          </a:prstGeom>
+          <a:noFill/>
+        </p:spPr>
+        <p:txBody>
+          <a:bodyPr wrap="square" lIns="73152" rIns="73152" tIns="36576" bIns="36576">
+            <a:spAutoFit/>
+          </a:bodyPr>
+          <a:lstStyle/>
+          <a:p>
+            <a:pPr algn="l">
+              <a:spcAft>
+                <a:spcPts val="0"/>
+              </a:spcAft>
+              <a:defRPr sz="1700" b="1">
+                <a:solidFill>
+                  <a:srgbClr val="122C4E"/>
+                </a:solidFill>
+                <a:latin typeface="Noto Sans CJK KR"/>
+              </a:defRPr>
+            </a:pPr>
+            <a:r>
+              <a:t>ROS 2 Jazzy — rosbag2 Recording and Playback</a:t>
+            </a:r>
+          </a:p>
+        </p:txBody>
+      </p:sp>
+      <p:sp>
+        <p:nvSpPr>
+          <p:cNvPr id="14" name="TextBox 13"/>
+          <p:cNvSpPr txBox="1"/>
+          <p:nvPr/>
+        </p:nvSpPr>
+        <p:spPr>
+          <a:xfrm>
+            <a:off x="914400" y="5285232"/>
+            <a:ext cx="9966960" cy="475488"/>
+          </a:xfrm>
+          <a:prstGeom prst="rect">
+            <a:avLst/>
+          </a:prstGeom>
+          <a:noFill/>
+        </p:spPr>
+        <p:txBody>
+          <a:bodyPr wrap="square" lIns="73152" rIns="73152" tIns="36576" bIns="36576">
+            <a:spAutoFit/>
+          </a:bodyPr>
+          <a:lstStyle/>
+          <a:p>
+            <a:pPr algn="l">
+              <a:spcAft>
+                <a:spcPts val="0"/>
+              </a:spcAft>
+              <a:defRPr sz="1000" b="0">
+                <a:solidFill>
+                  <a:srgbClr val="225B9B"/>
+                </a:solidFill>
+                <a:latin typeface="DejaVu Sans Mono"/>
+              </a:defRPr>
+            </a:pPr>
+            <a:r>
+              <a:t>https://docs.ros.org/en/jazzy/Tutorials/Beginner-CLI-Tools/Recording-And-Playing-Back-Data/Recording-And-Playing-Back-Data.html</a:t>
+            </a:r>
+          </a:p>
+        </p:txBody>
+      </p:sp>
+    </p:spTree>
+  </p:cSld>
+  <p:clrMapOvr>
+    <a:masterClrMapping/>
+  </p:clrMapOvr>
+</p:sld>
+</file>
+
 <file path=ppt/slides/slide6.xml><?xml version="1.0" encoding="utf-8"?>
 <p:sld xmlns:a="http://schemas.openxmlformats.org/drawingml/2006/main" xmlns:p="http://schemas.openxmlformats.org/presentationml/2006/main" xmlns:r="http://schemas.openxmlformats.org/officeDocument/2006/relationships">
   <p:cSld>
@@ -27499,7 +30615,7 @@
               </a:defRPr>
             </a:pPr>
             <a:r>
-              <a:t>~/agv_ws/src/</a:t>
+              <a:t>~/ros2_curri/agv_ws/src/</a:t>
             </a:r>
             <a:br/>
             <a:r>
@@ -27782,7 +30898,7 @@
               </a:defRPr>
             </a:pPr>
             <a:r>
-              <a:t>현재 단계 1/2    |    현재 폴더 ~/agv_ws    |    현재 터미널</a:t>
+              <a:t>현재 단계 1/2    |    현재 폴더 ~/ros2_curri/agv_ws    |    현재 터미널</a:t>
             </a:r>
           </a:p>
         </p:txBody>
@@ -27922,7 +31038,7 @@
             </a:r>
             <a:br/>
             <a:r>
-              <a:t>  ~/agv_ws/src/agv_gazebo/models/agv/model.sdf</a:t>
+              <a:t>  ~/ros2_curri/agv_ws/src/agv_gazebo/models/agv/model.sdf</a:t>
             </a:r>
           </a:p>
         </p:txBody>
@@ -28232,7 +31348,7 @@
               </a:defRPr>
             </a:pPr>
             <a:r>
-              <a:t>현재 단계 2/2    |    현재 폴더 ~/agv_ws    |    현재 터미널</a:t>
+              <a:t>현재 단계 2/2    |    현재 폴더 ~/ros2_curri/agv_ws    |    현재 터미널</a:t>
             </a:r>
           </a:p>
         </p:txBody>
@@ -28550,7 +31666,7 @@
               </a:defRPr>
             </a:pPr>
             <a:r>
-              <a:t>~/agv_ws/src/agv_gazebo/models/agv/model.sdf</a:t>
+              <a:t>~/ros2_curri/agv_ws/src/agv_gazebo/models/agv/model.sdf</a:t>
             </a:r>
           </a:p>
         </p:txBody>
@@ -28686,7 +31802,7 @@
               </a:defRPr>
             </a:pPr>
             <a:r>
-              <a:t>현재 단계 3/27    |    현재 폴더 ~/agv_ws    |    현재 터미널</a:t>
+              <a:t>현재 단계 3/27    |    현재 폴더 ~/ros2_curri/agv_ws    |    현재 터미널</a:t>
             </a:r>
           </a:p>
         </p:txBody>
@@ -28783,11 +31899,11 @@
               </a:defRPr>
             </a:pPr>
             <a:r>
-              <a:t>파일 생성: mkdir -p ~/agv_ws/src/agv_gazebo/models/agv</a:t>
-            </a:r>
-            <a:br/>
-            <a:r>
-              <a:t>파일 열기: nano ~/agv_ws/src/agv_gazebo/models/agv/model.sdf</a:t>
+              <a:t>파일 생성: mkdir -p ~/ros2_curri/agv_ws/src/agv_gazebo/models/agv</a:t>
+            </a:r>
+            <a:br/>
+            <a:r>
+              <a:t>파일 열기: nano ~/ros2_curri/agv_ws/src/agv_gazebo/models/agv/model.sdf</a:t>
             </a:r>
           </a:p>
         </p:txBody>

--- a/blocks/D_sensors/M12_camera_sensor/M12_Camera_Sensor.pptx
+++ b/blocks/D_sensors/M12_camera_sensor/M12_Camera_Sensor.pptx
@@ -12308,7 +12308,7 @@
               <a:spcAft>
                 <a:spcPts val="0"/>
               </a:spcAft>
-              <a:defRPr sz="1800" b="1">
+              <a:defRPr sz="1400" b="1">
                 <a:solidFill>
                   <a:srgbClr val="FFFFFF"/>
                 </a:solidFill>
@@ -12316,7 +12316,7 @@
               </a:defRPr>
             </a:pPr>
             <a:r>
-              <a:t>M12 · Block D · ROS 2 + Gazebo Sim AGV</a:t>
+              <a:t>ROS 2 기반 AGV End-to-End 개발 커리큘럼 · M12 · Block D</a:t>
             </a:r>
           </a:p>
         </p:txBody>
@@ -12526,7 +12526,7 @@
               <a:spcAft>
                 <a:spcPts val="0"/>
               </a:spcAft>
-              <a:defRPr sz="1000" b="0">
+              <a:defRPr sz="900" b="0">
                 <a:solidFill>
                   <a:srgbClr val="5C6672"/>
                 </a:solidFill>
@@ -12534,7 +12534,7 @@
               </a:defRPr>
             </a:pPr>
             <a:r>
-              <a:t>ROS 2 Jazzy · Gazebo Harmonic · M12 · 따라 하기형 AGV 실습</a:t>
+              <a:t>ROS 2 기반 AGV End-to-End 개발 커리큘럼 · M12 · Block D</a:t>
             </a:r>
           </a:p>
         </p:txBody>
@@ -12700,7 +12700,7 @@
               <a:spcAft>
                 <a:spcPts val="0"/>
               </a:spcAft>
-              <a:defRPr sz="1000" b="0">
+              <a:defRPr sz="900" b="0">
                 <a:solidFill>
                   <a:srgbClr val="5C6672"/>
                 </a:solidFill>
@@ -12708,7 +12708,7 @@
               </a:defRPr>
             </a:pPr>
             <a:r>
-              <a:t>ROS 2 Jazzy · Gazebo Harmonic · M12 · 따라 하기형 AGV 실습</a:t>
+              <a:t>ROS 2 기반 AGV End-to-End 개발 커리큘럼 · M12 · Block D</a:t>
             </a:r>
           </a:p>
         </p:txBody>
@@ -12999,7 +12999,7 @@
               <a:spcAft>
                 <a:spcPts val="0"/>
               </a:spcAft>
-              <a:defRPr sz="1000" b="0">
+              <a:defRPr sz="900" b="0">
                 <a:solidFill>
                   <a:srgbClr val="5C6672"/>
                 </a:solidFill>
@@ -13007,7 +13007,7 @@
               </a:defRPr>
             </a:pPr>
             <a:r>
-              <a:t>ROS 2 Jazzy · Gazebo Harmonic · M12 · 따라 하기형 AGV 실습</a:t>
+              <a:t>ROS 2 기반 AGV End-to-End 개발 커리큘럼 · M12 · Block D</a:t>
             </a:r>
           </a:p>
         </p:txBody>
@@ -13875,7 +13875,7 @@
               <a:spcAft>
                 <a:spcPts val="0"/>
               </a:spcAft>
-              <a:defRPr sz="1000" b="0">
+              <a:defRPr sz="900" b="0">
                 <a:solidFill>
                   <a:srgbClr val="5C6672"/>
                 </a:solidFill>
@@ -13883,7 +13883,7 @@
               </a:defRPr>
             </a:pPr>
             <a:r>
-              <a:t>ROS 2 Jazzy · Gazebo Harmonic · M12 · 따라 하기형 AGV 실습</a:t>
+              <a:t>ROS 2 기반 AGV End-to-End 개발 커리큘럼 · M12 · Block D</a:t>
             </a:r>
           </a:p>
         </p:txBody>
@@ -14751,7 +14751,7 @@
               <a:spcAft>
                 <a:spcPts val="0"/>
               </a:spcAft>
-              <a:defRPr sz="1000" b="0">
+              <a:defRPr sz="900" b="0">
                 <a:solidFill>
                   <a:srgbClr val="5C6672"/>
                 </a:solidFill>
@@ -14759,7 +14759,7 @@
               </a:defRPr>
             </a:pPr>
             <a:r>
-              <a:t>ROS 2 Jazzy · Gazebo Harmonic · M12 · 따라 하기형 AGV 실습</a:t>
+              <a:t>ROS 2 기반 AGV End-to-End 개발 커리큘럼 · M12 · Block D</a:t>
             </a:r>
           </a:p>
         </p:txBody>
@@ -15627,7 +15627,7 @@
               <a:spcAft>
                 <a:spcPts val="0"/>
               </a:spcAft>
-              <a:defRPr sz="1000" b="0">
+              <a:defRPr sz="900" b="0">
                 <a:solidFill>
                   <a:srgbClr val="5C6672"/>
                 </a:solidFill>
@@ -15635,7 +15635,7 @@
               </a:defRPr>
             </a:pPr>
             <a:r>
-              <a:t>ROS 2 Jazzy · Gazebo Harmonic · M12 · 따라 하기형 AGV 실습</a:t>
+              <a:t>ROS 2 기반 AGV End-to-End 개발 커리큘럼 · M12 · Block D</a:t>
             </a:r>
           </a:p>
         </p:txBody>
@@ -16181,7 +16181,7 @@
               <a:spcAft>
                 <a:spcPts val="0"/>
               </a:spcAft>
-              <a:defRPr sz="1000" b="0">
+              <a:defRPr sz="900" b="0">
                 <a:solidFill>
                   <a:srgbClr val="5C6672"/>
                 </a:solidFill>
@@ -16189,7 +16189,7 @@
               </a:defRPr>
             </a:pPr>
             <a:r>
-              <a:t>ROS 2 Jazzy · Gazebo Harmonic · M12 · 따라 하기형 AGV 실습</a:t>
+              <a:t>ROS 2 기반 AGV End-to-End 개발 커리큘럼 · M12 · Block D</a:t>
             </a:r>
           </a:p>
         </p:txBody>
@@ -16944,7 +16944,7 @@
               <a:spcAft>
                 <a:spcPts val="0"/>
               </a:spcAft>
-              <a:defRPr sz="1000" b="0">
+              <a:defRPr sz="900" b="0">
                 <a:solidFill>
                   <a:srgbClr val="5C6672"/>
                 </a:solidFill>
@@ -16952,7 +16952,7 @@
               </a:defRPr>
             </a:pPr>
             <a:r>
-              <a:t>ROS 2 Jazzy · Gazebo Harmonic · M12 · 따라 하기형 AGV 실습</a:t>
+              <a:t>ROS 2 기반 AGV End-to-End 개발 커리큘럼 · M12 · Block D</a:t>
             </a:r>
           </a:p>
         </p:txBody>
@@ -17359,7 +17359,7 @@
               <a:spcAft>
                 <a:spcPts val="0"/>
               </a:spcAft>
-              <a:defRPr sz="1000" b="0">
+              <a:defRPr sz="900" b="0">
                 <a:solidFill>
                   <a:srgbClr val="5C6672"/>
                 </a:solidFill>
@@ -17367,7 +17367,7 @@
               </a:defRPr>
             </a:pPr>
             <a:r>
-              <a:t>ROS 2 Jazzy · Gazebo Harmonic · M12 · 따라 하기형 AGV 실습</a:t>
+              <a:t>ROS 2 기반 AGV End-to-End 개발 커리큘럼 · M12 · Block D</a:t>
             </a:r>
           </a:p>
         </p:txBody>
@@ -17887,7 +17887,7 @@
               <a:spcAft>
                 <a:spcPts val="0"/>
               </a:spcAft>
-              <a:defRPr sz="1000" b="0">
+              <a:defRPr sz="900" b="0">
                 <a:solidFill>
                   <a:srgbClr val="5C6672"/>
                 </a:solidFill>
@@ -17895,7 +17895,7 @@
               </a:defRPr>
             </a:pPr>
             <a:r>
-              <a:t>ROS 2 Jazzy · Gazebo Harmonic · M12 · 따라 하기형 AGV 실습</a:t>
+              <a:t>ROS 2 기반 AGV End-to-End 개발 커리큘럼 · M12 · Block D</a:t>
             </a:r>
           </a:p>
         </p:txBody>
@@ -18676,7 +18676,7 @@
               <a:spcAft>
                 <a:spcPts val="0"/>
               </a:spcAft>
-              <a:defRPr sz="1000" b="0">
+              <a:defRPr sz="900" b="0">
                 <a:solidFill>
                   <a:srgbClr val="5C6672"/>
                 </a:solidFill>
@@ -18684,7 +18684,7 @@
               </a:defRPr>
             </a:pPr>
             <a:r>
-              <a:t>ROS 2 Jazzy · Gazebo Harmonic · M12 · 따라 하기형 AGV 실습</a:t>
+              <a:t>ROS 2 기반 AGV End-to-End 개발 커리큘럼 · M12 · Block D</a:t>
             </a:r>
           </a:p>
         </p:txBody>
@@ -19245,7 +19245,7 @@
               <a:spcAft>
                 <a:spcPts val="0"/>
               </a:spcAft>
-              <a:defRPr sz="1000" b="0">
+              <a:defRPr sz="900" b="0">
                 <a:solidFill>
                   <a:srgbClr val="5C6672"/>
                 </a:solidFill>
@@ -19253,7 +19253,7 @@
               </a:defRPr>
             </a:pPr>
             <a:r>
-              <a:t>ROS 2 Jazzy · Gazebo Harmonic · M12 · 따라 하기형 AGV 실습</a:t>
+              <a:t>ROS 2 기반 AGV End-to-End 개발 커리큘럼 · M12 · Block D</a:t>
             </a:r>
           </a:p>
         </p:txBody>
@@ -19706,7 +19706,7 @@
               <a:spcAft>
                 <a:spcPts val="0"/>
               </a:spcAft>
-              <a:defRPr sz="1000" b="0">
+              <a:defRPr sz="900" b="0">
                 <a:solidFill>
                   <a:srgbClr val="5C6672"/>
                 </a:solidFill>
@@ -19714,7 +19714,7 @@
               </a:defRPr>
             </a:pPr>
             <a:r>
-              <a:t>ROS 2 Jazzy · Gazebo Harmonic · M12 · 따라 하기형 AGV 실습</a:t>
+              <a:t>ROS 2 기반 AGV End-to-End 개발 커리큘럼 · M12 · Block D</a:t>
             </a:r>
           </a:p>
         </p:txBody>
@@ -20180,7 +20180,7 @@
               <a:spcAft>
                 <a:spcPts val="0"/>
               </a:spcAft>
-              <a:defRPr sz="1000" b="0">
+              <a:defRPr sz="900" b="0">
                 <a:solidFill>
                   <a:srgbClr val="5C6672"/>
                 </a:solidFill>
@@ -20188,7 +20188,7 @@
               </a:defRPr>
             </a:pPr>
             <a:r>
-              <a:t>ROS 2 Jazzy · Gazebo Harmonic · M12 · 따라 하기형 AGV 실습</a:t>
+              <a:t>ROS 2 기반 AGV End-to-End 개발 커리큘럼 · M12 · Block D</a:t>
             </a:r>
           </a:p>
         </p:txBody>
@@ -20651,7 +20651,7 @@
               <a:spcAft>
                 <a:spcPts val="0"/>
               </a:spcAft>
-              <a:defRPr sz="1000" b="0">
+              <a:defRPr sz="900" b="0">
                 <a:solidFill>
                   <a:srgbClr val="5C6672"/>
                 </a:solidFill>
@@ -20659,7 +20659,7 @@
               </a:defRPr>
             </a:pPr>
             <a:r>
-              <a:t>ROS 2 Jazzy · Gazebo Harmonic · M12 · 따라 하기형 AGV 실습</a:t>
+              <a:t>ROS 2 기반 AGV End-to-End 개발 커리큘럼 · M12 · Block D</a:t>
             </a:r>
           </a:p>
         </p:txBody>
@@ -21081,7 +21081,7 @@
               <a:spcAft>
                 <a:spcPts val="0"/>
               </a:spcAft>
-              <a:defRPr sz="1000" b="0">
+              <a:defRPr sz="900" b="0">
                 <a:solidFill>
                   <a:srgbClr val="5C6672"/>
                 </a:solidFill>
@@ -21089,7 +21089,7 @@
               </a:defRPr>
             </a:pPr>
             <a:r>
-              <a:t>ROS 2 Jazzy · Gazebo Harmonic · M12 · 따라 하기형 AGV 실습</a:t>
+              <a:t>ROS 2 기반 AGV End-to-End 개발 커리큘럼 · M12 · Block D</a:t>
             </a:r>
           </a:p>
         </p:txBody>
@@ -21609,7 +21609,7 @@
               <a:spcAft>
                 <a:spcPts val="0"/>
               </a:spcAft>
-              <a:defRPr sz="1000" b="0">
+              <a:defRPr sz="900" b="0">
                 <a:solidFill>
                   <a:srgbClr val="5C6672"/>
                 </a:solidFill>
@@ -21617,7 +21617,7 @@
               </a:defRPr>
             </a:pPr>
             <a:r>
-              <a:t>ROS 2 Jazzy · Gazebo Harmonic · M12 · 따라 하기형 AGV 실습</a:t>
+              <a:t>ROS 2 기반 AGV End-to-End 개발 커리큘럼 · M12 · Block D</a:t>
             </a:r>
           </a:p>
         </p:txBody>
@@ -22402,7 +22402,7 @@
               <a:spcAft>
                 <a:spcPts val="0"/>
               </a:spcAft>
-              <a:defRPr sz="1000" b="0">
+              <a:defRPr sz="900" b="0">
                 <a:solidFill>
                   <a:srgbClr val="5C6672"/>
                 </a:solidFill>
@@ -22410,7 +22410,7 @@
               </a:defRPr>
             </a:pPr>
             <a:r>
-              <a:t>ROS 2 Jazzy · Gazebo Harmonic · M12 · 따라 하기형 AGV 실습</a:t>
+              <a:t>ROS 2 기반 AGV End-to-End 개발 커리큘럼 · M12 · Block D</a:t>
             </a:r>
           </a:p>
         </p:txBody>
@@ -23195,7 +23195,7 @@
               <a:spcAft>
                 <a:spcPts val="0"/>
               </a:spcAft>
-              <a:defRPr sz="1000" b="0">
+              <a:defRPr sz="900" b="0">
                 <a:solidFill>
                   <a:srgbClr val="5C6672"/>
                 </a:solidFill>
@@ -23203,7 +23203,7 @@
               </a:defRPr>
             </a:pPr>
             <a:r>
-              <a:t>ROS 2 Jazzy · Gazebo Harmonic · M12 · 따라 하기형 AGV 실습</a:t>
+              <a:t>ROS 2 기반 AGV End-to-End 개발 커리큘럼 · M12 · Block D</a:t>
             </a:r>
           </a:p>
         </p:txBody>
@@ -23661,7 +23661,7 @@
               <a:spcAft>
                 <a:spcPts val="0"/>
               </a:spcAft>
-              <a:defRPr sz="1000" b="0">
+              <a:defRPr sz="900" b="0">
                 <a:solidFill>
                   <a:srgbClr val="5C6672"/>
                 </a:solidFill>
@@ -23669,7 +23669,7 @@
               </a:defRPr>
             </a:pPr>
             <a:r>
-              <a:t>ROS 2 Jazzy · Gazebo Harmonic · M12 · 따라 하기형 AGV 실습</a:t>
+              <a:t>ROS 2 기반 AGV End-to-End 개발 커리큘럼 · M12 · Block D</a:t>
             </a:r>
           </a:p>
         </p:txBody>
@@ -24189,7 +24189,7 @@
               <a:spcAft>
                 <a:spcPts val="0"/>
               </a:spcAft>
-              <a:defRPr sz="1000" b="0">
+              <a:defRPr sz="900" b="0">
                 <a:solidFill>
                   <a:srgbClr val="5C6672"/>
                 </a:solidFill>
@@ -24197,7 +24197,7 @@
               </a:defRPr>
             </a:pPr>
             <a:r>
-              <a:t>ROS 2 Jazzy · Gazebo Harmonic · M12 · 따라 하기형 AGV 실습</a:t>
+              <a:t>ROS 2 기반 AGV End-to-End 개발 커리큘럼 · M12 · Block D</a:t>
             </a:r>
           </a:p>
         </p:txBody>
@@ -24978,7 +24978,7 @@
               <a:spcAft>
                 <a:spcPts val="0"/>
               </a:spcAft>
-              <a:defRPr sz="1000" b="0">
+              <a:defRPr sz="900" b="0">
                 <a:solidFill>
                   <a:srgbClr val="5C6672"/>
                 </a:solidFill>
@@ -24986,7 +24986,7 @@
               </a:defRPr>
             </a:pPr>
             <a:r>
-              <a:t>ROS 2 Jazzy · Gazebo Harmonic · M12 · 따라 하기형 AGV 실습</a:t>
+              <a:t>ROS 2 기반 AGV End-to-End 개발 커리큘럼 · M12 · Block D</a:t>
             </a:r>
           </a:p>
         </p:txBody>
@@ -25547,7 +25547,7 @@
               <a:spcAft>
                 <a:spcPts val="0"/>
               </a:spcAft>
-              <a:defRPr sz="1000" b="0">
+              <a:defRPr sz="900" b="0">
                 <a:solidFill>
                   <a:srgbClr val="5C6672"/>
                 </a:solidFill>
@@ -25555,7 +25555,7 @@
               </a:defRPr>
             </a:pPr>
             <a:r>
-              <a:t>ROS 2 Jazzy · Gazebo Harmonic · M12 · 따라 하기형 AGV 실습</a:t>
+              <a:t>ROS 2 기반 AGV End-to-End 개발 커리큘럼 · M12 · Block D</a:t>
             </a:r>
           </a:p>
         </p:txBody>
@@ -25966,7 +25966,7 @@
               <a:spcAft>
                 <a:spcPts val="0"/>
               </a:spcAft>
-              <a:defRPr sz="1000" b="0">
+              <a:defRPr sz="900" b="0">
                 <a:solidFill>
                   <a:srgbClr val="5C6672"/>
                 </a:solidFill>
@@ -25974,7 +25974,7 @@
               </a:defRPr>
             </a:pPr>
             <a:r>
-              <a:t>ROS 2 Jazzy · Gazebo Harmonic · M12 · 따라 하기형 AGV 실습</a:t>
+              <a:t>ROS 2 기반 AGV End-to-End 개발 커리큘럼 · M12 · Block D</a:t>
             </a:r>
           </a:p>
         </p:txBody>
@@ -26440,7 +26440,7 @@
               <a:spcAft>
                 <a:spcPts val="0"/>
               </a:spcAft>
-              <a:defRPr sz="1000" b="0">
+              <a:defRPr sz="900" b="0">
                 <a:solidFill>
                   <a:srgbClr val="5C6672"/>
                 </a:solidFill>
@@ -26448,7 +26448,7 @@
               </a:defRPr>
             </a:pPr>
             <a:r>
-              <a:t>ROS 2 Jazzy · Gazebo Harmonic · M12 · 따라 하기형 AGV 실습</a:t>
+              <a:t>ROS 2 기반 AGV End-to-End 개발 커리큘럼 · M12 · Block D</a:t>
             </a:r>
           </a:p>
         </p:txBody>
@@ -26911,7 +26911,7 @@
               <a:spcAft>
                 <a:spcPts val="0"/>
               </a:spcAft>
-              <a:defRPr sz="1000" b="0">
+              <a:defRPr sz="900" b="0">
                 <a:solidFill>
                   <a:srgbClr val="5C6672"/>
                 </a:solidFill>
@@ -26919,7 +26919,7 @@
               </a:defRPr>
             </a:pPr>
             <a:r>
-              <a:t>ROS 2 Jazzy · Gazebo Harmonic · M12 · 따라 하기형 AGV 실습</a:t>
+              <a:t>ROS 2 기반 AGV End-to-End 개발 커리큘럼 · M12 · Block D</a:t>
             </a:r>
           </a:p>
         </p:txBody>
@@ -27439,7 +27439,7 @@
               <a:spcAft>
                 <a:spcPts val="0"/>
               </a:spcAft>
-              <a:defRPr sz="1000" b="0">
+              <a:defRPr sz="900" b="0">
                 <a:solidFill>
                   <a:srgbClr val="5C6672"/>
                 </a:solidFill>
@@ -27447,7 +27447,7 @@
               </a:defRPr>
             </a:pPr>
             <a:r>
-              <a:t>ROS 2 Jazzy · Gazebo Harmonic · M12 · 따라 하기형 AGV 실습</a:t>
+              <a:t>ROS 2 기반 AGV End-to-End 개발 커리큘럼 · M12 · Block D</a:t>
             </a:r>
           </a:p>
         </p:txBody>
@@ -28232,7 +28232,7 @@
               <a:spcAft>
                 <a:spcPts val="0"/>
               </a:spcAft>
-              <a:defRPr sz="1000" b="0">
+              <a:defRPr sz="900" b="0">
                 <a:solidFill>
                   <a:srgbClr val="5C6672"/>
                 </a:solidFill>
@@ -28240,7 +28240,7 @@
               </a:defRPr>
             </a:pPr>
             <a:r>
-              <a:t>ROS 2 Jazzy · Gazebo Harmonic · M12 · 따라 하기형 AGV 실습</a:t>
+              <a:t>ROS 2 기반 AGV End-to-End 개발 커리큘럼 · M12 · Block D</a:t>
             </a:r>
           </a:p>
         </p:txBody>
@@ -29025,7 +29025,7 @@
               <a:spcAft>
                 <a:spcPts val="0"/>
               </a:spcAft>
-              <a:defRPr sz="1000" b="0">
+              <a:defRPr sz="900" b="0">
                 <a:solidFill>
                   <a:srgbClr val="5C6672"/>
                 </a:solidFill>
@@ -29033,7 +29033,7 @@
               </a:defRPr>
             </a:pPr>
             <a:r>
-              <a:t>ROS 2 Jazzy · Gazebo Harmonic · M12 · 따라 하기형 AGV 실습</a:t>
+              <a:t>ROS 2 기반 AGV End-to-End 개발 커리큘럼 · M12 · Block D</a:t>
             </a:r>
           </a:p>
         </p:txBody>
@@ -29483,7 +29483,7 @@
               <a:spcAft>
                 <a:spcPts val="0"/>
               </a:spcAft>
-              <a:defRPr sz="1000" b="0">
+              <a:defRPr sz="900" b="0">
                 <a:solidFill>
                   <a:srgbClr val="5C6672"/>
                 </a:solidFill>
@@ -29491,7 +29491,7 @@
               </a:defRPr>
             </a:pPr>
             <a:r>
-              <a:t>ROS 2 Jazzy · Gazebo Harmonic · M12 · 따라 하기형 AGV 실습</a:t>
+              <a:t>ROS 2 기반 AGV End-to-End 개발 커리큘럼 · M12 · Block D</a:t>
             </a:r>
           </a:p>
         </p:txBody>
@@ -30011,7 +30011,7 @@
               <a:spcAft>
                 <a:spcPts val="0"/>
               </a:spcAft>
-              <a:defRPr sz="1000" b="0">
+              <a:defRPr sz="900" b="0">
                 <a:solidFill>
                   <a:srgbClr val="5C6672"/>
                 </a:solidFill>
@@ -30019,7 +30019,7 @@
               </a:defRPr>
             </a:pPr>
             <a:r>
-              <a:t>ROS 2 Jazzy · Gazebo Harmonic · M12 · 따라 하기형 AGV 실습</a:t>
+              <a:t>ROS 2 기반 AGV End-to-End 개발 커리큘럼 · M12 · Block D</a:t>
             </a:r>
           </a:p>
         </p:txBody>
@@ -30800,7 +30800,7 @@
               <a:spcAft>
                 <a:spcPts val="0"/>
               </a:spcAft>
-              <a:defRPr sz="1000" b="0">
+              <a:defRPr sz="900" b="0">
                 <a:solidFill>
                   <a:srgbClr val="5C6672"/>
                 </a:solidFill>
@@ -30808,7 +30808,7 @@
               </a:defRPr>
             </a:pPr>
             <a:r>
-              <a:t>ROS 2 Jazzy · Gazebo Harmonic · M12 · 따라 하기형 AGV 실습</a:t>
+              <a:t>ROS 2 기반 AGV End-to-End 개발 커리큘럼 · M12 · Block D</a:t>
             </a:r>
           </a:p>
         </p:txBody>
@@ -31589,7 +31589,7 @@
               <a:spcAft>
                 <a:spcPts val="0"/>
               </a:spcAft>
-              <a:defRPr sz="1000" b="0">
+              <a:defRPr sz="900" b="0">
                 <a:solidFill>
                   <a:srgbClr val="5C6672"/>
                 </a:solidFill>
@@ -31597,7 +31597,7 @@
               </a:defRPr>
             </a:pPr>
             <a:r>
-              <a:t>ROS 2 Jazzy · Gazebo Harmonic · M12 · 따라 하기형 AGV 실습</a:t>
+              <a:t>ROS 2 기반 AGV End-to-End 개발 커리큘럼 · M12 · Block D</a:t>
             </a:r>
           </a:p>
         </p:txBody>
@@ -32378,7 +32378,7 @@
               <a:spcAft>
                 <a:spcPts val="0"/>
               </a:spcAft>
-              <a:defRPr sz="1000" b="0">
+              <a:defRPr sz="900" b="0">
                 <a:solidFill>
                   <a:srgbClr val="5C6672"/>
                 </a:solidFill>
@@ -32386,7 +32386,7 @@
               </a:defRPr>
             </a:pPr>
             <a:r>
-              <a:t>ROS 2 Jazzy · Gazebo Harmonic · M12 · 따라 하기형 AGV 실습</a:t>
+              <a:t>ROS 2 기반 AGV End-to-End 개발 커리큘럼 · M12 · Block D</a:t>
             </a:r>
           </a:p>
         </p:txBody>
@@ -32711,7 +32711,7 @@
               <a:spcAft>
                 <a:spcPts val="0"/>
               </a:spcAft>
-              <a:defRPr sz="1000" b="0">
+              <a:defRPr sz="900" b="0">
                 <a:solidFill>
                   <a:srgbClr val="5C6672"/>
                 </a:solidFill>
@@ -32719,7 +32719,7 @@
               </a:defRPr>
             </a:pPr>
             <a:r>
-              <a:t>ROS 2 Jazzy · Gazebo Harmonic · M12 · 따라 하기형 AGV 실습</a:t>
+              <a:t>ROS 2 기반 AGV End-to-End 개발 커리큘럼 · M12 · Block D</a:t>
             </a:r>
           </a:p>
         </p:txBody>
@@ -33500,7 +33500,7 @@
               <a:spcAft>
                 <a:spcPts val="0"/>
               </a:spcAft>
-              <a:defRPr sz="1000" b="0">
+              <a:defRPr sz="900" b="0">
                 <a:solidFill>
                   <a:srgbClr val="5C6672"/>
                 </a:solidFill>
@@ -33508,7 +33508,7 @@
               </a:defRPr>
             </a:pPr>
             <a:r>
-              <a:t>ROS 2 Jazzy · Gazebo Harmonic · M12 · 따라 하기형 AGV 실습</a:t>
+              <a:t>ROS 2 기반 AGV End-to-End 개발 커리큘럼 · M12 · Block D</a:t>
             </a:r>
           </a:p>
         </p:txBody>
@@ -34069,7 +34069,7 @@
               <a:spcAft>
                 <a:spcPts val="0"/>
               </a:spcAft>
-              <a:defRPr sz="1000" b="0">
+              <a:defRPr sz="900" b="0">
                 <a:solidFill>
                   <a:srgbClr val="5C6672"/>
                 </a:solidFill>
@@ -34077,7 +34077,7 @@
               </a:defRPr>
             </a:pPr>
             <a:r>
-              <a:t>ROS 2 Jazzy · Gazebo Harmonic · M12 · 따라 하기형 AGV 실습</a:t>
+              <a:t>ROS 2 기반 AGV End-to-End 개발 커리큘럼 · M12 · Block D</a:t>
             </a:r>
           </a:p>
         </p:txBody>
@@ -34543,7 +34543,7 @@
               <a:spcAft>
                 <a:spcPts val="0"/>
               </a:spcAft>
-              <a:defRPr sz="1000" b="0">
+              <a:defRPr sz="900" b="0">
                 <a:solidFill>
                   <a:srgbClr val="5C6672"/>
                 </a:solidFill>
@@ -34551,7 +34551,7 @@
               </a:defRPr>
             </a:pPr>
             <a:r>
-              <a:t>ROS 2 Jazzy · Gazebo Harmonic · M12 · 따라 하기형 AGV 실습</a:t>
+              <a:t>ROS 2 기반 AGV End-to-End 개발 커리큘럼 · M12 · Block D</a:t>
             </a:r>
           </a:p>
         </p:txBody>
@@ -35017,7 +35017,7 @@
               <a:spcAft>
                 <a:spcPts val="0"/>
               </a:spcAft>
-              <a:defRPr sz="1000" b="0">
+              <a:defRPr sz="900" b="0">
                 <a:solidFill>
                   <a:srgbClr val="5C6672"/>
                 </a:solidFill>
@@ -35025,7 +35025,7 @@
               </a:defRPr>
             </a:pPr>
             <a:r>
-              <a:t>ROS 2 Jazzy · Gazebo Harmonic · M12 · 따라 하기형 AGV 실습</a:t>
+              <a:t>ROS 2 기반 AGV End-to-End 개발 커리큘럼 · M12 · Block D</a:t>
             </a:r>
           </a:p>
         </p:txBody>
@@ -35491,7 +35491,7 @@
               <a:spcAft>
                 <a:spcPts val="0"/>
               </a:spcAft>
-              <a:defRPr sz="1000" b="0">
+              <a:defRPr sz="900" b="0">
                 <a:solidFill>
                   <a:srgbClr val="5C6672"/>
                 </a:solidFill>
@@ -35499,7 +35499,7 @@
               </a:defRPr>
             </a:pPr>
             <a:r>
-              <a:t>ROS 2 Jazzy · Gazebo Harmonic · M12 · 따라 하기형 AGV 실습</a:t>
+              <a:t>ROS 2 기반 AGV End-to-End 개발 커리큘럼 · M12 · Block D</a:t>
             </a:r>
           </a:p>
         </p:txBody>
@@ -35965,7 +35965,7 @@
               <a:spcAft>
                 <a:spcPts val="0"/>
               </a:spcAft>
-              <a:defRPr sz="1000" b="0">
+              <a:defRPr sz="900" b="0">
                 <a:solidFill>
                   <a:srgbClr val="5C6672"/>
                 </a:solidFill>
@@ -35973,7 +35973,7 @@
               </a:defRPr>
             </a:pPr>
             <a:r>
-              <a:t>ROS 2 Jazzy · Gazebo Harmonic · M12 · 따라 하기형 AGV 실습</a:t>
+              <a:t>ROS 2 기반 AGV End-to-End 개발 커리큘럼 · M12 · Block D</a:t>
             </a:r>
           </a:p>
         </p:txBody>
@@ -36439,7 +36439,7 @@
               <a:spcAft>
                 <a:spcPts val="0"/>
               </a:spcAft>
-              <a:defRPr sz="1000" b="0">
+              <a:defRPr sz="900" b="0">
                 <a:solidFill>
                   <a:srgbClr val="5C6672"/>
                 </a:solidFill>
@@ -36447,7 +36447,7 @@
               </a:defRPr>
             </a:pPr>
             <a:r>
-              <a:t>ROS 2 Jazzy · Gazebo Harmonic · M12 · 따라 하기형 AGV 실습</a:t>
+              <a:t>ROS 2 기반 AGV End-to-End 개발 커리큘럼 · M12 · Block D</a:t>
             </a:r>
           </a:p>
         </p:txBody>
@@ -36913,7 +36913,7 @@
               <a:spcAft>
                 <a:spcPts val="0"/>
               </a:spcAft>
-              <a:defRPr sz="1000" b="0">
+              <a:defRPr sz="900" b="0">
                 <a:solidFill>
                   <a:srgbClr val="5C6672"/>
                 </a:solidFill>
@@ -36921,7 +36921,7 @@
               </a:defRPr>
             </a:pPr>
             <a:r>
-              <a:t>ROS 2 Jazzy · Gazebo Harmonic · M12 · 따라 하기형 AGV 실습</a:t>
+              <a:t>ROS 2 기반 AGV End-to-End 개발 커리큘럼 · M12 · Block D</a:t>
             </a:r>
           </a:p>
         </p:txBody>
@@ -37387,7 +37387,7 @@
               <a:spcAft>
                 <a:spcPts val="0"/>
               </a:spcAft>
-              <a:defRPr sz="1000" b="0">
+              <a:defRPr sz="900" b="0">
                 <a:solidFill>
                   <a:srgbClr val="5C6672"/>
                 </a:solidFill>
@@ -37395,7 +37395,7 @@
               </a:defRPr>
             </a:pPr>
             <a:r>
-              <a:t>ROS 2 Jazzy · Gazebo Harmonic · M12 · 따라 하기형 AGV 실습</a:t>
+              <a:t>ROS 2 기반 AGV End-to-End 개발 커리큘럼 · M12 · Block D</a:t>
             </a:r>
           </a:p>
         </p:txBody>
@@ -37861,7 +37861,7 @@
               <a:spcAft>
                 <a:spcPts val="0"/>
               </a:spcAft>
-              <a:defRPr sz="1000" b="0">
+              <a:defRPr sz="900" b="0">
                 <a:solidFill>
                   <a:srgbClr val="5C6672"/>
                 </a:solidFill>
@@ -37869,7 +37869,7 @@
               </a:defRPr>
             </a:pPr>
             <a:r>
-              <a:t>ROS 2 Jazzy · Gazebo Harmonic · M12 · 따라 하기형 AGV 실습</a:t>
+              <a:t>ROS 2 기반 AGV End-to-End 개발 커리큘럼 · M12 · Block D</a:t>
             </a:r>
           </a:p>
         </p:txBody>
@@ -38501,7 +38501,7 @@
               <a:spcAft>
                 <a:spcPts val="0"/>
               </a:spcAft>
-              <a:defRPr sz="1000" b="0">
+              <a:defRPr sz="900" b="0">
                 <a:solidFill>
                   <a:srgbClr val="5C6672"/>
                 </a:solidFill>
@@ -38509,7 +38509,7 @@
               </a:defRPr>
             </a:pPr>
             <a:r>
-              <a:t>ROS 2 Jazzy · Gazebo Harmonic · M12 · 따라 하기형 AGV 실습</a:t>
+              <a:t>ROS 2 기반 AGV End-to-End 개발 커리큘럼 · M12 · Block D</a:t>
             </a:r>
           </a:p>
         </p:txBody>
@@ -38975,7 +38975,7 @@
               <a:spcAft>
                 <a:spcPts val="0"/>
               </a:spcAft>
-              <a:defRPr sz="1000" b="0">
+              <a:defRPr sz="900" b="0">
                 <a:solidFill>
                   <a:srgbClr val="5C6672"/>
                 </a:solidFill>
@@ -38983,7 +38983,7 @@
               </a:defRPr>
             </a:pPr>
             <a:r>
-              <a:t>ROS 2 Jazzy · Gazebo Harmonic · M12 · 따라 하기형 AGV 실습</a:t>
+              <a:t>ROS 2 기반 AGV End-to-End 개발 커리큘럼 · M12 · Block D</a:t>
             </a:r>
           </a:p>
         </p:txBody>
@@ -39449,7 +39449,7 @@
               <a:spcAft>
                 <a:spcPts val="0"/>
               </a:spcAft>
-              <a:defRPr sz="1000" b="0">
+              <a:defRPr sz="900" b="0">
                 <a:solidFill>
                   <a:srgbClr val="5C6672"/>
                 </a:solidFill>
@@ -39457,7 +39457,7 @@
               </a:defRPr>
             </a:pPr>
             <a:r>
-              <a:t>ROS 2 Jazzy · Gazebo Harmonic · M12 · 따라 하기형 AGV 실습</a:t>
+              <a:t>ROS 2 기반 AGV End-to-End 개발 커리큘럼 · M12 · Block D</a:t>
             </a:r>
           </a:p>
         </p:txBody>
@@ -39923,7 +39923,7 @@
               <a:spcAft>
                 <a:spcPts val="0"/>
               </a:spcAft>
-              <a:defRPr sz="1000" b="0">
+              <a:defRPr sz="900" b="0">
                 <a:solidFill>
                   <a:srgbClr val="5C6672"/>
                 </a:solidFill>
@@ -39931,7 +39931,7 @@
               </a:defRPr>
             </a:pPr>
             <a:r>
-              <a:t>ROS 2 Jazzy · Gazebo Harmonic · M12 · 따라 하기형 AGV 실습</a:t>
+              <a:t>ROS 2 기반 AGV End-to-End 개발 커리큘럼 · M12 · Block D</a:t>
             </a:r>
           </a:p>
         </p:txBody>
@@ -40397,7 +40397,7 @@
               <a:spcAft>
                 <a:spcPts val="0"/>
               </a:spcAft>
-              <a:defRPr sz="1000" b="0">
+              <a:defRPr sz="900" b="0">
                 <a:solidFill>
                   <a:srgbClr val="5C6672"/>
                 </a:solidFill>
@@ -40405,7 +40405,7 @@
               </a:defRPr>
             </a:pPr>
             <a:r>
-              <a:t>ROS 2 Jazzy · Gazebo Harmonic · M12 · 따라 하기형 AGV 실습</a:t>
+              <a:t>ROS 2 기반 AGV End-to-End 개발 커리큘럼 · M12 · Block D</a:t>
             </a:r>
           </a:p>
         </p:txBody>
@@ -40871,7 +40871,7 @@
               <a:spcAft>
                 <a:spcPts val="0"/>
               </a:spcAft>
-              <a:defRPr sz="1000" b="0">
+              <a:defRPr sz="900" b="0">
                 <a:solidFill>
                   <a:srgbClr val="5C6672"/>
                 </a:solidFill>
@@ -40879,7 +40879,7 @@
               </a:defRPr>
             </a:pPr>
             <a:r>
-              <a:t>ROS 2 Jazzy · Gazebo Harmonic · M12 · 따라 하기형 AGV 실습</a:t>
+              <a:t>ROS 2 기반 AGV End-to-End 개발 커리큘럼 · M12 · Block D</a:t>
             </a:r>
           </a:p>
         </p:txBody>
@@ -41345,7 +41345,7 @@
               <a:spcAft>
                 <a:spcPts val="0"/>
               </a:spcAft>
-              <a:defRPr sz="1000" b="0">
+              <a:defRPr sz="900" b="0">
                 <a:solidFill>
                   <a:srgbClr val="5C6672"/>
                 </a:solidFill>
@@ -41353,7 +41353,7 @@
               </a:defRPr>
             </a:pPr>
             <a:r>
-              <a:t>ROS 2 Jazzy · Gazebo Harmonic · M12 · 따라 하기형 AGV 실습</a:t>
+              <a:t>ROS 2 기반 AGV End-to-End 개발 커리큘럼 · M12 · Block D</a:t>
             </a:r>
           </a:p>
         </p:txBody>
@@ -41819,7 +41819,7 @@
               <a:spcAft>
                 <a:spcPts val="0"/>
               </a:spcAft>
-              <a:defRPr sz="1000" b="0">
+              <a:defRPr sz="900" b="0">
                 <a:solidFill>
                   <a:srgbClr val="5C6672"/>
                 </a:solidFill>
@@ -41827,7 +41827,7 @@
               </a:defRPr>
             </a:pPr>
             <a:r>
-              <a:t>ROS 2 Jazzy · Gazebo Harmonic · M12 · 따라 하기형 AGV 실습</a:t>
+              <a:t>ROS 2 기반 AGV End-to-End 개발 커리큘럼 · M12 · Block D</a:t>
             </a:r>
           </a:p>
         </p:txBody>
@@ -42293,7 +42293,7 @@
               <a:spcAft>
                 <a:spcPts val="0"/>
               </a:spcAft>
-              <a:defRPr sz="1000" b="0">
+              <a:defRPr sz="900" b="0">
                 <a:solidFill>
                   <a:srgbClr val="5C6672"/>
                 </a:solidFill>
@@ -42301,7 +42301,7 @@
               </a:defRPr>
             </a:pPr>
             <a:r>
-              <a:t>ROS 2 Jazzy · Gazebo Harmonic · M12 · 따라 하기형 AGV 실습</a:t>
+              <a:t>ROS 2 기반 AGV End-to-End 개발 커리큘럼 · M12 · Block D</a:t>
             </a:r>
           </a:p>
         </p:txBody>
@@ -42767,7 +42767,7 @@
               <a:spcAft>
                 <a:spcPts val="0"/>
               </a:spcAft>
-              <a:defRPr sz="1000" b="0">
+              <a:defRPr sz="900" b="0">
                 <a:solidFill>
                   <a:srgbClr val="5C6672"/>
                 </a:solidFill>
@@ -42775,7 +42775,7 @@
               </a:defRPr>
             </a:pPr>
             <a:r>
-              <a:t>ROS 2 Jazzy · Gazebo Harmonic · M12 · 따라 하기형 AGV 실습</a:t>
+              <a:t>ROS 2 기반 AGV End-to-End 개발 커리큘럼 · M12 · Block D</a:t>
             </a:r>
           </a:p>
         </p:txBody>
@@ -43241,7 +43241,7 @@
               <a:spcAft>
                 <a:spcPts val="0"/>
               </a:spcAft>
-              <a:defRPr sz="1000" b="0">
+              <a:defRPr sz="900" b="0">
                 <a:solidFill>
                   <a:srgbClr val="5C6672"/>
                 </a:solidFill>
@@ -43249,7 +43249,7 @@
               </a:defRPr>
             </a:pPr>
             <a:r>
-              <a:t>ROS 2 Jazzy · Gazebo Harmonic · M12 · 따라 하기형 AGV 실습</a:t>
+              <a:t>ROS 2 기반 AGV End-to-End 개발 커리큘럼 · M12 · Block D</a:t>
             </a:r>
           </a:p>
         </p:txBody>
@@ -43478,7 +43478,7 @@
               <a:spcAft>
                 <a:spcPts val="0"/>
               </a:spcAft>
-              <a:defRPr sz="1000" b="0">
+              <a:defRPr sz="900" b="0">
                 <a:solidFill>
                   <a:srgbClr val="5C6672"/>
                 </a:solidFill>
@@ -43486,7 +43486,7 @@
               </a:defRPr>
             </a:pPr>
             <a:r>
-              <a:t>ROS 2 Jazzy · Gazebo Harmonic · M12 · 따라 하기형 AGV 실습</a:t>
+              <a:t>ROS 2 기반 AGV End-to-End 개발 커리큘럼 · M12 · Block D</a:t>
             </a:r>
           </a:p>
         </p:txBody>
@@ -43952,7 +43952,7 @@
               <a:spcAft>
                 <a:spcPts val="0"/>
               </a:spcAft>
-              <a:defRPr sz="1000" b="0">
+              <a:defRPr sz="900" b="0">
                 <a:solidFill>
                   <a:srgbClr val="5C6672"/>
                 </a:solidFill>
@@ -43960,7 +43960,7 @@
               </a:defRPr>
             </a:pPr>
             <a:r>
-              <a:t>ROS 2 Jazzy · Gazebo Harmonic · M12 · 따라 하기형 AGV 실습</a:t>
+              <a:t>ROS 2 기반 AGV End-to-End 개발 커리큘럼 · M12 · Block D</a:t>
             </a:r>
           </a:p>
         </p:txBody>
@@ -44426,7 +44426,7 @@
               <a:spcAft>
                 <a:spcPts val="0"/>
               </a:spcAft>
-              <a:defRPr sz="1000" b="0">
+              <a:defRPr sz="900" b="0">
                 <a:solidFill>
                   <a:srgbClr val="5C6672"/>
                 </a:solidFill>
@@ -44434,7 +44434,7 @@
               </a:defRPr>
             </a:pPr>
             <a:r>
-              <a:t>ROS 2 Jazzy · Gazebo Harmonic · M12 · 따라 하기형 AGV 실습</a:t>
+              <a:t>ROS 2 기반 AGV End-to-End 개발 커리큘럼 · M12 · Block D</a:t>
             </a:r>
           </a:p>
         </p:txBody>
@@ -44900,7 +44900,7 @@
               <a:spcAft>
                 <a:spcPts val="0"/>
               </a:spcAft>
-              <a:defRPr sz="1000" b="0">
+              <a:defRPr sz="900" b="0">
                 <a:solidFill>
                   <a:srgbClr val="5C6672"/>
                 </a:solidFill>
@@ -44908,7 +44908,7 @@
               </a:defRPr>
             </a:pPr>
             <a:r>
-              <a:t>ROS 2 Jazzy · Gazebo Harmonic · M12 · 따라 하기형 AGV 실습</a:t>
+              <a:t>ROS 2 기반 AGV End-to-End 개발 커리큘럼 · M12 · Block D</a:t>
             </a:r>
           </a:p>
         </p:txBody>
@@ -45374,7 +45374,7 @@
               <a:spcAft>
                 <a:spcPts val="0"/>
               </a:spcAft>
-              <a:defRPr sz="1000" b="0">
+              <a:defRPr sz="900" b="0">
                 <a:solidFill>
                   <a:srgbClr val="5C6672"/>
                 </a:solidFill>
@@ -45382,7 +45382,7 @@
               </a:defRPr>
             </a:pPr>
             <a:r>
-              <a:t>ROS 2 Jazzy · Gazebo Harmonic · M12 · 따라 하기형 AGV 실습</a:t>
+              <a:t>ROS 2 기반 AGV End-to-End 개발 커리큘럼 · M12 · Block D</a:t>
             </a:r>
           </a:p>
         </p:txBody>
@@ -45848,7 +45848,7 @@
               <a:spcAft>
                 <a:spcPts val="0"/>
               </a:spcAft>
-              <a:defRPr sz="1000" b="0">
+              <a:defRPr sz="900" b="0">
                 <a:solidFill>
                   <a:srgbClr val="5C6672"/>
                 </a:solidFill>
@@ -45856,7 +45856,7 @@
               </a:defRPr>
             </a:pPr>
             <a:r>
-              <a:t>ROS 2 Jazzy · Gazebo Harmonic · M12 · 따라 하기형 AGV 실습</a:t>
+              <a:t>ROS 2 기반 AGV End-to-End 개발 커리큘럼 · M12 · Block D</a:t>
             </a:r>
           </a:p>
         </p:txBody>
@@ -46319,7 +46319,7 @@
               <a:spcAft>
                 <a:spcPts val="0"/>
               </a:spcAft>
-              <a:defRPr sz="1000" b="0">
+              <a:defRPr sz="900" b="0">
                 <a:solidFill>
                   <a:srgbClr val="5C6672"/>
                 </a:solidFill>
@@ -46327,7 +46327,7 @@
               </a:defRPr>
             </a:pPr>
             <a:r>
-              <a:t>ROS 2 Jazzy · Gazebo Harmonic · M12 · 따라 하기형 AGV 실습</a:t>
+              <a:t>ROS 2 기반 AGV End-to-End 개발 커리큘럼 · M12 · Block D</a:t>
             </a:r>
           </a:p>
         </p:txBody>
@@ -46847,7 +46847,7 @@
               <a:spcAft>
                 <a:spcPts val="0"/>
               </a:spcAft>
-              <a:defRPr sz="1000" b="0">
+              <a:defRPr sz="900" b="0">
                 <a:solidFill>
                   <a:srgbClr val="5C6672"/>
                 </a:solidFill>
@@ -46855,7 +46855,7 @@
               </a:defRPr>
             </a:pPr>
             <a:r>
-              <a:t>ROS 2 Jazzy · Gazebo Harmonic · M12 · 따라 하기형 AGV 실습</a:t>
+              <a:t>ROS 2 기반 AGV End-to-End 개발 커리큘럼 · M12 · Block D</a:t>
             </a:r>
           </a:p>
         </p:txBody>
@@ -47636,7 +47636,7 @@
               <a:spcAft>
                 <a:spcPts val="0"/>
               </a:spcAft>
-              <a:defRPr sz="1000" b="0">
+              <a:defRPr sz="900" b="0">
                 <a:solidFill>
                   <a:srgbClr val="5C6672"/>
                 </a:solidFill>
@@ -47644,7 +47644,7 @@
               </a:defRPr>
             </a:pPr>
             <a:r>
-              <a:t>ROS 2 Jazzy · Gazebo Harmonic · M12 · 따라 하기형 AGV 실습</a:t>
+              <a:t>ROS 2 기반 AGV End-to-End 개발 커리큘럼 · M12 · Block D</a:t>
             </a:r>
           </a:p>
         </p:txBody>
@@ -48110,7 +48110,7 @@
               <a:spcAft>
                 <a:spcPts val="0"/>
               </a:spcAft>
-              <a:defRPr sz="1000" b="0">
+              <a:defRPr sz="900" b="0">
                 <a:solidFill>
                   <a:srgbClr val="5C6672"/>
                 </a:solidFill>
@@ -48118,7 +48118,7 @@
               </a:defRPr>
             </a:pPr>
             <a:r>
-              <a:t>ROS 2 Jazzy · Gazebo Harmonic · M12 · 따라 하기형 AGV 실습</a:t>
+              <a:t>ROS 2 기반 AGV End-to-End 개발 커리큘럼 · M12 · Block D</a:t>
             </a:r>
           </a:p>
         </p:txBody>
@@ -48584,7 +48584,7 @@
               <a:spcAft>
                 <a:spcPts val="0"/>
               </a:spcAft>
-              <a:defRPr sz="1000" b="0">
+              <a:defRPr sz="900" b="0">
                 <a:solidFill>
                   <a:srgbClr val="5C6672"/>
                 </a:solidFill>
@@ -48592,7 +48592,7 @@
               </a:defRPr>
             </a:pPr>
             <a:r>
-              <a:t>ROS 2 Jazzy · Gazebo Harmonic · M12 · 따라 하기형 AGV 실습</a:t>
+              <a:t>ROS 2 기반 AGV End-to-End 개발 커리큘럼 · M12 · Block D</a:t>
             </a:r>
           </a:p>
         </p:txBody>
@@ -48821,7 +48821,7 @@
               <a:spcAft>
                 <a:spcPts val="0"/>
               </a:spcAft>
-              <a:defRPr sz="1000" b="0">
+              <a:defRPr sz="900" b="0">
                 <a:solidFill>
                   <a:srgbClr val="5C6672"/>
                 </a:solidFill>
@@ -48829,7 +48829,7 @@
               </a:defRPr>
             </a:pPr>
             <a:r>
-              <a:t>ROS 2 Jazzy · Gazebo Harmonic · M12 · 따라 하기형 AGV 실습</a:t>
+              <a:t>ROS 2 기반 AGV End-to-End 개발 커리큘럼 · M12 · Block D</a:t>
             </a:r>
           </a:p>
         </p:txBody>
@@ -49271,7 +49271,7 @@
               <a:spcAft>
                 <a:spcPts val="0"/>
               </a:spcAft>
-              <a:defRPr sz="1000" b="0">
+              <a:defRPr sz="900" b="0">
                 <a:solidFill>
                   <a:srgbClr val="5C6672"/>
                 </a:solidFill>
@@ -49279,7 +49279,7 @@
               </a:defRPr>
             </a:pPr>
             <a:r>
-              <a:t>ROS 2 Jazzy · Gazebo Harmonic · M12 · 따라 하기형 AGV 실습</a:t>
+              <a:t>ROS 2 기반 AGV End-to-End 개발 커리큘럼 · M12 · Block D</a:t>
             </a:r>
           </a:p>
         </p:txBody>
@@ -49799,7 +49799,7 @@
               <a:spcAft>
                 <a:spcPts val="0"/>
               </a:spcAft>
-              <a:defRPr sz="1000" b="0">
+              <a:defRPr sz="900" b="0">
                 <a:solidFill>
                   <a:srgbClr val="5C6672"/>
                 </a:solidFill>
@@ -49807,7 +49807,7 @@
               </a:defRPr>
             </a:pPr>
             <a:r>
-              <a:t>ROS 2 Jazzy · Gazebo Harmonic · M12 · 따라 하기형 AGV 실습</a:t>
+              <a:t>ROS 2 기반 AGV End-to-End 개발 커리큘럼 · M12 · Block D</a:t>
             </a:r>
           </a:p>
         </p:txBody>
@@ -50588,7 +50588,7 @@
               <a:spcAft>
                 <a:spcPts val="0"/>
               </a:spcAft>
-              <a:defRPr sz="1000" b="0">
+              <a:defRPr sz="900" b="0">
                 <a:solidFill>
                   <a:srgbClr val="5C6672"/>
                 </a:solidFill>
@@ -50596,7 +50596,7 @@
               </a:defRPr>
             </a:pPr>
             <a:r>
-              <a:t>ROS 2 Jazzy · Gazebo Harmonic · M12 · 따라 하기형 AGV 실습</a:t>
+              <a:t>ROS 2 기반 AGV End-to-End 개발 커리큘럼 · M12 · Block D</a:t>
             </a:r>
           </a:p>
         </p:txBody>
@@ -51377,7 +51377,7 @@
               <a:spcAft>
                 <a:spcPts val="0"/>
               </a:spcAft>
-              <a:defRPr sz="1000" b="0">
+              <a:defRPr sz="900" b="0">
                 <a:solidFill>
                   <a:srgbClr val="5C6672"/>
                 </a:solidFill>
@@ -51385,7 +51385,7 @@
               </a:defRPr>
             </a:pPr>
             <a:r>
-              <a:t>ROS 2 Jazzy · Gazebo Harmonic · M12 · 따라 하기형 AGV 실습</a:t>
+              <a:t>ROS 2 기반 AGV End-to-End 개발 커리큘럼 · M12 · Block D</a:t>
             </a:r>
           </a:p>
         </p:txBody>
@@ -52174,7 +52174,7 @@
               <a:spcAft>
                 <a:spcPts val="0"/>
               </a:spcAft>
-              <a:defRPr sz="1000" b="0">
+              <a:defRPr sz="900" b="0">
                 <a:solidFill>
                   <a:srgbClr val="5C6672"/>
                 </a:solidFill>
@@ -52182,7 +52182,7 @@
               </a:defRPr>
             </a:pPr>
             <a:r>
-              <a:t>ROS 2 Jazzy · Gazebo Harmonic · M12 · 따라 하기형 AGV 실습</a:t>
+              <a:t>ROS 2 기반 AGV End-to-End 개발 커리큘럼 · M12 · Block D</a:t>
             </a:r>
           </a:p>
         </p:txBody>
@@ -52963,7 +52963,7 @@
               <a:spcAft>
                 <a:spcPts val="0"/>
               </a:spcAft>
-              <a:defRPr sz="1000" b="0">
+              <a:defRPr sz="900" b="0">
                 <a:solidFill>
                   <a:srgbClr val="5C6672"/>
                 </a:solidFill>
@@ -52971,7 +52971,7 @@
               </a:defRPr>
             </a:pPr>
             <a:r>
-              <a:t>ROS 2 Jazzy · Gazebo Harmonic · M12 · 따라 하기형 AGV 실습</a:t>
+              <a:t>ROS 2 기반 AGV End-to-End 개발 커리큘럼 · M12 · Block D</a:t>
             </a:r>
           </a:p>
         </p:txBody>
@@ -53536,7 +53536,7 @@
               <a:spcAft>
                 <a:spcPts val="0"/>
               </a:spcAft>
-              <a:defRPr sz="1000" b="0">
+              <a:defRPr sz="900" b="0">
                 <a:solidFill>
                   <a:srgbClr val="5C6672"/>
                 </a:solidFill>
@@ -53544,7 +53544,7 @@
               </a:defRPr>
             </a:pPr>
             <a:r>
-              <a:t>ROS 2 Jazzy · Gazebo Harmonic · M12 · 따라 하기형 AGV 실습</a:t>
+              <a:t>ROS 2 기반 AGV End-to-End 개발 커리큘럼 · M12 · Block D</a:t>
             </a:r>
           </a:p>
         </p:txBody>
@@ -54004,7 +54004,7 @@
               <a:spcAft>
                 <a:spcPts val="0"/>
               </a:spcAft>
-              <a:defRPr sz="1000" b="0">
+              <a:defRPr sz="900" b="0">
                 <a:solidFill>
                   <a:srgbClr val="5C6672"/>
                 </a:solidFill>
@@ -54012,7 +54012,7 @@
               </a:defRPr>
             </a:pPr>
             <a:r>
-              <a:t>ROS 2 Jazzy · Gazebo Harmonic · M12 · 따라 하기형 AGV 실습</a:t>
+              <a:t>ROS 2 기반 AGV End-to-End 개발 커리큘럼 · M12 · Block D</a:t>
             </a:r>
           </a:p>
         </p:txBody>
@@ -54478,7 +54478,7 @@
               <a:spcAft>
                 <a:spcPts val="0"/>
               </a:spcAft>
-              <a:defRPr sz="1000" b="0">
+              <a:defRPr sz="900" b="0">
                 <a:solidFill>
                   <a:srgbClr val="5C6672"/>
                 </a:solidFill>
@@ -54486,7 +54486,7 @@
               </a:defRPr>
             </a:pPr>
             <a:r>
-              <a:t>ROS 2 Jazzy · Gazebo Harmonic · M12 · 따라 하기형 AGV 실습</a:t>
+              <a:t>ROS 2 기반 AGV End-to-End 개발 커리큘럼 · M12 · Block D</a:t>
             </a:r>
           </a:p>
         </p:txBody>
@@ -54949,7 +54949,7 @@
               <a:spcAft>
                 <a:spcPts val="0"/>
               </a:spcAft>
-              <a:defRPr sz="1000" b="0">
+              <a:defRPr sz="900" b="0">
                 <a:solidFill>
                   <a:srgbClr val="5C6672"/>
                 </a:solidFill>
@@ -54957,7 +54957,7 @@
               </a:defRPr>
             </a:pPr>
             <a:r>
-              <a:t>ROS 2 Jazzy · Gazebo Harmonic · M12 · 따라 하기형 AGV 실습</a:t>
+              <a:t>ROS 2 기반 AGV End-to-End 개발 커리큘럼 · M12 · Block D</a:t>
             </a:r>
           </a:p>
         </p:txBody>
@@ -55186,7 +55186,7 @@
               <a:spcAft>
                 <a:spcPts val="0"/>
               </a:spcAft>
-              <a:defRPr sz="1000" b="0">
+              <a:defRPr sz="900" b="0">
                 <a:solidFill>
                   <a:srgbClr val="5C6672"/>
                 </a:solidFill>
@@ -55194,7 +55194,7 @@
               </a:defRPr>
             </a:pPr>
             <a:r>
-              <a:t>ROS 2 Jazzy · Gazebo Harmonic · M12 · 따라 하기형 AGV 실습</a:t>
+              <a:t>ROS 2 기반 AGV End-to-End 개발 커리큘럼 · M12 · Block D</a:t>
             </a:r>
           </a:p>
         </p:txBody>
@@ -55654,7 +55654,7 @@
               <a:spcAft>
                 <a:spcPts val="0"/>
               </a:spcAft>
-              <a:defRPr sz="1000" b="0">
+              <a:defRPr sz="900" b="0">
                 <a:solidFill>
                   <a:srgbClr val="5C6672"/>
                 </a:solidFill>
@@ -55662,7 +55662,7 @@
               </a:defRPr>
             </a:pPr>
             <a:r>
-              <a:t>ROS 2 Jazzy · Gazebo Harmonic · M12 · 따라 하기형 AGV 실습</a:t>
+              <a:t>ROS 2 기반 AGV End-to-End 개발 커리큘럼 · M12 · Block D</a:t>
             </a:r>
           </a:p>
         </p:txBody>
@@ -56128,7 +56128,7 @@
               <a:spcAft>
                 <a:spcPts val="0"/>
               </a:spcAft>
-              <a:defRPr sz="1000" b="0">
+              <a:defRPr sz="900" b="0">
                 <a:solidFill>
                   <a:srgbClr val="5C6672"/>
                 </a:solidFill>
@@ -56136,7 +56136,7 @@
               </a:defRPr>
             </a:pPr>
             <a:r>
-              <a:t>ROS 2 Jazzy · Gazebo Harmonic · M12 · 따라 하기형 AGV 실습</a:t>
+              <a:t>ROS 2 기반 AGV End-to-End 개발 커리큘럼 · M12 · Block D</a:t>
             </a:r>
           </a:p>
         </p:txBody>
@@ -56599,7 +56599,7 @@
               <a:spcAft>
                 <a:spcPts val="0"/>
               </a:spcAft>
-              <a:defRPr sz="1000" b="0">
+              <a:defRPr sz="900" b="0">
                 <a:solidFill>
                   <a:srgbClr val="5C6672"/>
                 </a:solidFill>
@@ -56607,7 +56607,7 @@
               </a:defRPr>
             </a:pPr>
             <a:r>
-              <a:t>ROS 2 Jazzy · Gazebo Harmonic · M12 · 따라 하기형 AGV 실습</a:t>
+              <a:t>ROS 2 기반 AGV End-to-End 개발 커리큘럼 · M12 · Block D</a:t>
             </a:r>
           </a:p>
         </p:txBody>
@@ -57073,7 +57073,7 @@
               <a:spcAft>
                 <a:spcPts val="0"/>
               </a:spcAft>
-              <a:defRPr sz="1000" b="0">
+              <a:defRPr sz="900" b="0">
                 <a:solidFill>
                   <a:srgbClr val="5C6672"/>
                 </a:solidFill>
@@ -57081,7 +57081,7 @@
               </a:defRPr>
             </a:pPr>
             <a:r>
-              <a:t>ROS 2 Jazzy · Gazebo Harmonic · M12 · 따라 하기형 AGV 실습</a:t>
+              <a:t>ROS 2 기반 AGV End-to-End 개발 커리큘럼 · M12 · Block D</a:t>
             </a:r>
           </a:p>
         </p:txBody>
@@ -57547,7 +57547,7 @@
               <a:spcAft>
                 <a:spcPts val="0"/>
               </a:spcAft>
-              <a:defRPr sz="1000" b="0">
+              <a:defRPr sz="900" b="0">
                 <a:solidFill>
                   <a:srgbClr val="5C6672"/>
                 </a:solidFill>
@@ -57555,7 +57555,7 @@
               </a:defRPr>
             </a:pPr>
             <a:r>
-              <a:t>ROS 2 Jazzy · Gazebo Harmonic · M12 · 따라 하기형 AGV 실습</a:t>
+              <a:t>ROS 2 기반 AGV End-to-End 개발 커리큘럼 · M12 · Block D</a:t>
             </a:r>
           </a:p>
         </p:txBody>
@@ -58018,7 +58018,7 @@
               <a:spcAft>
                 <a:spcPts val="0"/>
               </a:spcAft>
-              <a:defRPr sz="1000" b="0">
+              <a:defRPr sz="900" b="0">
                 <a:solidFill>
                   <a:srgbClr val="5C6672"/>
                 </a:solidFill>
@@ -58026,7 +58026,7 @@
               </a:defRPr>
             </a:pPr>
             <a:r>
-              <a:t>ROS 2 Jazzy · Gazebo Harmonic · M12 · 따라 하기형 AGV 실습</a:t>
+              <a:t>ROS 2 기반 AGV End-to-End 개발 커리큘럼 · M12 · Block D</a:t>
             </a:r>
           </a:p>
         </p:txBody>
@@ -58448,7 +58448,7 @@
               <a:spcAft>
                 <a:spcPts val="0"/>
               </a:spcAft>
-              <a:defRPr sz="1000" b="0">
+              <a:defRPr sz="900" b="0">
                 <a:solidFill>
                   <a:srgbClr val="5C6672"/>
                 </a:solidFill>
@@ -58456,7 +58456,7 @@
               </a:defRPr>
             </a:pPr>
             <a:r>
-              <a:t>ROS 2 Jazzy · Gazebo Harmonic · M12 · 따라 하기형 AGV 실습</a:t>
+              <a:t>ROS 2 기반 AGV End-to-End 개발 커리큘럼 · M12 · Block D</a:t>
             </a:r>
           </a:p>
         </p:txBody>
@@ -58898,7 +58898,7 @@
               <a:spcAft>
                 <a:spcPts val="0"/>
               </a:spcAft>
-              <a:defRPr sz="1000" b="0">
+              <a:defRPr sz="900" b="0">
                 <a:solidFill>
                   <a:srgbClr val="5C6672"/>
                 </a:solidFill>
@@ -58906,7 +58906,7 @@
               </a:defRPr>
             </a:pPr>
             <a:r>
-              <a:t>ROS 2 Jazzy · Gazebo Harmonic · M12 · 따라 하기형 AGV 실습</a:t>
+              <a:t>ROS 2 기반 AGV End-to-End 개발 커리큘럼 · M12 · Block D</a:t>
             </a:r>
           </a:p>
         </p:txBody>
@@ -59352,7 +59352,7 @@
               <a:spcAft>
                 <a:spcPts val="0"/>
               </a:spcAft>
-              <a:defRPr sz="1000" b="0">
+              <a:defRPr sz="900" b="0">
                 <a:solidFill>
                   <a:srgbClr val="5C6672"/>
                 </a:solidFill>
@@ -59360,7 +59360,7 @@
               </a:defRPr>
             </a:pPr>
             <a:r>
-              <a:t>ROS 2 Jazzy · Gazebo Harmonic · M12 · 따라 하기형 AGV 실습</a:t>
+              <a:t>ROS 2 기반 AGV End-to-End 개발 커리큘럼 · M12 · Block D</a:t>
             </a:r>
           </a:p>
         </p:txBody>
@@ -59724,7 +59724,7 @@
               <a:spcAft>
                 <a:spcPts val="0"/>
               </a:spcAft>
-              <a:defRPr sz="1000" b="0">
+              <a:defRPr sz="900" b="0">
                 <a:solidFill>
                   <a:srgbClr val="5C6672"/>
                 </a:solidFill>
@@ -59732,7 +59732,7 @@
               </a:defRPr>
             </a:pPr>
             <a:r>
-              <a:t>ROS 2 Jazzy · Gazebo Harmonic · M12 · 따라 하기형 AGV 실습</a:t>
+              <a:t>ROS 2 기반 AGV End-to-End 개발 커리큘럼 · M12 · Block D</a:t>
             </a:r>
           </a:p>
         </p:txBody>
@@ -60274,7 +60274,7 @@
               <a:spcAft>
                 <a:spcPts val="0"/>
               </a:spcAft>
-              <a:defRPr sz="1000" b="0">
+              <a:defRPr sz="900" b="0">
                 <a:solidFill>
                   <a:srgbClr val="5C6672"/>
                 </a:solidFill>
@@ -60282,7 +60282,7 @@
               </a:defRPr>
             </a:pPr>
             <a:r>
-              <a:t>ROS 2 Jazzy · Gazebo Harmonic · M12 · 따라 하기형 AGV 실습</a:t>
+              <a:t>ROS 2 기반 AGV End-to-End 개발 커리큘럼 · M12 · Block D</a:t>
             </a:r>
           </a:p>
         </p:txBody>
@@ -60511,7 +60511,7 @@
               <a:spcAft>
                 <a:spcPts val="0"/>
               </a:spcAft>
-              <a:defRPr sz="1000" b="0">
+              <a:defRPr sz="900" b="0">
                 <a:solidFill>
                   <a:srgbClr val="5C6672"/>
                 </a:solidFill>
@@ -60519,7 +60519,7 @@
               </a:defRPr>
             </a:pPr>
             <a:r>
-              <a:t>ROS 2 Jazzy · Gazebo Harmonic · M12 · 따라 하기형 AGV 실습</a:t>
+              <a:t>ROS 2 기반 AGV End-to-End 개발 커리큘럼 · M12 · Block D</a:t>
             </a:r>
           </a:p>
         </p:txBody>
@@ -60914,7 +60914,7 @@
               <a:spcAft>
                 <a:spcPts val="0"/>
               </a:spcAft>
-              <a:defRPr sz="1000" b="0">
+              <a:defRPr sz="900" b="0">
                 <a:solidFill>
                   <a:srgbClr val="5C6672"/>
                 </a:solidFill>
@@ -60922,7 +60922,7 @@
               </a:defRPr>
             </a:pPr>
             <a:r>
-              <a:t>ROS 2 Jazzy · Gazebo Harmonic · M12 · 따라 하기형 AGV 실습</a:t>
+              <a:t>ROS 2 기반 AGV End-to-End 개발 커리큘럼 · M12 · Block D</a:t>
             </a:r>
           </a:p>
         </p:txBody>
@@ -61439,7 +61439,7 @@
               <a:spcAft>
                 <a:spcPts val="0"/>
               </a:spcAft>
-              <a:defRPr sz="1000" b="0">
+              <a:defRPr sz="900" b="0">
                 <a:solidFill>
                   <a:srgbClr val="5C6672"/>
                 </a:solidFill>
@@ -61447,7 +61447,7 @@
               </a:defRPr>
             </a:pPr>
             <a:r>
-              <a:t>ROS 2 Jazzy · Gazebo Harmonic · M12 · 따라 하기형 AGV 실습</a:t>
+              <a:t>ROS 2 기반 AGV End-to-End 개발 커리큘럼 · M12 · Block D</a:t>
             </a:r>
           </a:p>
         </p:txBody>
@@ -61823,7 +61823,7 @@
               <a:spcAft>
                 <a:spcPts val="0"/>
               </a:spcAft>
-              <a:defRPr sz="1000" b="0">
+              <a:defRPr sz="900" b="0">
                 <a:solidFill>
                   <a:srgbClr val="5C6672"/>
                 </a:solidFill>
@@ -61831,7 +61831,7 @@
               </a:defRPr>
             </a:pPr>
             <a:r>
-              <a:t>ROS 2 Jazzy · Gazebo Harmonic · M12 · 따라 하기형 AGV 실습</a:t>
+              <a:t>ROS 2 기반 AGV End-to-End 개발 커리큘럼 · M12 · Block D</a:t>
             </a:r>
           </a:p>
         </p:txBody>
@@ -62152,7 +62152,7 @@
               <a:spcAft>
                 <a:spcPts val="0"/>
               </a:spcAft>
-              <a:defRPr sz="1000" b="0">
+              <a:defRPr sz="900" b="0">
                 <a:solidFill>
                   <a:srgbClr val="5C6672"/>
                 </a:solidFill>
@@ -62160,7 +62160,7 @@
               </a:defRPr>
             </a:pPr>
             <a:r>
-              <a:t>ROS 2 Jazzy · Gazebo Harmonic · M12 · 따라 하기형 AGV 실습</a:t>
+              <a:t>ROS 2 기반 AGV End-to-End 개발 커리큘럼 · M12 · Block D</a:t>
             </a:r>
           </a:p>
         </p:txBody>
@@ -62571,7 +62571,7 @@
               <a:spcAft>
                 <a:spcPts val="0"/>
               </a:spcAft>
-              <a:defRPr sz="1000" b="0">
+              <a:defRPr sz="900" b="0">
                 <a:solidFill>
                   <a:srgbClr val="5C6672"/>
                 </a:solidFill>
@@ -62579,7 +62579,7 @@
               </a:defRPr>
             </a:pPr>
             <a:r>
-              <a:t>ROS 2 Jazzy · Gazebo Harmonic · M12 · 따라 하기형 AGV 실습</a:t>
+              <a:t>ROS 2 기반 AGV End-to-End 개발 커리큘럼 · M12 · Block D</a:t>
             </a:r>
           </a:p>
         </p:txBody>
